--- a/IntelligenceStack_Executive_Deck.pptx
+++ b/IntelligenceStack_Executive_Deck.pptx
@@ -18,9 +18,10 @@
     <p:sldId id="266" r:id="rId12"/>
     <p:sldId id="267" r:id="rId13"/>
     <p:sldId id="268" r:id="rId14"/>
+    <p:sldId id="269" r:id="rId15"/>
   </p:sldIdLst>
   <p:notesMasterIdLst>
-    <p:notesMasterId r:id="rId15"/>
+    <p:notesMasterId r:id="rId16"/>
   </p:notesMasterIdLst>
   <p:sldSz cx="12191695" cy="6858000"/>
   <p:notesSz cx="6858000" cy="12191695"/>
@@ -515,7 +516,7 @@
             <a:r>
               <a:rPr lang="en-US" dirty="0"/>
               <a:t>Opening line: 'Every enterprise wants to point AI at its private data. The reason they hesitate is the same one every time — the moment an LLM can see the data, it can leak it or be tricked into destroying it. IntelligenceStack is a working answer to that, not a concept.'
-Set expectations: ~10 minutes of story, then a live demo you can poke at. The whole thing runs on a laptop and computes real answers from real data — nothing on these slides is mocked.
+Set expectations: ~12 minutes of story, then a live demo you can poke at. The whole thing runs on a laptop and computes real answers from real data — nothing on these slides is mocked.
 Demo is already running: FastAPI backend on :8000, Streamlit control plane on :8501.</a:t>
             </a:r>
             <a:endParaRPr lang="en-US" dirty="0"/>
@@ -604,9 +605,9 @@
           <a:p>
             <a:r>
               <a:rPr lang="en-US" dirty="0"/>
-              <a:t>Pivot in tone here — you're done with how it works, now it's what it's worth. Four outcomes, each mapped to a number or a one-word promise the audience can repeat later.
-Lead with the one that matters most to THIS room. For a CFO, cost. For a CISO, unblocked adoption. For a business unit, days-to-seconds. Read the room and reorder verbally.
-The strongest strategic argument is the second tile: most enterprise GenAI initiatives don't fail on capability, they stall in security review. This architecture is what gets them unstuck — that's the real ROI, and it's larger than any single use case.</a:t>
+              <a:t>For the technical people in the room. The histogram shows why the anomaly call is trustworthy: normal traffic clusters near 66ms, the 3σ line sits at 310ms, and the anomaly cohort lives in the far right tail. Nobody picked 310 — it's three standard deviations of the actual data.
+The three bullets are the engineering credibility: statistical definition, bound parameters, durable tracing. If a CTO or architect is evaluating this, these are the words that say it was built by someone who has shipped production data systems.
+Close on the tests: each claim on these slides has an automated test that fails loudly if it regresses — including one that asserts the agent keeps working when the audit sink is broken.</a:t>
             </a:r>
             <a:endParaRPr lang="en-US" dirty="0"/>
           </a:p>
@@ -694,9 +695,9 @@
           <a:p>
             <a:r>
               <a:rPr lang="en-US" dirty="0"/>
-              <a:t>Don't read all five — that's death by list. Name the two seats that are actually in the room and let the rest sit as evidence of breadth.
-The meta-point: this isn't a security project OR a productivity project OR a cost project. It's one architecture where each stakeholder gets a different win from the same build. That's what makes it fundable — the cost is shared across five value cases.
-Use this slide to hand off to whoever owns the next step: 'Whichever of these is your priority, the pilot looks the same.'</a:t>
+              <a:t>Pivot in tone here — you're done with how it works, now it's what it's worth. Four outcomes, each mapped to a number or a one-word promise the audience can repeat later.
+Lead with the one that matters most to THIS room. For a CFO, cost. For a CISO, unblocked adoption. For a business unit, days-to-seconds.
+The strongest strategic argument is the second tile: most enterprise GenAI initiatives don't fail on capability, they stall in security review. This architecture is what gets them unstuck — that's the real ROI, larger than any single use case.</a:t>
             </a:r>
             <a:endParaRPr lang="en-US" dirty="0"/>
           </a:p>
@@ -784,9 +785,9 @@
           <a:p>
             <a:r>
               <a:rPr lang="en-US" dirty="0"/>
-              <a:t>The objection this slide kills: 'nice demo, but it's a toy — production is a rewrite.' No. The seams are deliberate and each is a one-line swap with an identical contract.
-Row two is new and worth calling out: the retrieval index is the same story as the SQL engine. The sandbox embeds passages with TF-IDF and ranks them with in-engine cosine similarity; production embeds them with bge-large and serves them from Mosaic AI Vector Search. Same storage layout, same query contract, same citations — only the embedding changes.
-So the pilot isn't 'rebuild for prod' — it's 'repoint at the workspace.'</a:t>
+              <a:t>Don't read all five — that's death by list. Name the two seats that are actually in the room and let the rest sit as evidence of breadth.
+The meta-point: this isn't a security project OR a productivity project OR a cost project. It's one architecture where each stakeholder gets a different win from the same build. That's what makes it fundable — the cost is shared across five value cases.
+Use this slide to hand off to whoever owns the next step: 'Whichever of these is your priority, the pilot looks the same.'</a:t>
             </a:r>
             <a:endParaRPr lang="en-US" dirty="0"/>
           </a:p>
@@ -874,9 +875,9 @@
           <a:p>
             <a:r>
               <a:rPr lang="en-US" dirty="0"/>
-              <a:t>Land the plane on one sentence: the choice between AI capability and data governance was always a false one, and here's the proof running on a laptop.
-Then make the ask concrete with the three NEXT options — pick the one that matches who you're talking to. Don't leave the meeting without agreeing which dataset a pilot would point at.
-Invite them to break it: the repo is public and runs in four commands. An architecture you're willing to hand over and say 'try to get past the boundary' is a very different pitch from a slideware promise.</a:t>
+              <a:t>The objection this slide kills: 'nice demo, but it's a toy — production is a rewrite.' No. The seams are deliberate and each is a one-line swap with an identical contract.
+Two rows are worth calling out. The vector index: sandbox uses TF-IDF with in-engine cosine, production uses bge-large on Mosaic AI — same storage layout, same query contract, same citations. And the audit log: append-only JSON locally, a Delta table with retention in production — the record shape does not change.
+So the pilot isn't 'rebuild for prod' — it's 'repoint at the workspace.'</a:t>
             </a:r>
             <a:endParaRPr lang="en-US" dirty="0"/>
           </a:p>
@@ -900,6 +901,96 @@
             <a:fld id="{F7021451-1387-4CA6-816F-3879F97B5CBC}" type="slidenum">
               <a:rPr lang="en-US"/>
               <a:t>13</a:t>
+            </a:fld>
+            <a:endParaRPr lang="en-US"/>
+          </a:p>
+        </p:txBody>
+      </p:sp>
+    </p:spTree>
+    <p:extLst>
+      <p:ext uri="{BB962C8B-B14F-4D97-AF65-F5344CB8AC3E}">
+        <p14:creationId xmlns:p14="http://schemas.microsoft.com/office/powerpoint/2010/main" val="1024086991"/>
+      </p:ext>
+    </p:extLst>
+  </p:cSld>
+  <p:clrMapOvr>
+    <a:masterClrMapping/>
+  </p:clrMapOvr>
+</p:notes>
+</file>
+
+<file path=ppt/notesSlides/notesSlide14.xml><?xml version="1.0" encoding="utf-8"?>
+<p:notes xmlns:a="http://schemas.openxmlformats.org/drawingml/2006/main" xmlns:r="http://schemas.openxmlformats.org/officeDocument/2006/relationships" xmlns:p="http://schemas.openxmlformats.org/presentationml/2006/main">
+  <p:cSld>
+    <p:spTree>
+      <p:nvGrpSpPr>
+        <p:cNvPr id="1" name=""/>
+        <p:cNvGrpSpPr/>
+        <p:nvPr/>
+      </p:nvGrpSpPr>
+      <p:grpSpPr>
+        <a:xfrm>
+          <a:off x="0" y="0"/>
+          <a:ext cx="0" cy="0"/>
+          <a:chOff x="0" y="0"/>
+          <a:chExt cx="0" cy="0"/>
+        </a:xfrm>
+      </p:grpSpPr>
+      <p:sp>
+        <p:nvSpPr>
+          <p:cNvPr id="2" name="Slide Image Placeholder 1"/>
+          <p:cNvSpPr>
+            <a:spLocks noGrp="1" noRot="1" noChangeAspect="1"/>
+          </p:cNvSpPr>
+          <p:nvPr>
+            <p:ph type="sldImg"/>
+          </p:nvPr>
+        </p:nvSpPr>
+        <p:spPr/>
+      </p:sp>
+      <p:sp>
+        <p:nvSpPr>
+          <p:cNvPr id="3" name="Notes Placeholder 2"/>
+          <p:cNvSpPr>
+            <a:spLocks noGrp="1"/>
+          </p:cNvSpPr>
+          <p:nvPr>
+            <p:ph type="body" idx="1"/>
+          </p:nvPr>
+        </p:nvSpPr>
+        <p:spPr/>
+        <p:txBody>
+          <a:bodyPr/>
+          <a:lstStyle/>
+          <a:p>
+            <a:r>
+              <a:rPr lang="en-US" dirty="0"/>
+              <a:t>Land the plane on one sentence: the choice between AI capability and data governance was always a false one, and here's the proof running on a laptop.
+Then make the ask concrete with the three NEXT options — pick the one that matches who you're talking to. Don't leave the meeting without agreeing which dataset a pilot would point at.
+Invite them to break it: the repo is public and runs in four commands, and the figures on these slides reproduce exactly. An architecture you're willing to hand over and say 'try to get past the boundary' is a very different pitch from a slideware promise.</a:t>
+            </a:r>
+            <a:endParaRPr lang="en-US" dirty="0"/>
+          </a:p>
+        </p:txBody>
+      </p:sp>
+      <p:sp>
+        <p:nvSpPr>
+          <p:cNvPr id="4" name="Slide Number Placeholder 3"/>
+          <p:cNvSpPr>
+            <a:spLocks noGrp="1"/>
+          </p:cNvSpPr>
+          <p:nvPr>
+            <p:ph type="sldNum" sz="quarter" idx="10"/>
+          </p:nvPr>
+        </p:nvSpPr>
+        <p:spPr/>
+        <p:txBody>
+          <a:bodyPr/>
+          <a:lstStyle/>
+          <a:p>
+            <a:fld id="{F7021451-1387-4CA6-816F-3879F97B5CBC}" type="slidenum">
+              <a:rPr lang="en-US"/>
+              <a:t>14</a:t>
             </a:fld>
             <a:endParaRPr lang="en-US"/>
           </a:p>
@@ -1056,7 +1147,7 @@
               <a:rPr lang="en-US" dirty="0"/>
               <a:t>The vending-machine analogy lands well here: 'We don't give the AI keys to the warehouse. We give it a vending machine with a fixed set of buttons. It's very good at choosing the right button — but it physically cannot reach behind the glass.'
 The right-hand column is the whole thesis. Every later slide is evidence for one of those four lines.
-Emphasize the last bullet on each side: the shift from 'trust us' to 'here is the allowlist' is what actually unblocks projects in security review.</a:t>
+Note the last bullet says 'here is the evidence', not 'here is the allowlist' — since the Trust Center, you can show the actual record of what the AI did, not just what it was permitted to do.</a:t>
             </a:r>
             <a:endParaRPr lang="en-US" dirty="0"/>
           </a:p>
@@ -1145,7 +1236,7 @@
             <a:r>
               <a:rPr lang="en-US" dirty="0"/>
               <a:t>Walk the diagram left to right, but keep it to one sentence per numbered item — executives don't need the plumbing, they need to see there IS plumbing.
-The one line to land: the boundary sits between the agent and the data. The agent never touches tables directly; it can only ask the catalog to run a named, pre-approved function. Item 4 extends that same rule to unstructured knowledge — retrieval is a governed tool like any other.
+The one line to land: the boundary sits between the agent and the data. The agent never touches tables directly; it can only ask the catalog to run a named, pre-approved function. Item 4 extends that same rule to unstructured knowledge, and item 5 makes every one of those decisions durable evidence.
 If someone asks 'is this really Databricks?' — yes: DLT, Unity Catalog, Liquid Clustering, Model Serving, Mosaic AI Vector Search. The sandbox swaps each for a local stand-in with the same contract.</a:t>
             </a:r>
             <a:endParaRPr lang="en-US" dirty="0"/>
@@ -1236,8 +1327,8 @@
               <a:rPr lang="en-US" dirty="0"/>
               <a:t>This is the switch-to-live-app slide. Leave it up while you alt-tab to the control plane at localhost:8501.
 Run order matters: lead with value (moves 1 and 2) so the room sees the point before the security material. Then 3, 4 and 5 answer 'but can I trust it?' — by trying to break it in front of them.
-For each move, read the trace panel aloud: Intent Resolution → Governance Boundary Check → Execution. Move 2 is the one to linger on — the trace shows TWO governance checks, one per tool.
-If the live app misbehaves, slides 6 through 9 carry the same content as static backup — just present those.</a:t>
+For each move, read the trace panel aloud. Move 2 is the one to linger on — the trace shows TWO governance checks, one per tool.
+Then finish on the Trust Center: the five things you just did are already recorded. That closing beat is what turns a demo into an audit story.</a:t>
             </a:r>
             <a:endParaRPr lang="en-US" dirty="0"/>
           </a:p>
@@ -1327,7 +1418,7 @@
               <a:rPr lang="en-US" dirty="0"/>
               <a:t>The headline: the agent did not retrieve a canned sentence. It called the anomaly function, got rows back, and phrased them. The chart is the same data, drawn independently — three biased-cohort customers separate cleanly from ~57 normal ones.
 The stat tiles are the 'so what': 82% of this customer's traffic is anomalous, at 6x normal latency. That is an actionable finding a business owner can act on today.
-Swap CUST_404 for CUST_405 live and watch it drop to 0% — that improvisation always convinces the skeptic.</a:t>
+The italic line matters for credibility: these numbers are reproducible, not screenshots. Anyone can clone and verify. Swap CUST_404 for CUST_405 live and watch it drop to 0%.</a:t>
             </a:r>
             <a:endParaRPr lang="en-US" dirty="0"/>
           </a:p>
@@ -1416,8 +1507,8 @@
             <a:r>
               <a:rPr lang="en-US" dirty="0"/>
               <a:t>This is the slide that shows the architecture has matured beyond 'query a table'. A real operational question needs two different kinds of knowledge — a measurement and a procedure — and until now those lived in two different systems with two different access models.
-The key governance point, and say it explicitly: retrieval did not get a special exemption. It is a registered function on the same allowlist, its question is passed as a bound value, and it produced its OWN governance check. In the live trace the room can count two 'Granted' entries.
-The closing line is the one to land: the number is from the lakehouse, the recommendation is from an approved document, and the model authored neither. It orchestrated. That is the whole thesis, demonstrated on one question.</a:t>
+The key governance point, and say it explicitly: retrieval did not get a special exemption. It is a registered function on the same allowlist, its question is passed as a bound value, and it produced its OWN governance check. In the live trace the room can count two 'Granted' entries — and both are separately recorded in the audit trail.
+The closing line is the one to land: the number is from the lakehouse, the recommendation is from an approved document, and the model authored neither. It orchestrated.</a:t>
             </a:r>
             <a:endParaRPr lang="en-US" dirty="0"/>
           </a:p>
@@ -1508,7 +1599,7 @@
               <a:t>This slide is aimed squarely at anyone who has been burned by a RAG pilot. Every one of them has seen a demo where the system cheerfully cites an irrelevant document, and it is the reason many of those pilots never shipped.
 Walk the chart left to right. The left panel is the trap: if you rank purely by similarity — which is what most RAG implementations do — the off-topic question WINS. That is measured on this corpus, not hypothetical.
 The right panel is the fix: require that the question's vocabulary is actually covered by the corpus. Off-topic falls below the line and the system declines.
-The engineering maturity signal here is knowing that a retrieval system needs an abstention policy at all. Most teams discover this in production, after a bad answer reaches a customer.</a:t>
+The maturity signal is knowing a retrieval system needs an abstention policy at all. Most teams discover this in production, after a bad answer reaches a customer.</a:t>
             </a:r>
             <a:endParaRPr lang="en-US" dirty="0"/>
           </a:p>
@@ -1596,9 +1687,11 @@
           <a:p>
             <a:r>
               <a:rPr lang="en-US" dirty="0"/>
-              <a:t>For the technical people in the room. The histogram shows why the anomaly call is trustworthy: normal traffic clusters near 66ms, the 3σ line sits at 310ms, and the anomaly cohort lives in the far right tail. Nobody picked 310 — it's three standard deviations of the actual data.
-The three bullets are the engineering credibility: statistical definition, bound parameters, full tracing. If a CTO or architect is evaluating this, these are the words that say it was built by someone who has shipped production data systems.
-Close on the tests: each claim on these slides has an automated test that fails loudly if it regresses.</a:t>
+              <a:t>This is the CISO and Compliance slide, and it is the natural close to the live demo — you have just done five things, now show the room that all five are already on the record.
+The framing that matters: a control you cannot evidence is a control you cannot pass an audit with. Most AI governance stories stop at 'we have a policy'. This one produces a queryable record of every decision the boundary made, including every refusal.
+Call out the refusal count deliberately. A denial is not an error to be embarrassed about — it is the single best piece of evidence that the control is live and working, and auditors treat it that way.
+If you want a memorable beat: kill the API in front of them, restart it, and reload the tab. The trail is unchanged. That is what separates evidence from logging.
+Production note if asked: this is a Delta table with retention and access policy applied, or shipped to your SIEM — the record shape is identical.</a:t>
             </a:r>
             <a:endParaRPr lang="en-US" dirty="0"/>
           </a:p>
@@ -2377,6 +2470,580 @@
                 <a:ea typeface="Calibri" pitchFamily="34" charset="-122"/>
                 <a:cs typeface="Calibri" pitchFamily="34" charset="-120"/>
               </a:rPr>
+              <a:t>UNDER THE HOOD</a:t>
+            </a:r>
+            <a:endParaRPr lang="en-US" sz="1200" dirty="0"/>
+          </a:p>
+        </p:txBody>
+      </p:sp>
+      <p:sp>
+        <p:nvSpPr>
+          <p:cNvPr id="4" name="Text 2"/>
+          <p:cNvSpPr/>
+          <p:nvPr/>
+        </p:nvSpPr>
+        <p:spPr>
+          <a:xfrm>
+            <a:off x="640080" y="841248"/>
+            <a:ext cx="10881360" cy="914400"/>
+          </a:xfrm>
+          <a:prstGeom prst="rect">
+            <a:avLst/>
+          </a:prstGeom>
+          <a:noFill/>
+          <a:ln/>
+        </p:spPr>
+        <p:txBody>
+          <a:bodyPr wrap="square" lIns="0" tIns="0" rIns="0" bIns="0" rtlCol="0" anchor="t"/>
+          <a:lstStyle/>
+          <a:p>
+            <a:pPr indent="0" marL="0">
+              <a:buNone/>
+            </a:pPr>
+            <a:r>
+              <a:rPr lang="en-US" sz="3200" b="1" dirty="0">
+                <a:solidFill>
+                  <a:srgbClr val="E9EEF3"/>
+                </a:solidFill>
+                <a:latin typeface="Cambria" pitchFamily="34" charset="0"/>
+                <a:ea typeface="Cambria" pitchFamily="34" charset="-122"/>
+                <a:cs typeface="Cambria" pitchFamily="34" charset="-120"/>
+              </a:rPr>
+              <a:t>Why the answers hold up</a:t>
+            </a:r>
+            <a:endParaRPr lang="en-US" sz="3200" dirty="0"/>
+          </a:p>
+        </p:txBody>
+      </p:sp>
+      <p:pic>
+        <p:nvPicPr>
+          <p:cNvPr id="5" name="Image 0" descr="/private/tmp/claude-501/-Users-atharvvani-Downloads-DataBricks/437ba0b1-41b9-48e1-95cf-333721d11260/scratchpad/deck_assets/latency_dist.png">    </p:cNvPr>
+          <p:cNvPicPr>
+            <a:picLocks noChangeAspect="1"/>
+          </p:cNvPicPr>
+          <p:nvPr/>
+        </p:nvPicPr>
+        <p:blipFill>
+          <a:blip r:embed="rId1"/>
+          <a:stretch>
+            <a:fillRect/>
+          </a:stretch>
+        </p:blipFill>
+        <p:spPr>
+          <a:xfrm>
+            <a:off x="640080" y="1828800"/>
+            <a:ext cx="6766560" cy="2926080"/>
+          </a:xfrm>
+          <a:prstGeom prst="rect">
+            <a:avLst/>
+          </a:prstGeom>
+        </p:spPr>
+      </p:pic>
+      <p:sp>
+        <p:nvSpPr>
+          <p:cNvPr id="6" name="Shape 3"/>
+          <p:cNvSpPr/>
+          <p:nvPr/>
+        </p:nvSpPr>
+        <p:spPr>
+          <a:xfrm>
+            <a:off x="7772400" y="1764792"/>
+            <a:ext cx="146304" cy="146304"/>
+          </a:xfrm>
+          <a:prstGeom prst="ellipse">
+            <a:avLst/>
+          </a:prstGeom>
+          <a:solidFill>
+            <a:srgbClr val="FF6C00"/>
+          </a:solidFill>
+          <a:ln/>
+        </p:spPr>
+      </p:sp>
+      <p:sp>
+        <p:nvSpPr>
+          <p:cNvPr id="7" name="Text 4"/>
+          <p:cNvSpPr/>
+          <p:nvPr/>
+        </p:nvSpPr>
+        <p:spPr>
+          <a:xfrm>
+            <a:off x="8046720" y="1645920"/>
+            <a:ext cx="3474720" cy="365760"/>
+          </a:xfrm>
+          <a:prstGeom prst="rect">
+            <a:avLst/>
+          </a:prstGeom>
+          <a:noFill/>
+          <a:ln/>
+        </p:spPr>
+        <p:txBody>
+          <a:bodyPr wrap="square" lIns="0" tIns="0" rIns="0" bIns="0" rtlCol="0" anchor="ctr"/>
+          <a:lstStyle/>
+          <a:p>
+            <a:pPr indent="0" marL="0">
+              <a:buNone/>
+            </a:pPr>
+            <a:r>
+              <a:rPr lang="en-US" sz="1550" b="1" dirty="0">
+                <a:solidFill>
+                  <a:srgbClr val="E9EEF3"/>
+                </a:solidFill>
+                <a:latin typeface="Calibri" pitchFamily="34" charset="0"/>
+                <a:ea typeface="Calibri" pitchFamily="34" charset="-122"/>
+                <a:cs typeface="Calibri" pitchFamily="34" charset="-120"/>
+              </a:rPr>
+              <a:t>Statistical, not hard-coded</a:t>
+            </a:r>
+            <a:endParaRPr lang="en-US" sz="1550" dirty="0"/>
+          </a:p>
+        </p:txBody>
+      </p:sp>
+      <p:sp>
+        <p:nvSpPr>
+          <p:cNvPr id="8" name="Text 5"/>
+          <p:cNvSpPr/>
+          <p:nvPr/>
+        </p:nvSpPr>
+        <p:spPr>
+          <a:xfrm>
+            <a:off x="8046720" y="2029968"/>
+            <a:ext cx="3474720" cy="822960"/>
+          </a:xfrm>
+          <a:prstGeom prst="rect">
+            <a:avLst/>
+          </a:prstGeom>
+          <a:noFill/>
+          <a:ln/>
+        </p:spPr>
+        <p:txBody>
+          <a:bodyPr wrap="square" lIns="0" tIns="0" rIns="0" bIns="0" rtlCol="0" anchor="ctr"/>
+          <a:lstStyle/>
+          <a:p>
+            <a:pPr indent="0" marL="0">
+              <a:lnSpc>
+                <a:spcPct val="108000"/>
+              </a:lnSpc>
+              <a:buNone/>
+            </a:pPr>
+            <a:r>
+              <a:rPr lang="en-US" sz="1250" dirty="0">
+                <a:solidFill>
+                  <a:srgbClr val="93A1AF"/>
+                </a:solidFill>
+                <a:latin typeface="Calibri" pitchFamily="34" charset="0"/>
+                <a:ea typeface="Calibri" pitchFamily="34" charset="-122"/>
+                <a:cs typeface="Calibri" pitchFamily="34" charset="-120"/>
+              </a:rPr>
+              <a:t>Anomalies are events beyond 3σ of the live population — the threshold moves with the data, not a magic number.</a:t>
+            </a:r>
+            <a:endParaRPr lang="en-US" sz="1250" dirty="0"/>
+          </a:p>
+        </p:txBody>
+      </p:sp>
+      <p:sp>
+        <p:nvSpPr>
+          <p:cNvPr id="9" name="Shape 6"/>
+          <p:cNvSpPr/>
+          <p:nvPr/>
+        </p:nvSpPr>
+        <p:spPr>
+          <a:xfrm>
+            <a:off x="7772400" y="3099816"/>
+            <a:ext cx="146304" cy="146304"/>
+          </a:xfrm>
+          <a:prstGeom prst="ellipse">
+            <a:avLst/>
+          </a:prstGeom>
+          <a:solidFill>
+            <a:srgbClr val="FF6C00"/>
+          </a:solidFill>
+          <a:ln/>
+        </p:spPr>
+      </p:sp>
+      <p:sp>
+        <p:nvSpPr>
+          <p:cNvPr id="10" name="Text 7"/>
+          <p:cNvSpPr/>
+          <p:nvPr/>
+        </p:nvSpPr>
+        <p:spPr>
+          <a:xfrm>
+            <a:off x="8046720" y="2980944"/>
+            <a:ext cx="3474720" cy="365760"/>
+          </a:xfrm>
+          <a:prstGeom prst="rect">
+            <a:avLst/>
+          </a:prstGeom>
+          <a:noFill/>
+          <a:ln/>
+        </p:spPr>
+        <p:txBody>
+          <a:bodyPr wrap="square" lIns="0" tIns="0" rIns="0" bIns="0" rtlCol="0" anchor="ctr"/>
+          <a:lstStyle/>
+          <a:p>
+            <a:pPr indent="0" marL="0">
+              <a:buNone/>
+            </a:pPr>
+            <a:r>
+              <a:rPr lang="en-US" sz="1550" b="1" dirty="0">
+                <a:solidFill>
+                  <a:srgbClr val="E9EEF3"/>
+                </a:solidFill>
+                <a:latin typeface="Calibri" pitchFamily="34" charset="0"/>
+                <a:ea typeface="Calibri" pitchFamily="34" charset="-122"/>
+                <a:cs typeface="Calibri" pitchFamily="34" charset="-120"/>
+              </a:rPr>
+              <a:t>Parameter-bound execution</a:t>
+            </a:r>
+            <a:endParaRPr lang="en-US" sz="1550" dirty="0"/>
+          </a:p>
+        </p:txBody>
+      </p:sp>
+      <p:sp>
+        <p:nvSpPr>
+          <p:cNvPr id="11" name="Text 8"/>
+          <p:cNvSpPr/>
+          <p:nvPr/>
+        </p:nvSpPr>
+        <p:spPr>
+          <a:xfrm>
+            <a:off x="8046720" y="3364992"/>
+            <a:ext cx="3474720" cy="822960"/>
+          </a:xfrm>
+          <a:prstGeom prst="rect">
+            <a:avLst/>
+          </a:prstGeom>
+          <a:noFill/>
+          <a:ln/>
+        </p:spPr>
+        <p:txBody>
+          <a:bodyPr wrap="square" lIns="0" tIns="0" rIns="0" bIns="0" rtlCol="0" anchor="ctr"/>
+          <a:lstStyle/>
+          <a:p>
+            <a:pPr indent="0" marL="0">
+              <a:lnSpc>
+                <a:spcPct val="108000"/>
+              </a:lnSpc>
+              <a:buNone/>
+            </a:pPr>
+            <a:r>
+              <a:rPr lang="en-US" sz="1250" dirty="0">
+                <a:solidFill>
+                  <a:srgbClr val="93A1AF"/>
+                </a:solidFill>
+                <a:latin typeface="Calibri" pitchFamily="34" charset="0"/>
+                <a:ea typeface="Calibri" pitchFamily="34" charset="-122"/>
+                <a:cs typeface="Calibri" pitchFamily="34" charset="-120"/>
+              </a:rPr>
+              <a:t>Values are bound, never interpolated — a hostile input matches no rows and cannot reshape a query.</a:t>
+            </a:r>
+            <a:endParaRPr lang="en-US" sz="1250" dirty="0"/>
+          </a:p>
+        </p:txBody>
+      </p:sp>
+      <p:sp>
+        <p:nvSpPr>
+          <p:cNvPr id="12" name="Shape 9"/>
+          <p:cNvSpPr/>
+          <p:nvPr/>
+        </p:nvSpPr>
+        <p:spPr>
+          <a:xfrm>
+            <a:off x="7772400" y="4434840"/>
+            <a:ext cx="146304" cy="146304"/>
+          </a:xfrm>
+          <a:prstGeom prst="ellipse">
+            <a:avLst/>
+          </a:prstGeom>
+          <a:solidFill>
+            <a:srgbClr val="FF6C00"/>
+          </a:solidFill>
+          <a:ln/>
+        </p:spPr>
+      </p:sp>
+      <p:sp>
+        <p:nvSpPr>
+          <p:cNvPr id="13" name="Text 10"/>
+          <p:cNvSpPr/>
+          <p:nvPr/>
+        </p:nvSpPr>
+        <p:spPr>
+          <a:xfrm>
+            <a:off x="8046720" y="4315968"/>
+            <a:ext cx="3474720" cy="365760"/>
+          </a:xfrm>
+          <a:prstGeom prst="rect">
+            <a:avLst/>
+          </a:prstGeom>
+          <a:noFill/>
+          <a:ln/>
+        </p:spPr>
+        <p:txBody>
+          <a:bodyPr wrap="square" lIns="0" tIns="0" rIns="0" bIns="0" rtlCol="0" anchor="ctr"/>
+          <a:lstStyle/>
+          <a:p>
+            <a:pPr indent="0" marL="0">
+              <a:buNone/>
+            </a:pPr>
+            <a:r>
+              <a:rPr lang="en-US" sz="1550" b="1" dirty="0">
+                <a:solidFill>
+                  <a:srgbClr val="E9EEF3"/>
+                </a:solidFill>
+                <a:latin typeface="Calibri" pitchFamily="34" charset="0"/>
+                <a:ea typeface="Calibri" pitchFamily="34" charset="-122"/>
+                <a:cs typeface="Calibri" pitchFamily="34" charset="-120"/>
+              </a:rPr>
+              <a:t>Every step is traced and kept</a:t>
+            </a:r>
+            <a:endParaRPr lang="en-US" sz="1550" dirty="0"/>
+          </a:p>
+        </p:txBody>
+      </p:sp>
+      <p:sp>
+        <p:nvSpPr>
+          <p:cNvPr id="14" name="Text 11"/>
+          <p:cNvSpPr/>
+          <p:nvPr/>
+        </p:nvSpPr>
+        <p:spPr>
+          <a:xfrm>
+            <a:off x="8046720" y="4700016"/>
+            <a:ext cx="3474720" cy="822960"/>
+          </a:xfrm>
+          <a:prstGeom prst="rect">
+            <a:avLst/>
+          </a:prstGeom>
+          <a:noFill/>
+          <a:ln/>
+        </p:spPr>
+        <p:txBody>
+          <a:bodyPr wrap="square" lIns="0" tIns="0" rIns="0" bIns="0" rtlCol="0" anchor="ctr"/>
+          <a:lstStyle/>
+          <a:p>
+            <a:pPr indent="0" marL="0">
+              <a:lnSpc>
+                <a:spcPct val="108000"/>
+              </a:lnSpc>
+              <a:buNone/>
+            </a:pPr>
+            <a:r>
+              <a:rPr lang="en-US" sz="1250" dirty="0">
+                <a:solidFill>
+                  <a:srgbClr val="93A1AF"/>
+                </a:solidFill>
+                <a:latin typeface="Calibri" pitchFamily="34" charset="0"/>
+                <a:ea typeface="Calibri" pitchFamily="34" charset="-122"/>
+                <a:cs typeface="Calibri" pitchFamily="34" charset="-120"/>
+              </a:rPr>
+              <a:t>Intent, each governance decision, execution, synthesis — recorded live and persisted for audit.</a:t>
+            </a:r>
+            <a:endParaRPr lang="en-US" sz="1250" dirty="0"/>
+          </a:p>
+        </p:txBody>
+      </p:sp>
+      <p:sp>
+        <p:nvSpPr>
+          <p:cNvPr id="15" name="Text 12"/>
+          <p:cNvSpPr/>
+          <p:nvPr/>
+        </p:nvSpPr>
+        <p:spPr>
+          <a:xfrm>
+            <a:off x="640080" y="5943600"/>
+            <a:ext cx="10881360" cy="457200"/>
+          </a:xfrm>
+          <a:prstGeom prst="rect">
+            <a:avLst/>
+          </a:prstGeom>
+          <a:noFill/>
+          <a:ln/>
+        </p:spPr>
+        <p:txBody>
+          <a:bodyPr wrap="square" lIns="0" tIns="0" rIns="0" bIns="0" rtlCol="0" anchor="ctr"/>
+          <a:lstStyle/>
+          <a:p>
+            <a:pPr indent="0" marL="0">
+              <a:buNone/>
+            </a:pPr>
+            <a:r>
+              <a:rPr lang="en-US" sz="1450" i="1" dirty="0">
+                <a:solidFill>
+                  <a:srgbClr val="FF8A3D"/>
+                </a:solidFill>
+                <a:latin typeface="Calibri" pitchFamily="34" charset="0"/>
+                <a:ea typeface="Calibri" pitchFamily="34" charset="-122"/>
+                <a:cs typeface="Calibri" pitchFamily="34" charset="-120"/>
+              </a:rPr>
+              <a:t>Verified by a 45-test suite covering computation, governance, injection resistance, retrieval quality, abstention, and audit durability — all passing.</a:t>
+            </a:r>
+            <a:endParaRPr lang="en-US" sz="1450" dirty="0"/>
+          </a:p>
+        </p:txBody>
+      </p:sp>
+      <p:sp>
+        <p:nvSpPr>
+          <p:cNvPr id="16" name="Text 13"/>
+          <p:cNvSpPr/>
+          <p:nvPr/>
+        </p:nvSpPr>
+        <p:spPr>
+          <a:xfrm>
+            <a:off x="11277295" y="6400800"/>
+            <a:ext cx="548640" cy="274320"/>
+          </a:xfrm>
+          <a:prstGeom prst="rect">
+            <a:avLst/>
+          </a:prstGeom>
+          <a:noFill/>
+          <a:ln/>
+        </p:spPr>
+        <p:txBody>
+          <a:bodyPr wrap="square" lIns="0" tIns="0" rIns="0" bIns="0" rtlCol="0" anchor="ctr"/>
+          <a:lstStyle/>
+          <a:p>
+            <a:pPr algn="r" indent="0" marL="0">
+              <a:buNone/>
+            </a:pPr>
+            <a:r>
+              <a:rPr lang="en-US" sz="1000" dirty="0">
+                <a:solidFill>
+                  <a:srgbClr val="6C7C8A"/>
+                </a:solidFill>
+                <a:latin typeface="Calibri" pitchFamily="34" charset="0"/>
+                <a:ea typeface="Calibri" pitchFamily="34" charset="-122"/>
+                <a:cs typeface="Calibri" pitchFamily="34" charset="-120"/>
+              </a:rPr>
+              <a:t>10</a:t>
+            </a:r>
+            <a:endParaRPr lang="en-US" sz="1000" dirty="0"/>
+          </a:p>
+        </p:txBody>
+      </p:sp>
+      <p:sp>
+        <p:nvSpPr>
+          <p:cNvPr id="17" name="Text 14"/>
+          <p:cNvSpPr/>
+          <p:nvPr/>
+        </p:nvSpPr>
+        <p:spPr>
+          <a:xfrm>
+            <a:off x="640080" y="6400800"/>
+            <a:ext cx="3657600" cy="274320"/>
+          </a:xfrm>
+          <a:prstGeom prst="rect">
+            <a:avLst/>
+          </a:prstGeom>
+          <a:noFill/>
+          <a:ln/>
+        </p:spPr>
+        <p:txBody>
+          <a:bodyPr wrap="square" lIns="0" tIns="0" rIns="0" bIns="0" rtlCol="0" anchor="ctr"/>
+          <a:lstStyle/>
+          <a:p>
+            <a:pPr indent="0" marL="0">
+              <a:buNone/>
+            </a:pPr>
+            <a:r>
+              <a:rPr lang="en-US" sz="1000" dirty="0">
+                <a:solidFill>
+                  <a:srgbClr val="6C7C8A"/>
+                </a:solidFill>
+                <a:latin typeface="Calibri" pitchFamily="34" charset="0"/>
+                <a:ea typeface="Calibri" pitchFamily="34" charset="-122"/>
+                <a:cs typeface="Calibri" pitchFamily="34" charset="-120"/>
+              </a:rPr>
+              <a:t>IntelligenceStack</a:t>
+            </a:r>
+            <a:endParaRPr lang="en-US" sz="1000" dirty="0"/>
+          </a:p>
+        </p:txBody>
+      </p:sp>
+    </p:spTree>
+  </p:cSld>
+  <p:clrMapOvr>
+    <a:masterClrMapping/>
+  </p:clrMapOvr>
+</p:sld>
+</file>
+
+<file path=ppt/slides/slide11.xml><?xml version="1.0" encoding="utf-8"?>
+<p:sld xmlns:a="http://schemas.openxmlformats.org/drawingml/2006/main" xmlns:r="http://schemas.openxmlformats.org/officeDocument/2006/relationships" xmlns:p="http://schemas.openxmlformats.org/presentationml/2006/main">
+  <p:cSld name="Slide 11">
+    <p:bg>
+      <p:bgPr>
+        <a:solidFill>
+          <a:srgbClr val="0E1621"/>
+        </a:solidFill>
+      </p:bgPr>
+    </p:bg>
+    <p:spTree>
+      <p:nvGrpSpPr>
+        <p:cNvPr id="1" name=""/>
+        <p:cNvGrpSpPr/>
+        <p:nvPr/>
+      </p:nvGrpSpPr>
+      <p:grpSpPr>
+        <a:xfrm>
+          <a:off x="0" y="0"/>
+          <a:ext cx="0" cy="0"/>
+          <a:chOff x="0" y="0"/>
+          <a:chExt cx="0" cy="0"/>
+        </a:xfrm>
+      </p:grpSpPr>
+      <p:sp>
+        <p:nvSpPr>
+          <p:cNvPr id="2" name="Shape 0"/>
+          <p:cNvSpPr/>
+          <p:nvPr/>
+        </p:nvSpPr>
+        <p:spPr>
+          <a:xfrm>
+            <a:off x="640080" y="566928"/>
+            <a:ext cx="146304" cy="146304"/>
+          </a:xfrm>
+          <a:prstGeom prst="ellipse">
+            <a:avLst/>
+          </a:prstGeom>
+          <a:solidFill>
+            <a:srgbClr val="FF6C00"/>
+          </a:solidFill>
+          <a:ln/>
+        </p:spPr>
+      </p:sp>
+      <p:sp>
+        <p:nvSpPr>
+          <p:cNvPr id="3" name="Text 1"/>
+          <p:cNvSpPr/>
+          <p:nvPr/>
+        </p:nvSpPr>
+        <p:spPr>
+          <a:xfrm>
+            <a:off x="896112" y="457200"/>
+            <a:ext cx="9144000" cy="365760"/>
+          </a:xfrm>
+          <a:prstGeom prst="rect">
+            <a:avLst/>
+          </a:prstGeom>
+          <a:noFill/>
+          <a:ln/>
+        </p:spPr>
+        <p:txBody>
+          <a:bodyPr wrap="square" lIns="0" tIns="0" rIns="0" bIns="0" rtlCol="0" anchor="ctr"/>
+          <a:lstStyle/>
+          <a:p>
+            <a:pPr indent="0" marL="0">
+              <a:buNone/>
+            </a:pPr>
+            <a:r>
+              <a:rPr lang="en-US" sz="1200" b="1" spc="200" kern="0" dirty="0">
+                <a:solidFill>
+                  <a:srgbClr val="FF8A3D"/>
+                </a:solidFill>
+                <a:latin typeface="Calibri" pitchFamily="34" charset="0"/>
+                <a:ea typeface="Calibri" pitchFamily="34" charset="-122"/>
+                <a:cs typeface="Calibri" pitchFamily="34" charset="-120"/>
+              </a:rPr>
               <a:t>WHY IT MATTERS</a:t>
             </a:r>
             <a:endParaRPr lang="en-US" sz="1200" dirty="0"/>
@@ -2878,7 +3545,7 @@
                 <a:ea typeface="Calibri" pitchFamily="34" charset="-122"/>
                 <a:cs typeface="Calibri" pitchFamily="34" charset="-120"/>
               </a:rPr>
-              <a:t>PII hashed at ingestion, no raw-row exfiltration, per-action audit trail — controls you can demonstrate, not just promise.</a:t>
+              <a:t>PII hashed at ingestion, no raw-row exfiltration, and a durable per-action record — controls you can demonstrate, not just promise.</a:t>
             </a:r>
             <a:endParaRPr lang="en-US" sz="1250" dirty="0"/>
           </a:p>
@@ -3071,7 +3738,7 @@
                 <a:ea typeface="Calibri" pitchFamily="34" charset="-122"/>
                 <a:cs typeface="Calibri" pitchFamily="34" charset="-120"/>
               </a:rPr>
-              <a:t>10</a:t>
+              <a:t>11</a:t>
             </a:r>
             <a:endParaRPr lang="en-US" sz="1000" dirty="0"/>
           </a:p>
@@ -3124,9 +3791,9 @@
 </p:sld>
 </file>
 
-<file path=ppt/slides/slide11.xml><?xml version="1.0" encoding="utf-8"?>
+<file path=ppt/slides/slide12.xml><?xml version="1.0" encoding="utf-8"?>
 <p:sld xmlns:a="http://schemas.openxmlformats.org/drawingml/2006/main" xmlns:r="http://schemas.openxmlformats.org/officeDocument/2006/relationships" xmlns:p="http://schemas.openxmlformats.org/presentationml/2006/main">
-  <p:cSld name="Slide 11">
+  <p:cSld name="Slide 12">
     <p:bg>
       <p:bgPr>
         <a:solidFill>
@@ -3720,7 +4387,7 @@
                 <a:ea typeface="Calibri" pitchFamily="34" charset="-122"/>
                 <a:cs typeface="Calibri" pitchFamily="34" charset="-120"/>
               </a:rPr>
-              <a:t>Provable controls and a per-action audit trail that shorten review and audit cycles.</a:t>
+              <a:t>A durable, queryable record of every AI action — refusals included — that shortens review and audit cycles.</a:t>
             </a:r>
             <a:endParaRPr lang="en-US" sz="1280" dirty="0"/>
           </a:p>
@@ -4079,7 +4746,7 @@
                 <a:ea typeface="Calibri" pitchFamily="34" charset="-122"/>
                 <a:cs typeface="Calibri" pitchFamily="34" charset="-120"/>
               </a:rPr>
-              <a:t>11</a:t>
+              <a:t>12</a:t>
             </a:r>
             <a:endParaRPr lang="en-US" sz="1000" dirty="0"/>
           </a:p>
@@ -4132,9 +4799,9 @@
 </p:sld>
 </file>
 
-<file path=ppt/slides/slide12.xml><?xml version="1.0" encoding="utf-8"?>
+<file path=ppt/slides/slide13.xml><?xml version="1.0" encoding="utf-8"?>
 <p:sld xmlns:a="http://schemas.openxmlformats.org/drawingml/2006/main" xmlns:r="http://schemas.openxmlformats.org/officeDocument/2006/relationships" xmlns:p="http://schemas.openxmlformats.org/presentationml/2006/main">
-  <p:cSld name="Slide 12">
+  <p:cSld name="Slide 13">
     <p:bg>
       <p:bgPr>
         <a:solidFill>
@@ -4383,11 +5050,11 @@
         <p:spPr>
           <a:xfrm>
             <a:off x="640080" y="2788920"/>
-            <a:ext cx="4480560" cy="566928"/>
+            <a:ext cx="4480560" cy="457200"/>
           </a:xfrm>
           <a:prstGeom prst="roundRect">
             <a:avLst>
-              <a:gd name="adj" fmla="val 14516"/>
+              <a:gd name="adj" fmla="val 18000"/>
             </a:avLst>
           </a:prstGeom>
           <a:solidFill>
@@ -4417,23 +5084,23 @@
         <p:spPr>
           <a:xfrm>
             <a:off x="914400" y="2788920"/>
-            <a:ext cx="4023360" cy="566928"/>
-          </a:xfrm>
-          <a:prstGeom prst="rect">
-            <a:avLst/>
-          </a:prstGeom>
-          <a:noFill/>
-          <a:ln/>
-        </p:spPr>
-        <p:txBody>
-          <a:bodyPr wrap="square" lIns="0" tIns="0" rIns="0" bIns="0" rtlCol="0" anchor="ctr"/>
-          <a:lstStyle/>
-          <a:p>
-            <a:pPr indent="0" marL="0">
-              <a:buNone/>
-            </a:pPr>
-            <a:r>
-              <a:rPr lang="en-US" sz="1300" dirty="0">
+            <a:ext cx="4023360" cy="457200"/>
+          </a:xfrm>
+          <a:prstGeom prst="rect">
+            <a:avLst/>
+          </a:prstGeom>
+          <a:noFill/>
+          <a:ln/>
+        </p:spPr>
+        <p:txBody>
+          <a:bodyPr wrap="square" lIns="0" tIns="0" rIns="0" bIns="0" rtlCol="0" anchor="ctr"/>
+          <a:lstStyle/>
+          <a:p>
+            <a:pPr indent="0" marL="0">
+              <a:buNone/>
+            </a:pPr>
+            <a:r>
+              <a:rPr lang="en-US" sz="1200" dirty="0">
                 <a:solidFill>
                   <a:srgbClr val="E9EEF3"/>
                 </a:solidFill>
@@ -4443,7 +5110,7 @@
               </a:rPr>
               <a:t>DuckDB medallion engine</a:t>
             </a:r>
-            <a:endParaRPr lang="en-US" sz="1300" dirty="0"/>
+            <a:endParaRPr lang="en-US" sz="1200" dirty="0"/>
           </a:p>
         </p:txBody>
       </p:sp>
@@ -4455,8 +5122,8 @@
         </p:nvSpPr>
         <p:spPr>
           <a:xfrm>
-            <a:off x="5175504" y="2980944"/>
-            <a:ext cx="256032" cy="182880"/>
+            <a:off x="5175504" y="2944368"/>
+            <a:ext cx="256032" cy="146304"/>
           </a:xfrm>
           <a:prstGeom prst="rightArrow">
             <a:avLst/>
@@ -4476,11 +5143,11 @@
         <p:spPr>
           <a:xfrm>
             <a:off x="5486400" y="2788920"/>
-            <a:ext cx="6080760" cy="566928"/>
+            <a:ext cx="6080760" cy="457200"/>
           </a:xfrm>
           <a:prstGeom prst="roundRect">
             <a:avLst>
-              <a:gd name="adj" fmla="val 14516"/>
+              <a:gd name="adj" fmla="val 18000"/>
             </a:avLst>
           </a:prstGeom>
           <a:solidFill>
@@ -4510,23 +5177,23 @@
         <p:spPr>
           <a:xfrm>
             <a:off x="5760720" y="2788920"/>
-            <a:ext cx="5623560" cy="566928"/>
-          </a:xfrm>
-          <a:prstGeom prst="rect">
-            <a:avLst/>
-          </a:prstGeom>
-          <a:noFill/>
-          <a:ln/>
-        </p:spPr>
-        <p:txBody>
-          <a:bodyPr wrap="square" lIns="0" tIns="0" rIns="0" bIns="0" rtlCol="0" anchor="ctr"/>
-          <a:lstStyle/>
-          <a:p>
-            <a:pPr indent="0" marL="0">
-              <a:buNone/>
-            </a:pPr>
-            <a:r>
-              <a:rPr lang="en-US" sz="1300" dirty="0">
+            <a:ext cx="5623560" cy="457200"/>
+          </a:xfrm>
+          <a:prstGeom prst="rect">
+            <a:avLst/>
+          </a:prstGeom>
+          <a:noFill/>
+          <a:ln/>
+        </p:spPr>
+        <p:txBody>
+          <a:bodyPr wrap="square" lIns="0" tIns="0" rIns="0" bIns="0" rtlCol="0" anchor="ctr"/>
+          <a:lstStyle/>
+          <a:p>
+            <a:pPr indent="0" marL="0">
+              <a:buNone/>
+            </a:pPr>
+            <a:r>
+              <a:rPr lang="en-US" sz="1200" dirty="0">
                 <a:solidFill>
                   <a:srgbClr val="E9EEF3"/>
                 </a:solidFill>
@@ -4536,7 +5203,7 @@
               </a:rPr>
               <a:t>Serverless SQL Warehouse over Delta + Unity Catalog</a:t>
             </a:r>
-            <a:endParaRPr lang="en-US" sz="1300" dirty="0"/>
+            <a:endParaRPr lang="en-US" sz="1200" dirty="0"/>
           </a:p>
         </p:txBody>
       </p:sp>
@@ -4548,12 +5215,12 @@
         </p:nvSpPr>
         <p:spPr>
           <a:xfrm>
-            <a:off x="640080" y="3447288"/>
-            <a:ext cx="4480560" cy="566928"/>
+            <a:off x="640080" y="3319272"/>
+            <a:ext cx="4480560" cy="457200"/>
           </a:xfrm>
           <a:prstGeom prst="roundRect">
             <a:avLst>
-              <a:gd name="adj" fmla="val 14516"/>
+              <a:gd name="adj" fmla="val 18000"/>
             </a:avLst>
           </a:prstGeom>
           <a:solidFill>
@@ -4582,24 +5249,24 @@
         </p:nvSpPr>
         <p:spPr>
           <a:xfrm>
-            <a:off x="914400" y="3447288"/>
-            <a:ext cx="4023360" cy="566928"/>
-          </a:xfrm>
-          <a:prstGeom prst="rect">
-            <a:avLst/>
-          </a:prstGeom>
-          <a:noFill/>
-          <a:ln/>
-        </p:spPr>
-        <p:txBody>
-          <a:bodyPr wrap="square" lIns="0" tIns="0" rIns="0" bIns="0" rtlCol="0" anchor="ctr"/>
-          <a:lstStyle/>
-          <a:p>
-            <a:pPr indent="0" marL="0">
-              <a:buNone/>
-            </a:pPr>
-            <a:r>
-              <a:rPr lang="en-US" sz="1300" dirty="0">
+            <a:off x="914400" y="3319272"/>
+            <a:ext cx="4023360" cy="457200"/>
+          </a:xfrm>
+          <a:prstGeom prst="rect">
+            <a:avLst/>
+          </a:prstGeom>
+          <a:noFill/>
+          <a:ln/>
+        </p:spPr>
+        <p:txBody>
+          <a:bodyPr wrap="square" lIns="0" tIns="0" rIns="0" bIns="0" rtlCol="0" anchor="ctr"/>
+          <a:lstStyle/>
+          <a:p>
+            <a:pPr indent="0" marL="0">
+              <a:buNone/>
+            </a:pPr>
+            <a:r>
+              <a:rPr lang="en-US" sz="1200" dirty="0">
                 <a:solidFill>
                   <a:srgbClr val="E9EEF3"/>
                 </a:solidFill>
@@ -4609,7 +5276,7 @@
               </a:rPr>
               <a:t>TF-IDF vector index</a:t>
             </a:r>
-            <a:endParaRPr lang="en-US" sz="1300" dirty="0"/>
+            <a:endParaRPr lang="en-US" sz="1200" dirty="0"/>
           </a:p>
         </p:txBody>
       </p:sp>
@@ -4621,8 +5288,8 @@
         </p:nvSpPr>
         <p:spPr>
           <a:xfrm>
-            <a:off x="5175504" y="3639312"/>
-            <a:ext cx="256032" cy="182880"/>
+            <a:off x="5175504" y="3474720"/>
+            <a:ext cx="256032" cy="146304"/>
           </a:xfrm>
           <a:prstGeom prst="rightArrow">
             <a:avLst/>
@@ -4641,12 +5308,12 @@
         </p:nvSpPr>
         <p:spPr>
           <a:xfrm>
-            <a:off x="5486400" y="3447288"/>
-            <a:ext cx="6080760" cy="566928"/>
+            <a:off x="5486400" y="3319272"/>
+            <a:ext cx="6080760" cy="457200"/>
           </a:xfrm>
           <a:prstGeom prst="roundRect">
             <a:avLst>
-              <a:gd name="adj" fmla="val 14516"/>
+              <a:gd name="adj" fmla="val 18000"/>
             </a:avLst>
           </a:prstGeom>
           <a:solidFill>
@@ -4675,24 +5342,24 @@
         </p:nvSpPr>
         <p:spPr>
           <a:xfrm>
-            <a:off x="5760720" y="3447288"/>
-            <a:ext cx="5623560" cy="566928"/>
-          </a:xfrm>
-          <a:prstGeom prst="rect">
-            <a:avLst/>
-          </a:prstGeom>
-          <a:noFill/>
-          <a:ln/>
-        </p:spPr>
-        <p:txBody>
-          <a:bodyPr wrap="square" lIns="0" tIns="0" rIns="0" bIns="0" rtlCol="0" anchor="ctr"/>
-          <a:lstStyle/>
-          <a:p>
-            <a:pPr indent="0" marL="0">
-              <a:buNone/>
-            </a:pPr>
-            <a:r>
-              <a:rPr lang="en-US" sz="1300" dirty="0">
+            <a:off x="5760720" y="3319272"/>
+            <a:ext cx="5623560" cy="457200"/>
+          </a:xfrm>
+          <a:prstGeom prst="rect">
+            <a:avLst/>
+          </a:prstGeom>
+          <a:noFill/>
+          <a:ln/>
+        </p:spPr>
+        <p:txBody>
+          <a:bodyPr wrap="square" lIns="0" tIns="0" rIns="0" bIns="0" rtlCol="0" anchor="ctr"/>
+          <a:lstStyle/>
+          <a:p>
+            <a:pPr indent="0" marL="0">
+              <a:buNone/>
+            </a:pPr>
+            <a:r>
+              <a:rPr lang="en-US" sz="1200" dirty="0">
                 <a:solidFill>
                   <a:srgbClr val="E9EEF3"/>
                 </a:solidFill>
@@ -4702,7 +5369,7 @@
               </a:rPr>
               <a:t>Mosaic AI Vector Search (bge-large embeddings)</a:t>
             </a:r>
-            <a:endParaRPr lang="en-US" sz="1300" dirty="0"/>
+            <a:endParaRPr lang="en-US" sz="1200" dirty="0"/>
           </a:p>
         </p:txBody>
       </p:sp>
@@ -4714,12 +5381,12 @@
         </p:nvSpPr>
         <p:spPr>
           <a:xfrm>
-            <a:off x="640080" y="4105656"/>
-            <a:ext cx="4480560" cy="566928"/>
+            <a:off x="640080" y="3849624"/>
+            <a:ext cx="4480560" cy="457200"/>
           </a:xfrm>
           <a:prstGeom prst="roundRect">
             <a:avLst>
-              <a:gd name="adj" fmla="val 14516"/>
+              <a:gd name="adj" fmla="val 18000"/>
             </a:avLst>
           </a:prstGeom>
           <a:solidFill>
@@ -4748,24 +5415,24 @@
         </p:nvSpPr>
         <p:spPr>
           <a:xfrm>
-            <a:off x="914400" y="4105656"/>
-            <a:ext cx="4023360" cy="566928"/>
-          </a:xfrm>
-          <a:prstGeom prst="rect">
-            <a:avLst/>
-          </a:prstGeom>
-          <a:noFill/>
-          <a:ln/>
-        </p:spPr>
-        <p:txBody>
-          <a:bodyPr wrap="square" lIns="0" tIns="0" rIns="0" bIns="0" rtlCol="0" anchor="ctr"/>
-          <a:lstStyle/>
-          <a:p>
-            <a:pPr indent="0" marL="0">
-              <a:buNone/>
-            </a:pPr>
-            <a:r>
-              <a:rPr lang="en-US" sz="1300" dirty="0">
+            <a:off x="914400" y="3849624"/>
+            <a:ext cx="4023360" cy="457200"/>
+          </a:xfrm>
+          <a:prstGeom prst="rect">
+            <a:avLst/>
+          </a:prstGeom>
+          <a:noFill/>
+          <a:ln/>
+        </p:spPr>
+        <p:txBody>
+          <a:bodyPr wrap="square" lIns="0" tIns="0" rIns="0" bIns="0" rtlCol="0" anchor="ctr"/>
+          <a:lstStyle/>
+          <a:p>
+            <a:pPr indent="0" marL="0">
+              <a:buNone/>
+            </a:pPr>
+            <a:r>
+              <a:rPr lang="en-US" sz="1200" dirty="0">
                 <a:solidFill>
                   <a:srgbClr val="E9EEF3"/>
                 </a:solidFill>
@@ -4775,7 +5442,7 @@
               </a:rPr>
               <a:t>In-code governance allowlist</a:t>
             </a:r>
-            <a:endParaRPr lang="en-US" sz="1300" dirty="0"/>
+            <a:endParaRPr lang="en-US" sz="1200" dirty="0"/>
           </a:p>
         </p:txBody>
       </p:sp>
@@ -4787,8 +5454,8 @@
         </p:nvSpPr>
         <p:spPr>
           <a:xfrm>
-            <a:off x="5175504" y="4297680"/>
-            <a:ext cx="256032" cy="182880"/>
+            <a:off x="5175504" y="4005072"/>
+            <a:ext cx="256032" cy="146304"/>
           </a:xfrm>
           <a:prstGeom prst="rightArrow">
             <a:avLst/>
@@ -4807,12 +5474,12 @@
         </p:nvSpPr>
         <p:spPr>
           <a:xfrm>
-            <a:off x="5486400" y="4105656"/>
-            <a:ext cx="6080760" cy="566928"/>
+            <a:off x="5486400" y="3849624"/>
+            <a:ext cx="6080760" cy="457200"/>
           </a:xfrm>
           <a:prstGeom prst="roundRect">
             <a:avLst>
-              <a:gd name="adj" fmla="val 14516"/>
+              <a:gd name="adj" fmla="val 18000"/>
             </a:avLst>
           </a:prstGeom>
           <a:solidFill>
@@ -4841,24 +5508,24 @@
         </p:nvSpPr>
         <p:spPr>
           <a:xfrm>
-            <a:off x="5760720" y="4105656"/>
-            <a:ext cx="5623560" cy="566928"/>
-          </a:xfrm>
-          <a:prstGeom prst="rect">
-            <a:avLst/>
-          </a:prstGeom>
-          <a:noFill/>
-          <a:ln/>
-        </p:spPr>
-        <p:txBody>
-          <a:bodyPr wrap="square" lIns="0" tIns="0" rIns="0" bIns="0" rtlCol="0" anchor="ctr"/>
-          <a:lstStyle/>
-          <a:p>
-            <a:pPr indent="0" marL="0">
-              <a:buNone/>
-            </a:pPr>
-            <a:r>
-              <a:rPr lang="en-US" sz="1300" dirty="0">
+            <a:off x="5760720" y="3849624"/>
+            <a:ext cx="5623560" cy="457200"/>
+          </a:xfrm>
+          <a:prstGeom prst="rect">
+            <a:avLst/>
+          </a:prstGeom>
+          <a:noFill/>
+          <a:ln/>
+        </p:spPr>
+        <p:txBody>
+          <a:bodyPr wrap="square" lIns="0" tIns="0" rIns="0" bIns="0" rtlCol="0" anchor="ctr"/>
+          <a:lstStyle/>
+          <a:p>
+            <a:pPr indent="0" marL="0">
+              <a:buNone/>
+            </a:pPr>
+            <a:r>
+              <a:rPr lang="en-US" sz="1200" dirty="0">
                 <a:solidFill>
                   <a:srgbClr val="E9EEF3"/>
                 </a:solidFill>
@@ -4868,7 +5535,7 @@
               </a:rPr>
               <a:t>GRANT EXECUTE ON FUNCTION + row/column-level security</a:t>
             </a:r>
-            <a:endParaRPr lang="en-US" sz="1300" dirty="0"/>
+            <a:endParaRPr lang="en-US" sz="1200" dirty="0"/>
           </a:p>
         </p:txBody>
       </p:sp>
@@ -4880,12 +5547,12 @@
         </p:nvSpPr>
         <p:spPr>
           <a:xfrm>
-            <a:off x="640080" y="4764024"/>
-            <a:ext cx="4480560" cy="566928"/>
+            <a:off x="640080" y="4379976"/>
+            <a:ext cx="4480560" cy="457200"/>
           </a:xfrm>
           <a:prstGeom prst="roundRect">
             <a:avLst>
-              <a:gd name="adj" fmla="val 14516"/>
+              <a:gd name="adj" fmla="val 18000"/>
             </a:avLst>
           </a:prstGeom>
           <a:solidFill>
@@ -4914,24 +5581,24 @@
         </p:nvSpPr>
         <p:spPr>
           <a:xfrm>
-            <a:off x="914400" y="4764024"/>
-            <a:ext cx="4023360" cy="566928"/>
-          </a:xfrm>
-          <a:prstGeom prst="rect">
-            <a:avLst/>
-          </a:prstGeom>
-          <a:noFill/>
-          <a:ln/>
-        </p:spPr>
-        <p:txBody>
-          <a:bodyPr wrap="square" lIns="0" tIns="0" rIns="0" bIns="0" rtlCol="0" anchor="ctr"/>
-          <a:lstStyle/>
-          <a:p>
-            <a:pPr indent="0" marL="0">
-              <a:buNone/>
-            </a:pPr>
-            <a:r>
-              <a:rPr lang="en-US" sz="1300" dirty="0">
+            <a:off x="914400" y="4379976"/>
+            <a:ext cx="4023360" cy="457200"/>
+          </a:xfrm>
+          <a:prstGeom prst="rect">
+            <a:avLst/>
+          </a:prstGeom>
+          <a:noFill/>
+          <a:ln/>
+        </p:spPr>
+        <p:txBody>
+          <a:bodyPr wrap="square" lIns="0" tIns="0" rIns="0" bIns="0" rtlCol="0" anchor="ctr"/>
+          <a:lstStyle/>
+          <a:p>
+            <a:pPr indent="0" marL="0">
+              <a:buNone/>
+            </a:pPr>
+            <a:r>
+              <a:rPr lang="en-US" sz="1200" dirty="0">
                 <a:solidFill>
                   <a:srgbClr val="E9EEF3"/>
                 </a:solidFill>
@@ -4939,9 +5606,9 @@
                 <a:ea typeface="Calibri" pitchFamily="34" charset="-122"/>
                 <a:cs typeface="Calibri" pitchFamily="34" charset="-120"/>
               </a:rPr>
-              <a:t>Local deterministic planner</a:t>
-            </a:r>
-            <a:endParaRPr lang="en-US" sz="1300" dirty="0"/>
+              <a:t>Append-only audit log</a:t>
+            </a:r>
+            <a:endParaRPr lang="en-US" sz="1200" dirty="0"/>
           </a:p>
         </p:txBody>
       </p:sp>
@@ -4953,8 +5620,8 @@
         </p:nvSpPr>
         <p:spPr>
           <a:xfrm>
-            <a:off x="5175504" y="4956048"/>
-            <a:ext cx="256032" cy="182880"/>
+            <a:off x="5175504" y="4535424"/>
+            <a:ext cx="256032" cy="146304"/>
           </a:xfrm>
           <a:prstGeom prst="rightArrow">
             <a:avLst/>
@@ -4973,12 +5640,12 @@
         </p:nvSpPr>
         <p:spPr>
           <a:xfrm>
-            <a:off x="5486400" y="4764024"/>
-            <a:ext cx="6080760" cy="566928"/>
+            <a:off x="5486400" y="4379976"/>
+            <a:ext cx="6080760" cy="457200"/>
           </a:xfrm>
           <a:prstGeom prst="roundRect">
             <a:avLst>
-              <a:gd name="adj" fmla="val 14516"/>
+              <a:gd name="adj" fmla="val 18000"/>
             </a:avLst>
           </a:prstGeom>
           <a:solidFill>
@@ -5007,24 +5674,24 @@
         </p:nvSpPr>
         <p:spPr>
           <a:xfrm>
-            <a:off x="5760720" y="4764024"/>
-            <a:ext cx="5623560" cy="566928"/>
-          </a:xfrm>
-          <a:prstGeom prst="rect">
-            <a:avLst/>
-          </a:prstGeom>
-          <a:noFill/>
-          <a:ln/>
-        </p:spPr>
-        <p:txBody>
-          <a:bodyPr wrap="square" lIns="0" tIns="0" rIns="0" bIns="0" rtlCol="0" anchor="ctr"/>
-          <a:lstStyle/>
-          <a:p>
-            <a:pPr indent="0" marL="0">
-              <a:buNone/>
-            </a:pPr>
-            <a:r>
-              <a:rPr lang="en-US" sz="1300" dirty="0">
+            <a:off x="5760720" y="4379976"/>
+            <a:ext cx="5623560" cy="457200"/>
+          </a:xfrm>
+          <a:prstGeom prst="rect">
+            <a:avLst/>
+          </a:prstGeom>
+          <a:noFill/>
+          <a:ln/>
+        </p:spPr>
+        <p:txBody>
+          <a:bodyPr wrap="square" lIns="0" tIns="0" rIns="0" bIns="0" rtlCol="0" anchor="ctr"/>
+          <a:lstStyle/>
+          <a:p>
+            <a:pPr indent="0" marL="0">
+              <a:buNone/>
+            </a:pPr>
+            <a:r>
+              <a:rPr lang="en-US" sz="1200" dirty="0">
                 <a:solidFill>
                   <a:srgbClr val="E9EEF3"/>
                 </a:solidFill>
@@ -5032,9 +5699,9 @@
                 <a:ea typeface="Calibri" pitchFamily="34" charset="-122"/>
                 <a:cs typeface="Calibri" pitchFamily="34" charset="-120"/>
               </a:rPr>
-              <a:t>Databricks Model Serving (Llama 3 / DBRX) in your VPC</a:t>
-            </a:r>
-            <a:endParaRPr lang="en-US" sz="1300" dirty="0"/>
+              <a:t>Delta audit table with retention policy, or your SIEM</a:t>
+            </a:r>
+            <a:endParaRPr lang="en-US" sz="1200" dirty="0"/>
           </a:p>
         </p:txBody>
       </p:sp>
@@ -5046,12 +5713,12 @@
         </p:nvSpPr>
         <p:spPr>
           <a:xfrm>
-            <a:off x="640080" y="5422392"/>
-            <a:ext cx="4480560" cy="566928"/>
+            <a:off x="640080" y="4910328"/>
+            <a:ext cx="4480560" cy="457200"/>
           </a:xfrm>
           <a:prstGeom prst="roundRect">
             <a:avLst>
-              <a:gd name="adj" fmla="val 14516"/>
+              <a:gd name="adj" fmla="val 18000"/>
             </a:avLst>
           </a:prstGeom>
           <a:solidFill>
@@ -5080,24 +5747,24 @@
         </p:nvSpPr>
         <p:spPr>
           <a:xfrm>
-            <a:off x="914400" y="5422392"/>
-            <a:ext cx="4023360" cy="566928"/>
-          </a:xfrm>
-          <a:prstGeom prst="rect">
-            <a:avLst/>
-          </a:prstGeom>
-          <a:noFill/>
-          <a:ln/>
-        </p:spPr>
-        <p:txBody>
-          <a:bodyPr wrap="square" lIns="0" tIns="0" rIns="0" bIns="0" rtlCol="0" anchor="ctr"/>
-          <a:lstStyle/>
-          <a:p>
-            <a:pPr indent="0" marL="0">
-              <a:buNone/>
-            </a:pPr>
-            <a:r>
-              <a:rPr lang="en-US" sz="1300" dirty="0">
+            <a:off x="914400" y="4910328"/>
+            <a:ext cx="4023360" cy="457200"/>
+          </a:xfrm>
+          <a:prstGeom prst="rect">
+            <a:avLst/>
+          </a:prstGeom>
+          <a:noFill/>
+          <a:ln/>
+        </p:spPr>
+        <p:txBody>
+          <a:bodyPr wrap="square" lIns="0" tIns="0" rIns="0" bIns="0" rtlCol="0" anchor="ctr"/>
+          <a:lstStyle/>
+          <a:p>
+            <a:pPr indent="0" marL="0">
+              <a:buNone/>
+            </a:pPr>
+            <a:r>
+              <a:rPr lang="en-US" sz="1200" dirty="0">
                 <a:solidFill>
                   <a:srgbClr val="E9EEF3"/>
                 </a:solidFill>
@@ -5105,9 +5772,9 @@
                 <a:ea typeface="Calibri" pitchFamily="34" charset="-122"/>
                 <a:cs typeface="Calibri" pitchFamily="34" charset="-120"/>
               </a:rPr>
-              <a:t>Synthetic JSON generator</a:t>
-            </a:r>
-            <a:endParaRPr lang="en-US" sz="1300" dirty="0"/>
+              <a:t>Local deterministic planner</a:t>
+            </a:r>
+            <a:endParaRPr lang="en-US" sz="1200" dirty="0"/>
           </a:p>
         </p:txBody>
       </p:sp>
@@ -5119,8 +5786,8 @@
         </p:nvSpPr>
         <p:spPr>
           <a:xfrm>
-            <a:off x="5175504" y="5614416"/>
-            <a:ext cx="256032" cy="182880"/>
+            <a:off x="5175504" y="5065776"/>
+            <a:ext cx="256032" cy="146304"/>
           </a:xfrm>
           <a:prstGeom prst="rightArrow">
             <a:avLst/>
@@ -5139,12 +5806,12 @@
         </p:nvSpPr>
         <p:spPr>
           <a:xfrm>
-            <a:off x="5486400" y="5422392"/>
-            <a:ext cx="6080760" cy="566928"/>
+            <a:off x="5486400" y="4910328"/>
+            <a:ext cx="6080760" cy="457200"/>
           </a:xfrm>
           <a:prstGeom prst="roundRect">
             <a:avLst>
-              <a:gd name="adj" fmla="val 14516"/>
+              <a:gd name="adj" fmla="val 18000"/>
             </a:avLst>
           </a:prstGeom>
           <a:solidFill>
@@ -5173,24 +5840,24 @@
         </p:nvSpPr>
         <p:spPr>
           <a:xfrm>
-            <a:off x="5760720" y="5422392"/>
-            <a:ext cx="5623560" cy="566928"/>
-          </a:xfrm>
-          <a:prstGeom prst="rect">
-            <a:avLst/>
-          </a:prstGeom>
-          <a:noFill/>
-          <a:ln/>
-        </p:spPr>
-        <p:txBody>
-          <a:bodyPr wrap="square" lIns="0" tIns="0" rIns="0" bIns="0" rtlCol="0" anchor="ctr"/>
-          <a:lstStyle/>
-          <a:p>
-            <a:pPr indent="0" marL="0">
-              <a:buNone/>
-            </a:pPr>
-            <a:r>
-              <a:rPr lang="en-US" sz="1300" dirty="0">
+            <a:off x="5760720" y="4910328"/>
+            <a:ext cx="5623560" cy="457200"/>
+          </a:xfrm>
+          <a:prstGeom prst="rect">
+            <a:avLst/>
+          </a:prstGeom>
+          <a:noFill/>
+          <a:ln/>
+        </p:spPr>
+        <p:txBody>
+          <a:bodyPr wrap="square" lIns="0" tIns="0" rIns="0" bIns="0" rtlCol="0" anchor="ctr"/>
+          <a:lstStyle/>
+          <a:p>
+            <a:pPr indent="0" marL="0">
+              <a:buNone/>
+            </a:pPr>
+            <a:r>
+              <a:rPr lang="en-US" sz="1200" dirty="0">
                 <a:solidFill>
                   <a:srgbClr val="E9EEF3"/>
                 </a:solidFill>
@@ -5198,54 +5865,220 @@
                 <a:ea typeface="Calibri" pitchFamily="34" charset="-122"/>
                 <a:cs typeface="Calibri" pitchFamily="34" charset="-120"/>
               </a:rPr>
+              <a:t>Databricks Model Serving (Llama 3 / DBRX) in your VPC</a:t>
+            </a:r>
+            <a:endParaRPr lang="en-US" sz="1200" dirty="0"/>
+          </a:p>
+        </p:txBody>
+      </p:sp>
+      <p:sp>
+        <p:nvSpPr>
+          <p:cNvPr id="33" name="Shape 31"/>
+          <p:cNvSpPr/>
+          <p:nvPr/>
+        </p:nvSpPr>
+        <p:spPr>
+          <a:xfrm>
+            <a:off x="640080" y="5440680"/>
+            <a:ext cx="4480560" cy="457200"/>
+          </a:xfrm>
+          <a:prstGeom prst="roundRect">
+            <a:avLst>
+              <a:gd name="adj" fmla="val 18000"/>
+            </a:avLst>
+          </a:prstGeom>
+          <a:solidFill>
+            <a:srgbClr val="1F2C3A"/>
+          </a:solidFill>
+          <a:ln w="12700">
+            <a:solidFill>
+              <a:srgbClr val="2A3745"/>
+            </a:solidFill>
+            <a:prstDash val="solid"/>
+          </a:ln>
+          <a:effectLst>
+            <a:outerShdw sx="100000" sy="100000" kx="0" ky="0" algn="bl" rotWithShape="0" blurRad="114300" dist="38100" dir="5400000">
+              <a:srgbClr val="000000">
+                <a:alpha val="28000"/>
+              </a:srgbClr>
+            </a:outerShdw>
+          </a:effectLst>
+        </p:spPr>
+      </p:sp>
+      <p:sp>
+        <p:nvSpPr>
+          <p:cNvPr id="34" name="Text 32"/>
+          <p:cNvSpPr/>
+          <p:nvPr/>
+        </p:nvSpPr>
+        <p:spPr>
+          <a:xfrm>
+            <a:off x="914400" y="5440680"/>
+            <a:ext cx="4023360" cy="457200"/>
+          </a:xfrm>
+          <a:prstGeom prst="rect">
+            <a:avLst/>
+          </a:prstGeom>
+          <a:noFill/>
+          <a:ln/>
+        </p:spPr>
+        <p:txBody>
+          <a:bodyPr wrap="square" lIns="0" tIns="0" rIns="0" bIns="0" rtlCol="0" anchor="ctr"/>
+          <a:lstStyle/>
+          <a:p>
+            <a:pPr indent="0" marL="0">
+              <a:buNone/>
+            </a:pPr>
+            <a:r>
+              <a:rPr lang="en-US" sz="1200" dirty="0">
+                <a:solidFill>
+                  <a:srgbClr val="E9EEF3"/>
+                </a:solidFill>
+                <a:latin typeface="Calibri" pitchFamily="34" charset="0"/>
+                <a:ea typeface="Calibri" pitchFamily="34" charset="-122"/>
+                <a:cs typeface="Calibri" pitchFamily="34" charset="-120"/>
+              </a:rPr>
+              <a:t>Synthetic JSON generator</a:t>
+            </a:r>
+            <a:endParaRPr lang="en-US" sz="1200" dirty="0"/>
+          </a:p>
+        </p:txBody>
+      </p:sp>
+      <p:sp>
+        <p:nvSpPr>
+          <p:cNvPr id="35" name="Shape 33"/>
+          <p:cNvSpPr/>
+          <p:nvPr/>
+        </p:nvSpPr>
+        <p:spPr>
+          <a:xfrm>
+            <a:off x="5175504" y="5596128"/>
+            <a:ext cx="256032" cy="146304"/>
+          </a:xfrm>
+          <a:prstGeom prst="rightArrow">
+            <a:avLst/>
+          </a:prstGeom>
+          <a:solidFill>
+            <a:srgbClr val="FF6C00"/>
+          </a:solidFill>
+          <a:ln/>
+        </p:spPr>
+      </p:sp>
+      <p:sp>
+        <p:nvSpPr>
+          <p:cNvPr id="36" name="Shape 34"/>
+          <p:cNvSpPr/>
+          <p:nvPr/>
+        </p:nvSpPr>
+        <p:spPr>
+          <a:xfrm>
+            <a:off x="5486400" y="5440680"/>
+            <a:ext cx="6080760" cy="457200"/>
+          </a:xfrm>
+          <a:prstGeom prst="roundRect">
+            <a:avLst>
+              <a:gd name="adj" fmla="val 18000"/>
+            </a:avLst>
+          </a:prstGeom>
+          <a:solidFill>
+            <a:srgbClr val="1F2C3A"/>
+          </a:solidFill>
+          <a:ln w="12700">
+            <a:solidFill>
+              <a:srgbClr val="2A3745"/>
+            </a:solidFill>
+            <a:prstDash val="solid"/>
+          </a:ln>
+          <a:effectLst>
+            <a:outerShdw sx="100000" sy="100000" kx="0" ky="0" algn="bl" rotWithShape="0" blurRad="114300" dist="38100" dir="5400000">
+              <a:srgbClr val="000000">
+                <a:alpha val="28000"/>
+              </a:srgbClr>
+            </a:outerShdw>
+          </a:effectLst>
+        </p:spPr>
+      </p:sp>
+      <p:sp>
+        <p:nvSpPr>
+          <p:cNvPr id="37" name="Text 35"/>
+          <p:cNvSpPr/>
+          <p:nvPr/>
+        </p:nvSpPr>
+        <p:spPr>
+          <a:xfrm>
+            <a:off x="5760720" y="5440680"/>
+            <a:ext cx="5623560" cy="457200"/>
+          </a:xfrm>
+          <a:prstGeom prst="rect">
+            <a:avLst/>
+          </a:prstGeom>
+          <a:noFill/>
+          <a:ln/>
+        </p:spPr>
+        <p:txBody>
+          <a:bodyPr wrap="square" lIns="0" tIns="0" rIns="0" bIns="0" rtlCol="0" anchor="ctr"/>
+          <a:lstStyle/>
+          <a:p>
+            <a:pPr indent="0" marL="0">
+              <a:buNone/>
+            </a:pPr>
+            <a:r>
+              <a:rPr lang="en-US" sz="1200" dirty="0">
+                <a:solidFill>
+                  <a:srgbClr val="E9EEF3"/>
+                </a:solidFill>
+                <a:latin typeface="Calibri" pitchFamily="34" charset="0"/>
+                <a:ea typeface="Calibri" pitchFamily="34" charset="-122"/>
+                <a:cs typeface="Calibri" pitchFamily="34" charset="-120"/>
+              </a:rPr>
               <a:t>Kafka streams / cloud storage via Auto Loader</a:t>
             </a:r>
+            <a:endParaRPr lang="en-US" sz="1200" dirty="0"/>
+          </a:p>
+        </p:txBody>
+      </p:sp>
+      <p:sp>
+        <p:nvSpPr>
+          <p:cNvPr id="38" name="Text 36"/>
+          <p:cNvSpPr/>
+          <p:nvPr/>
+        </p:nvSpPr>
+        <p:spPr>
+          <a:xfrm>
+            <a:off x="640080" y="6053328"/>
+            <a:ext cx="10881360" cy="274320"/>
+          </a:xfrm>
+          <a:prstGeom prst="rect">
+            <a:avLst/>
+          </a:prstGeom>
+          <a:noFill/>
+          <a:ln/>
+        </p:spPr>
+        <p:txBody>
+          <a:bodyPr wrap="square" lIns="0" tIns="0" rIns="0" bIns="0" rtlCol="0" anchor="ctr"/>
+          <a:lstStyle/>
+          <a:p>
+            <a:pPr indent="0" marL="0">
+              <a:buNone/>
+            </a:pPr>
+            <a:r>
+              <a:rPr lang="en-US" sz="1300" i="1" dirty="0">
+                <a:solidFill>
+                  <a:srgbClr val="93A1AF"/>
+                </a:solidFill>
+                <a:latin typeface="Calibri" pitchFamily="34" charset="0"/>
+                <a:ea typeface="Calibri" pitchFamily="34" charset="-122"/>
+                <a:cs typeface="Calibri" pitchFamily="34" charset="-120"/>
+              </a:rPr>
+              <a:t>Point DATABRICKS_HOST / DATABRICKS_TOKEN at a workspace and the same call path routes to the served model.</a:t>
+            </a:r>
             <a:endParaRPr lang="en-US" sz="1300" dirty="0"/>
           </a:p>
         </p:txBody>
       </p:sp>
       <p:sp>
         <p:nvSpPr>
-          <p:cNvPr id="33" name="Text 31"/>
-          <p:cNvSpPr/>
-          <p:nvPr/>
-        </p:nvSpPr>
-        <p:spPr>
-          <a:xfrm>
-            <a:off x="640080" y="6172200"/>
-            <a:ext cx="10881360" cy="365760"/>
-          </a:xfrm>
-          <a:prstGeom prst="rect">
-            <a:avLst/>
-          </a:prstGeom>
-          <a:noFill/>
-          <a:ln/>
-        </p:spPr>
-        <p:txBody>
-          <a:bodyPr wrap="square" lIns="0" tIns="0" rIns="0" bIns="0" rtlCol="0" anchor="ctr"/>
-          <a:lstStyle/>
-          <a:p>
-            <a:pPr indent="0" marL="0">
-              <a:buNone/>
-            </a:pPr>
-            <a:r>
-              <a:rPr lang="en-US" sz="1300" i="1" dirty="0">
-                <a:solidFill>
-                  <a:srgbClr val="93A1AF"/>
-                </a:solidFill>
-                <a:latin typeface="Calibri" pitchFamily="34" charset="0"/>
-                <a:ea typeface="Calibri" pitchFamily="34" charset="-122"/>
-                <a:cs typeface="Calibri" pitchFamily="34" charset="-120"/>
-              </a:rPr>
-              <a:t>Point DATABRICKS_HOST / DATABRICKS_TOKEN at a workspace and the same call path routes to the served model.</a:t>
-            </a:r>
-            <a:endParaRPr lang="en-US" sz="1300" dirty="0"/>
-          </a:p>
-        </p:txBody>
-      </p:sp>
-      <p:sp>
-        <p:nvSpPr>
-          <p:cNvPr id="34" name="Text 32"/>
+          <p:cNvPr id="39" name="Text 37"/>
           <p:cNvSpPr/>
           <p:nvPr/>
         </p:nvSpPr>
@@ -5276,7 +6109,7 @@
                 <a:ea typeface="Calibri" pitchFamily="34" charset="-122"/>
                 <a:cs typeface="Calibri" pitchFamily="34" charset="-120"/>
               </a:rPr>
-              <a:t>12</a:t>
+              <a:t>13</a:t>
             </a:r>
             <a:endParaRPr lang="en-US" sz="1000" dirty="0"/>
           </a:p>
@@ -5284,7 +6117,7 @@
       </p:sp>
       <p:sp>
         <p:nvSpPr>
-          <p:cNvPr id="35" name="Text 33"/>
+          <p:cNvPr id="40" name="Text 38"/>
           <p:cNvSpPr/>
           <p:nvPr/>
         </p:nvSpPr>
@@ -5329,9 +6162,9 @@
 </p:sld>
 </file>
 
-<file path=ppt/slides/slide13.xml><?xml version="1.0" encoding="utf-8"?>
+<file path=ppt/slides/slide14.xml><?xml version="1.0" encoding="utf-8"?>
 <p:sld xmlns:a="http://schemas.openxmlformats.org/drawingml/2006/main" xmlns:r="http://schemas.openxmlformats.org/officeDocument/2006/relationships" xmlns:p="http://schemas.openxmlformats.org/presentationml/2006/main">
-  <p:cSld name="Slide 13">
+  <p:cSld name="Slide 14">
     <p:bg>
       <p:bgPr>
         <a:solidFill>
@@ -5556,7 +6389,7 @@
                 <a:ea typeface="Calibri" pitchFamily="34" charset="-122"/>
                 <a:cs typeface="Calibri" pitchFamily="34" charset="-120"/>
               </a:rPr>
-              <a:t>IntelligenceStack proves it with running code — real answers, cited guidance, an enforced boundary, and a clean path to production.</a:t>
+              <a:t>IntelligenceStack proves it with running code — real answers, cited guidance, an enforced boundary, and a durable record of every decision.</a:t>
             </a:r>
             <a:endParaRPr lang="en-US" sz="1700" dirty="0"/>
           </a:p>
@@ -7575,7 +8408,7 @@
                 <a:ea typeface="Calibri" pitchFamily="34" charset="-122"/>
                 <a:cs typeface="Calibri" pitchFamily="34" charset="-120"/>
               </a:rPr>
-              <a:t>Compliance answer: here is the allowlist</a:t>
+              <a:t>Compliance answer: here is the evidence</a:t>
             </a:r>
             <a:endParaRPr lang="en-US" sz="1400" dirty="0"/>
           </a:p>
@@ -7861,7 +8694,7 @@
         <p:spPr>
           <a:xfrm>
             <a:off x="5760720" y="1828800"/>
-            <a:ext cx="365760" cy="365760"/>
+            <a:ext cx="329184" cy="329184"/>
           </a:xfrm>
           <a:prstGeom prst="ellipse">
             <a:avLst/>
@@ -7886,7 +8719,7 @@
         <p:spPr>
           <a:xfrm>
             <a:off x="5760720" y="1828800"/>
-            <a:ext cx="365760" cy="365760"/>
+            <a:ext cx="329184" cy="329184"/>
           </a:xfrm>
           <a:prstGeom prst="rect">
             <a:avLst/>
@@ -7902,7 +8735,7 @@
               <a:buNone/>
             </a:pPr>
             <a:r>
-              <a:rPr lang="en-US" sz="1500" b="1" dirty="0">
+              <a:rPr lang="en-US" sz="1400" b="1" dirty="0">
                 <a:solidFill>
                   <a:srgbClr val="FF8A3D"/>
                 </a:solidFill>
@@ -7912,7 +8745,7 @@
               </a:rPr>
               <a:t>1</a:t>
             </a:r>
-            <a:endParaRPr lang="en-US" sz="1500" dirty="0"/>
+            <a:endParaRPr lang="en-US" sz="1400" dirty="0"/>
           </a:p>
         </p:txBody>
       </p:sp>
@@ -7924,24 +8757,24 @@
         </p:nvSpPr>
         <p:spPr>
           <a:xfrm>
-            <a:off x="6291072" y="1755648"/>
-            <a:ext cx="5230368" cy="329184"/>
-          </a:xfrm>
-          <a:prstGeom prst="rect">
-            <a:avLst/>
-          </a:prstGeom>
-          <a:noFill/>
-          <a:ln/>
-        </p:spPr>
-        <p:txBody>
-          <a:bodyPr wrap="square" lIns="0" tIns="0" rIns="0" bIns="0" rtlCol="0" anchor="ctr"/>
-          <a:lstStyle/>
-          <a:p>
-            <a:pPr indent="0" marL="0">
-              <a:buNone/>
-            </a:pPr>
-            <a:r>
-              <a:rPr lang="en-US" sz="1500" b="1" dirty="0">
+            <a:off x="6236208" y="1764792"/>
+            <a:ext cx="5285232" cy="292608"/>
+          </a:xfrm>
+          <a:prstGeom prst="rect">
+            <a:avLst/>
+          </a:prstGeom>
+          <a:noFill/>
+          <a:ln/>
+        </p:spPr>
+        <p:txBody>
+          <a:bodyPr wrap="square" lIns="0" tIns="0" rIns="0" bIns="0" rtlCol="0" anchor="ctr"/>
+          <a:lstStyle/>
+          <a:p>
+            <a:pPr indent="0" marL="0">
+              <a:buNone/>
+            </a:pPr>
+            <a:r>
+              <a:rPr lang="en-US" sz="1400" b="1" dirty="0">
                 <a:solidFill>
                   <a:srgbClr val="E9EEF3"/>
                 </a:solidFill>
@@ -7951,7 +8784,7 @@
               </a:rPr>
               <a:t>Streaming ingestion</a:t>
             </a:r>
-            <a:endParaRPr lang="en-US" sz="1500" dirty="0"/>
+            <a:endParaRPr lang="en-US" sz="1400" dirty="0"/>
           </a:p>
         </p:txBody>
       </p:sp>
@@ -7963,8 +8796,8 @@
         </p:nvSpPr>
         <p:spPr>
           <a:xfrm>
-            <a:off x="6291072" y="2066544"/>
-            <a:ext cx="5230368" cy="640080"/>
+            <a:off x="6236208" y="2039112"/>
+            <a:ext cx="5285232" cy="530352"/>
           </a:xfrm>
           <a:prstGeom prst="rect">
             <a:avLst/>
@@ -7978,12 +8811,12 @@
           <a:p>
             <a:pPr indent="0" marL="0">
               <a:lnSpc>
-                <a:spcPct val="105000"/>
+                <a:spcPct val="102000"/>
               </a:lnSpc>
               <a:buNone/>
             </a:pPr>
             <a:r>
-              <a:rPr lang="en-US" sz="1150" dirty="0">
+              <a:rPr lang="en-US" sz="1050" dirty="0">
                 <a:solidFill>
                   <a:srgbClr val="93A1AF"/>
                 </a:solidFill>
@@ -7993,7 +8826,7 @@
               </a:rPr>
               <a:t>Auto Loader + Delta Live Tables land events through a bronze → silver → gold medallion, enforcing data quality and hashing PII on the way in.</a:t>
             </a:r>
-            <a:endParaRPr lang="en-US" sz="1150" dirty="0"/>
+            <a:endParaRPr lang="en-US" sz="1050" dirty="0"/>
           </a:p>
         </p:txBody>
       </p:sp>
@@ -8005,8 +8838,8 @@
         </p:nvSpPr>
         <p:spPr>
           <a:xfrm>
-            <a:off x="5760720" y="2715768"/>
-            <a:ext cx="365760" cy="365760"/>
+            <a:off x="5760720" y="2569464"/>
+            <a:ext cx="329184" cy="329184"/>
           </a:xfrm>
           <a:prstGeom prst="ellipse">
             <a:avLst/>
@@ -8030,8 +8863,8 @@
         </p:nvSpPr>
         <p:spPr>
           <a:xfrm>
-            <a:off x="5760720" y="2715768"/>
-            <a:ext cx="365760" cy="365760"/>
+            <a:off x="5760720" y="2569464"/>
+            <a:ext cx="329184" cy="329184"/>
           </a:xfrm>
           <a:prstGeom prst="rect">
             <a:avLst/>
@@ -8047,7 +8880,7 @@
               <a:buNone/>
             </a:pPr>
             <a:r>
-              <a:rPr lang="en-US" sz="1500" b="1" dirty="0">
+              <a:rPr lang="en-US" sz="1400" b="1" dirty="0">
                 <a:solidFill>
                   <a:srgbClr val="FF8A3D"/>
                 </a:solidFill>
@@ -8057,7 +8890,7 @@
               </a:rPr>
               <a:t>2</a:t>
             </a:r>
-            <a:endParaRPr lang="en-US" sz="1500" dirty="0"/>
+            <a:endParaRPr lang="en-US" sz="1400" dirty="0"/>
           </a:p>
         </p:txBody>
       </p:sp>
@@ -8069,24 +8902,24 @@
         </p:nvSpPr>
         <p:spPr>
           <a:xfrm>
-            <a:off x="6291072" y="2642616"/>
-            <a:ext cx="5230368" cy="329184"/>
-          </a:xfrm>
-          <a:prstGeom prst="rect">
-            <a:avLst/>
-          </a:prstGeom>
-          <a:noFill/>
-          <a:ln/>
-        </p:spPr>
-        <p:txBody>
-          <a:bodyPr wrap="square" lIns="0" tIns="0" rIns="0" bIns="0" rtlCol="0" anchor="ctr"/>
-          <a:lstStyle/>
-          <a:p>
-            <a:pPr indent="0" marL="0">
-              <a:buNone/>
-            </a:pPr>
-            <a:r>
-              <a:rPr lang="en-US" sz="1500" b="1" dirty="0">
+            <a:off x="6236208" y="2505456"/>
+            <a:ext cx="5285232" cy="292608"/>
+          </a:xfrm>
+          <a:prstGeom prst="rect">
+            <a:avLst/>
+          </a:prstGeom>
+          <a:noFill/>
+          <a:ln/>
+        </p:spPr>
+        <p:txBody>
+          <a:bodyPr wrap="square" lIns="0" tIns="0" rIns="0" bIns="0" rtlCol="0" anchor="ctr"/>
+          <a:lstStyle/>
+          <a:p>
+            <a:pPr indent="0" marL="0">
+              <a:buNone/>
+            </a:pPr>
+            <a:r>
+              <a:rPr lang="en-US" sz="1400" b="1" dirty="0">
                 <a:solidFill>
                   <a:srgbClr val="E9EEF3"/>
                 </a:solidFill>
@@ -8096,7 +8929,7 @@
               </a:rPr>
               <a:t>Governed gold layer</a:t>
             </a:r>
-            <a:endParaRPr lang="en-US" sz="1500" dirty="0"/>
+            <a:endParaRPr lang="en-US" sz="1400" dirty="0"/>
           </a:p>
         </p:txBody>
       </p:sp>
@@ -8108,8 +8941,8 @@
         </p:nvSpPr>
         <p:spPr>
           <a:xfrm>
-            <a:off x="6291072" y="2953512"/>
-            <a:ext cx="5230368" cy="640080"/>
+            <a:off x="6236208" y="2779776"/>
+            <a:ext cx="5285232" cy="530352"/>
           </a:xfrm>
           <a:prstGeom prst="rect">
             <a:avLst/>
@@ -8123,12 +8956,12 @@
           <a:p>
             <a:pPr indent="0" marL="0">
               <a:lnSpc>
-                <a:spcPct val="105000"/>
+                <a:spcPct val="102000"/>
               </a:lnSpc>
               <a:buNone/>
             </a:pPr>
             <a:r>
-              <a:rPr lang="en-US" sz="1150" dirty="0">
+              <a:rPr lang="en-US" sz="1050" dirty="0">
                 <a:solidFill>
                   <a:srgbClr val="93A1AF"/>
                 </a:solidFill>
@@ -8136,9 +8969,9 @@
                 <a:ea typeface="Calibri" pitchFamily="34" charset="-122"/>
                 <a:cs typeface="Calibri" pitchFamily="34" charset="-120"/>
               </a:rPr>
-              <a:t>Business-ready tables the agent reads. In the sandbox this is a real DuckDB engine; in production, a Serverless SQL Warehouse over Delta.</a:t>
-            </a:r>
-            <a:endParaRPr lang="en-US" sz="1150" dirty="0"/>
+              <a:t>Business-ready tables the agent reads. In the sandbox a real DuckDB engine; in production, a Serverless SQL Warehouse over Delta.</a:t>
+            </a:r>
+            <a:endParaRPr lang="en-US" sz="1050" dirty="0"/>
           </a:p>
         </p:txBody>
       </p:sp>
@@ -8150,8 +8983,8 @@
         </p:nvSpPr>
         <p:spPr>
           <a:xfrm>
-            <a:off x="5760720" y="3602736"/>
-            <a:ext cx="365760" cy="365760"/>
+            <a:off x="5760720" y="3310128"/>
+            <a:ext cx="329184" cy="329184"/>
           </a:xfrm>
           <a:prstGeom prst="ellipse">
             <a:avLst/>
@@ -8175,8 +9008,8 @@
         </p:nvSpPr>
         <p:spPr>
           <a:xfrm>
-            <a:off x="5760720" y="3602736"/>
-            <a:ext cx="365760" cy="365760"/>
+            <a:off x="5760720" y="3310128"/>
+            <a:ext cx="329184" cy="329184"/>
           </a:xfrm>
           <a:prstGeom prst="rect">
             <a:avLst/>
@@ -8192,7 +9025,7 @@
               <a:buNone/>
             </a:pPr>
             <a:r>
-              <a:rPr lang="en-US" sz="1500" b="1" dirty="0">
+              <a:rPr lang="en-US" sz="1400" b="1" dirty="0">
                 <a:solidFill>
                   <a:srgbClr val="FF8A3D"/>
                 </a:solidFill>
@@ -8202,7 +9035,7 @@
               </a:rPr>
               <a:t>3</a:t>
             </a:r>
-            <a:endParaRPr lang="en-US" sz="1500" dirty="0"/>
+            <a:endParaRPr lang="en-US" sz="1400" dirty="0"/>
           </a:p>
         </p:txBody>
       </p:sp>
@@ -8214,24 +9047,24 @@
         </p:nvSpPr>
         <p:spPr>
           <a:xfrm>
-            <a:off x="6291072" y="3529584"/>
-            <a:ext cx="5230368" cy="329184"/>
-          </a:xfrm>
-          <a:prstGeom prst="rect">
-            <a:avLst/>
-          </a:prstGeom>
-          <a:noFill/>
-          <a:ln/>
-        </p:spPr>
-        <p:txBody>
-          <a:bodyPr wrap="square" lIns="0" tIns="0" rIns="0" bIns="0" rtlCol="0" anchor="ctr"/>
-          <a:lstStyle/>
-          <a:p>
-            <a:pPr indent="0" marL="0">
-              <a:buNone/>
-            </a:pPr>
-            <a:r>
-              <a:rPr lang="en-US" sz="1500" b="1" dirty="0">
+            <a:off x="6236208" y="3246120"/>
+            <a:ext cx="5285232" cy="292608"/>
+          </a:xfrm>
+          <a:prstGeom prst="rect">
+            <a:avLst/>
+          </a:prstGeom>
+          <a:noFill/>
+          <a:ln/>
+        </p:spPr>
+        <p:txBody>
+          <a:bodyPr wrap="square" lIns="0" tIns="0" rIns="0" bIns="0" rtlCol="0" anchor="ctr"/>
+          <a:lstStyle/>
+          <a:p>
+            <a:pPr indent="0" marL="0">
+              <a:buNone/>
+            </a:pPr>
+            <a:r>
+              <a:rPr lang="en-US" sz="1400" b="1" dirty="0">
                 <a:solidFill>
                   <a:srgbClr val="E9EEF3"/>
                 </a:solidFill>
@@ -8241,7 +9074,7 @@
               </a:rPr>
               <a:t>Unity Catalog boundary</a:t>
             </a:r>
-            <a:endParaRPr lang="en-US" sz="1500" dirty="0"/>
+            <a:endParaRPr lang="en-US" sz="1400" dirty="0"/>
           </a:p>
         </p:txBody>
       </p:sp>
@@ -8253,8 +9086,8 @@
         </p:nvSpPr>
         <p:spPr>
           <a:xfrm>
-            <a:off x="6291072" y="3840480"/>
-            <a:ext cx="5230368" cy="640080"/>
+            <a:off x="6236208" y="3520440"/>
+            <a:ext cx="5285232" cy="530352"/>
           </a:xfrm>
           <a:prstGeom prst="rect">
             <a:avLst/>
@@ -8268,12 +9101,12 @@
           <a:p>
             <a:pPr indent="0" marL="0">
               <a:lnSpc>
-                <a:spcPct val="105000"/>
+                <a:spcPct val="102000"/>
               </a:lnSpc>
               <a:buNone/>
             </a:pPr>
             <a:r>
-              <a:rPr lang="en-US" sz="1150" dirty="0">
+              <a:rPr lang="en-US" sz="1050" dirty="0">
                 <a:solidFill>
                   <a:srgbClr val="93A1AF"/>
                 </a:solidFill>
@@ -8283,7 +9116,7 @@
               </a:rPr>
               <a:t>The agent is granted EXECUTE on a short allowlist of functions — never raw table access. Every call is checked before it runs.</a:t>
             </a:r>
-            <a:endParaRPr lang="en-US" sz="1150" dirty="0"/>
+            <a:endParaRPr lang="en-US" sz="1050" dirty="0"/>
           </a:p>
         </p:txBody>
       </p:sp>
@@ -8295,8 +9128,8 @@
         </p:nvSpPr>
         <p:spPr>
           <a:xfrm>
-            <a:off x="5760720" y="4489704"/>
-            <a:ext cx="365760" cy="365760"/>
+            <a:off x="5760720" y="4050792"/>
+            <a:ext cx="329184" cy="329184"/>
           </a:xfrm>
           <a:prstGeom prst="ellipse">
             <a:avLst/>
@@ -8320,8 +9153,8 @@
         </p:nvSpPr>
         <p:spPr>
           <a:xfrm>
-            <a:off x="5760720" y="4489704"/>
-            <a:ext cx="365760" cy="365760"/>
+            <a:off x="5760720" y="4050792"/>
+            <a:ext cx="329184" cy="329184"/>
           </a:xfrm>
           <a:prstGeom prst="rect">
             <a:avLst/>
@@ -8337,7 +9170,7 @@
               <a:buNone/>
             </a:pPr>
             <a:r>
-              <a:rPr lang="en-US" sz="1500" b="1" dirty="0">
+              <a:rPr lang="en-US" sz="1400" b="1" dirty="0">
                 <a:solidFill>
                   <a:srgbClr val="FF8A3D"/>
                 </a:solidFill>
@@ -8347,7 +9180,7 @@
               </a:rPr>
               <a:t>4</a:t>
             </a:r>
-            <a:endParaRPr lang="en-US" sz="1500" dirty="0"/>
+            <a:endParaRPr lang="en-US" sz="1400" dirty="0"/>
           </a:p>
         </p:txBody>
       </p:sp>
@@ -8359,24 +9192,24 @@
         </p:nvSpPr>
         <p:spPr>
           <a:xfrm>
-            <a:off x="6291072" y="4416552"/>
-            <a:ext cx="5230368" cy="329184"/>
-          </a:xfrm>
-          <a:prstGeom prst="rect">
-            <a:avLst/>
-          </a:prstGeom>
-          <a:noFill/>
-          <a:ln/>
-        </p:spPr>
-        <p:txBody>
-          <a:bodyPr wrap="square" lIns="0" tIns="0" rIns="0" bIns="0" rtlCol="0" anchor="ctr"/>
-          <a:lstStyle/>
-          <a:p>
-            <a:pPr indent="0" marL="0">
-              <a:buNone/>
-            </a:pPr>
-            <a:r>
-              <a:rPr lang="en-US" sz="1500" b="1" dirty="0">
+            <a:off x="6236208" y="3986784"/>
+            <a:ext cx="5285232" cy="292608"/>
+          </a:xfrm>
+          <a:prstGeom prst="rect">
+            <a:avLst/>
+          </a:prstGeom>
+          <a:noFill/>
+          <a:ln/>
+        </p:spPr>
+        <p:txBody>
+          <a:bodyPr wrap="square" lIns="0" tIns="0" rIns="0" bIns="0" rtlCol="0" anchor="ctr"/>
+          <a:lstStyle/>
+          <a:p>
+            <a:pPr indent="0" marL="0">
+              <a:buNone/>
+            </a:pPr>
+            <a:r>
+              <a:rPr lang="en-US" sz="1400" b="1" dirty="0">
                 <a:solidFill>
                   <a:srgbClr val="E9EEF3"/>
                 </a:solidFill>
@@ -8386,7 +9219,7 @@
               </a:rPr>
               <a:t>Mosaic AI Vector Search</a:t>
             </a:r>
-            <a:endParaRPr lang="en-US" sz="1500" dirty="0"/>
+            <a:endParaRPr lang="en-US" sz="1400" dirty="0"/>
           </a:p>
         </p:txBody>
       </p:sp>
@@ -8398,8 +9231,8 @@
         </p:nvSpPr>
         <p:spPr>
           <a:xfrm>
-            <a:off x="6291072" y="4727448"/>
-            <a:ext cx="5230368" cy="640080"/>
+            <a:off x="6236208" y="4261104"/>
+            <a:ext cx="5285232" cy="530352"/>
           </a:xfrm>
           <a:prstGeom prst="rect">
             <a:avLst/>
@@ -8413,12 +9246,12 @@
           <a:p>
             <a:pPr indent="0" marL="0">
               <a:lnSpc>
-                <a:spcPct val="105000"/>
+                <a:spcPct val="102000"/>
               </a:lnSpc>
               <a:buNone/>
             </a:pPr>
             <a:r>
-              <a:rPr lang="en-US" sz="1150" dirty="0">
+              <a:rPr lang="en-US" sz="1050" dirty="0">
                 <a:solidFill>
                   <a:srgbClr val="93A1AF"/>
                 </a:solidFill>
@@ -8426,9 +9259,9 @@
                 <a:ea typeface="Calibri" pitchFamily="34" charset="-122"/>
                 <a:cs typeface="Calibri" pitchFamily="34" charset="-120"/>
               </a:rPr>
-              <a:t>A governed index over enterprise runbooks and policies, so the agent can ground answers in documented knowledge as well as live metrics.</a:t>
-            </a:r>
-            <a:endParaRPr lang="en-US" sz="1150" dirty="0"/>
+              <a:t>A governed index over enterprise runbooks and policies, so answers can be grounded in documented knowledge as well as live metrics.</a:t>
+            </a:r>
+            <a:endParaRPr lang="en-US" sz="1050" dirty="0"/>
           </a:p>
         </p:txBody>
       </p:sp>
@@ -8440,8 +9273,8 @@
         </p:nvSpPr>
         <p:spPr>
           <a:xfrm>
-            <a:off x="5760720" y="5376672"/>
-            <a:ext cx="365760" cy="365760"/>
+            <a:off x="5760720" y="4791456"/>
+            <a:ext cx="329184" cy="329184"/>
           </a:xfrm>
           <a:prstGeom prst="ellipse">
             <a:avLst/>
@@ -8465,8 +9298,8 @@
         </p:nvSpPr>
         <p:spPr>
           <a:xfrm>
-            <a:off x="5760720" y="5376672"/>
-            <a:ext cx="365760" cy="365760"/>
+            <a:off x="5760720" y="4791456"/>
+            <a:ext cx="329184" cy="329184"/>
           </a:xfrm>
           <a:prstGeom prst="rect">
             <a:avLst/>
@@ -8482,7 +9315,7 @@
               <a:buNone/>
             </a:pPr>
             <a:r>
-              <a:rPr lang="en-US" sz="1500" b="1" dirty="0">
+              <a:rPr lang="en-US" sz="1400" b="1" dirty="0">
                 <a:solidFill>
                   <a:srgbClr val="FF8A3D"/>
                 </a:solidFill>
@@ -8492,7 +9325,7 @@
               </a:rPr>
               <a:t>5</a:t>
             </a:r>
-            <a:endParaRPr lang="en-US" sz="1500" dirty="0"/>
+            <a:endParaRPr lang="en-US" sz="1400" dirty="0"/>
           </a:p>
         </p:txBody>
       </p:sp>
@@ -8504,24 +9337,24 @@
         </p:nvSpPr>
         <p:spPr>
           <a:xfrm>
-            <a:off x="6291072" y="5303520"/>
-            <a:ext cx="5230368" cy="329184"/>
-          </a:xfrm>
-          <a:prstGeom prst="rect">
-            <a:avLst/>
-          </a:prstGeom>
-          <a:noFill/>
-          <a:ln/>
-        </p:spPr>
-        <p:txBody>
-          <a:bodyPr wrap="square" lIns="0" tIns="0" rIns="0" bIns="0" rtlCol="0" anchor="ctr"/>
-          <a:lstStyle/>
-          <a:p>
-            <a:pPr indent="0" marL="0">
-              <a:buNone/>
-            </a:pPr>
-            <a:r>
-              <a:rPr lang="en-US" sz="1500" b="1" dirty="0">
+            <a:off x="6236208" y="4727448"/>
+            <a:ext cx="5285232" cy="292608"/>
+          </a:xfrm>
+          <a:prstGeom prst="rect">
+            <a:avLst/>
+          </a:prstGeom>
+          <a:noFill/>
+          <a:ln/>
+        </p:spPr>
+        <p:txBody>
+          <a:bodyPr wrap="square" lIns="0" tIns="0" rIns="0" bIns="0" rtlCol="0" anchor="ctr"/>
+          <a:lstStyle/>
+          <a:p>
+            <a:pPr indent="0" marL="0">
+              <a:buNone/>
+            </a:pPr>
+            <a:r>
+              <a:rPr lang="en-US" sz="1400" b="1" dirty="0">
                 <a:solidFill>
                   <a:srgbClr val="E9EEF3"/>
                 </a:solidFill>
@@ -8529,22 +9362,167 @@
                 <a:ea typeface="Calibri" pitchFamily="34" charset="-122"/>
                 <a:cs typeface="Calibri" pitchFamily="34" charset="-120"/>
               </a:rPr>
+              <a:t>Audit trail</a:t>
+            </a:r>
+            <a:endParaRPr lang="en-US" sz="1400" dirty="0"/>
+          </a:p>
+        </p:txBody>
+      </p:sp>
+      <p:sp>
+        <p:nvSpPr>
+          <p:cNvPr id="25" name="Text 22"/>
+          <p:cNvSpPr/>
+          <p:nvPr/>
+        </p:nvSpPr>
+        <p:spPr>
+          <a:xfrm>
+            <a:off x="6236208" y="5001768"/>
+            <a:ext cx="5285232" cy="530352"/>
+          </a:xfrm>
+          <a:prstGeom prst="rect">
+            <a:avLst/>
+          </a:prstGeom>
+          <a:noFill/>
+          <a:ln/>
+        </p:spPr>
+        <p:txBody>
+          <a:bodyPr wrap="square" lIns="0" tIns="0" rIns="0" bIns="0" rtlCol="0" anchor="ctr"/>
+          <a:lstStyle/>
+          <a:p>
+            <a:pPr indent="0" marL="0">
+              <a:lnSpc>
+                <a:spcPct val="102000"/>
+              </a:lnSpc>
+              <a:buNone/>
+            </a:pPr>
+            <a:r>
+              <a:rPr lang="en-US" sz="1050" dirty="0">
+                <a:solidFill>
+                  <a:srgbClr val="93A1AF"/>
+                </a:solidFill>
+                <a:latin typeface="Calibri" pitchFamily="34" charset="0"/>
+                <a:ea typeface="Calibri" pitchFamily="34" charset="-122"/>
+                <a:cs typeface="Calibri" pitchFamily="34" charset="-120"/>
+              </a:rPr>
+              <a:t>Every decision — granted or refused — is appended to a durable record, making the boundary provable after the fact, not just at request time.</a:t>
+            </a:r>
+            <a:endParaRPr lang="en-US" sz="1050" dirty="0"/>
+          </a:p>
+        </p:txBody>
+      </p:sp>
+      <p:sp>
+        <p:nvSpPr>
+          <p:cNvPr id="26" name="Shape 23"/>
+          <p:cNvSpPr/>
+          <p:nvPr/>
+        </p:nvSpPr>
+        <p:spPr>
+          <a:xfrm>
+            <a:off x="5760720" y="5532120"/>
+            <a:ext cx="329184" cy="329184"/>
+          </a:xfrm>
+          <a:prstGeom prst="ellipse">
+            <a:avLst/>
+          </a:prstGeom>
+          <a:solidFill>
+            <a:srgbClr val="2A1B12"/>
+          </a:solidFill>
+          <a:ln w="15240">
+            <a:solidFill>
+              <a:srgbClr val="FF6C00"/>
+            </a:solidFill>
+            <a:prstDash val="solid"/>
+          </a:ln>
+        </p:spPr>
+      </p:sp>
+      <p:sp>
+        <p:nvSpPr>
+          <p:cNvPr id="27" name="Text 24"/>
+          <p:cNvSpPr/>
+          <p:nvPr/>
+        </p:nvSpPr>
+        <p:spPr>
+          <a:xfrm>
+            <a:off x="5760720" y="5532120"/>
+            <a:ext cx="329184" cy="329184"/>
+          </a:xfrm>
+          <a:prstGeom prst="rect">
+            <a:avLst/>
+          </a:prstGeom>
+          <a:noFill/>
+          <a:ln/>
+        </p:spPr>
+        <p:txBody>
+          <a:bodyPr wrap="square" lIns="0" tIns="0" rIns="0" bIns="0" rtlCol="0" anchor="ctr"/>
+          <a:lstStyle/>
+          <a:p>
+            <a:pPr algn="ctr" indent="0" marL="0">
+              <a:buNone/>
+            </a:pPr>
+            <a:r>
+              <a:rPr lang="en-US" sz="1400" b="1" dirty="0">
+                <a:solidFill>
+                  <a:srgbClr val="FF8A3D"/>
+                </a:solidFill>
+                <a:latin typeface="Cambria" pitchFamily="34" charset="0"/>
+                <a:ea typeface="Cambria" pitchFamily="34" charset="-122"/>
+                <a:cs typeface="Cambria" pitchFamily="34" charset="-120"/>
+              </a:rPr>
+              <a:t>6</a:t>
+            </a:r>
+            <a:endParaRPr lang="en-US" sz="1400" dirty="0"/>
+          </a:p>
+        </p:txBody>
+      </p:sp>
+      <p:sp>
+        <p:nvSpPr>
+          <p:cNvPr id="28" name="Text 25"/>
+          <p:cNvSpPr/>
+          <p:nvPr/>
+        </p:nvSpPr>
+        <p:spPr>
+          <a:xfrm>
+            <a:off x="6236208" y="5468112"/>
+            <a:ext cx="5285232" cy="292608"/>
+          </a:xfrm>
+          <a:prstGeom prst="rect">
+            <a:avLst/>
+          </a:prstGeom>
+          <a:noFill/>
+          <a:ln/>
+        </p:spPr>
+        <p:txBody>
+          <a:bodyPr wrap="square" lIns="0" tIns="0" rIns="0" bIns="0" rtlCol="0" anchor="ctr"/>
+          <a:lstStyle/>
+          <a:p>
+            <a:pPr indent="0" marL="0">
+              <a:buNone/>
+            </a:pPr>
+            <a:r>
+              <a:rPr lang="en-US" sz="1400" b="1" dirty="0">
+                <a:solidFill>
+                  <a:srgbClr val="E9EEF3"/>
+                </a:solidFill>
+                <a:latin typeface="Calibri" pitchFamily="34" charset="0"/>
+                <a:ea typeface="Calibri" pitchFamily="34" charset="-122"/>
+                <a:cs typeface="Calibri" pitchFamily="34" charset="-120"/>
+              </a:rPr>
               <a:t>Cognitive agent + serving</a:t>
             </a:r>
-            <a:endParaRPr lang="en-US" sz="1500" dirty="0"/>
-          </a:p>
-        </p:txBody>
-      </p:sp>
-      <p:sp>
-        <p:nvSpPr>
-          <p:cNvPr id="25" name="Text 22"/>
-          <p:cNvSpPr/>
-          <p:nvPr/>
-        </p:nvSpPr>
-        <p:spPr>
-          <a:xfrm>
-            <a:off x="6291072" y="5614416"/>
-            <a:ext cx="5230368" cy="640080"/>
+            <a:endParaRPr lang="en-US" sz="1400" dirty="0"/>
+          </a:p>
+        </p:txBody>
+      </p:sp>
+      <p:sp>
+        <p:nvSpPr>
+          <p:cNvPr id="29" name="Text 26"/>
+          <p:cNvSpPr/>
+          <p:nvPr/>
+        </p:nvSpPr>
+        <p:spPr>
+          <a:xfrm>
+            <a:off x="6236208" y="5742432"/>
+            <a:ext cx="5285232" cy="530352"/>
           </a:xfrm>
           <a:prstGeom prst="rect">
             <a:avLst/>
@@ -8558,12 +9536,12 @@
           <a:p>
             <a:pPr indent="0" marL="0">
               <a:lnSpc>
-                <a:spcPct val="105000"/>
+                <a:spcPct val="102000"/>
               </a:lnSpc>
               <a:buNone/>
             </a:pPr>
             <a:r>
-              <a:rPr lang="en-US" sz="1150" dirty="0">
+              <a:rPr lang="en-US" sz="1050" dirty="0">
                 <a:solidFill>
                   <a:srgbClr val="93A1AF"/>
                 </a:solidFill>
@@ -8573,13 +9551,13 @@
               </a:rPr>
               <a:t>Model Serving resolves plain-English intent into approved function calls, then grounds the answer in what those calls returned.</a:t>
             </a:r>
-            <a:endParaRPr lang="en-US" sz="1150" dirty="0"/>
-          </a:p>
-        </p:txBody>
-      </p:sp>
-      <p:sp>
-        <p:nvSpPr>
-          <p:cNvPr id="26" name="Text 23"/>
+            <a:endParaRPr lang="en-US" sz="1050" dirty="0"/>
+          </a:p>
+        </p:txBody>
+      </p:sp>
+      <p:sp>
+        <p:nvSpPr>
+          <p:cNvPr id="30" name="Text 27"/>
           <p:cNvSpPr/>
           <p:nvPr/>
         </p:nvSpPr>
@@ -8618,7 +9596,7 @@
       </p:sp>
       <p:sp>
         <p:nvSpPr>
-          <p:cNvPr id="27" name="Text 24"/>
+          <p:cNvPr id="31" name="Text 28"/>
           <p:cNvSpPr/>
           <p:nvPr/>
         </p:nvSpPr>
@@ -8779,7 +9757,7 @@
                 <a:ea typeface="Cambria" pitchFamily="34" charset="-122"/>
                 <a:cs typeface="Cambria" pitchFamily="34" charset="-120"/>
               </a:rPr>
-              <a:t>Five moves, two minutes</a:t>
+              <a:t>Five moves, then the receipts</a:t>
             </a:r>
             <a:endParaRPr lang="en-US" sz="3200" dirty="0"/>
           </a:p>
@@ -8818,7 +9796,7 @@
                 <a:ea typeface="Calibri" pitchFamily="34" charset="-122"/>
                 <a:cs typeface="Calibri" pitchFamily="34" charset="-120"/>
               </a:rPr>
-              <a:t>The same interface throughout. The first two show value; the last three show why you can trust it in production.</a:t>
+              <a:t>The same interface throughout. The first two show value; the next three show why you can trust it — and the Trust Center proves all five happened.</a:t>
             </a:r>
             <a:endParaRPr lang="en-US" sz="1600" dirty="0"/>
           </a:p>
@@ -8833,11 +9811,11 @@
         <p:spPr>
           <a:xfrm>
             <a:off x="640080" y="2395728"/>
-            <a:ext cx="10927080" cy="694944"/>
+            <a:ext cx="10927080" cy="640080"/>
           </a:xfrm>
           <a:prstGeom prst="roundRect">
             <a:avLst>
-              <a:gd name="adj" fmla="val 11842"/>
+              <a:gd name="adj" fmla="val 12857"/>
             </a:avLst>
           </a:prstGeom>
           <a:solidFill>
@@ -8866,8 +9844,8 @@
         </p:nvSpPr>
         <p:spPr>
           <a:xfrm>
-            <a:off x="877824" y="2569464"/>
-            <a:ext cx="384048" cy="384048"/>
+            <a:off x="877824" y="2532888"/>
+            <a:ext cx="365760" cy="365760"/>
           </a:xfrm>
           <a:prstGeom prst="ellipse">
             <a:avLst/>
@@ -8886,8 +9864,8 @@
         </p:nvSpPr>
         <p:spPr>
           <a:xfrm>
-            <a:off x="877824" y="2569464"/>
-            <a:ext cx="384048" cy="384048"/>
+            <a:off x="877824" y="2532888"/>
+            <a:ext cx="365760" cy="365760"/>
           </a:xfrm>
           <a:prstGeom prst="rect">
             <a:avLst/>
@@ -8903,7 +9881,7 @@
               <a:buNone/>
             </a:pPr>
             <a:r>
-              <a:rPr lang="en-US" sz="1700" b="1" dirty="0">
+              <a:rPr lang="en-US" sz="1600" b="1" dirty="0">
                 <a:solidFill>
                   <a:srgbClr val="0B121B"/>
                 </a:solidFill>
@@ -8913,7 +9891,7 @@
               </a:rPr>
               <a:t>1</a:t>
             </a:r>
-            <a:endParaRPr lang="en-US" sz="1700" dirty="0"/>
+            <a:endParaRPr lang="en-US" sz="1600" dirty="0"/>
           </a:p>
         </p:txBody>
       </p:sp>
@@ -8925,8 +9903,8 @@
         </p:nvSpPr>
         <p:spPr>
           <a:xfrm>
-            <a:off x="1417320" y="2395728"/>
-            <a:ext cx="2286000" cy="694944"/>
+            <a:off x="1399032" y="2395728"/>
+            <a:ext cx="2286000" cy="640080"/>
           </a:xfrm>
           <a:prstGeom prst="rect">
             <a:avLst/>
@@ -8965,7 +9943,7 @@
         <p:spPr>
           <a:xfrm>
             <a:off x="3794760" y="2395728"/>
-            <a:ext cx="3749040" cy="694944"/>
+            <a:ext cx="3749040" cy="640080"/>
           </a:xfrm>
           <a:prstGeom prst="rect">
             <a:avLst/>
@@ -9004,7 +9982,7 @@
         <p:spPr>
           <a:xfrm>
             <a:off x="7680960" y="2395728"/>
-            <a:ext cx="3657600" cy="694944"/>
+            <a:ext cx="3657600" cy="640080"/>
           </a:xfrm>
           <a:prstGeom prst="rect">
             <a:avLst/>
@@ -9045,12 +10023,12 @@
         </p:nvSpPr>
         <p:spPr>
           <a:xfrm>
-            <a:off x="640080" y="3182112"/>
-            <a:ext cx="10927080" cy="694944"/>
+            <a:off x="640080" y="3108960"/>
+            <a:ext cx="10927080" cy="640080"/>
           </a:xfrm>
           <a:prstGeom prst="roundRect">
             <a:avLst>
-              <a:gd name="adj" fmla="val 11842"/>
+              <a:gd name="adj" fmla="val 12857"/>
             </a:avLst>
           </a:prstGeom>
           <a:solidFill>
@@ -9079,8 +10057,8 @@
         </p:nvSpPr>
         <p:spPr>
           <a:xfrm>
-            <a:off x="877824" y="3355848"/>
-            <a:ext cx="384048" cy="384048"/>
+            <a:off x="877824" y="3246120"/>
+            <a:ext cx="365760" cy="365760"/>
           </a:xfrm>
           <a:prstGeom prst="ellipse">
             <a:avLst/>
@@ -9099,8 +10077,8 @@
         </p:nvSpPr>
         <p:spPr>
           <a:xfrm>
-            <a:off x="877824" y="3355848"/>
-            <a:ext cx="384048" cy="384048"/>
+            <a:off x="877824" y="3246120"/>
+            <a:ext cx="365760" cy="365760"/>
           </a:xfrm>
           <a:prstGeom prst="rect">
             <a:avLst/>
@@ -9116,7 +10094,7 @@
               <a:buNone/>
             </a:pPr>
             <a:r>
-              <a:rPr lang="en-US" sz="1700" b="1" dirty="0">
+              <a:rPr lang="en-US" sz="1600" b="1" dirty="0">
                 <a:solidFill>
                   <a:srgbClr val="0B121B"/>
                 </a:solidFill>
@@ -9126,7 +10104,7 @@
               </a:rPr>
               <a:t>2</a:t>
             </a:r>
-            <a:endParaRPr lang="en-US" sz="1700" dirty="0"/>
+            <a:endParaRPr lang="en-US" sz="1600" dirty="0"/>
           </a:p>
         </p:txBody>
       </p:sp>
@@ -9138,8 +10116,8 @@
         </p:nvSpPr>
         <p:spPr>
           <a:xfrm>
-            <a:off x="1417320" y="3182112"/>
-            <a:ext cx="2286000" cy="694944"/>
+            <a:off x="1399032" y="3108960"/>
+            <a:ext cx="2286000" cy="640080"/>
           </a:xfrm>
           <a:prstGeom prst="rect">
             <a:avLst/>
@@ -9177,8 +10155,8 @@
         </p:nvSpPr>
         <p:spPr>
           <a:xfrm>
-            <a:off x="3794760" y="3182112"/>
-            <a:ext cx="3749040" cy="694944"/>
+            <a:off x="3794760" y="3108960"/>
+            <a:ext cx="3749040" cy="640080"/>
           </a:xfrm>
           <a:prstGeom prst="rect">
             <a:avLst/>
@@ -9216,8 +10194,8 @@
         </p:nvSpPr>
         <p:spPr>
           <a:xfrm>
-            <a:off x="7680960" y="3182112"/>
-            <a:ext cx="3657600" cy="694944"/>
+            <a:off x="7680960" y="3108960"/>
+            <a:ext cx="3657600" cy="640080"/>
           </a:xfrm>
           <a:prstGeom prst="rect">
             <a:avLst/>
@@ -9258,12 +10236,12 @@
         </p:nvSpPr>
         <p:spPr>
           <a:xfrm>
-            <a:off x="640080" y="3968496"/>
-            <a:ext cx="10927080" cy="694944"/>
+            <a:off x="640080" y="3822192"/>
+            <a:ext cx="10927080" cy="640080"/>
           </a:xfrm>
           <a:prstGeom prst="roundRect">
             <a:avLst>
-              <a:gd name="adj" fmla="val 11842"/>
+              <a:gd name="adj" fmla="val 12857"/>
             </a:avLst>
           </a:prstGeom>
           <a:solidFill>
@@ -9292,8 +10270,8 @@
         </p:nvSpPr>
         <p:spPr>
           <a:xfrm>
-            <a:off x="877824" y="4142232"/>
-            <a:ext cx="384048" cy="384048"/>
+            <a:off x="877824" y="3959352"/>
+            <a:ext cx="365760" cy="365760"/>
           </a:xfrm>
           <a:prstGeom prst="ellipse">
             <a:avLst/>
@@ -9312,8 +10290,8 @@
         </p:nvSpPr>
         <p:spPr>
           <a:xfrm>
-            <a:off x="877824" y="4142232"/>
-            <a:ext cx="384048" cy="384048"/>
+            <a:off x="877824" y="3959352"/>
+            <a:ext cx="365760" cy="365760"/>
           </a:xfrm>
           <a:prstGeom prst="rect">
             <a:avLst/>
@@ -9329,7 +10307,7 @@
               <a:buNone/>
             </a:pPr>
             <a:r>
-              <a:rPr lang="en-US" sz="1700" b="1" dirty="0">
+              <a:rPr lang="en-US" sz="1600" b="1" dirty="0">
                 <a:solidFill>
                   <a:srgbClr val="0B121B"/>
                 </a:solidFill>
@@ -9339,7 +10317,7 @@
               </a:rPr>
               <a:t>3</a:t>
             </a:r>
-            <a:endParaRPr lang="en-US" sz="1700" dirty="0"/>
+            <a:endParaRPr lang="en-US" sz="1600" dirty="0"/>
           </a:p>
         </p:txBody>
       </p:sp>
@@ -9351,8 +10329,8 @@
         </p:nvSpPr>
         <p:spPr>
           <a:xfrm>
-            <a:off x="1417320" y="3968496"/>
-            <a:ext cx="2286000" cy="694944"/>
+            <a:off x="1399032" y="3822192"/>
+            <a:ext cx="2286000" cy="640080"/>
           </a:xfrm>
           <a:prstGeom prst="rect">
             <a:avLst/>
@@ -9390,8 +10368,8 @@
         </p:nvSpPr>
         <p:spPr>
           <a:xfrm>
-            <a:off x="3794760" y="3968496"/>
-            <a:ext cx="3749040" cy="694944"/>
+            <a:off x="3794760" y="3822192"/>
+            <a:ext cx="3749040" cy="640080"/>
           </a:xfrm>
           <a:prstGeom prst="rect">
             <a:avLst/>
@@ -9429,8 +10407,8 @@
         </p:nvSpPr>
         <p:spPr>
           <a:xfrm>
-            <a:off x="7680960" y="3968496"/>
-            <a:ext cx="3657600" cy="694944"/>
+            <a:off x="7680960" y="3822192"/>
+            <a:ext cx="3657600" cy="640080"/>
           </a:xfrm>
           <a:prstGeom prst="rect">
             <a:avLst/>
@@ -9471,12 +10449,12 @@
         </p:nvSpPr>
         <p:spPr>
           <a:xfrm>
-            <a:off x="640080" y="4754880"/>
-            <a:ext cx="10927080" cy="694944"/>
+            <a:off x="640080" y="4535424"/>
+            <a:ext cx="10927080" cy="640080"/>
           </a:xfrm>
           <a:prstGeom prst="roundRect">
             <a:avLst>
-              <a:gd name="adj" fmla="val 11842"/>
+              <a:gd name="adj" fmla="val 12857"/>
             </a:avLst>
           </a:prstGeom>
           <a:solidFill>
@@ -9505,8 +10483,8 @@
         </p:nvSpPr>
         <p:spPr>
           <a:xfrm>
-            <a:off x="877824" y="4928616"/>
-            <a:ext cx="384048" cy="384048"/>
+            <a:off x="877824" y="4672584"/>
+            <a:ext cx="365760" cy="365760"/>
           </a:xfrm>
           <a:prstGeom prst="ellipse">
             <a:avLst/>
@@ -9525,8 +10503,8 @@
         </p:nvSpPr>
         <p:spPr>
           <a:xfrm>
-            <a:off x="877824" y="4928616"/>
-            <a:ext cx="384048" cy="384048"/>
+            <a:off x="877824" y="4672584"/>
+            <a:ext cx="365760" cy="365760"/>
           </a:xfrm>
           <a:prstGeom prst="rect">
             <a:avLst/>
@@ -9542,7 +10520,7 @@
               <a:buNone/>
             </a:pPr>
             <a:r>
-              <a:rPr lang="en-US" sz="1700" b="1" dirty="0">
+              <a:rPr lang="en-US" sz="1600" b="1" dirty="0">
                 <a:solidFill>
                   <a:srgbClr val="0B121B"/>
                 </a:solidFill>
@@ -9552,7 +10530,7 @@
               </a:rPr>
               <a:t>4</a:t>
             </a:r>
-            <a:endParaRPr lang="en-US" sz="1700" dirty="0"/>
+            <a:endParaRPr lang="en-US" sz="1600" dirty="0"/>
           </a:p>
         </p:txBody>
       </p:sp>
@@ -9564,8 +10542,8 @@
         </p:nvSpPr>
         <p:spPr>
           <a:xfrm>
-            <a:off x="1417320" y="4754880"/>
-            <a:ext cx="2286000" cy="694944"/>
+            <a:off x="1399032" y="4535424"/>
+            <a:ext cx="2286000" cy="640080"/>
           </a:xfrm>
           <a:prstGeom prst="rect">
             <a:avLst/>
@@ -9603,8 +10581,8 @@
         </p:nvSpPr>
         <p:spPr>
           <a:xfrm>
-            <a:off x="3794760" y="4754880"/>
-            <a:ext cx="3749040" cy="694944"/>
+            <a:off x="3794760" y="4535424"/>
+            <a:ext cx="3749040" cy="640080"/>
           </a:xfrm>
           <a:prstGeom prst="rect">
             <a:avLst/>
@@ -9642,8 +10620,8 @@
         </p:nvSpPr>
         <p:spPr>
           <a:xfrm>
-            <a:off x="7680960" y="4754880"/>
-            <a:ext cx="3657600" cy="694944"/>
+            <a:off x="7680960" y="4535424"/>
+            <a:ext cx="3657600" cy="640080"/>
           </a:xfrm>
           <a:prstGeom prst="rect">
             <a:avLst/>
@@ -9684,12 +10662,12 @@
         </p:nvSpPr>
         <p:spPr>
           <a:xfrm>
-            <a:off x="640080" y="5541264"/>
-            <a:ext cx="10927080" cy="694944"/>
+            <a:off x="640080" y="5248656"/>
+            <a:ext cx="10927080" cy="640080"/>
           </a:xfrm>
           <a:prstGeom prst="roundRect">
             <a:avLst>
-              <a:gd name="adj" fmla="val 11842"/>
+              <a:gd name="adj" fmla="val 12857"/>
             </a:avLst>
           </a:prstGeom>
           <a:solidFill>
@@ -9718,8 +10696,8 @@
         </p:nvSpPr>
         <p:spPr>
           <a:xfrm>
-            <a:off x="877824" y="5715000"/>
-            <a:ext cx="384048" cy="384048"/>
+            <a:off x="877824" y="5385816"/>
+            <a:ext cx="365760" cy="365760"/>
           </a:xfrm>
           <a:prstGeom prst="ellipse">
             <a:avLst/>
@@ -9738,8 +10716,8 @@
         </p:nvSpPr>
         <p:spPr>
           <a:xfrm>
-            <a:off x="877824" y="5715000"/>
-            <a:ext cx="384048" cy="384048"/>
+            <a:off x="877824" y="5385816"/>
+            <a:ext cx="365760" cy="365760"/>
           </a:xfrm>
           <a:prstGeom prst="rect">
             <a:avLst/>
@@ -9755,7 +10733,7 @@
               <a:buNone/>
             </a:pPr>
             <a:r>
-              <a:rPr lang="en-US" sz="1700" b="1" dirty="0">
+              <a:rPr lang="en-US" sz="1600" b="1" dirty="0">
                 <a:solidFill>
                   <a:srgbClr val="0B121B"/>
                 </a:solidFill>
@@ -9765,7 +10743,7 @@
               </a:rPr>
               <a:t>5</a:t>
             </a:r>
-            <a:endParaRPr lang="en-US" sz="1700" dirty="0"/>
+            <a:endParaRPr lang="en-US" sz="1600" dirty="0"/>
           </a:p>
         </p:txBody>
       </p:sp>
@@ -9777,8 +10755,8 @@
         </p:nvSpPr>
         <p:spPr>
           <a:xfrm>
-            <a:off x="1417320" y="5541264"/>
-            <a:ext cx="2286000" cy="694944"/>
+            <a:off x="1399032" y="5248656"/>
+            <a:ext cx="2286000" cy="640080"/>
           </a:xfrm>
           <a:prstGeom prst="rect">
             <a:avLst/>
@@ -9816,8 +10794,8 @@
         </p:nvSpPr>
         <p:spPr>
           <a:xfrm>
-            <a:off x="3794760" y="5541264"/>
-            <a:ext cx="3749040" cy="694944"/>
+            <a:off x="3794760" y="5248656"/>
+            <a:ext cx="3749040" cy="640080"/>
           </a:xfrm>
           <a:prstGeom prst="rect">
             <a:avLst/>
@@ -9855,8 +10833,8 @@
         </p:nvSpPr>
         <p:spPr>
           <a:xfrm>
-            <a:off x="7680960" y="5541264"/>
-            <a:ext cx="3657600" cy="694944"/>
+            <a:off x="7680960" y="5248656"/>
+            <a:ext cx="3657600" cy="640080"/>
           </a:xfrm>
           <a:prstGeom prst="rect">
             <a:avLst/>
@@ -9897,6 +10875,45 @@
         </p:nvSpPr>
         <p:spPr>
           <a:xfrm>
+            <a:off x="640080" y="6053328"/>
+            <a:ext cx="10881360" cy="274320"/>
+          </a:xfrm>
+          <a:prstGeom prst="rect">
+            <a:avLst/>
+          </a:prstGeom>
+          <a:noFill/>
+          <a:ln/>
+        </p:spPr>
+        <p:txBody>
+          <a:bodyPr wrap="square" lIns="0" tIns="0" rIns="0" bIns="0" rtlCol="0" anchor="ctr"/>
+          <a:lstStyle/>
+          <a:p>
+            <a:pPr indent="0" marL="0">
+              <a:buNone/>
+            </a:pPr>
+            <a:r>
+              <a:rPr lang="en-US" sz="1350" i="1" dirty="0">
+                <a:solidFill>
+                  <a:srgbClr val="FF8A3D"/>
+                </a:solidFill>
+                <a:latin typeface="Calibri" pitchFamily="34" charset="0"/>
+                <a:ea typeface="Calibri" pitchFamily="34" charset="-122"/>
+                <a:cs typeface="Calibri" pitchFamily="34" charset="-120"/>
+              </a:rPr>
+              <a:t>Then open the Trust Center tab — every one of these is already on the record.</a:t>
+            </a:r>
+            <a:endParaRPr lang="en-US" sz="1350" dirty="0"/>
+          </a:p>
+        </p:txBody>
+      </p:sp>
+      <p:sp>
+        <p:nvSpPr>
+          <p:cNvPr id="37" name="Text 35"/>
+          <p:cNvSpPr/>
+          <p:nvPr/>
+        </p:nvSpPr>
+        <p:spPr>
+          <a:xfrm>
             <a:off x="11277295" y="6400800"/>
             <a:ext cx="548640" cy="274320"/>
           </a:xfrm>
@@ -9930,7 +10947,7 @@
       </p:sp>
       <p:sp>
         <p:nvSpPr>
-          <p:cNvPr id="37" name="Text 35"/>
+          <p:cNvPr id="38" name="Text 36"/>
           <p:cNvSpPr/>
           <p:nvPr/>
         </p:nvSpPr>
@@ -10532,7 +11549,7 @@
                 <a:ea typeface="Calibri" pitchFamily="34" charset="-122"/>
                 <a:cs typeface="Calibri" pitchFamily="34" charset="-120"/>
               </a:rPr>
-              <a:t>Ask about a different customer and the numbers change, because they are read from the gold layer — the dashboard and the agent cannot disagree.</a:t>
+              <a:t>Seeding is deterministic — clone the repo, run one command, and reproduce these exact figures on your own machine.</a:t>
             </a:r>
             <a:endParaRPr lang="en-US" sz="1450" dirty="0"/>
           </a:p>
@@ -12340,7 +13357,7 @@
     <p:bg>
       <p:bgPr>
         <a:solidFill>
-          <a:srgbClr val="0E1621"/>
+          <a:srgbClr val="0B121B"/>
         </a:solidFill>
       </p:bgPr>
     </p:bg>
@@ -12411,7 +13428,7 @@
                 <a:ea typeface="Calibri" pitchFamily="34" charset="-122"/>
                 <a:cs typeface="Calibri" pitchFamily="34" charset="-120"/>
               </a:rPr>
-              <a:t>UNDER THE HOOD</a:t>
+              <a:t>THE RECEIPTS</a:t>
             </a:r>
             <a:endParaRPr lang="en-US" sz="1200" dirty="0"/>
           </a:p>
@@ -12450,45 +13467,581 @@
                 <a:ea typeface="Cambria" pitchFamily="34" charset="-122"/>
                 <a:cs typeface="Cambria" pitchFamily="34" charset="-120"/>
               </a:rPr>
-              <a:t>Why the answers hold up</a:t>
+              <a:t>Proving it after the fact</a:t>
             </a:r>
             <a:endParaRPr lang="en-US" sz="3200" dirty="0"/>
           </a:p>
         </p:txBody>
       </p:sp>
-      <p:pic>
-        <p:nvPicPr>
-          <p:cNvPr id="5" name="Image 0" descr="/private/tmp/claude-501/-Users-atharvvani-Downloads-DataBricks/437ba0b1-41b9-48e1-95cf-333721d11260/scratchpad/deck_assets/latency_dist.png">    </p:cNvPr>
-          <p:cNvPicPr>
-            <a:picLocks noChangeAspect="1"/>
-          </p:cNvPicPr>
-          <p:nvPr/>
-        </p:nvPicPr>
-        <p:blipFill>
-          <a:blip r:embed="rId1"/>
-          <a:stretch>
-            <a:fillRect/>
-          </a:stretch>
-        </p:blipFill>
-        <p:spPr>
-          <a:xfrm>
-            <a:off x="640080" y="1828800"/>
-            <a:ext cx="6766560" cy="2926080"/>
-          </a:xfrm>
-          <a:prstGeom prst="rect">
-            <a:avLst/>
-          </a:prstGeom>
-        </p:spPr>
-      </p:pic>
-      <p:sp>
-        <p:nvSpPr>
-          <p:cNvPr id="6" name="Shape 3"/>
-          <p:cNvSpPr/>
-          <p:nvPr/>
-        </p:nvSpPr>
-        <p:spPr>
-          <a:xfrm>
-            <a:off x="7772400" y="1764792"/>
+      <p:sp>
+        <p:nvSpPr>
+          <p:cNvPr id="5" name="Text 3"/>
+          <p:cNvSpPr/>
+          <p:nvPr/>
+        </p:nvSpPr>
+        <p:spPr>
+          <a:xfrm>
+            <a:off x="640080" y="1783080"/>
+            <a:ext cx="10789920" cy="457200"/>
+          </a:xfrm>
+          <a:prstGeom prst="rect">
+            <a:avLst/>
+          </a:prstGeom>
+          <a:noFill/>
+          <a:ln/>
+        </p:spPr>
+        <p:txBody>
+          <a:bodyPr wrap="square" lIns="0" tIns="0" rIns="0" bIns="0" rtlCol="0" anchor="ctr"/>
+          <a:lstStyle/>
+          <a:p>
+            <a:pPr indent="0" marL="0">
+              <a:buNone/>
+            </a:pPr>
+            <a:r>
+              <a:rPr lang="en-US" sz="1600" dirty="0">
+                <a:solidFill>
+                  <a:srgbClr val="93A1AF"/>
+                </a:solidFill>
+                <a:latin typeface="Calibri" pitchFamily="34" charset="0"/>
+                <a:ea typeface="Calibri" pitchFamily="34" charset="-122"/>
+                <a:cs typeface="Calibri" pitchFamily="34" charset="-120"/>
+              </a:rPr>
+              <a:t>A control you cannot evidence is a control you cannot pass an audit with. Every decision — granted or refused — is appended to a durable trail.</a:t>
+            </a:r>
+            <a:endParaRPr lang="en-US" sz="1600" dirty="0"/>
+          </a:p>
+        </p:txBody>
+      </p:sp>
+      <p:sp>
+        <p:nvSpPr>
+          <p:cNvPr id="6" name="Shape 4"/>
+          <p:cNvSpPr/>
+          <p:nvPr/>
+        </p:nvSpPr>
+        <p:spPr>
+          <a:xfrm>
+            <a:off x="640080" y="2331720"/>
+            <a:ext cx="2615184" cy="960120"/>
+          </a:xfrm>
+          <a:prstGeom prst="roundRect">
+            <a:avLst>
+              <a:gd name="adj" fmla="val 8571"/>
+            </a:avLst>
+          </a:prstGeom>
+          <a:solidFill>
+            <a:srgbClr val="18232F"/>
+          </a:solidFill>
+          <a:ln w="12700">
+            <a:solidFill>
+              <a:srgbClr val="2A3745"/>
+            </a:solidFill>
+            <a:prstDash val="solid"/>
+          </a:ln>
+          <a:effectLst>
+            <a:outerShdw sx="100000" sy="100000" kx="0" ky="0" algn="bl" rotWithShape="0" blurRad="114300" dist="38100" dir="5400000">
+              <a:srgbClr val="000000">
+                <a:alpha val="28000"/>
+              </a:srgbClr>
+            </a:outerShdw>
+          </a:effectLst>
+        </p:spPr>
+      </p:sp>
+      <p:sp>
+        <p:nvSpPr>
+          <p:cNvPr id="7" name="Text 5"/>
+          <p:cNvSpPr/>
+          <p:nvPr/>
+        </p:nvSpPr>
+        <p:spPr>
+          <a:xfrm>
+            <a:off x="868680" y="2395728"/>
+            <a:ext cx="2157984" cy="502920"/>
+          </a:xfrm>
+          <a:prstGeom prst="rect">
+            <a:avLst/>
+          </a:prstGeom>
+          <a:noFill/>
+          <a:ln/>
+        </p:spPr>
+        <p:txBody>
+          <a:bodyPr wrap="square" lIns="0" tIns="0" rIns="0" bIns="0" rtlCol="0" anchor="ctr"/>
+          <a:lstStyle/>
+          <a:p>
+            <a:pPr indent="0" marL="0">
+              <a:buNone/>
+            </a:pPr>
+            <a:r>
+              <a:rPr lang="en-US" sz="2500" b="1" dirty="0">
+                <a:solidFill>
+                  <a:srgbClr val="FF8A3D"/>
+                </a:solidFill>
+                <a:latin typeface="Cambria" pitchFamily="34" charset="0"/>
+                <a:ea typeface="Cambria" pitchFamily="34" charset="-122"/>
+                <a:cs typeface="Cambria" pitchFamily="34" charset="-120"/>
+              </a:rPr>
+              <a:t>6</a:t>
+            </a:r>
+            <a:endParaRPr lang="en-US" sz="2500" dirty="0"/>
+          </a:p>
+        </p:txBody>
+      </p:sp>
+      <p:sp>
+        <p:nvSpPr>
+          <p:cNvPr id="8" name="Text 6"/>
+          <p:cNvSpPr/>
+          <p:nvPr/>
+        </p:nvSpPr>
+        <p:spPr>
+          <a:xfrm>
+            <a:off x="868680" y="2889504"/>
+            <a:ext cx="2157984" cy="274320"/>
+          </a:xfrm>
+          <a:prstGeom prst="rect">
+            <a:avLst/>
+          </a:prstGeom>
+          <a:noFill/>
+          <a:ln/>
+        </p:spPr>
+        <p:txBody>
+          <a:bodyPr wrap="square" lIns="0" tIns="0" rIns="0" bIns="0" rtlCol="0" anchor="ctr"/>
+          <a:lstStyle/>
+          <a:p>
+            <a:pPr indent="0" marL="0">
+              <a:buNone/>
+            </a:pPr>
+            <a:r>
+              <a:rPr lang="en-US" sz="1050" b="1" spc="120" kern="0" dirty="0">
+                <a:solidFill>
+                  <a:srgbClr val="93A1AF"/>
+                </a:solidFill>
+                <a:latin typeface="Calibri" pitchFamily="34" charset="0"/>
+                <a:ea typeface="Calibri" pitchFamily="34" charset="-122"/>
+                <a:cs typeface="Calibri" pitchFamily="34" charset="-120"/>
+              </a:rPr>
+              <a:t>GOVERNED ACTIONS</a:t>
+            </a:r>
+            <a:endParaRPr lang="en-US" sz="1050" dirty="0"/>
+          </a:p>
+        </p:txBody>
+      </p:sp>
+      <p:sp>
+        <p:nvSpPr>
+          <p:cNvPr id="9" name="Shape 7"/>
+          <p:cNvSpPr/>
+          <p:nvPr/>
+        </p:nvSpPr>
+        <p:spPr>
+          <a:xfrm>
+            <a:off x="3429000" y="2331720"/>
+            <a:ext cx="2615184" cy="960120"/>
+          </a:xfrm>
+          <a:prstGeom prst="roundRect">
+            <a:avLst>
+              <a:gd name="adj" fmla="val 8571"/>
+            </a:avLst>
+          </a:prstGeom>
+          <a:solidFill>
+            <a:srgbClr val="18232F"/>
+          </a:solidFill>
+          <a:ln w="12700">
+            <a:solidFill>
+              <a:srgbClr val="2A3745"/>
+            </a:solidFill>
+            <a:prstDash val="solid"/>
+          </a:ln>
+          <a:effectLst>
+            <a:outerShdw sx="100000" sy="100000" kx="0" ky="0" algn="bl" rotWithShape="0" blurRad="114300" dist="38100" dir="5400000">
+              <a:srgbClr val="000000">
+                <a:alpha val="28000"/>
+              </a:srgbClr>
+            </a:outerShdw>
+          </a:effectLst>
+        </p:spPr>
+      </p:sp>
+      <p:sp>
+        <p:nvSpPr>
+          <p:cNvPr id="10" name="Text 8"/>
+          <p:cNvSpPr/>
+          <p:nvPr/>
+        </p:nvSpPr>
+        <p:spPr>
+          <a:xfrm>
+            <a:off x="3657600" y="2395728"/>
+            <a:ext cx="2157984" cy="502920"/>
+          </a:xfrm>
+          <a:prstGeom prst="rect">
+            <a:avLst/>
+          </a:prstGeom>
+          <a:noFill/>
+          <a:ln/>
+        </p:spPr>
+        <p:txBody>
+          <a:bodyPr wrap="square" lIns="0" tIns="0" rIns="0" bIns="0" rtlCol="0" anchor="ctr"/>
+          <a:lstStyle/>
+          <a:p>
+            <a:pPr indent="0" marL="0">
+              <a:buNone/>
+            </a:pPr>
+            <a:r>
+              <a:rPr lang="en-US" sz="2500" b="1" dirty="0">
+                <a:solidFill>
+                  <a:srgbClr val="FF8A3D"/>
+                </a:solidFill>
+                <a:latin typeface="Cambria" pitchFamily="34" charset="0"/>
+                <a:ea typeface="Cambria" pitchFamily="34" charset="-122"/>
+                <a:cs typeface="Cambria" pitchFamily="34" charset="-120"/>
+              </a:rPr>
+              <a:t>5</a:t>
+            </a:r>
+            <a:endParaRPr lang="en-US" sz="2500" dirty="0"/>
+          </a:p>
+        </p:txBody>
+      </p:sp>
+      <p:sp>
+        <p:nvSpPr>
+          <p:cNvPr id="11" name="Text 9"/>
+          <p:cNvSpPr/>
+          <p:nvPr/>
+        </p:nvSpPr>
+        <p:spPr>
+          <a:xfrm>
+            <a:off x="3657600" y="2889504"/>
+            <a:ext cx="2157984" cy="274320"/>
+          </a:xfrm>
+          <a:prstGeom prst="rect">
+            <a:avLst/>
+          </a:prstGeom>
+          <a:noFill/>
+          <a:ln/>
+        </p:spPr>
+        <p:txBody>
+          <a:bodyPr wrap="square" lIns="0" tIns="0" rIns="0" bIns="0" rtlCol="0" anchor="ctr"/>
+          <a:lstStyle/>
+          <a:p>
+            <a:pPr indent="0" marL="0">
+              <a:buNone/>
+            </a:pPr>
+            <a:r>
+              <a:rPr lang="en-US" sz="1050" b="1" spc="120" kern="0" dirty="0">
+                <a:solidFill>
+                  <a:srgbClr val="93A1AF"/>
+                </a:solidFill>
+                <a:latin typeface="Calibri" pitchFamily="34" charset="0"/>
+                <a:ea typeface="Calibri" pitchFamily="34" charset="-122"/>
+                <a:cs typeface="Calibri" pitchFamily="34" charset="-120"/>
+              </a:rPr>
+              <a:t>GRANTED</a:t>
+            </a:r>
+            <a:endParaRPr lang="en-US" sz="1050" dirty="0"/>
+          </a:p>
+        </p:txBody>
+      </p:sp>
+      <p:sp>
+        <p:nvSpPr>
+          <p:cNvPr id="12" name="Shape 10"/>
+          <p:cNvSpPr/>
+          <p:nvPr/>
+        </p:nvSpPr>
+        <p:spPr>
+          <a:xfrm>
+            <a:off x="6217920" y="2331720"/>
+            <a:ext cx="2615184" cy="960120"/>
+          </a:xfrm>
+          <a:prstGeom prst="roundRect">
+            <a:avLst>
+              <a:gd name="adj" fmla="val 8571"/>
+            </a:avLst>
+          </a:prstGeom>
+          <a:solidFill>
+            <a:srgbClr val="1F2C3A"/>
+          </a:solidFill>
+          <a:ln w="12700">
+            <a:solidFill>
+              <a:srgbClr val="2A3745"/>
+            </a:solidFill>
+            <a:prstDash val="solid"/>
+          </a:ln>
+          <a:effectLst>
+            <a:outerShdw sx="100000" sy="100000" kx="0" ky="0" algn="bl" rotWithShape="0" blurRad="114300" dist="38100" dir="5400000">
+              <a:srgbClr val="000000">
+                <a:alpha val="28000"/>
+              </a:srgbClr>
+            </a:outerShdw>
+          </a:effectLst>
+        </p:spPr>
+      </p:sp>
+      <p:sp>
+        <p:nvSpPr>
+          <p:cNvPr id="13" name="Text 11"/>
+          <p:cNvSpPr/>
+          <p:nvPr/>
+        </p:nvSpPr>
+        <p:spPr>
+          <a:xfrm>
+            <a:off x="6446520" y="2395728"/>
+            <a:ext cx="2157984" cy="502920"/>
+          </a:xfrm>
+          <a:prstGeom prst="rect">
+            <a:avLst/>
+          </a:prstGeom>
+          <a:noFill/>
+          <a:ln/>
+        </p:spPr>
+        <p:txBody>
+          <a:bodyPr wrap="square" lIns="0" tIns="0" rIns="0" bIns="0" rtlCol="0" anchor="ctr"/>
+          <a:lstStyle/>
+          <a:p>
+            <a:pPr indent="0" marL="0">
+              <a:buNone/>
+            </a:pPr>
+            <a:r>
+              <a:rPr lang="en-US" sz="2500" b="1" dirty="0">
+                <a:solidFill>
+                  <a:srgbClr val="F85149"/>
+                </a:solidFill>
+                <a:latin typeface="Cambria" pitchFamily="34" charset="0"/>
+                <a:ea typeface="Cambria" pitchFamily="34" charset="-122"/>
+                <a:cs typeface="Cambria" pitchFamily="34" charset="-120"/>
+              </a:rPr>
+              <a:t>1</a:t>
+            </a:r>
+            <a:endParaRPr lang="en-US" sz="2500" dirty="0"/>
+          </a:p>
+        </p:txBody>
+      </p:sp>
+      <p:sp>
+        <p:nvSpPr>
+          <p:cNvPr id="14" name="Text 12"/>
+          <p:cNvSpPr/>
+          <p:nvPr/>
+        </p:nvSpPr>
+        <p:spPr>
+          <a:xfrm>
+            <a:off x="6446520" y="2889504"/>
+            <a:ext cx="2157984" cy="274320"/>
+          </a:xfrm>
+          <a:prstGeom prst="rect">
+            <a:avLst/>
+          </a:prstGeom>
+          <a:noFill/>
+          <a:ln/>
+        </p:spPr>
+        <p:txBody>
+          <a:bodyPr wrap="square" lIns="0" tIns="0" rIns="0" bIns="0" rtlCol="0" anchor="ctr"/>
+          <a:lstStyle/>
+          <a:p>
+            <a:pPr indent="0" marL="0">
+              <a:buNone/>
+            </a:pPr>
+            <a:r>
+              <a:rPr lang="en-US" sz="1050" b="1" spc="120" kern="0" dirty="0">
+                <a:solidFill>
+                  <a:srgbClr val="93A1AF"/>
+                </a:solidFill>
+                <a:latin typeface="Calibri" pitchFamily="34" charset="0"/>
+                <a:ea typeface="Calibri" pitchFamily="34" charset="-122"/>
+                <a:cs typeface="Calibri" pitchFamily="34" charset="-120"/>
+              </a:rPr>
+              <a:t>DENIED</a:t>
+            </a:r>
+            <a:endParaRPr lang="en-US" sz="1050" dirty="0"/>
+          </a:p>
+        </p:txBody>
+      </p:sp>
+      <p:sp>
+        <p:nvSpPr>
+          <p:cNvPr id="15" name="Shape 13"/>
+          <p:cNvSpPr/>
+          <p:nvPr/>
+        </p:nvSpPr>
+        <p:spPr>
+          <a:xfrm>
+            <a:off x="9006840" y="2331720"/>
+            <a:ext cx="2615184" cy="960120"/>
+          </a:xfrm>
+          <a:prstGeom prst="roundRect">
+            <a:avLst>
+              <a:gd name="adj" fmla="val 8571"/>
+            </a:avLst>
+          </a:prstGeom>
+          <a:solidFill>
+            <a:srgbClr val="18232F"/>
+          </a:solidFill>
+          <a:ln w="12700">
+            <a:solidFill>
+              <a:srgbClr val="2A3745"/>
+            </a:solidFill>
+            <a:prstDash val="solid"/>
+          </a:ln>
+          <a:effectLst>
+            <a:outerShdw sx="100000" sy="100000" kx="0" ky="0" algn="bl" rotWithShape="0" blurRad="114300" dist="38100" dir="5400000">
+              <a:srgbClr val="000000">
+                <a:alpha val="28000"/>
+              </a:srgbClr>
+            </a:outerShdw>
+          </a:effectLst>
+        </p:spPr>
+      </p:sp>
+      <p:sp>
+        <p:nvSpPr>
+          <p:cNvPr id="16" name="Text 14"/>
+          <p:cNvSpPr/>
+          <p:nvPr/>
+        </p:nvSpPr>
+        <p:spPr>
+          <a:xfrm>
+            <a:off x="9235440" y="2395728"/>
+            <a:ext cx="2157984" cy="502920"/>
+          </a:xfrm>
+          <a:prstGeom prst="rect">
+            <a:avLst/>
+          </a:prstGeom>
+          <a:noFill/>
+          <a:ln/>
+        </p:spPr>
+        <p:txBody>
+          <a:bodyPr wrap="square" lIns="0" tIns="0" rIns="0" bIns="0" rtlCol="0" anchor="ctr"/>
+          <a:lstStyle/>
+          <a:p>
+            <a:pPr indent="0" marL="0">
+              <a:buNone/>
+            </a:pPr>
+            <a:r>
+              <a:rPr lang="en-US" sz="2500" b="1" dirty="0">
+                <a:solidFill>
+                  <a:srgbClr val="FF8A3D"/>
+                </a:solidFill>
+                <a:latin typeface="Cambria" pitchFamily="34" charset="0"/>
+                <a:ea typeface="Cambria" pitchFamily="34" charset="-122"/>
+                <a:cs typeface="Cambria" pitchFamily="34" charset="-120"/>
+              </a:rPr>
+              <a:t>16.7%</a:t>
+            </a:r>
+            <a:endParaRPr lang="en-US" sz="2500" dirty="0"/>
+          </a:p>
+        </p:txBody>
+      </p:sp>
+      <p:sp>
+        <p:nvSpPr>
+          <p:cNvPr id="17" name="Text 15"/>
+          <p:cNvSpPr/>
+          <p:nvPr/>
+        </p:nvSpPr>
+        <p:spPr>
+          <a:xfrm>
+            <a:off x="9235440" y="2889504"/>
+            <a:ext cx="2157984" cy="274320"/>
+          </a:xfrm>
+          <a:prstGeom prst="rect">
+            <a:avLst/>
+          </a:prstGeom>
+          <a:noFill/>
+          <a:ln/>
+        </p:spPr>
+        <p:txBody>
+          <a:bodyPr wrap="square" lIns="0" tIns="0" rIns="0" bIns="0" rtlCol="0" anchor="ctr"/>
+          <a:lstStyle/>
+          <a:p>
+            <a:pPr indent="0" marL="0">
+              <a:buNone/>
+            </a:pPr>
+            <a:r>
+              <a:rPr lang="en-US" sz="1050" b="1" spc="120" kern="0" dirty="0">
+                <a:solidFill>
+                  <a:srgbClr val="93A1AF"/>
+                </a:solidFill>
+                <a:latin typeface="Calibri" pitchFamily="34" charset="0"/>
+                <a:ea typeface="Calibri" pitchFamily="34" charset="-122"/>
+                <a:cs typeface="Calibri" pitchFamily="34" charset="-120"/>
+              </a:rPr>
+              <a:t>DENIAL RATE</a:t>
+            </a:r>
+            <a:endParaRPr lang="en-US" sz="1050" dirty="0"/>
+          </a:p>
+        </p:txBody>
+      </p:sp>
+      <p:sp>
+        <p:nvSpPr>
+          <p:cNvPr id="18" name="Text 16"/>
+          <p:cNvSpPr/>
+          <p:nvPr/>
+        </p:nvSpPr>
+        <p:spPr>
+          <a:xfrm>
+            <a:off x="640080" y="3364992"/>
+            <a:ext cx="10881360" cy="256032"/>
+          </a:xfrm>
+          <a:prstGeom prst="rect">
+            <a:avLst/>
+          </a:prstGeom>
+          <a:noFill/>
+          <a:ln/>
+        </p:spPr>
+        <p:txBody>
+          <a:bodyPr wrap="square" lIns="0" tIns="0" rIns="0" bIns="0" rtlCol="0" anchor="ctr"/>
+          <a:lstStyle/>
+          <a:p>
+            <a:pPr indent="0" marL="0">
+              <a:buNone/>
+            </a:pPr>
+            <a:r>
+              <a:rPr lang="en-US" sz="1150" i="1" dirty="0">
+                <a:solidFill>
+                  <a:srgbClr val="6C7C8A"/>
+                </a:solidFill>
+                <a:latin typeface="Calibri" pitchFamily="34" charset="0"/>
+                <a:ea typeface="Calibri" pitchFamily="34" charset="-122"/>
+                <a:cs typeface="Calibri" pitchFamily="34" charset="-120"/>
+              </a:rPr>
+              <a:t>the five demo moves, already on the record</a:t>
+            </a:r>
+            <a:endParaRPr lang="en-US" sz="1150" dirty="0"/>
+          </a:p>
+        </p:txBody>
+      </p:sp>
+      <p:sp>
+        <p:nvSpPr>
+          <p:cNvPr id="19" name="Shape 17"/>
+          <p:cNvSpPr/>
+          <p:nvPr/>
+        </p:nvSpPr>
+        <p:spPr>
+          <a:xfrm>
+            <a:off x="640080" y="3675888"/>
+            <a:ext cx="5257800" cy="1051560"/>
+          </a:xfrm>
+          <a:prstGeom prst="roundRect">
+            <a:avLst>
+              <a:gd name="adj" fmla="val 7826"/>
+            </a:avLst>
+          </a:prstGeom>
+          <a:solidFill>
+            <a:srgbClr val="18232F"/>
+          </a:solidFill>
+          <a:ln w="12700">
+            <a:solidFill>
+              <a:srgbClr val="2A3745"/>
+            </a:solidFill>
+            <a:prstDash val="solid"/>
+          </a:ln>
+          <a:effectLst>
+            <a:outerShdw sx="100000" sy="100000" kx="0" ky="0" algn="bl" rotWithShape="0" blurRad="114300" dist="38100" dir="5400000">
+              <a:srgbClr val="000000">
+                <a:alpha val="28000"/>
+              </a:srgbClr>
+            </a:outerShdw>
+          </a:effectLst>
+        </p:spPr>
+      </p:sp>
+      <p:sp>
+        <p:nvSpPr>
+          <p:cNvPr id="20" name="Shape 18"/>
+          <p:cNvSpPr/>
+          <p:nvPr/>
+        </p:nvSpPr>
+        <p:spPr>
+          <a:xfrm>
+            <a:off x="914400" y="3895344"/>
             <a:ext cx="146304" cy="146304"/>
           </a:xfrm>
           <a:prstGeom prst="ellipse">
@@ -12502,30 +14055,30 @@
       </p:sp>
       <p:sp>
         <p:nvSpPr>
-          <p:cNvPr id="7" name="Text 4"/>
-          <p:cNvSpPr/>
-          <p:nvPr/>
-        </p:nvSpPr>
-        <p:spPr>
-          <a:xfrm>
-            <a:off x="8046720" y="1645920"/>
-            <a:ext cx="3474720" cy="365760"/>
-          </a:xfrm>
-          <a:prstGeom prst="rect">
-            <a:avLst/>
-          </a:prstGeom>
-          <a:noFill/>
-          <a:ln/>
-        </p:spPr>
-        <p:txBody>
-          <a:bodyPr wrap="square" lIns="0" tIns="0" rIns="0" bIns="0" rtlCol="0" anchor="ctr"/>
-          <a:lstStyle/>
-          <a:p>
-            <a:pPr indent="0" marL="0">
-              <a:buNone/>
-            </a:pPr>
-            <a:r>
-              <a:rPr lang="en-US" sz="1550" b="1" dirty="0">
+          <p:cNvPr id="21" name="Text 19"/>
+          <p:cNvSpPr/>
+          <p:nvPr/>
+        </p:nvSpPr>
+        <p:spPr>
+          <a:xfrm>
+            <a:off x="1188720" y="3785616"/>
+            <a:ext cx="4480560" cy="292608"/>
+          </a:xfrm>
+          <a:prstGeom prst="rect">
+            <a:avLst/>
+          </a:prstGeom>
+          <a:noFill/>
+          <a:ln/>
+        </p:spPr>
+        <p:txBody>
+          <a:bodyPr wrap="square" lIns="0" tIns="0" rIns="0" bIns="0" rtlCol="0" anchor="ctr"/>
+          <a:lstStyle/>
+          <a:p>
+            <a:pPr indent="0" marL="0">
+              <a:buNone/>
+            </a:pPr>
+            <a:r>
+              <a:rPr lang="en-US" sz="1400" b="1" dirty="0">
                 <a:solidFill>
                   <a:srgbClr val="E9EEF3"/>
                 </a:solidFill>
@@ -12533,22 +14086,22 @@
                 <a:ea typeface="Calibri" pitchFamily="34" charset="-122"/>
                 <a:cs typeface="Calibri" pitchFamily="34" charset="-120"/>
               </a:rPr>
-              <a:t>Statistical, not hard-coded</a:t>
-            </a:r>
-            <a:endParaRPr lang="en-US" sz="1550" dirty="0"/>
-          </a:p>
-        </p:txBody>
-      </p:sp>
-      <p:sp>
-        <p:nvSpPr>
-          <p:cNvPr id="8" name="Text 5"/>
-          <p:cNvSpPr/>
-          <p:nvPr/>
-        </p:nvSpPr>
-        <p:spPr>
-          <a:xfrm>
-            <a:off x="8046720" y="2029968"/>
-            <a:ext cx="3474720" cy="822960"/>
+              <a:t>Append-only</a:t>
+            </a:r>
+            <a:endParaRPr lang="en-US" sz="1400" dirty="0"/>
+          </a:p>
+        </p:txBody>
+      </p:sp>
+      <p:sp>
+        <p:nvSpPr>
+          <p:cNvPr id="22" name="Text 20"/>
+          <p:cNvSpPr/>
+          <p:nvPr/>
+        </p:nvSpPr>
+        <p:spPr>
+          <a:xfrm>
+            <a:off x="1188720" y="4078224"/>
+            <a:ext cx="4480560" cy="585216"/>
           </a:xfrm>
           <a:prstGeom prst="rect">
             <a:avLst/>
@@ -12562,12 +14115,12 @@
           <a:p>
             <a:pPr indent="0" marL="0">
               <a:lnSpc>
-                <a:spcPct val="108000"/>
+                <a:spcPct val="103000"/>
               </a:lnSpc>
               <a:buNone/>
             </a:pPr>
             <a:r>
-              <a:rPr lang="en-US" sz="1250" dirty="0">
+              <a:rPr lang="en-US" sz="1100" dirty="0">
                 <a:solidFill>
                   <a:srgbClr val="93A1AF"/>
                 </a:solidFill>
@@ -12575,21 +14128,55 @@
                 <a:ea typeface="Calibri" pitchFamily="34" charset="-122"/>
                 <a:cs typeface="Calibri" pitchFamily="34" charset="-120"/>
               </a:rPr>
-              <a:t>Anomalies are events beyond 3σ of the live population — the threshold moves with the data, not a magic number.</a:t>
-            </a:r>
-            <a:endParaRPr lang="en-US" sz="1250" dirty="0"/>
-          </a:p>
-        </p:txBody>
-      </p:sp>
-      <p:sp>
-        <p:nvSpPr>
-          <p:cNvPr id="9" name="Shape 6"/>
-          <p:cNvSpPr/>
-          <p:nvPr/>
-        </p:nvSpPr>
-        <p:spPr>
-          <a:xfrm>
-            <a:off x="7772400" y="3099816"/>
+              <a:t>Records are never rewritten. A log you can edit in place is not evidence — and it can be tailed straight to a SIEM.</a:t>
+            </a:r>
+            <a:endParaRPr lang="en-US" sz="1100" dirty="0"/>
+          </a:p>
+        </p:txBody>
+      </p:sp>
+      <p:sp>
+        <p:nvSpPr>
+          <p:cNvPr id="23" name="Shape 21"/>
+          <p:cNvSpPr/>
+          <p:nvPr/>
+        </p:nvSpPr>
+        <p:spPr>
+          <a:xfrm>
+            <a:off x="6217920" y="3675888"/>
+            <a:ext cx="5257800" cy="1051560"/>
+          </a:xfrm>
+          <a:prstGeom prst="roundRect">
+            <a:avLst>
+              <a:gd name="adj" fmla="val 7826"/>
+            </a:avLst>
+          </a:prstGeom>
+          <a:solidFill>
+            <a:srgbClr val="18232F"/>
+          </a:solidFill>
+          <a:ln w="12700">
+            <a:solidFill>
+              <a:srgbClr val="2A3745"/>
+            </a:solidFill>
+            <a:prstDash val="solid"/>
+          </a:ln>
+          <a:effectLst>
+            <a:outerShdw sx="100000" sy="100000" kx="0" ky="0" algn="bl" rotWithShape="0" blurRad="114300" dist="38100" dir="5400000">
+              <a:srgbClr val="000000">
+                <a:alpha val="28000"/>
+              </a:srgbClr>
+            </a:outerShdw>
+          </a:effectLst>
+        </p:spPr>
+      </p:sp>
+      <p:sp>
+        <p:nvSpPr>
+          <p:cNvPr id="24" name="Shape 22"/>
+          <p:cNvSpPr/>
+          <p:nvPr/>
+        </p:nvSpPr>
+        <p:spPr>
+          <a:xfrm>
+            <a:off x="6492240" y="3895344"/>
             <a:ext cx="146304" cy="146304"/>
           </a:xfrm>
           <a:prstGeom prst="ellipse">
@@ -12603,30 +14190,30 @@
       </p:sp>
       <p:sp>
         <p:nvSpPr>
-          <p:cNvPr id="10" name="Text 7"/>
-          <p:cNvSpPr/>
-          <p:nvPr/>
-        </p:nvSpPr>
-        <p:spPr>
-          <a:xfrm>
-            <a:off x="8046720" y="2980944"/>
-            <a:ext cx="3474720" cy="365760"/>
-          </a:xfrm>
-          <a:prstGeom prst="rect">
-            <a:avLst/>
-          </a:prstGeom>
-          <a:noFill/>
-          <a:ln/>
-        </p:spPr>
-        <p:txBody>
-          <a:bodyPr wrap="square" lIns="0" tIns="0" rIns="0" bIns="0" rtlCol="0" anchor="ctr"/>
-          <a:lstStyle/>
-          <a:p>
-            <a:pPr indent="0" marL="0">
-              <a:buNone/>
-            </a:pPr>
-            <a:r>
-              <a:rPr lang="en-US" sz="1550" b="1" dirty="0">
+          <p:cNvPr id="25" name="Text 23"/>
+          <p:cNvSpPr/>
+          <p:nvPr/>
+        </p:nvSpPr>
+        <p:spPr>
+          <a:xfrm>
+            <a:off x="6766560" y="3785616"/>
+            <a:ext cx="4480560" cy="292608"/>
+          </a:xfrm>
+          <a:prstGeom prst="rect">
+            <a:avLst/>
+          </a:prstGeom>
+          <a:noFill/>
+          <a:ln/>
+        </p:spPr>
+        <p:txBody>
+          <a:bodyPr wrap="square" lIns="0" tIns="0" rIns="0" bIns="0" rtlCol="0" anchor="ctr"/>
+          <a:lstStyle/>
+          <a:p>
+            <a:pPr indent="0" marL="0">
+              <a:buNone/>
+            </a:pPr>
+            <a:r>
+              <a:rPr lang="en-US" sz="1400" b="1" dirty="0">
                 <a:solidFill>
                   <a:srgbClr val="E9EEF3"/>
                 </a:solidFill>
@@ -12634,22 +14221,22 @@
                 <a:ea typeface="Calibri" pitchFamily="34" charset="-122"/>
                 <a:cs typeface="Calibri" pitchFamily="34" charset="-120"/>
               </a:rPr>
-              <a:t>Parameter-bound execution</a:t>
-            </a:r>
-            <a:endParaRPr lang="en-US" sz="1550" dirty="0"/>
-          </a:p>
-        </p:txBody>
-      </p:sp>
-      <p:sp>
-        <p:nvSpPr>
-          <p:cNvPr id="11" name="Text 8"/>
-          <p:cNvSpPr/>
-          <p:nvPr/>
-        </p:nvSpPr>
-        <p:spPr>
-          <a:xfrm>
-            <a:off x="8046720" y="3364992"/>
-            <a:ext cx="3474720" cy="822960"/>
+              <a:t>Refusals are the point</a:t>
+            </a:r>
+            <a:endParaRPr lang="en-US" sz="1400" dirty="0"/>
+          </a:p>
+        </p:txBody>
+      </p:sp>
+      <p:sp>
+        <p:nvSpPr>
+          <p:cNvPr id="26" name="Text 24"/>
+          <p:cNvSpPr/>
+          <p:nvPr/>
+        </p:nvSpPr>
+        <p:spPr>
+          <a:xfrm>
+            <a:off x="6766560" y="4078224"/>
+            <a:ext cx="4480560" cy="585216"/>
           </a:xfrm>
           <a:prstGeom prst="rect">
             <a:avLst/>
@@ -12663,12 +14250,12 @@
           <a:p>
             <a:pPr indent="0" marL="0">
               <a:lnSpc>
-                <a:spcPct val="108000"/>
+                <a:spcPct val="103000"/>
               </a:lnSpc>
               <a:buNone/>
             </a:pPr>
             <a:r>
-              <a:rPr lang="en-US" sz="1250" dirty="0">
+              <a:rPr lang="en-US" sz="1100" dirty="0">
                 <a:solidFill>
                   <a:srgbClr val="93A1AF"/>
                 </a:solidFill>
@@ -12676,21 +14263,55 @@
                 <a:ea typeface="Calibri" pitchFamily="34" charset="-122"/>
                 <a:cs typeface="Calibri" pitchFamily="34" charset="-120"/>
               </a:rPr>
-              <a:t>Values are bound, never interpolated — a hostile input matches no rows and cannot reshape a query.</a:t>
-            </a:r>
-            <a:endParaRPr lang="en-US" sz="1250" dirty="0"/>
-          </a:p>
-        </p:txBody>
-      </p:sp>
-      <p:sp>
-        <p:nvSpPr>
-          <p:cNvPr id="12" name="Shape 9"/>
-          <p:cNvSpPr/>
-          <p:nvPr/>
-        </p:nvSpPr>
-        <p:spPr>
-          <a:xfrm>
-            <a:off x="7772400" y="4434840"/>
+              <a:t>A denial is the control working. It is recorded with the control that made it and the request that triggered it.</a:t>
+            </a:r>
+            <a:endParaRPr lang="en-US" sz="1100" dirty="0"/>
+          </a:p>
+        </p:txBody>
+      </p:sp>
+      <p:sp>
+        <p:nvSpPr>
+          <p:cNvPr id="27" name="Shape 25"/>
+          <p:cNvSpPr/>
+          <p:nvPr/>
+        </p:nvSpPr>
+        <p:spPr>
+          <a:xfrm>
+            <a:off x="640080" y="4892040"/>
+            <a:ext cx="5257800" cy="1051560"/>
+          </a:xfrm>
+          <a:prstGeom prst="roundRect">
+            <a:avLst>
+              <a:gd name="adj" fmla="val 7826"/>
+            </a:avLst>
+          </a:prstGeom>
+          <a:solidFill>
+            <a:srgbClr val="18232F"/>
+          </a:solidFill>
+          <a:ln w="12700">
+            <a:solidFill>
+              <a:srgbClr val="2A3745"/>
+            </a:solidFill>
+            <a:prstDash val="solid"/>
+          </a:ln>
+          <a:effectLst>
+            <a:outerShdw sx="100000" sy="100000" kx="0" ky="0" algn="bl" rotWithShape="0" blurRad="114300" dist="38100" dir="5400000">
+              <a:srgbClr val="000000">
+                <a:alpha val="28000"/>
+              </a:srgbClr>
+            </a:outerShdw>
+          </a:effectLst>
+        </p:spPr>
+      </p:sp>
+      <p:sp>
+        <p:nvSpPr>
+          <p:cNvPr id="28" name="Shape 26"/>
+          <p:cNvSpPr/>
+          <p:nvPr/>
+        </p:nvSpPr>
+        <p:spPr>
+          <a:xfrm>
+            <a:off x="914400" y="5111496"/>
             <a:ext cx="146304" cy="146304"/>
           </a:xfrm>
           <a:prstGeom prst="ellipse">
@@ -12704,30 +14325,30 @@
       </p:sp>
       <p:sp>
         <p:nvSpPr>
-          <p:cNvPr id="13" name="Text 10"/>
-          <p:cNvSpPr/>
-          <p:nvPr/>
-        </p:nvSpPr>
-        <p:spPr>
-          <a:xfrm>
-            <a:off x="8046720" y="4315968"/>
-            <a:ext cx="3474720" cy="365760"/>
-          </a:xfrm>
-          <a:prstGeom prst="rect">
-            <a:avLst/>
-          </a:prstGeom>
-          <a:noFill/>
-          <a:ln/>
-        </p:spPr>
-        <p:txBody>
-          <a:bodyPr wrap="square" lIns="0" tIns="0" rIns="0" bIns="0" rtlCol="0" anchor="ctr"/>
-          <a:lstStyle/>
-          <a:p>
-            <a:pPr indent="0" marL="0">
-              <a:buNone/>
-            </a:pPr>
-            <a:r>
-              <a:rPr lang="en-US" sz="1550" b="1" dirty="0">
+          <p:cNvPr id="29" name="Text 27"/>
+          <p:cNvSpPr/>
+          <p:nvPr/>
+        </p:nvSpPr>
+        <p:spPr>
+          <a:xfrm>
+            <a:off x="1188720" y="5001768"/>
+            <a:ext cx="4480560" cy="292608"/>
+          </a:xfrm>
+          <a:prstGeom prst="rect">
+            <a:avLst/>
+          </a:prstGeom>
+          <a:noFill/>
+          <a:ln/>
+        </p:spPr>
+        <p:txBody>
+          <a:bodyPr wrap="square" lIns="0" tIns="0" rIns="0" bIns="0" rtlCol="0" anchor="ctr"/>
+          <a:lstStyle/>
+          <a:p>
+            <a:pPr indent="0" marL="0">
+              <a:buNone/>
+            </a:pPr>
+            <a:r>
+              <a:rPr lang="en-US" sz="1400" b="1" dirty="0">
                 <a:solidFill>
                   <a:srgbClr val="E9EEF3"/>
                 </a:solidFill>
@@ -12735,22 +14356,22 @@
                 <a:ea typeface="Calibri" pitchFamily="34" charset="-122"/>
                 <a:cs typeface="Calibri" pitchFamily="34" charset="-120"/>
               </a:rPr>
-              <a:t>Every step is traced</a:t>
-            </a:r>
-            <a:endParaRPr lang="en-US" sz="1550" dirty="0"/>
-          </a:p>
-        </p:txBody>
-      </p:sp>
-      <p:sp>
-        <p:nvSpPr>
-          <p:cNvPr id="14" name="Text 11"/>
-          <p:cNvSpPr/>
-          <p:nvPr/>
-        </p:nvSpPr>
-        <p:spPr>
-          <a:xfrm>
-            <a:off x="8046720" y="4700016"/>
-            <a:ext cx="3474720" cy="822960"/>
+              <a:t>Queryable, exportable</a:t>
+            </a:r>
+            <a:endParaRPr lang="en-US" sz="1400" dirty="0"/>
+          </a:p>
+        </p:txBody>
+      </p:sp>
+      <p:sp>
+        <p:nvSpPr>
+          <p:cNvPr id="30" name="Text 28"/>
+          <p:cNvSpPr/>
+          <p:nvPr/>
+        </p:nvSpPr>
+        <p:spPr>
+          <a:xfrm>
+            <a:off x="1188720" y="5294376"/>
+            <a:ext cx="4480560" cy="585216"/>
           </a:xfrm>
           <a:prstGeom prst="rect">
             <a:avLst/>
@@ -12764,12 +14385,12 @@
           <a:p>
             <a:pPr indent="0" marL="0">
               <a:lnSpc>
-                <a:spcPct val="108000"/>
+                <a:spcPct val="103000"/>
               </a:lnSpc>
               <a:buNone/>
             </a:pPr>
             <a:r>
-              <a:rPr lang="en-US" sz="1250" dirty="0">
+              <a:rPr lang="en-US" sz="1100" dirty="0">
                 <a:solidFill>
                   <a:srgbClr val="93A1AF"/>
                 </a:solidFill>
@@ -12777,38 +14398,173 @@
                 <a:ea typeface="Calibri" pitchFamily="34" charset="-122"/>
                 <a:cs typeface="Calibri" pitchFamily="34" charset="-120"/>
               </a:rPr>
-              <a:t>Intent, each governance decision, execution, synthesis — all recorded, so an answer is auditable end to end.</a:t>
-            </a:r>
-            <a:endParaRPr lang="en-US" sz="1250" dirty="0"/>
-          </a:p>
-        </p:txBody>
-      </p:sp>
-      <p:sp>
-        <p:nvSpPr>
-          <p:cNvPr id="15" name="Text 12"/>
-          <p:cNvSpPr/>
-          <p:nvPr/>
-        </p:nvSpPr>
-        <p:spPr>
-          <a:xfrm>
-            <a:off x="640080" y="5943600"/>
-            <a:ext cx="10881360" cy="457200"/>
-          </a:xfrm>
-          <a:prstGeom prst="rect">
-            <a:avLst/>
-          </a:prstGeom>
-          <a:noFill/>
-          <a:ln/>
-        </p:spPr>
-        <p:txBody>
-          <a:bodyPr wrap="square" lIns="0" tIns="0" rIns="0" bIns="0" rtlCol="0" anchor="ctr"/>
-          <a:lstStyle/>
-          <a:p>
-            <a:pPr indent="0" marL="0">
-              <a:buNone/>
-            </a:pPr>
-            <a:r>
-              <a:rPr lang="en-US" sz="1450" i="1" dirty="0">
+              <a:t>“Show me everything the AI did” is a SQL question, with a CSV extract for the auditor.</a:t>
+            </a:r>
+            <a:endParaRPr lang="en-US" sz="1100" dirty="0"/>
+          </a:p>
+        </p:txBody>
+      </p:sp>
+      <p:sp>
+        <p:nvSpPr>
+          <p:cNvPr id="31" name="Shape 29"/>
+          <p:cNvSpPr/>
+          <p:nvPr/>
+        </p:nvSpPr>
+        <p:spPr>
+          <a:xfrm>
+            <a:off x="6217920" y="4892040"/>
+            <a:ext cx="5257800" cy="1051560"/>
+          </a:xfrm>
+          <a:prstGeom prst="roundRect">
+            <a:avLst>
+              <a:gd name="adj" fmla="val 7826"/>
+            </a:avLst>
+          </a:prstGeom>
+          <a:solidFill>
+            <a:srgbClr val="18232F"/>
+          </a:solidFill>
+          <a:ln w="12700">
+            <a:solidFill>
+              <a:srgbClr val="2A3745"/>
+            </a:solidFill>
+            <a:prstDash val="solid"/>
+          </a:ln>
+          <a:effectLst>
+            <a:outerShdw sx="100000" sy="100000" kx="0" ky="0" algn="bl" rotWithShape="0" blurRad="114300" dist="38100" dir="5400000">
+              <a:srgbClr val="000000">
+                <a:alpha val="28000"/>
+              </a:srgbClr>
+            </a:outerShdw>
+          </a:effectLst>
+        </p:spPr>
+      </p:sp>
+      <p:sp>
+        <p:nvSpPr>
+          <p:cNvPr id="32" name="Shape 30"/>
+          <p:cNvSpPr/>
+          <p:nvPr/>
+        </p:nvSpPr>
+        <p:spPr>
+          <a:xfrm>
+            <a:off x="6492240" y="5111496"/>
+            <a:ext cx="146304" cy="146304"/>
+          </a:xfrm>
+          <a:prstGeom prst="ellipse">
+            <a:avLst/>
+          </a:prstGeom>
+          <a:solidFill>
+            <a:srgbClr val="FF6C00"/>
+          </a:solidFill>
+          <a:ln/>
+        </p:spPr>
+      </p:sp>
+      <p:sp>
+        <p:nvSpPr>
+          <p:cNvPr id="33" name="Text 31"/>
+          <p:cNvSpPr/>
+          <p:nvPr/>
+        </p:nvSpPr>
+        <p:spPr>
+          <a:xfrm>
+            <a:off x="6766560" y="5001768"/>
+            <a:ext cx="4480560" cy="292608"/>
+          </a:xfrm>
+          <a:prstGeom prst="rect">
+            <a:avLst/>
+          </a:prstGeom>
+          <a:noFill/>
+          <a:ln/>
+        </p:spPr>
+        <p:txBody>
+          <a:bodyPr wrap="square" lIns="0" tIns="0" rIns="0" bIns="0" rtlCol="0" anchor="ctr"/>
+          <a:lstStyle/>
+          <a:p>
+            <a:pPr indent="0" marL="0">
+              <a:buNone/>
+            </a:pPr>
+            <a:r>
+              <a:rPr lang="en-US" sz="1400" b="1" dirty="0">
+                <a:solidFill>
+                  <a:srgbClr val="E9EEF3"/>
+                </a:solidFill>
+                <a:latin typeface="Calibri" pitchFamily="34" charset="0"/>
+                <a:ea typeface="Calibri" pitchFamily="34" charset="-122"/>
+                <a:cs typeface="Calibri" pitchFamily="34" charset="-120"/>
+              </a:rPr>
+              <a:t>Never fails the request</a:t>
+            </a:r>
+            <a:endParaRPr lang="en-US" sz="1400" dirty="0"/>
+          </a:p>
+        </p:txBody>
+      </p:sp>
+      <p:sp>
+        <p:nvSpPr>
+          <p:cNvPr id="34" name="Text 32"/>
+          <p:cNvSpPr/>
+          <p:nvPr/>
+        </p:nvSpPr>
+        <p:spPr>
+          <a:xfrm>
+            <a:off x="6766560" y="5294376"/>
+            <a:ext cx="4480560" cy="585216"/>
+          </a:xfrm>
+          <a:prstGeom prst="rect">
+            <a:avLst/>
+          </a:prstGeom>
+          <a:noFill/>
+          <a:ln/>
+        </p:spPr>
+        <p:txBody>
+          <a:bodyPr wrap="square" lIns="0" tIns="0" rIns="0" bIns="0" rtlCol="0" anchor="ctr"/>
+          <a:lstStyle/>
+          <a:p>
+            <a:pPr indent="0" marL="0">
+              <a:lnSpc>
+                <a:spcPct val="103000"/>
+              </a:lnSpc>
+              <a:buNone/>
+            </a:pPr>
+            <a:r>
+              <a:rPr lang="en-US" sz="1100" dirty="0">
+                <a:solidFill>
+                  <a:srgbClr val="93A1AF"/>
+                </a:solidFill>
+                <a:latin typeface="Calibri" pitchFamily="34" charset="0"/>
+                <a:ea typeface="Calibri" pitchFamily="34" charset="-122"/>
+                <a:cs typeface="Calibri" pitchFamily="34" charset="-120"/>
+              </a:rPr>
+              <a:t>An audit sink that can take the service down is a liability. Write failures are logged and swallowed.</a:t>
+            </a:r>
+            <a:endParaRPr lang="en-US" sz="1100" dirty="0"/>
+          </a:p>
+        </p:txBody>
+      </p:sp>
+      <p:sp>
+        <p:nvSpPr>
+          <p:cNvPr id="35" name="Text 33"/>
+          <p:cNvSpPr/>
+          <p:nvPr/>
+        </p:nvSpPr>
+        <p:spPr>
+          <a:xfrm>
+            <a:off x="640080" y="6035040"/>
+            <a:ext cx="10881360" cy="274320"/>
+          </a:xfrm>
+          <a:prstGeom prst="rect">
+            <a:avLst/>
+          </a:prstGeom>
+          <a:noFill/>
+          <a:ln/>
+        </p:spPr>
+        <p:txBody>
+          <a:bodyPr wrap="square" lIns="0" tIns="0" rIns="0" bIns="0" rtlCol="0" anchor="ctr"/>
+          <a:lstStyle/>
+          <a:p>
+            <a:pPr indent="0" marL="0">
+              <a:buNone/>
+            </a:pPr>
+            <a:r>
+              <a:rPr lang="en-US" sz="1400" i="1" dirty="0">
                 <a:solidFill>
                   <a:srgbClr val="FF8A3D"/>
                 </a:solidFill>
@@ -12816,15 +14572,15 @@
                 <a:ea typeface="Calibri" pitchFamily="34" charset="-122"/>
                 <a:cs typeface="Calibri" pitchFamily="34" charset="-120"/>
               </a:rPr>
-              <a:t>Verified by a 29-test suite covering real computation, governance enforcement, injection resistance, retrieval quality, and abstention — all passing.</a:t>
-            </a:r>
-            <a:endParaRPr lang="en-US" sz="1450" dirty="0"/>
-          </a:p>
-        </p:txBody>
-      </p:sp>
-      <p:sp>
-        <p:nvSpPr>
-          <p:cNvPr id="16" name="Text 13"/>
+              <a:t>Kill the process, restart it, and the trail is still there — that is the difference between logging and evidence.</a:t>
+            </a:r>
+            <a:endParaRPr lang="en-US" sz="1400" dirty="0"/>
+          </a:p>
+        </p:txBody>
+      </p:sp>
+      <p:sp>
+        <p:nvSpPr>
+          <p:cNvPr id="36" name="Text 34"/>
           <p:cNvSpPr/>
           <p:nvPr/>
         </p:nvSpPr>
@@ -12863,7 +14619,7 @@
       </p:sp>
       <p:sp>
         <p:nvSpPr>
-          <p:cNvPr id="17" name="Text 14"/>
+          <p:cNvPr id="37" name="Text 35"/>
           <p:cNvSpPr/>
           <p:nvPr/>
         </p:nvSpPr>

--- a/IntelligenceStack_Executive_Deck.pptx
+++ b/IntelligenceStack_Executive_Deck.pptx
@@ -19,9 +19,10 @@
     <p:sldId id="267" r:id="rId13"/>
     <p:sldId id="268" r:id="rId14"/>
     <p:sldId id="269" r:id="rId15"/>
+    <p:sldId id="270" r:id="rId16"/>
   </p:sldIdLst>
   <p:notesMasterIdLst>
-    <p:notesMasterId r:id="rId16"/>
+    <p:notesMasterId r:id="rId17"/>
   </p:notesMasterIdLst>
   <p:sldSz cx="12191695" cy="6858000"/>
   <p:notesSz cx="6858000" cy="12191695"/>
@@ -516,8 +517,8 @@
             <a:r>
               <a:rPr lang="en-US" dirty="0"/>
               <a:t>Opening line: 'Every enterprise wants to point AI at its private data. The reason they hesitate is the same one every time — the moment an LLM can see the data, it can leak it or be tricked into destroying it. IntelligenceStack is a working answer to that, not a concept.'
-Set expectations: ~12 minutes of story, then a live demo you can poke at. The whole thing runs on a laptop and computes real answers from real data — nothing on these slides is mocked.
-Demo is already running: FastAPI backend on :8000, Streamlit control plane on :8501.</a:t>
+Set expectations: about twelve minutes of story, then a live demo you can poke at. Everything runs on a laptop, computes real answers from real data, and every figure on these slides is reproducible from a clone.
+Backend on :8000, control plane on :8501, both already running.</a:t>
             </a:r>
             <a:endParaRPr lang="en-US" dirty="0"/>
           </a:p>
@@ -605,9 +606,11 @@
           <a:p>
             <a:r>
               <a:rPr lang="en-US" dirty="0"/>
-              <a:t>For the technical people in the room. The histogram shows why the anomaly call is trustworthy: normal traffic clusters near 66ms, the 3σ line sits at 310ms, and the anomaly cohort lives in the far right tail. Nobody picked 310 — it's three standard deviations of the actual data.
-The three bullets are the engineering credibility: statistical definition, bound parameters, durable tracing. If a CTO or architect is evaluating this, these are the words that say it was built by someone who has shipped production data systems.
-Close on the tests: each claim on these slides has an automated test that fails loudly if it regresses — including one that asserts the agent keeps working when the audit sink is broken.</a:t>
+              <a:t>The CISO and Compliance slide, and the natural close to the live demo: you have just done eight things, now show that all eight are already on the record.
+The framing that matters: a control you cannot evidence is a control you cannot pass an audit with. Most AI governance stories stop at 'we have a policy'. This one produces a queryable record of every decision, who made it, and what it cost.
+Call out the refusal count deliberately. A denial is not embarrassing — it is the best evidence the control is live, and auditors read it that way.
+For a memorable beat: kill the API in front of them, restart it, reload the tab. Unchanged.
+Production note if asked: a Delta table with retention and access policy, or shipped to your SIEM. Same record shape.</a:t>
             </a:r>
             <a:endParaRPr lang="en-US" dirty="0"/>
           </a:p>
@@ -695,9 +698,9 @@
           <a:p>
             <a:r>
               <a:rPr lang="en-US" dirty="0"/>
-              <a:t>Pivot in tone here — you're done with how it works, now it's what it's worth. Four outcomes, each mapped to a number or a one-word promise the audience can repeat later.
-Lead with the one that matters most to THIS room. For a CFO, cost. For a CISO, unblocked adoption. For a business unit, days-to-seconds.
-The strongest strategic argument is the second tile: most enterprise GenAI initiatives don't fail on capability, they stall in security review. This architecture is what gets them unstuck — that's the real ROI, larger than any single use case.</a:t>
+              <a:t>For the technical people. The histogram shows why the anomaly call is trustworthy: normal traffic clusters near 66ms, the 3σ line sits at 310ms, and the anomaly cohort lives in the far right tail. Nobody picked 310 — it is three standard deviations of the actual data.
+The three bullets are the engineering credibility: statistical definition, bound parameters, continuous verification.
+The closing line usually gets a reaction from anyone who has maintained a demo: the build fails if the headline numbers drift, so the slides cannot quietly go stale.</a:t>
             </a:r>
             <a:endParaRPr lang="en-US" dirty="0"/>
           </a:p>
@@ -785,9 +788,9 @@
           <a:p>
             <a:r>
               <a:rPr lang="en-US" dirty="0"/>
-              <a:t>Don't read all five — that's death by list. Name the two seats that are actually in the room and let the rest sit as evidence of breadth.
-The meta-point: this isn't a security project OR a productivity project OR a cost project. It's one architecture where each stakeholder gets a different win from the same build. That's what makes it fundable — the cost is shared across five value cases.
-Use this slide to hand off to whoever owns the next step: 'Whichever of these is your priority, the pilot looks the same.'</a:t>
+              <a:t>Pivot in tone — you're done with how it works, now what it's worth. Four outcomes, each a number or a single word the audience can repeat later.
+Lead with whichever matters to THIS room: CFO hears cost, CISO hears unblocked adoption, a business unit hears days-to-seconds.
+The strongest strategic argument is the second tile. Most enterprise GenAI initiatives don't fail on capability, they stall in security review. This architecture is what gets them unstuck, and that is worth more than any single use case.</a:t>
             </a:r>
             <a:endParaRPr lang="en-US" dirty="0"/>
           </a:p>
@@ -875,9 +878,9 @@
           <a:p>
             <a:r>
               <a:rPr lang="en-US" dirty="0"/>
-              <a:t>The objection this slide kills: 'nice demo, but it's a toy — production is a rewrite.' No. The seams are deliberate and each is a one-line swap with an identical contract.
-Two rows are worth calling out. The vector index: sandbox uses TF-IDF with in-engine cosine, production uses bge-large on Mosaic AI — same storage layout, same query contract, same citations. And the audit log: append-only JSON locally, a Delta table with retention in production — the record shape does not change.
-So the pilot isn't 'rebuild for prod' — it's 'repoint at the workspace.'</a:t>
+              <a:t>Don't read all five — name the two seats actually in the room and let the rest sit as evidence of breadth.
+The meta-point: this is not a security project OR a productivity project OR a cost project. It is one architecture where each stakeholder gets a different win from the same build, which is what makes it fundable — the cost is shared across five value cases.
+Use this to hand off: 'Whichever of these is your priority, the pilot looks the same.'</a:t>
             </a:r>
             <a:endParaRPr lang="en-US" dirty="0"/>
           </a:p>
@@ -965,9 +968,9 @@
           <a:p>
             <a:r>
               <a:rPr lang="en-US" dirty="0"/>
-              <a:t>Land the plane on one sentence: the choice between AI capability and data governance was always a false one, and here's the proof running on a laptop.
-Then make the ask concrete with the three NEXT options — pick the one that matches who you're talking to. Don't leave the meeting without agreeing which dataset a pilot would point at.
-Invite them to break it: the repo is public and runs in four commands, and the figures on these slides reproduce exactly. An architecture you're willing to hand over and say 'try to get past the boundary' is a very different pitch from a slideware promise.</a:t>
+              <a:t>The objection this kills: 'nice demo, but production is a rewrite.' No — the seams are deliberate and each is a one-line swap with an identical contract.
+Three rows worth naming. The vector index: TF-IDF locally, bge-large on Mosaic AI in production, same storage layout and citations. The identity row: the principal directory becomes workspace identities and Unity Catalog row filters — the shape of the decision does not change. The audit log: append-only JSON locally, a Delta table with retention in production.
+So the pilot is not 'rebuild for prod', it is 'repoint at the workspace.'</a:t>
             </a:r>
             <a:endParaRPr lang="en-US" dirty="0"/>
           </a:p>
@@ -991,6 +994,96 @@
             <a:fld id="{F7021451-1387-4CA6-816F-3879F97B5CBC}" type="slidenum">
               <a:rPr lang="en-US"/>
               <a:t>14</a:t>
+            </a:fld>
+            <a:endParaRPr lang="en-US"/>
+          </a:p>
+        </p:txBody>
+      </p:sp>
+    </p:spTree>
+    <p:extLst>
+      <p:ext uri="{BB962C8B-B14F-4D97-AF65-F5344CB8AC3E}">
+        <p14:creationId xmlns:p14="http://schemas.microsoft.com/office/powerpoint/2010/main" val="1024086991"/>
+      </p:ext>
+    </p:extLst>
+  </p:cSld>
+  <p:clrMapOvr>
+    <a:masterClrMapping/>
+  </p:clrMapOvr>
+</p:notes>
+</file>
+
+<file path=ppt/notesSlides/notesSlide15.xml><?xml version="1.0" encoding="utf-8"?>
+<p:notes xmlns:a="http://schemas.openxmlformats.org/drawingml/2006/main" xmlns:r="http://schemas.openxmlformats.org/officeDocument/2006/relationships" xmlns:p="http://schemas.openxmlformats.org/presentationml/2006/main">
+  <p:cSld>
+    <p:spTree>
+      <p:nvGrpSpPr>
+        <p:cNvPr id="1" name=""/>
+        <p:cNvGrpSpPr/>
+        <p:nvPr/>
+      </p:nvGrpSpPr>
+      <p:grpSpPr>
+        <a:xfrm>
+          <a:off x="0" y="0"/>
+          <a:ext cx="0" cy="0"/>
+          <a:chOff x="0" y="0"/>
+          <a:chExt cx="0" cy="0"/>
+        </a:xfrm>
+      </p:grpSpPr>
+      <p:sp>
+        <p:nvSpPr>
+          <p:cNvPr id="2" name="Slide Image Placeholder 1"/>
+          <p:cNvSpPr>
+            <a:spLocks noGrp="1" noRot="1" noChangeAspect="1"/>
+          </p:cNvSpPr>
+          <p:nvPr>
+            <p:ph type="sldImg"/>
+          </p:nvPr>
+        </p:nvSpPr>
+        <p:spPr/>
+      </p:sp>
+      <p:sp>
+        <p:nvSpPr>
+          <p:cNvPr id="3" name="Notes Placeholder 2"/>
+          <p:cNvSpPr>
+            <a:spLocks noGrp="1"/>
+          </p:cNvSpPr>
+          <p:nvPr>
+            <p:ph type="body" idx="1"/>
+          </p:nvPr>
+        </p:nvSpPr>
+        <p:spPr/>
+        <p:txBody>
+          <a:bodyPr/>
+          <a:lstStyle/>
+          <a:p>
+            <a:r>
+              <a:rPr lang="en-US" dirty="0"/>
+              <a:t>Land on one sentence: the choice between AI capability and data governance was always a false one, and here is the proof running on a laptop.
+Make the ask concrete with the three NEXT options — pick the one matching who you're talking to. Don't leave without agreeing which dataset a pilot would point at.
+Invite them to break it: the repo is public, runs in four commands, and the figures on these slides reproduce exactly. An architecture you will hand over and say 'try to get past the boundary' is a very different pitch from a slideware promise.</a:t>
+            </a:r>
+            <a:endParaRPr lang="en-US" dirty="0"/>
+          </a:p>
+        </p:txBody>
+      </p:sp>
+      <p:sp>
+        <p:nvSpPr>
+          <p:cNvPr id="4" name="Slide Number Placeholder 3"/>
+          <p:cNvSpPr>
+            <a:spLocks noGrp="1"/>
+          </p:cNvSpPr>
+          <p:nvPr>
+            <p:ph type="sldNum" sz="quarter" idx="10"/>
+          </p:nvPr>
+        </p:nvSpPr>
+        <p:spPr/>
+        <p:txBody>
+          <a:bodyPr/>
+          <a:lstStyle/>
+          <a:p>
+            <a:fld id="{F7021451-1387-4CA6-816F-3879F97B5CBC}" type="slidenum">
+              <a:rPr lang="en-US"/>
+              <a:t>15</a:t>
             </a:fld>
             <a:endParaRPr lang="en-US"/>
           </a:p>
@@ -1055,9 +1148,9 @@
           <a:p>
             <a:r>
               <a:rPr lang="en-US" dirty="0"/>
-              <a:t>Frame these as the three objections you personally hear in every AI review. They are not hypothetical — each has a real headline behind it.
-The punchline is the last line: the industry's default answer (ship the data to the model) makes all three worse at once. That sets up the inversion on the next slide.
-Don't dwell — 45 seconds. The audience already believes this problem; you're establishing shared ground.</a:t>
+              <a:t>Frame these as the three objections you personally hear in every AI review. Each has a real headline behind it.
+The third one is the quiet killer and the one this project answers most completely: it is not enough to bound the model, you have to bound each person using it, and be able to prove both.
+Don't dwell — 45 seconds. The room already believes this problem; you're establishing shared ground.</a:t>
             </a:r>
             <a:endParaRPr lang="en-US" dirty="0"/>
           </a:p>
@@ -1145,9 +1238,9 @@
           <a:p>
             <a:r>
               <a:rPr lang="en-US" dirty="0"/>
-              <a:t>The vending-machine analogy lands well here: 'We don't give the AI keys to the warehouse. We give it a vending machine with a fixed set of buttons. It's very good at choosing the right button — but it physically cannot reach behind the glass.'
-The right-hand column is the whole thesis. Every later slide is evidence for one of those four lines.
-Note the last bullet says 'here is the evidence', not 'here is the allowlist' — since the Trust Center, you can show the actual record of what the AI did, not just what it was permitted to do.</a:t>
+              <a:t>The vending-machine analogy lands well: 'We don't give the AI keys to the warehouse. We give it a vending machine with fixed buttons. It's very good at choosing the right button — but it physically cannot reach behind the glass.'
+The right-hand column is the whole thesis; every later slide is evidence for one of those five lines.
+The last two are the ones that close a security review: entitlements per caller, and evidence rather than assurance.</a:t>
             </a:r>
             <a:endParaRPr lang="en-US" dirty="0"/>
           </a:p>
@@ -1235,9 +1328,9 @@
           <a:p>
             <a:r>
               <a:rPr lang="en-US" dirty="0"/>
-              <a:t>Walk the diagram left to right, but keep it to one sentence per numbered item — executives don't need the plumbing, they need to see there IS plumbing.
-The one line to land: the boundary sits between the agent and the data. The agent never touches tables directly; it can only ask the catalog to run a named, pre-approved function. Item 4 extends that same rule to unstructured knowledge, and item 5 makes every one of those decisions durable evidence.
-If someone asks 'is this really Databricks?' — yes: DLT, Unity Catalog, Liquid Clustering, Model Serving, Mosaic AI Vector Search. The sandbox swaps each for a local stand-in with the same contract.</a:t>
+              <a:t>Walk the diagram left to right, one sentence per numbered item. Executives don't need the plumbing, they need to see there IS plumbing.
+The line to land: the boundary sits between the agent and the data. The agent never touches tables; it asks the catalog to run a named, pre-approved function. Items 4 through 6 extend that same rule to unstructured knowledge, to the individual caller, and to the permanent record.
+If asked 'is this really Databricks?' — yes: DLT, Unity Catalog, Liquid Clustering, Model Serving, Mosaic AI Vector Search. The sandbox swaps each for a local stand-in with an identical contract.</a:t>
             </a:r>
             <a:endParaRPr lang="en-US" dirty="0"/>
           </a:p>
@@ -1325,10 +1418,10 @@
           <a:p>
             <a:r>
               <a:rPr lang="en-US" dirty="0"/>
-              <a:t>This is the switch-to-live-app slide. Leave it up while you alt-tab to the control plane at localhost:8501.
-Run order matters: lead with value (moves 1 and 2) so the room sees the point before the security material. Then 3, 4 and 5 answer 'but can I trust it?' — by trying to break it in front of them.
-For each move, read the trace panel aloud. Move 2 is the one to linger on — the trace shows TWO governance checks, one per tool.
-Then finish on the Trust Center: the five things you just did are already recorded. That closing beat is what turns a demo into an audit story.</a:t>
+              <a:t>This is the switch-to-live-app slide. Leave it up while you alt-tab to localhost:8501.
+Run the left column first so the room sees value before security theatre, then the right column to answer 'but can I trust it?' by trying to break it in front of them.
+If you are tight on time, cut Trend and Injection — Comparison already shows multi-call chaining, and Entitlement is the stronger security moment. Never cut Entitlement or the Trust Center; those are the two nobody else demos.
+Read the trace panel aloud each time: Intent Resolution, Governance Boundary Check, Execution. On Comparison and Hybrid the room can count two Granted entries.</a:t>
             </a:r>
             <a:endParaRPr lang="en-US" dirty="0"/>
           </a:p>
@@ -1416,9 +1509,9 @@
           <a:p>
             <a:r>
               <a:rPr lang="en-US" dirty="0"/>
-              <a:t>The headline: the agent did not retrieve a canned sentence. It called the anomaly function, got rows back, and phrased them. The chart is the same data, drawn independently — three biased-cohort customers separate cleanly from ~57 normal ones.
-The stat tiles are the 'so what': 82% of this customer's traffic is anomalous, at 6x normal latency. That is an actionable finding a business owner can act on today.
-The italic line matters for credibility: these numbers are reproducible, not screenshots. Anyone can clone and verify. Swap CUST_404 for CUST_405 live and watch it drop to 0%.</a:t>
+              <a:t>The headline: the agent did not retrieve a canned sentence. It called the anomaly function, got rows back, and phrased them. The chart is the same data drawn independently — three biased-cohort customers separate cleanly from about 57 normal ones.
+The stat tiles are the 'so what': 82% of this customer's traffic is anomalous at 6x normal latency. That is actionable today.
+The italic line is the credibility close. These are not screenshots — the build fails if they drift. Improvise by swapping CUST_404 for CUST_405 and watching it drop to zero.</a:t>
             </a:r>
             <a:endParaRPr lang="en-US" dirty="0"/>
           </a:p>
@@ -1506,9 +1599,10 @@
           <a:p>
             <a:r>
               <a:rPr lang="en-US" dirty="0"/>
-              <a:t>This is the slide that shows the architecture has matured beyond 'query a table'. A real operational question needs two different kinds of knowledge — a measurement and a procedure — and until now those lived in two different systems with two different access models.
-The key governance point, and say it explicitly: retrieval did not get a special exemption. It is a registered function on the same allowlist, its question is passed as a bound value, and it produced its OWN governance check. In the live trace the room can count two 'Granted' entries — and both are separately recorded in the audit trail.
-The closing line is the one to land: the number is from the lakehouse, the recommendation is from an approved document, and the model authored neither. It orchestrated.</a:t>
+              <a:t>This slide shows the architecture has matured past 'query one table'.
+The governance point, said explicitly: none of these tools got a special path. Each is registered on the same allowlist, each produces its OWN governance decision, and each lands its own audit record. In the live trace the room can literally count the Granted entries.
+The closing line is the architectural payoff and worth pausing on: the third governed function required no change to the boundary, the dispatcher, or the audit path. If adding a capability were a redesign, this pattern would not survive contact with a real backlog.
+If a technical person pushes: yes, a partially-entitled comparison fails closed — the analyst asking about one in-scope and one out-of-scope customer gets nothing, not half.</a:t>
             </a:r>
             <a:endParaRPr lang="en-US" dirty="0"/>
           </a:p>
@@ -1596,10 +1690,10 @@
           <a:p>
             <a:r>
               <a:rPr lang="en-US" dirty="0"/>
-              <a:t>This slide is aimed squarely at anyone who has been burned by a RAG pilot. Every one of them has seen a demo where the system cheerfully cites an irrelevant document, and it is the reason many of those pilots never shipped.
-Walk the chart left to right. The left panel is the trap: if you rank purely by similarity — which is what most RAG implementations do — the off-topic question WINS. That is measured on this corpus, not hypothetical.
-The right panel is the fix: require that the question's vocabulary is actually covered by the corpus. Off-topic falls below the line and the system declines.
-The maturity signal is knowing a retrieval system needs an abstention policy at all. Most teams discover this in production, after a bad answer reaches a customer.</a:t>
+              <a:t>Aimed squarely at anyone burned by a RAG pilot. They have all seen a system cheerfully cite an irrelevant document, and it is why many of those pilots never shipped.
+Walk the chart left to right. The left panel is the trap: rank purely by similarity — what most implementations do — and the off-topic question WINS. That is measured on this corpus, not hypothetical.
+The right panel is the fix: require the question's vocabulary to actually be covered. Off-topic falls below the line and the system declines.
+The maturity signal is knowing a retrieval system needs an abstention policy at all. Most teams learn that in production, after a bad answer reaches a customer.</a:t>
             </a:r>
             <a:endParaRPr lang="en-US" dirty="0"/>
           </a:p>
@@ -1687,11 +1781,10 @@
           <a:p>
             <a:r>
               <a:rPr lang="en-US" dirty="0"/>
-              <a:t>This is the CISO and Compliance slide, and it is the natural close to the live demo — you have just done five things, now show the room that all five are already on the record.
-The framing that matters: a control you cannot evidence is a control you cannot pass an audit with. Most AI governance stories stop at 'we have a policy'. This one produces a queryable record of every decision the boundary made, including every refusal.
-Call out the refusal count deliberately. A denial is not an error to be embarrassed about — it is the single best piece of evidence that the control is live and working, and auditors treat it that way.
-If you want a memorable beat: kill the API in front of them, restart it, and reload the tab. The trail is unchanged. That is what separates evidence from logging.
-Production note if asked: this is a Delta table with retention and access policy applied, or shipped to your SIEM — the record shape is identical.</a:t>
+              <a:t>This is the CISO slide, and the single most differentiating thing in the demo. Almost nobody's AI demo has a concept of who is asking.
+Walk the grid: the SRE sees both customers. The analyst, whose book is CUST_400 to 419, is answered for 404 and refused for 431 — that refusal is row-level security happening at the agent. The auditor is refused both, yet has full access to the Trust Center.
+Worth saying: that grid is not artwork. It is generated by calling the real policy engine, so if entitlements changed the slide would change with them.
+Do this one live if you do nothing else live — switching the Acting-as dropdown and re-asking the identical question is far more convincing than any diagram.</a:t>
             </a:r>
             <a:endParaRPr lang="en-US" dirty="0"/>
           </a:p>
@@ -2379,7 +2472,7 @@
                 <a:ea typeface="Calibri" pitchFamily="34" charset="-122"/>
                 <a:cs typeface="Calibri" pitchFamily="34" charset="-120"/>
               </a:rPr>
-              <a:t>github.com/atharvvani464/IntelligenceStack</a:t>
+              <a:t>github.com/atharvvani464/IntelligenceStack   ·   77 tests, green in CI</a:t>
             </a:r>
             <a:endParaRPr lang="en-US" sz="1300" dirty="0"/>
           </a:p>
@@ -2399,7 +2492,7 @@
     <p:bg>
       <p:bgPr>
         <a:solidFill>
-          <a:srgbClr val="0E1621"/>
+          <a:srgbClr val="0B121B"/>
         </a:solidFill>
       </p:bgPr>
     </p:bg>
@@ -2470,7 +2563,7 @@
                 <a:ea typeface="Calibri" pitchFamily="34" charset="-122"/>
                 <a:cs typeface="Calibri" pitchFamily="34" charset="-120"/>
               </a:rPr>
-              <a:t>UNDER THE HOOD</a:t>
+              <a:t>THE RECEIPTS</a:t>
             </a:r>
             <a:endParaRPr lang="en-US" sz="1200" dirty="0"/>
           </a:p>
@@ -2509,45 +2602,581 @@
                 <a:ea typeface="Cambria" pitchFamily="34" charset="-122"/>
                 <a:cs typeface="Cambria" pitchFamily="34" charset="-120"/>
               </a:rPr>
-              <a:t>Why the answers hold up</a:t>
+              <a:t>Proving it after the fact</a:t>
             </a:r>
             <a:endParaRPr lang="en-US" sz="3200" dirty="0"/>
           </a:p>
         </p:txBody>
       </p:sp>
-      <p:pic>
-        <p:nvPicPr>
-          <p:cNvPr id="5" name="Image 0" descr="/private/tmp/claude-501/-Users-atharvvani-Downloads-DataBricks/437ba0b1-41b9-48e1-95cf-333721d11260/scratchpad/deck_assets/latency_dist.png">    </p:cNvPr>
-          <p:cNvPicPr>
-            <a:picLocks noChangeAspect="1"/>
-          </p:cNvPicPr>
-          <p:nvPr/>
-        </p:nvPicPr>
-        <p:blipFill>
-          <a:blip r:embed="rId1"/>
-          <a:stretch>
-            <a:fillRect/>
-          </a:stretch>
-        </p:blipFill>
-        <p:spPr>
-          <a:xfrm>
-            <a:off x="640080" y="1828800"/>
-            <a:ext cx="6766560" cy="2926080"/>
-          </a:xfrm>
-          <a:prstGeom prst="rect">
-            <a:avLst/>
-          </a:prstGeom>
-        </p:spPr>
-      </p:pic>
-      <p:sp>
-        <p:nvSpPr>
-          <p:cNvPr id="6" name="Shape 3"/>
-          <p:cNvSpPr/>
-          <p:nvPr/>
-        </p:nvSpPr>
-        <p:spPr>
-          <a:xfrm>
-            <a:off x="7772400" y="1764792"/>
+      <p:sp>
+        <p:nvSpPr>
+          <p:cNvPr id="5" name="Text 3"/>
+          <p:cNvSpPr/>
+          <p:nvPr/>
+        </p:nvSpPr>
+        <p:spPr>
+          <a:xfrm>
+            <a:off x="640080" y="1783080"/>
+            <a:ext cx="10789920" cy="457200"/>
+          </a:xfrm>
+          <a:prstGeom prst="rect">
+            <a:avLst/>
+          </a:prstGeom>
+          <a:noFill/>
+          <a:ln/>
+        </p:spPr>
+        <p:txBody>
+          <a:bodyPr wrap="square" lIns="0" tIns="0" rIns="0" bIns="0" rtlCol="0" anchor="ctr"/>
+          <a:lstStyle/>
+          <a:p>
+            <a:pPr indent="0" marL="0">
+              <a:buNone/>
+            </a:pPr>
+            <a:r>
+              <a:rPr lang="en-US" sz="1550" dirty="0">
+                <a:solidFill>
+                  <a:srgbClr val="93A1AF"/>
+                </a:solidFill>
+                <a:latin typeface="Calibri" pitchFamily="34" charset="0"/>
+                <a:ea typeface="Calibri" pitchFamily="34" charset="-122"/>
+                <a:cs typeface="Calibri" pitchFamily="34" charset="-120"/>
+              </a:rPr>
+              <a:t>A control you cannot evidence is a control you cannot pass an audit with. Every decision — granted or refused, and by whom — is appended to a durable trail.</a:t>
+            </a:r>
+            <a:endParaRPr lang="en-US" sz="1550" dirty="0"/>
+          </a:p>
+        </p:txBody>
+      </p:sp>
+      <p:sp>
+        <p:nvSpPr>
+          <p:cNvPr id="6" name="Shape 4"/>
+          <p:cNvSpPr/>
+          <p:nvPr/>
+        </p:nvSpPr>
+        <p:spPr>
+          <a:xfrm>
+            <a:off x="640080" y="2331720"/>
+            <a:ext cx="2615184" cy="960120"/>
+          </a:xfrm>
+          <a:prstGeom prst="roundRect">
+            <a:avLst>
+              <a:gd name="adj" fmla="val 8571"/>
+            </a:avLst>
+          </a:prstGeom>
+          <a:solidFill>
+            <a:srgbClr val="18232F"/>
+          </a:solidFill>
+          <a:ln w="12700">
+            <a:solidFill>
+              <a:srgbClr val="2A3745"/>
+            </a:solidFill>
+            <a:prstDash val="solid"/>
+          </a:ln>
+          <a:effectLst>
+            <a:outerShdw sx="100000" sy="100000" kx="0" ky="0" algn="bl" rotWithShape="0" blurRad="114300" dist="38100" dir="5400000">
+              <a:srgbClr val="000000">
+                <a:alpha val="28000"/>
+              </a:srgbClr>
+            </a:outerShdw>
+          </a:effectLst>
+        </p:spPr>
+      </p:sp>
+      <p:sp>
+        <p:nvSpPr>
+          <p:cNvPr id="7" name="Text 5"/>
+          <p:cNvSpPr/>
+          <p:nvPr/>
+        </p:nvSpPr>
+        <p:spPr>
+          <a:xfrm>
+            <a:off x="868680" y="2395728"/>
+            <a:ext cx="2157984" cy="502920"/>
+          </a:xfrm>
+          <a:prstGeom prst="rect">
+            <a:avLst/>
+          </a:prstGeom>
+          <a:noFill/>
+          <a:ln/>
+        </p:spPr>
+        <p:txBody>
+          <a:bodyPr wrap="square" lIns="0" tIns="0" rIns="0" bIns="0" rtlCol="0" anchor="ctr"/>
+          <a:lstStyle/>
+          <a:p>
+            <a:pPr indent="0" marL="0">
+              <a:buNone/>
+            </a:pPr>
+            <a:r>
+              <a:rPr lang="en-US" sz="2500" b="1" dirty="0">
+                <a:solidFill>
+                  <a:srgbClr val="FF8A3D"/>
+                </a:solidFill>
+                <a:latin typeface="Cambria" pitchFamily="34" charset="0"/>
+                <a:ea typeface="Cambria" pitchFamily="34" charset="-122"/>
+                <a:cs typeface="Cambria" pitchFamily="34" charset="-120"/>
+              </a:rPr>
+              <a:t>9</a:t>
+            </a:r>
+            <a:endParaRPr lang="en-US" sz="2500" dirty="0"/>
+          </a:p>
+        </p:txBody>
+      </p:sp>
+      <p:sp>
+        <p:nvSpPr>
+          <p:cNvPr id="8" name="Text 6"/>
+          <p:cNvSpPr/>
+          <p:nvPr/>
+        </p:nvSpPr>
+        <p:spPr>
+          <a:xfrm>
+            <a:off x="868680" y="2889504"/>
+            <a:ext cx="2157984" cy="274320"/>
+          </a:xfrm>
+          <a:prstGeom prst="rect">
+            <a:avLst/>
+          </a:prstGeom>
+          <a:noFill/>
+          <a:ln/>
+        </p:spPr>
+        <p:txBody>
+          <a:bodyPr wrap="square" lIns="0" tIns="0" rIns="0" bIns="0" rtlCol="0" anchor="ctr"/>
+          <a:lstStyle/>
+          <a:p>
+            <a:pPr indent="0" marL="0">
+              <a:buNone/>
+            </a:pPr>
+            <a:r>
+              <a:rPr lang="en-US" sz="1050" b="1" spc="120" kern="0" dirty="0">
+                <a:solidFill>
+                  <a:srgbClr val="93A1AF"/>
+                </a:solidFill>
+                <a:latin typeface="Calibri" pitchFamily="34" charset="0"/>
+                <a:ea typeface="Calibri" pitchFamily="34" charset="-122"/>
+                <a:cs typeface="Calibri" pitchFamily="34" charset="-120"/>
+              </a:rPr>
+              <a:t>GOVERNED ACTIONS</a:t>
+            </a:r>
+            <a:endParaRPr lang="en-US" sz="1050" dirty="0"/>
+          </a:p>
+        </p:txBody>
+      </p:sp>
+      <p:sp>
+        <p:nvSpPr>
+          <p:cNvPr id="9" name="Shape 7"/>
+          <p:cNvSpPr/>
+          <p:nvPr/>
+        </p:nvSpPr>
+        <p:spPr>
+          <a:xfrm>
+            <a:off x="3429000" y="2331720"/>
+            <a:ext cx="2615184" cy="960120"/>
+          </a:xfrm>
+          <a:prstGeom prst="roundRect">
+            <a:avLst>
+              <a:gd name="adj" fmla="val 8571"/>
+            </a:avLst>
+          </a:prstGeom>
+          <a:solidFill>
+            <a:srgbClr val="18232F"/>
+          </a:solidFill>
+          <a:ln w="12700">
+            <a:solidFill>
+              <a:srgbClr val="2A3745"/>
+            </a:solidFill>
+            <a:prstDash val="solid"/>
+          </a:ln>
+          <a:effectLst>
+            <a:outerShdw sx="100000" sy="100000" kx="0" ky="0" algn="bl" rotWithShape="0" blurRad="114300" dist="38100" dir="5400000">
+              <a:srgbClr val="000000">
+                <a:alpha val="28000"/>
+              </a:srgbClr>
+            </a:outerShdw>
+          </a:effectLst>
+        </p:spPr>
+      </p:sp>
+      <p:sp>
+        <p:nvSpPr>
+          <p:cNvPr id="10" name="Text 8"/>
+          <p:cNvSpPr/>
+          <p:nvPr/>
+        </p:nvSpPr>
+        <p:spPr>
+          <a:xfrm>
+            <a:off x="3657600" y="2395728"/>
+            <a:ext cx="2157984" cy="502920"/>
+          </a:xfrm>
+          <a:prstGeom prst="rect">
+            <a:avLst/>
+          </a:prstGeom>
+          <a:noFill/>
+          <a:ln/>
+        </p:spPr>
+        <p:txBody>
+          <a:bodyPr wrap="square" lIns="0" tIns="0" rIns="0" bIns="0" rtlCol="0" anchor="ctr"/>
+          <a:lstStyle/>
+          <a:p>
+            <a:pPr indent="0" marL="0">
+              <a:buNone/>
+            </a:pPr>
+            <a:r>
+              <a:rPr lang="en-US" sz="2500" b="1" dirty="0">
+                <a:solidFill>
+                  <a:srgbClr val="FF8A3D"/>
+                </a:solidFill>
+                <a:latin typeface="Cambria" pitchFamily="34" charset="0"/>
+                <a:ea typeface="Cambria" pitchFamily="34" charset="-122"/>
+                <a:cs typeface="Cambria" pitchFamily="34" charset="-120"/>
+              </a:rPr>
+              <a:t>8</a:t>
+            </a:r>
+            <a:endParaRPr lang="en-US" sz="2500" dirty="0"/>
+          </a:p>
+        </p:txBody>
+      </p:sp>
+      <p:sp>
+        <p:nvSpPr>
+          <p:cNvPr id="11" name="Text 9"/>
+          <p:cNvSpPr/>
+          <p:nvPr/>
+        </p:nvSpPr>
+        <p:spPr>
+          <a:xfrm>
+            <a:off x="3657600" y="2889504"/>
+            <a:ext cx="2157984" cy="274320"/>
+          </a:xfrm>
+          <a:prstGeom prst="rect">
+            <a:avLst/>
+          </a:prstGeom>
+          <a:noFill/>
+          <a:ln/>
+        </p:spPr>
+        <p:txBody>
+          <a:bodyPr wrap="square" lIns="0" tIns="0" rIns="0" bIns="0" rtlCol="0" anchor="ctr"/>
+          <a:lstStyle/>
+          <a:p>
+            <a:pPr indent="0" marL="0">
+              <a:buNone/>
+            </a:pPr>
+            <a:r>
+              <a:rPr lang="en-US" sz="1050" b="1" spc="120" kern="0" dirty="0">
+                <a:solidFill>
+                  <a:srgbClr val="93A1AF"/>
+                </a:solidFill>
+                <a:latin typeface="Calibri" pitchFamily="34" charset="0"/>
+                <a:ea typeface="Calibri" pitchFamily="34" charset="-122"/>
+                <a:cs typeface="Calibri" pitchFamily="34" charset="-120"/>
+              </a:rPr>
+              <a:t>GRANTED</a:t>
+            </a:r>
+            <a:endParaRPr lang="en-US" sz="1050" dirty="0"/>
+          </a:p>
+        </p:txBody>
+      </p:sp>
+      <p:sp>
+        <p:nvSpPr>
+          <p:cNvPr id="12" name="Shape 10"/>
+          <p:cNvSpPr/>
+          <p:nvPr/>
+        </p:nvSpPr>
+        <p:spPr>
+          <a:xfrm>
+            <a:off x="6217920" y="2331720"/>
+            <a:ext cx="2615184" cy="960120"/>
+          </a:xfrm>
+          <a:prstGeom prst="roundRect">
+            <a:avLst>
+              <a:gd name="adj" fmla="val 8571"/>
+            </a:avLst>
+          </a:prstGeom>
+          <a:solidFill>
+            <a:srgbClr val="1F2C3A"/>
+          </a:solidFill>
+          <a:ln w="12700">
+            <a:solidFill>
+              <a:srgbClr val="2A3745"/>
+            </a:solidFill>
+            <a:prstDash val="solid"/>
+          </a:ln>
+          <a:effectLst>
+            <a:outerShdw sx="100000" sy="100000" kx="0" ky="0" algn="bl" rotWithShape="0" blurRad="114300" dist="38100" dir="5400000">
+              <a:srgbClr val="000000">
+                <a:alpha val="28000"/>
+              </a:srgbClr>
+            </a:outerShdw>
+          </a:effectLst>
+        </p:spPr>
+      </p:sp>
+      <p:sp>
+        <p:nvSpPr>
+          <p:cNvPr id="13" name="Text 11"/>
+          <p:cNvSpPr/>
+          <p:nvPr/>
+        </p:nvSpPr>
+        <p:spPr>
+          <a:xfrm>
+            <a:off x="6446520" y="2395728"/>
+            <a:ext cx="2157984" cy="502920"/>
+          </a:xfrm>
+          <a:prstGeom prst="rect">
+            <a:avLst/>
+          </a:prstGeom>
+          <a:noFill/>
+          <a:ln/>
+        </p:spPr>
+        <p:txBody>
+          <a:bodyPr wrap="square" lIns="0" tIns="0" rIns="0" bIns="0" rtlCol="0" anchor="ctr"/>
+          <a:lstStyle/>
+          <a:p>
+            <a:pPr indent="0" marL="0">
+              <a:buNone/>
+            </a:pPr>
+            <a:r>
+              <a:rPr lang="en-US" sz="2500" b="1" dirty="0">
+                <a:solidFill>
+                  <a:srgbClr val="F85149"/>
+                </a:solidFill>
+                <a:latin typeface="Cambria" pitchFamily="34" charset="0"/>
+                <a:ea typeface="Cambria" pitchFamily="34" charset="-122"/>
+                <a:cs typeface="Cambria" pitchFamily="34" charset="-120"/>
+              </a:rPr>
+              <a:t>1</a:t>
+            </a:r>
+            <a:endParaRPr lang="en-US" sz="2500" dirty="0"/>
+          </a:p>
+        </p:txBody>
+      </p:sp>
+      <p:sp>
+        <p:nvSpPr>
+          <p:cNvPr id="14" name="Text 12"/>
+          <p:cNvSpPr/>
+          <p:nvPr/>
+        </p:nvSpPr>
+        <p:spPr>
+          <a:xfrm>
+            <a:off x="6446520" y="2889504"/>
+            <a:ext cx="2157984" cy="274320"/>
+          </a:xfrm>
+          <a:prstGeom prst="rect">
+            <a:avLst/>
+          </a:prstGeom>
+          <a:noFill/>
+          <a:ln/>
+        </p:spPr>
+        <p:txBody>
+          <a:bodyPr wrap="square" lIns="0" tIns="0" rIns="0" bIns="0" rtlCol="0" anchor="ctr"/>
+          <a:lstStyle/>
+          <a:p>
+            <a:pPr indent="0" marL="0">
+              <a:buNone/>
+            </a:pPr>
+            <a:r>
+              <a:rPr lang="en-US" sz="1050" b="1" spc="120" kern="0" dirty="0">
+                <a:solidFill>
+                  <a:srgbClr val="93A1AF"/>
+                </a:solidFill>
+                <a:latin typeface="Calibri" pitchFamily="34" charset="0"/>
+                <a:ea typeface="Calibri" pitchFamily="34" charset="-122"/>
+                <a:cs typeface="Calibri" pitchFamily="34" charset="-120"/>
+              </a:rPr>
+              <a:t>DENIED</a:t>
+            </a:r>
+            <a:endParaRPr lang="en-US" sz="1050" dirty="0"/>
+          </a:p>
+        </p:txBody>
+      </p:sp>
+      <p:sp>
+        <p:nvSpPr>
+          <p:cNvPr id="15" name="Shape 13"/>
+          <p:cNvSpPr/>
+          <p:nvPr/>
+        </p:nvSpPr>
+        <p:spPr>
+          <a:xfrm>
+            <a:off x="9006840" y="2331720"/>
+            <a:ext cx="2615184" cy="960120"/>
+          </a:xfrm>
+          <a:prstGeom prst="roundRect">
+            <a:avLst>
+              <a:gd name="adj" fmla="val 8571"/>
+            </a:avLst>
+          </a:prstGeom>
+          <a:solidFill>
+            <a:srgbClr val="18232F"/>
+          </a:solidFill>
+          <a:ln w="12700">
+            <a:solidFill>
+              <a:srgbClr val="2A3745"/>
+            </a:solidFill>
+            <a:prstDash val="solid"/>
+          </a:ln>
+          <a:effectLst>
+            <a:outerShdw sx="100000" sy="100000" kx="0" ky="0" algn="bl" rotWithShape="0" blurRad="114300" dist="38100" dir="5400000">
+              <a:srgbClr val="000000">
+                <a:alpha val="28000"/>
+              </a:srgbClr>
+            </a:outerShdw>
+          </a:effectLst>
+        </p:spPr>
+      </p:sp>
+      <p:sp>
+        <p:nvSpPr>
+          <p:cNvPr id="16" name="Text 14"/>
+          <p:cNvSpPr/>
+          <p:nvPr/>
+        </p:nvSpPr>
+        <p:spPr>
+          <a:xfrm>
+            <a:off x="9235440" y="2395728"/>
+            <a:ext cx="2157984" cy="502920"/>
+          </a:xfrm>
+          <a:prstGeom prst="rect">
+            <a:avLst/>
+          </a:prstGeom>
+          <a:noFill/>
+          <a:ln/>
+        </p:spPr>
+        <p:txBody>
+          <a:bodyPr wrap="square" lIns="0" tIns="0" rIns="0" bIns="0" rtlCol="0" anchor="ctr"/>
+          <a:lstStyle/>
+          <a:p>
+            <a:pPr indent="0" marL="0">
+              <a:buNone/>
+            </a:pPr>
+            <a:r>
+              <a:rPr lang="en-US" sz="2500" b="1" dirty="0">
+                <a:solidFill>
+                  <a:srgbClr val="FF8A3D"/>
+                </a:solidFill>
+                <a:latin typeface="Cambria" pitchFamily="34" charset="0"/>
+                <a:ea typeface="Cambria" pitchFamily="34" charset="-122"/>
+                <a:cs typeface="Cambria" pitchFamily="34" charset="-120"/>
+              </a:rPr>
+              <a:t>3 ms</a:t>
+            </a:r>
+            <a:endParaRPr lang="en-US" sz="2500" dirty="0"/>
+          </a:p>
+        </p:txBody>
+      </p:sp>
+      <p:sp>
+        <p:nvSpPr>
+          <p:cNvPr id="17" name="Text 15"/>
+          <p:cNvSpPr/>
+          <p:nvPr/>
+        </p:nvSpPr>
+        <p:spPr>
+          <a:xfrm>
+            <a:off x="9235440" y="2889504"/>
+            <a:ext cx="2157984" cy="274320"/>
+          </a:xfrm>
+          <a:prstGeom prst="rect">
+            <a:avLst/>
+          </a:prstGeom>
+          <a:noFill/>
+          <a:ln/>
+        </p:spPr>
+        <p:txBody>
+          <a:bodyPr wrap="square" lIns="0" tIns="0" rIns="0" bIns="0" rtlCol="0" anchor="ctr"/>
+          <a:lstStyle/>
+          <a:p>
+            <a:pPr indent="0" marL="0">
+              <a:buNone/>
+            </a:pPr>
+            <a:r>
+              <a:rPr lang="en-US" sz="1050" b="1" spc="120" kern="0" dirty="0">
+                <a:solidFill>
+                  <a:srgbClr val="93A1AF"/>
+                </a:solidFill>
+                <a:latin typeface="Calibri" pitchFamily="34" charset="0"/>
+                <a:ea typeface="Calibri" pitchFamily="34" charset="-122"/>
+                <a:cs typeface="Calibri" pitchFamily="34" charset="-120"/>
+              </a:rPr>
+              <a:t>P50 LATENCY</a:t>
+            </a:r>
+            <a:endParaRPr lang="en-US" sz="1050" dirty="0"/>
+          </a:p>
+        </p:txBody>
+      </p:sp>
+      <p:sp>
+        <p:nvSpPr>
+          <p:cNvPr id="18" name="Text 16"/>
+          <p:cNvSpPr/>
+          <p:nvPr/>
+        </p:nvSpPr>
+        <p:spPr>
+          <a:xfrm>
+            <a:off x="640080" y="3364992"/>
+            <a:ext cx="10881360" cy="256032"/>
+          </a:xfrm>
+          <a:prstGeom prst="rect">
+            <a:avLst/>
+          </a:prstGeom>
+          <a:noFill/>
+          <a:ln/>
+        </p:spPr>
+        <p:txBody>
+          <a:bodyPr wrap="square" lIns="0" tIns="0" rIns="0" bIns="0" rtlCol="0" anchor="ctr"/>
+          <a:lstStyle/>
+          <a:p>
+            <a:pPr indent="0" marL="0">
+              <a:buNone/>
+            </a:pPr>
+            <a:r>
+              <a:rPr lang="en-US" sz="1150" i="1" dirty="0">
+                <a:solidFill>
+                  <a:srgbClr val="6C7C8A"/>
+                </a:solidFill>
+                <a:latin typeface="Calibri" pitchFamily="34" charset="0"/>
+                <a:ea typeface="Calibri" pitchFamily="34" charset="-122"/>
+                <a:cs typeface="Calibri" pitchFamily="34" charset="-120"/>
+              </a:rPr>
+              <a:t>a live Trust Center reading — refusals and timings included</a:t>
+            </a:r>
+            <a:endParaRPr lang="en-US" sz="1150" dirty="0"/>
+          </a:p>
+        </p:txBody>
+      </p:sp>
+      <p:sp>
+        <p:nvSpPr>
+          <p:cNvPr id="19" name="Shape 17"/>
+          <p:cNvSpPr/>
+          <p:nvPr/>
+        </p:nvSpPr>
+        <p:spPr>
+          <a:xfrm>
+            <a:off x="640080" y="3675888"/>
+            <a:ext cx="5257800" cy="1051560"/>
+          </a:xfrm>
+          <a:prstGeom prst="roundRect">
+            <a:avLst>
+              <a:gd name="adj" fmla="val 7826"/>
+            </a:avLst>
+          </a:prstGeom>
+          <a:solidFill>
+            <a:srgbClr val="18232F"/>
+          </a:solidFill>
+          <a:ln w="12700">
+            <a:solidFill>
+              <a:srgbClr val="2A3745"/>
+            </a:solidFill>
+            <a:prstDash val="solid"/>
+          </a:ln>
+          <a:effectLst>
+            <a:outerShdw sx="100000" sy="100000" kx="0" ky="0" algn="bl" rotWithShape="0" blurRad="114300" dist="38100" dir="5400000">
+              <a:srgbClr val="000000">
+                <a:alpha val="28000"/>
+              </a:srgbClr>
+            </a:outerShdw>
+          </a:effectLst>
+        </p:spPr>
+      </p:sp>
+      <p:sp>
+        <p:nvSpPr>
+          <p:cNvPr id="20" name="Shape 18"/>
+          <p:cNvSpPr/>
+          <p:nvPr/>
+        </p:nvSpPr>
+        <p:spPr>
+          <a:xfrm>
+            <a:off x="914400" y="3895344"/>
             <a:ext cx="146304" cy="146304"/>
           </a:xfrm>
           <a:prstGeom prst="ellipse">
@@ -2561,30 +3190,30 @@
       </p:sp>
       <p:sp>
         <p:nvSpPr>
-          <p:cNvPr id="7" name="Text 4"/>
-          <p:cNvSpPr/>
-          <p:nvPr/>
-        </p:nvSpPr>
-        <p:spPr>
-          <a:xfrm>
-            <a:off x="8046720" y="1645920"/>
-            <a:ext cx="3474720" cy="365760"/>
-          </a:xfrm>
-          <a:prstGeom prst="rect">
-            <a:avLst/>
-          </a:prstGeom>
-          <a:noFill/>
-          <a:ln/>
-        </p:spPr>
-        <p:txBody>
-          <a:bodyPr wrap="square" lIns="0" tIns="0" rIns="0" bIns="0" rtlCol="0" anchor="ctr"/>
-          <a:lstStyle/>
-          <a:p>
-            <a:pPr indent="0" marL="0">
-              <a:buNone/>
-            </a:pPr>
-            <a:r>
-              <a:rPr lang="en-US" sz="1550" b="1" dirty="0">
+          <p:cNvPr id="21" name="Text 19"/>
+          <p:cNvSpPr/>
+          <p:nvPr/>
+        </p:nvSpPr>
+        <p:spPr>
+          <a:xfrm>
+            <a:off x="1188720" y="3785616"/>
+            <a:ext cx="4480560" cy="292608"/>
+          </a:xfrm>
+          <a:prstGeom prst="rect">
+            <a:avLst/>
+          </a:prstGeom>
+          <a:noFill/>
+          <a:ln/>
+        </p:spPr>
+        <p:txBody>
+          <a:bodyPr wrap="square" lIns="0" tIns="0" rIns="0" bIns="0" rtlCol="0" anchor="ctr"/>
+          <a:lstStyle/>
+          <a:p>
+            <a:pPr indent="0" marL="0">
+              <a:buNone/>
+            </a:pPr>
+            <a:r>
+              <a:rPr lang="en-US" sz="1400" b="1" dirty="0">
                 <a:solidFill>
                   <a:srgbClr val="E9EEF3"/>
                 </a:solidFill>
@@ -2592,22 +3221,22 @@
                 <a:ea typeface="Calibri" pitchFamily="34" charset="-122"/>
                 <a:cs typeface="Calibri" pitchFamily="34" charset="-120"/>
               </a:rPr>
-              <a:t>Statistical, not hard-coded</a:t>
-            </a:r>
-            <a:endParaRPr lang="en-US" sz="1550" dirty="0"/>
-          </a:p>
-        </p:txBody>
-      </p:sp>
-      <p:sp>
-        <p:nvSpPr>
-          <p:cNvPr id="8" name="Text 5"/>
-          <p:cNvSpPr/>
-          <p:nvPr/>
-        </p:nvSpPr>
-        <p:spPr>
-          <a:xfrm>
-            <a:off x="8046720" y="2029968"/>
-            <a:ext cx="3474720" cy="822960"/>
+              <a:t>Append-only</a:t>
+            </a:r>
+            <a:endParaRPr lang="en-US" sz="1400" dirty="0"/>
+          </a:p>
+        </p:txBody>
+      </p:sp>
+      <p:sp>
+        <p:nvSpPr>
+          <p:cNvPr id="22" name="Text 20"/>
+          <p:cNvSpPr/>
+          <p:nvPr/>
+        </p:nvSpPr>
+        <p:spPr>
+          <a:xfrm>
+            <a:off x="1188720" y="4078224"/>
+            <a:ext cx="4480560" cy="585216"/>
           </a:xfrm>
           <a:prstGeom prst="rect">
             <a:avLst/>
@@ -2621,12 +3250,12 @@
           <a:p>
             <a:pPr indent="0" marL="0">
               <a:lnSpc>
-                <a:spcPct val="108000"/>
+                <a:spcPct val="103000"/>
               </a:lnSpc>
               <a:buNone/>
             </a:pPr>
             <a:r>
-              <a:rPr lang="en-US" sz="1250" dirty="0">
+              <a:rPr lang="en-US" sz="1100" dirty="0">
                 <a:solidFill>
                   <a:srgbClr val="93A1AF"/>
                 </a:solidFill>
@@ -2634,21 +3263,55 @@
                 <a:ea typeface="Calibri" pitchFamily="34" charset="-122"/>
                 <a:cs typeface="Calibri" pitchFamily="34" charset="-120"/>
               </a:rPr>
-              <a:t>Anomalies are events beyond 3σ of the live population — the threshold moves with the data, not a magic number.</a:t>
-            </a:r>
-            <a:endParaRPr lang="en-US" sz="1250" dirty="0"/>
-          </a:p>
-        </p:txBody>
-      </p:sp>
-      <p:sp>
-        <p:nvSpPr>
-          <p:cNvPr id="9" name="Shape 6"/>
-          <p:cNvSpPr/>
-          <p:nvPr/>
-        </p:nvSpPr>
-        <p:spPr>
-          <a:xfrm>
-            <a:off x="7772400" y="3099816"/>
+              <a:t>Records are never rewritten. A log you can edit in place is not evidence — and it can be tailed straight to a SIEM.</a:t>
+            </a:r>
+            <a:endParaRPr lang="en-US" sz="1100" dirty="0"/>
+          </a:p>
+        </p:txBody>
+      </p:sp>
+      <p:sp>
+        <p:nvSpPr>
+          <p:cNvPr id="23" name="Shape 21"/>
+          <p:cNvSpPr/>
+          <p:nvPr/>
+        </p:nvSpPr>
+        <p:spPr>
+          <a:xfrm>
+            <a:off x="6217920" y="3675888"/>
+            <a:ext cx="5257800" cy="1051560"/>
+          </a:xfrm>
+          <a:prstGeom prst="roundRect">
+            <a:avLst>
+              <a:gd name="adj" fmla="val 7826"/>
+            </a:avLst>
+          </a:prstGeom>
+          <a:solidFill>
+            <a:srgbClr val="18232F"/>
+          </a:solidFill>
+          <a:ln w="12700">
+            <a:solidFill>
+              <a:srgbClr val="2A3745"/>
+            </a:solidFill>
+            <a:prstDash val="solid"/>
+          </a:ln>
+          <a:effectLst>
+            <a:outerShdw sx="100000" sy="100000" kx="0" ky="0" algn="bl" rotWithShape="0" blurRad="114300" dist="38100" dir="5400000">
+              <a:srgbClr val="000000">
+                <a:alpha val="28000"/>
+              </a:srgbClr>
+            </a:outerShdw>
+          </a:effectLst>
+        </p:spPr>
+      </p:sp>
+      <p:sp>
+        <p:nvSpPr>
+          <p:cNvPr id="24" name="Shape 22"/>
+          <p:cNvSpPr/>
+          <p:nvPr/>
+        </p:nvSpPr>
+        <p:spPr>
+          <a:xfrm>
+            <a:off x="6492240" y="3895344"/>
             <a:ext cx="146304" cy="146304"/>
           </a:xfrm>
           <a:prstGeom prst="ellipse">
@@ -2662,30 +3325,30 @@
       </p:sp>
       <p:sp>
         <p:nvSpPr>
-          <p:cNvPr id="10" name="Text 7"/>
-          <p:cNvSpPr/>
-          <p:nvPr/>
-        </p:nvSpPr>
-        <p:spPr>
-          <a:xfrm>
-            <a:off x="8046720" y="2980944"/>
-            <a:ext cx="3474720" cy="365760"/>
-          </a:xfrm>
-          <a:prstGeom prst="rect">
-            <a:avLst/>
-          </a:prstGeom>
-          <a:noFill/>
-          <a:ln/>
-        </p:spPr>
-        <p:txBody>
-          <a:bodyPr wrap="square" lIns="0" tIns="0" rIns="0" bIns="0" rtlCol="0" anchor="ctr"/>
-          <a:lstStyle/>
-          <a:p>
-            <a:pPr indent="0" marL="0">
-              <a:buNone/>
-            </a:pPr>
-            <a:r>
-              <a:rPr lang="en-US" sz="1550" b="1" dirty="0">
+          <p:cNvPr id="25" name="Text 23"/>
+          <p:cNvSpPr/>
+          <p:nvPr/>
+        </p:nvSpPr>
+        <p:spPr>
+          <a:xfrm>
+            <a:off x="6766560" y="3785616"/>
+            <a:ext cx="4480560" cy="292608"/>
+          </a:xfrm>
+          <a:prstGeom prst="rect">
+            <a:avLst/>
+          </a:prstGeom>
+          <a:noFill/>
+          <a:ln/>
+        </p:spPr>
+        <p:txBody>
+          <a:bodyPr wrap="square" lIns="0" tIns="0" rIns="0" bIns="0" rtlCol="0" anchor="ctr"/>
+          <a:lstStyle/>
+          <a:p>
+            <a:pPr indent="0" marL="0">
+              <a:buNone/>
+            </a:pPr>
+            <a:r>
+              <a:rPr lang="en-US" sz="1400" b="1" dirty="0">
                 <a:solidFill>
                   <a:srgbClr val="E9EEF3"/>
                 </a:solidFill>
@@ -2693,22 +3356,22 @@
                 <a:ea typeface="Calibri" pitchFamily="34" charset="-122"/>
                 <a:cs typeface="Calibri" pitchFamily="34" charset="-120"/>
               </a:rPr>
-              <a:t>Parameter-bound execution</a:t>
-            </a:r>
-            <a:endParaRPr lang="en-US" sz="1550" dirty="0"/>
-          </a:p>
-        </p:txBody>
-      </p:sp>
-      <p:sp>
-        <p:nvSpPr>
-          <p:cNvPr id="11" name="Text 8"/>
-          <p:cNvSpPr/>
-          <p:nvPr/>
-        </p:nvSpPr>
-        <p:spPr>
-          <a:xfrm>
-            <a:off x="8046720" y="3364992"/>
-            <a:ext cx="3474720" cy="822960"/>
+              <a:t>It records who</a:t>
+            </a:r>
+            <a:endParaRPr lang="en-US" sz="1400" dirty="0"/>
+          </a:p>
+        </p:txBody>
+      </p:sp>
+      <p:sp>
+        <p:nvSpPr>
+          <p:cNvPr id="26" name="Text 24"/>
+          <p:cNvSpPr/>
+          <p:nvPr/>
+        </p:nvSpPr>
+        <p:spPr>
+          <a:xfrm>
+            <a:off x="6766560" y="4078224"/>
+            <a:ext cx="4480560" cy="585216"/>
           </a:xfrm>
           <a:prstGeom prst="rect">
             <a:avLst/>
@@ -2722,12 +3385,12 @@
           <a:p>
             <a:pPr indent="0" marL="0">
               <a:lnSpc>
-                <a:spcPct val="108000"/>
+                <a:spcPct val="103000"/>
               </a:lnSpc>
               <a:buNone/>
             </a:pPr>
             <a:r>
-              <a:rPr lang="en-US" sz="1250" dirty="0">
+              <a:rPr lang="en-US" sz="1100" dirty="0">
                 <a:solidFill>
                   <a:srgbClr val="93A1AF"/>
                 </a:solidFill>
@@ -2735,21 +3398,55 @@
                 <a:ea typeface="Calibri" pitchFamily="34" charset="-122"/>
                 <a:cs typeface="Calibri" pitchFamily="34" charset="-120"/>
               </a:rPr>
-              <a:t>Values are bound, never interpolated — a hostile input matches no rows and cannot reshape a query.</a:t>
-            </a:r>
-            <a:endParaRPr lang="en-US" sz="1250" dirty="0"/>
-          </a:p>
-        </p:txBody>
-      </p:sp>
-      <p:sp>
-        <p:nvSpPr>
-          <p:cNvPr id="12" name="Shape 9"/>
-          <p:cNvSpPr/>
-          <p:nvPr/>
-        </p:nvSpPr>
-        <p:spPr>
-          <a:xfrm>
-            <a:off x="7772400" y="4434840"/>
+              <a:t>Each row names the calling principal and their role, so “who ran this?” is a query, not an investigation.</a:t>
+            </a:r>
+            <a:endParaRPr lang="en-US" sz="1100" dirty="0"/>
+          </a:p>
+        </p:txBody>
+      </p:sp>
+      <p:sp>
+        <p:nvSpPr>
+          <p:cNvPr id="27" name="Shape 25"/>
+          <p:cNvSpPr/>
+          <p:nvPr/>
+        </p:nvSpPr>
+        <p:spPr>
+          <a:xfrm>
+            <a:off x="640080" y="4892040"/>
+            <a:ext cx="5257800" cy="1051560"/>
+          </a:xfrm>
+          <a:prstGeom prst="roundRect">
+            <a:avLst>
+              <a:gd name="adj" fmla="val 7826"/>
+            </a:avLst>
+          </a:prstGeom>
+          <a:solidFill>
+            <a:srgbClr val="18232F"/>
+          </a:solidFill>
+          <a:ln w="12700">
+            <a:solidFill>
+              <a:srgbClr val="2A3745"/>
+            </a:solidFill>
+            <a:prstDash val="solid"/>
+          </a:ln>
+          <a:effectLst>
+            <a:outerShdw sx="100000" sy="100000" kx="0" ky="0" algn="bl" rotWithShape="0" blurRad="114300" dist="38100" dir="5400000">
+              <a:srgbClr val="000000">
+                <a:alpha val="28000"/>
+              </a:srgbClr>
+            </a:outerShdw>
+          </a:effectLst>
+        </p:spPr>
+      </p:sp>
+      <p:sp>
+        <p:nvSpPr>
+          <p:cNvPr id="28" name="Shape 26"/>
+          <p:cNvSpPr/>
+          <p:nvPr/>
+        </p:nvSpPr>
+        <p:spPr>
+          <a:xfrm>
+            <a:off x="914400" y="5111496"/>
             <a:ext cx="146304" cy="146304"/>
           </a:xfrm>
           <a:prstGeom prst="ellipse">
@@ -2763,30 +3460,30 @@
       </p:sp>
       <p:sp>
         <p:nvSpPr>
-          <p:cNvPr id="13" name="Text 10"/>
-          <p:cNvSpPr/>
-          <p:nvPr/>
-        </p:nvSpPr>
-        <p:spPr>
-          <a:xfrm>
-            <a:off x="8046720" y="4315968"/>
-            <a:ext cx="3474720" cy="365760"/>
-          </a:xfrm>
-          <a:prstGeom prst="rect">
-            <a:avLst/>
-          </a:prstGeom>
-          <a:noFill/>
-          <a:ln/>
-        </p:spPr>
-        <p:txBody>
-          <a:bodyPr wrap="square" lIns="0" tIns="0" rIns="0" bIns="0" rtlCol="0" anchor="ctr"/>
-          <a:lstStyle/>
-          <a:p>
-            <a:pPr indent="0" marL="0">
-              <a:buNone/>
-            </a:pPr>
-            <a:r>
-              <a:rPr lang="en-US" sz="1550" b="1" dirty="0">
+          <p:cNvPr id="29" name="Text 27"/>
+          <p:cNvSpPr/>
+          <p:nvPr/>
+        </p:nvSpPr>
+        <p:spPr>
+          <a:xfrm>
+            <a:off x="1188720" y="5001768"/>
+            <a:ext cx="4480560" cy="292608"/>
+          </a:xfrm>
+          <a:prstGeom prst="rect">
+            <a:avLst/>
+          </a:prstGeom>
+          <a:noFill/>
+          <a:ln/>
+        </p:spPr>
+        <p:txBody>
+          <a:bodyPr wrap="square" lIns="0" tIns="0" rIns="0" bIns="0" rtlCol="0" anchor="ctr"/>
+          <a:lstStyle/>
+          <a:p>
+            <a:pPr indent="0" marL="0">
+              <a:buNone/>
+            </a:pPr>
+            <a:r>
+              <a:rPr lang="en-US" sz="1400" b="1" dirty="0">
                 <a:solidFill>
                   <a:srgbClr val="E9EEF3"/>
                 </a:solidFill>
@@ -2794,22 +3491,22 @@
                 <a:ea typeface="Calibri" pitchFamily="34" charset="-122"/>
                 <a:cs typeface="Calibri" pitchFamily="34" charset="-120"/>
               </a:rPr>
-              <a:t>Every step is traced and kept</a:t>
-            </a:r>
-            <a:endParaRPr lang="en-US" sz="1550" dirty="0"/>
-          </a:p>
-        </p:txBody>
-      </p:sp>
-      <p:sp>
-        <p:nvSpPr>
-          <p:cNvPr id="14" name="Text 11"/>
-          <p:cNvSpPr/>
-          <p:nvPr/>
-        </p:nvSpPr>
-        <p:spPr>
-          <a:xfrm>
-            <a:off x="8046720" y="4700016"/>
-            <a:ext cx="3474720" cy="822960"/>
+              <a:t>Refusals are the point</a:t>
+            </a:r>
+            <a:endParaRPr lang="en-US" sz="1400" dirty="0"/>
+          </a:p>
+        </p:txBody>
+      </p:sp>
+      <p:sp>
+        <p:nvSpPr>
+          <p:cNvPr id="30" name="Text 28"/>
+          <p:cNvSpPr/>
+          <p:nvPr/>
+        </p:nvSpPr>
+        <p:spPr>
+          <a:xfrm>
+            <a:off x="1188720" y="5294376"/>
+            <a:ext cx="4480560" cy="585216"/>
           </a:xfrm>
           <a:prstGeom prst="rect">
             <a:avLst/>
@@ -2823,12 +3520,12 @@
           <a:p>
             <a:pPr indent="0" marL="0">
               <a:lnSpc>
-                <a:spcPct val="108000"/>
+                <a:spcPct val="103000"/>
               </a:lnSpc>
               <a:buNone/>
             </a:pPr>
             <a:r>
-              <a:rPr lang="en-US" sz="1250" dirty="0">
+              <a:rPr lang="en-US" sz="1100" dirty="0">
                 <a:solidFill>
                   <a:srgbClr val="93A1AF"/>
                 </a:solidFill>
@@ -2836,38 +3533,173 @@
                 <a:ea typeface="Calibri" pitchFamily="34" charset="-122"/>
                 <a:cs typeface="Calibri" pitchFamily="34" charset="-120"/>
               </a:rPr>
-              <a:t>Intent, each governance decision, execution, synthesis — recorded live and persisted for audit.</a:t>
-            </a:r>
-            <a:endParaRPr lang="en-US" sz="1250" dirty="0"/>
-          </a:p>
-        </p:txBody>
-      </p:sp>
-      <p:sp>
-        <p:nvSpPr>
-          <p:cNvPr id="15" name="Text 12"/>
-          <p:cNvSpPr/>
-          <p:nvPr/>
-        </p:nvSpPr>
-        <p:spPr>
-          <a:xfrm>
-            <a:off x="640080" y="5943600"/>
-            <a:ext cx="10881360" cy="457200"/>
-          </a:xfrm>
-          <a:prstGeom prst="rect">
-            <a:avLst/>
-          </a:prstGeom>
-          <a:noFill/>
-          <a:ln/>
-        </p:spPr>
-        <p:txBody>
-          <a:bodyPr wrap="square" lIns="0" tIns="0" rIns="0" bIns="0" rtlCol="0" anchor="ctr"/>
-          <a:lstStyle/>
-          <a:p>
-            <a:pPr indent="0" marL="0">
-              <a:buNone/>
-            </a:pPr>
-            <a:r>
-              <a:rPr lang="en-US" sz="1450" i="1" dirty="0">
+              <a:t>A denial is the control working. It is kept with the control that made it and the request that triggered it.</a:t>
+            </a:r>
+            <a:endParaRPr lang="en-US" sz="1100" dirty="0"/>
+          </a:p>
+        </p:txBody>
+      </p:sp>
+      <p:sp>
+        <p:nvSpPr>
+          <p:cNvPr id="31" name="Shape 29"/>
+          <p:cNvSpPr/>
+          <p:nvPr/>
+        </p:nvSpPr>
+        <p:spPr>
+          <a:xfrm>
+            <a:off x="6217920" y="4892040"/>
+            <a:ext cx="5257800" cy="1051560"/>
+          </a:xfrm>
+          <a:prstGeom prst="roundRect">
+            <a:avLst>
+              <a:gd name="adj" fmla="val 7826"/>
+            </a:avLst>
+          </a:prstGeom>
+          <a:solidFill>
+            <a:srgbClr val="18232F"/>
+          </a:solidFill>
+          <a:ln w="12700">
+            <a:solidFill>
+              <a:srgbClr val="2A3745"/>
+            </a:solidFill>
+            <a:prstDash val="solid"/>
+          </a:ln>
+          <a:effectLst>
+            <a:outerShdw sx="100000" sy="100000" kx="0" ky="0" algn="bl" rotWithShape="0" blurRad="114300" dist="38100" dir="5400000">
+              <a:srgbClr val="000000">
+                <a:alpha val="28000"/>
+              </a:srgbClr>
+            </a:outerShdw>
+          </a:effectLst>
+        </p:spPr>
+      </p:sp>
+      <p:sp>
+        <p:nvSpPr>
+          <p:cNvPr id="32" name="Shape 30"/>
+          <p:cNvSpPr/>
+          <p:nvPr/>
+        </p:nvSpPr>
+        <p:spPr>
+          <a:xfrm>
+            <a:off x="6492240" y="5111496"/>
+            <a:ext cx="146304" cy="146304"/>
+          </a:xfrm>
+          <a:prstGeom prst="ellipse">
+            <a:avLst/>
+          </a:prstGeom>
+          <a:solidFill>
+            <a:srgbClr val="FF6C00"/>
+          </a:solidFill>
+          <a:ln/>
+        </p:spPr>
+      </p:sp>
+      <p:sp>
+        <p:nvSpPr>
+          <p:cNvPr id="33" name="Text 31"/>
+          <p:cNvSpPr/>
+          <p:nvPr/>
+        </p:nvSpPr>
+        <p:spPr>
+          <a:xfrm>
+            <a:off x="6766560" y="5001768"/>
+            <a:ext cx="4480560" cy="292608"/>
+          </a:xfrm>
+          <a:prstGeom prst="rect">
+            <a:avLst/>
+          </a:prstGeom>
+          <a:noFill/>
+          <a:ln/>
+        </p:spPr>
+        <p:txBody>
+          <a:bodyPr wrap="square" lIns="0" tIns="0" rIns="0" bIns="0" rtlCol="0" anchor="ctr"/>
+          <a:lstStyle/>
+          <a:p>
+            <a:pPr indent="0" marL="0">
+              <a:buNone/>
+            </a:pPr>
+            <a:r>
+              <a:rPr lang="en-US" sz="1400" b="1" dirty="0">
+                <a:solidFill>
+                  <a:srgbClr val="E9EEF3"/>
+                </a:solidFill>
+                <a:latin typeface="Calibri" pitchFamily="34" charset="0"/>
+                <a:ea typeface="Calibri" pitchFamily="34" charset="-122"/>
+                <a:cs typeface="Calibri" pitchFamily="34" charset="-120"/>
+              </a:rPr>
+              <a:t>Cost is measured</a:t>
+            </a:r>
+            <a:endParaRPr lang="en-US" sz="1400" dirty="0"/>
+          </a:p>
+        </p:txBody>
+      </p:sp>
+      <p:sp>
+        <p:nvSpPr>
+          <p:cNvPr id="34" name="Text 32"/>
+          <p:cNvSpPr/>
+          <p:nvPr/>
+        </p:nvSpPr>
+        <p:spPr>
+          <a:xfrm>
+            <a:off x="6766560" y="5294376"/>
+            <a:ext cx="4480560" cy="585216"/>
+          </a:xfrm>
+          <a:prstGeom prst="rect">
+            <a:avLst/>
+          </a:prstGeom>
+          <a:noFill/>
+          <a:ln/>
+        </p:spPr>
+        <p:txBody>
+          <a:bodyPr wrap="square" lIns="0" tIns="0" rIns="0" bIns="0" rtlCol="0" anchor="ctr"/>
+          <a:lstStyle/>
+          <a:p>
+            <a:pPr indent="0" marL="0">
+              <a:lnSpc>
+                <a:spcPct val="103000"/>
+              </a:lnSpc>
+              <a:buNone/>
+            </a:pPr>
+            <a:r>
+              <a:rPr lang="en-US" sz="1100" dirty="0">
+                <a:solidFill>
+                  <a:srgbClr val="93A1AF"/>
+                </a:solidFill>
+                <a:latin typeface="Calibri" pitchFamily="34" charset="0"/>
+                <a:ea typeface="Calibri" pitchFamily="34" charset="-122"/>
+                <a:cs typeface="Calibri" pitchFamily="34" charset="-120"/>
+              </a:rPr>
+              <a:t>Every call is timed. p50, p95 and the slowest call sit beside the decisions — performance evidence, not a claim.</a:t>
+            </a:r>
+            <a:endParaRPr lang="en-US" sz="1100" dirty="0"/>
+          </a:p>
+        </p:txBody>
+      </p:sp>
+      <p:sp>
+        <p:nvSpPr>
+          <p:cNvPr id="35" name="Text 33"/>
+          <p:cNvSpPr/>
+          <p:nvPr/>
+        </p:nvSpPr>
+        <p:spPr>
+          <a:xfrm>
+            <a:off x="640080" y="6053328"/>
+            <a:ext cx="10881360" cy="274320"/>
+          </a:xfrm>
+          <a:prstGeom prst="rect">
+            <a:avLst/>
+          </a:prstGeom>
+          <a:noFill/>
+          <a:ln/>
+        </p:spPr>
+        <p:txBody>
+          <a:bodyPr wrap="square" lIns="0" tIns="0" rIns="0" bIns="0" rtlCol="0" anchor="ctr"/>
+          <a:lstStyle/>
+          <a:p>
+            <a:pPr indent="0" marL="0">
+              <a:buNone/>
+            </a:pPr>
+            <a:r>
+              <a:rPr lang="en-US" sz="1400" i="1" dirty="0">
                 <a:solidFill>
                   <a:srgbClr val="FF8A3D"/>
                 </a:solidFill>
@@ -2875,15 +3707,15 @@
                 <a:ea typeface="Calibri" pitchFamily="34" charset="-122"/>
                 <a:cs typeface="Calibri" pitchFamily="34" charset="-120"/>
               </a:rPr>
-              <a:t>Verified by a 45-test suite covering computation, governance, injection resistance, retrieval quality, abstention, and audit durability — all passing.</a:t>
-            </a:r>
-            <a:endParaRPr lang="en-US" sz="1450" dirty="0"/>
-          </a:p>
-        </p:txBody>
-      </p:sp>
-      <p:sp>
-        <p:nvSpPr>
-          <p:cNvPr id="16" name="Text 13"/>
+              <a:t>Kill the process, restart it, reload — the trail is unchanged. That is the difference between logging and evidence.</a:t>
+            </a:r>
+            <a:endParaRPr lang="en-US" sz="1400" dirty="0"/>
+          </a:p>
+        </p:txBody>
+      </p:sp>
+      <p:sp>
+        <p:nvSpPr>
+          <p:cNvPr id="36" name="Text 34"/>
           <p:cNvSpPr/>
           <p:nvPr/>
         </p:nvSpPr>
@@ -2922,7 +3754,7 @@
       </p:sp>
       <p:sp>
         <p:nvSpPr>
-          <p:cNvPr id="17" name="Text 14"/>
+          <p:cNvPr id="37" name="Text 35"/>
           <p:cNvSpPr/>
           <p:nvPr/>
         </p:nvSpPr>
@@ -3044,6 +3876,580 @@
                 <a:ea typeface="Calibri" pitchFamily="34" charset="-122"/>
                 <a:cs typeface="Calibri" pitchFamily="34" charset="-120"/>
               </a:rPr>
+              <a:t>UNDER THE HOOD</a:t>
+            </a:r>
+            <a:endParaRPr lang="en-US" sz="1200" dirty="0"/>
+          </a:p>
+        </p:txBody>
+      </p:sp>
+      <p:sp>
+        <p:nvSpPr>
+          <p:cNvPr id="4" name="Text 2"/>
+          <p:cNvSpPr/>
+          <p:nvPr/>
+        </p:nvSpPr>
+        <p:spPr>
+          <a:xfrm>
+            <a:off x="640080" y="841248"/>
+            <a:ext cx="10881360" cy="914400"/>
+          </a:xfrm>
+          <a:prstGeom prst="rect">
+            <a:avLst/>
+          </a:prstGeom>
+          <a:noFill/>
+          <a:ln/>
+        </p:spPr>
+        <p:txBody>
+          <a:bodyPr wrap="square" lIns="0" tIns="0" rIns="0" bIns="0" rtlCol="0" anchor="t"/>
+          <a:lstStyle/>
+          <a:p>
+            <a:pPr indent="0" marL="0">
+              <a:buNone/>
+            </a:pPr>
+            <a:r>
+              <a:rPr lang="en-US" sz="3200" b="1" dirty="0">
+                <a:solidFill>
+                  <a:srgbClr val="E9EEF3"/>
+                </a:solidFill>
+                <a:latin typeface="Cambria" pitchFamily="34" charset="0"/>
+                <a:ea typeface="Cambria" pitchFamily="34" charset="-122"/>
+                <a:cs typeface="Cambria" pitchFamily="34" charset="-120"/>
+              </a:rPr>
+              <a:t>Why the answers hold up</a:t>
+            </a:r>
+            <a:endParaRPr lang="en-US" sz="3200" dirty="0"/>
+          </a:p>
+        </p:txBody>
+      </p:sp>
+      <p:pic>
+        <p:nvPicPr>
+          <p:cNvPr id="5" name="Image 0" descr="/private/tmp/claude-501/-Users-atharvvani-Downloads-DataBricks/437ba0b1-41b9-48e1-95cf-333721d11260/scratchpad/deck_assets/latency_dist.png">    </p:cNvPr>
+          <p:cNvPicPr>
+            <a:picLocks noChangeAspect="1"/>
+          </p:cNvPicPr>
+          <p:nvPr/>
+        </p:nvPicPr>
+        <p:blipFill>
+          <a:blip r:embed="rId1"/>
+          <a:stretch>
+            <a:fillRect/>
+          </a:stretch>
+        </p:blipFill>
+        <p:spPr>
+          <a:xfrm>
+            <a:off x="640080" y="1828800"/>
+            <a:ext cx="6766560" cy="2926080"/>
+          </a:xfrm>
+          <a:prstGeom prst="rect">
+            <a:avLst/>
+          </a:prstGeom>
+        </p:spPr>
+      </p:pic>
+      <p:sp>
+        <p:nvSpPr>
+          <p:cNvPr id="6" name="Shape 3"/>
+          <p:cNvSpPr/>
+          <p:nvPr/>
+        </p:nvSpPr>
+        <p:spPr>
+          <a:xfrm>
+            <a:off x="7772400" y="1764792"/>
+            <a:ext cx="146304" cy="146304"/>
+          </a:xfrm>
+          <a:prstGeom prst="ellipse">
+            <a:avLst/>
+          </a:prstGeom>
+          <a:solidFill>
+            <a:srgbClr val="FF6C00"/>
+          </a:solidFill>
+          <a:ln/>
+        </p:spPr>
+      </p:sp>
+      <p:sp>
+        <p:nvSpPr>
+          <p:cNvPr id="7" name="Text 4"/>
+          <p:cNvSpPr/>
+          <p:nvPr/>
+        </p:nvSpPr>
+        <p:spPr>
+          <a:xfrm>
+            <a:off x="8046720" y="1645920"/>
+            <a:ext cx="3474720" cy="365760"/>
+          </a:xfrm>
+          <a:prstGeom prst="rect">
+            <a:avLst/>
+          </a:prstGeom>
+          <a:noFill/>
+          <a:ln/>
+        </p:spPr>
+        <p:txBody>
+          <a:bodyPr wrap="square" lIns="0" tIns="0" rIns="0" bIns="0" rtlCol="0" anchor="ctr"/>
+          <a:lstStyle/>
+          <a:p>
+            <a:pPr indent="0" marL="0">
+              <a:buNone/>
+            </a:pPr>
+            <a:r>
+              <a:rPr lang="en-US" sz="1550" b="1" dirty="0">
+                <a:solidFill>
+                  <a:srgbClr val="E9EEF3"/>
+                </a:solidFill>
+                <a:latin typeface="Calibri" pitchFamily="34" charset="0"/>
+                <a:ea typeface="Calibri" pitchFamily="34" charset="-122"/>
+                <a:cs typeface="Calibri" pitchFamily="34" charset="-120"/>
+              </a:rPr>
+              <a:t>Statistical, not hard-coded</a:t>
+            </a:r>
+            <a:endParaRPr lang="en-US" sz="1550" dirty="0"/>
+          </a:p>
+        </p:txBody>
+      </p:sp>
+      <p:sp>
+        <p:nvSpPr>
+          <p:cNvPr id="8" name="Text 5"/>
+          <p:cNvSpPr/>
+          <p:nvPr/>
+        </p:nvSpPr>
+        <p:spPr>
+          <a:xfrm>
+            <a:off x="8046720" y="2029968"/>
+            <a:ext cx="3474720" cy="822960"/>
+          </a:xfrm>
+          <a:prstGeom prst="rect">
+            <a:avLst/>
+          </a:prstGeom>
+          <a:noFill/>
+          <a:ln/>
+        </p:spPr>
+        <p:txBody>
+          <a:bodyPr wrap="square" lIns="0" tIns="0" rIns="0" bIns="0" rtlCol="0" anchor="ctr"/>
+          <a:lstStyle/>
+          <a:p>
+            <a:pPr indent="0" marL="0">
+              <a:lnSpc>
+                <a:spcPct val="108000"/>
+              </a:lnSpc>
+              <a:buNone/>
+            </a:pPr>
+            <a:r>
+              <a:rPr lang="en-US" sz="1250" dirty="0">
+                <a:solidFill>
+                  <a:srgbClr val="93A1AF"/>
+                </a:solidFill>
+                <a:latin typeface="Calibri" pitchFamily="34" charset="0"/>
+                <a:ea typeface="Calibri" pitchFamily="34" charset="-122"/>
+                <a:cs typeface="Calibri" pitchFamily="34" charset="-120"/>
+              </a:rPr>
+              <a:t>Anomalies are events beyond 3σ of the live population — the threshold moves with the data, not a magic number.</a:t>
+            </a:r>
+            <a:endParaRPr lang="en-US" sz="1250" dirty="0"/>
+          </a:p>
+        </p:txBody>
+      </p:sp>
+      <p:sp>
+        <p:nvSpPr>
+          <p:cNvPr id="9" name="Shape 6"/>
+          <p:cNvSpPr/>
+          <p:nvPr/>
+        </p:nvSpPr>
+        <p:spPr>
+          <a:xfrm>
+            <a:off x="7772400" y="3099816"/>
+            <a:ext cx="146304" cy="146304"/>
+          </a:xfrm>
+          <a:prstGeom prst="ellipse">
+            <a:avLst/>
+          </a:prstGeom>
+          <a:solidFill>
+            <a:srgbClr val="FF6C00"/>
+          </a:solidFill>
+          <a:ln/>
+        </p:spPr>
+      </p:sp>
+      <p:sp>
+        <p:nvSpPr>
+          <p:cNvPr id="10" name="Text 7"/>
+          <p:cNvSpPr/>
+          <p:nvPr/>
+        </p:nvSpPr>
+        <p:spPr>
+          <a:xfrm>
+            <a:off x="8046720" y="2980944"/>
+            <a:ext cx="3474720" cy="365760"/>
+          </a:xfrm>
+          <a:prstGeom prst="rect">
+            <a:avLst/>
+          </a:prstGeom>
+          <a:noFill/>
+          <a:ln/>
+        </p:spPr>
+        <p:txBody>
+          <a:bodyPr wrap="square" lIns="0" tIns="0" rIns="0" bIns="0" rtlCol="0" anchor="ctr"/>
+          <a:lstStyle/>
+          <a:p>
+            <a:pPr indent="0" marL="0">
+              <a:buNone/>
+            </a:pPr>
+            <a:r>
+              <a:rPr lang="en-US" sz="1550" b="1" dirty="0">
+                <a:solidFill>
+                  <a:srgbClr val="E9EEF3"/>
+                </a:solidFill>
+                <a:latin typeface="Calibri" pitchFamily="34" charset="0"/>
+                <a:ea typeface="Calibri" pitchFamily="34" charset="-122"/>
+                <a:cs typeface="Calibri" pitchFamily="34" charset="-120"/>
+              </a:rPr>
+              <a:t>Parameter-bound execution</a:t>
+            </a:r>
+            <a:endParaRPr lang="en-US" sz="1550" dirty="0"/>
+          </a:p>
+        </p:txBody>
+      </p:sp>
+      <p:sp>
+        <p:nvSpPr>
+          <p:cNvPr id="11" name="Text 8"/>
+          <p:cNvSpPr/>
+          <p:nvPr/>
+        </p:nvSpPr>
+        <p:spPr>
+          <a:xfrm>
+            <a:off x="8046720" y="3364992"/>
+            <a:ext cx="3474720" cy="822960"/>
+          </a:xfrm>
+          <a:prstGeom prst="rect">
+            <a:avLst/>
+          </a:prstGeom>
+          <a:noFill/>
+          <a:ln/>
+        </p:spPr>
+        <p:txBody>
+          <a:bodyPr wrap="square" lIns="0" tIns="0" rIns="0" bIns="0" rtlCol="0" anchor="ctr"/>
+          <a:lstStyle/>
+          <a:p>
+            <a:pPr indent="0" marL="0">
+              <a:lnSpc>
+                <a:spcPct val="108000"/>
+              </a:lnSpc>
+              <a:buNone/>
+            </a:pPr>
+            <a:r>
+              <a:rPr lang="en-US" sz="1250" dirty="0">
+                <a:solidFill>
+                  <a:srgbClr val="93A1AF"/>
+                </a:solidFill>
+                <a:latin typeface="Calibri" pitchFamily="34" charset="0"/>
+                <a:ea typeface="Calibri" pitchFamily="34" charset="-122"/>
+                <a:cs typeface="Calibri" pitchFamily="34" charset="-120"/>
+              </a:rPr>
+              <a:t>Values are bound, never interpolated — a hostile input matches no rows and cannot reshape a query.</a:t>
+            </a:r>
+            <a:endParaRPr lang="en-US" sz="1250" dirty="0"/>
+          </a:p>
+        </p:txBody>
+      </p:sp>
+      <p:sp>
+        <p:nvSpPr>
+          <p:cNvPr id="12" name="Shape 9"/>
+          <p:cNvSpPr/>
+          <p:nvPr/>
+        </p:nvSpPr>
+        <p:spPr>
+          <a:xfrm>
+            <a:off x="7772400" y="4434840"/>
+            <a:ext cx="146304" cy="146304"/>
+          </a:xfrm>
+          <a:prstGeom prst="ellipse">
+            <a:avLst/>
+          </a:prstGeom>
+          <a:solidFill>
+            <a:srgbClr val="FF6C00"/>
+          </a:solidFill>
+          <a:ln/>
+        </p:spPr>
+      </p:sp>
+      <p:sp>
+        <p:nvSpPr>
+          <p:cNvPr id="13" name="Text 10"/>
+          <p:cNvSpPr/>
+          <p:nvPr/>
+        </p:nvSpPr>
+        <p:spPr>
+          <a:xfrm>
+            <a:off x="8046720" y="4315968"/>
+            <a:ext cx="3474720" cy="365760"/>
+          </a:xfrm>
+          <a:prstGeom prst="rect">
+            <a:avLst/>
+          </a:prstGeom>
+          <a:noFill/>
+          <a:ln/>
+        </p:spPr>
+        <p:txBody>
+          <a:bodyPr wrap="square" lIns="0" tIns="0" rIns="0" bIns="0" rtlCol="0" anchor="ctr"/>
+          <a:lstStyle/>
+          <a:p>
+            <a:pPr indent="0" marL="0">
+              <a:buNone/>
+            </a:pPr>
+            <a:r>
+              <a:rPr lang="en-US" sz="1550" b="1" dirty="0">
+                <a:solidFill>
+                  <a:srgbClr val="E9EEF3"/>
+                </a:solidFill>
+                <a:latin typeface="Calibri" pitchFamily="34" charset="0"/>
+                <a:ea typeface="Calibri" pitchFamily="34" charset="-122"/>
+                <a:cs typeface="Calibri" pitchFamily="34" charset="-120"/>
+              </a:rPr>
+              <a:t>Continuously verified</a:t>
+            </a:r>
+            <a:endParaRPr lang="en-US" sz="1550" dirty="0"/>
+          </a:p>
+        </p:txBody>
+      </p:sp>
+      <p:sp>
+        <p:nvSpPr>
+          <p:cNvPr id="14" name="Text 11"/>
+          <p:cNvSpPr/>
+          <p:nvPr/>
+        </p:nvSpPr>
+        <p:spPr>
+          <a:xfrm>
+            <a:off x="8046720" y="4700016"/>
+            <a:ext cx="3474720" cy="822960"/>
+          </a:xfrm>
+          <a:prstGeom prst="rect">
+            <a:avLst/>
+          </a:prstGeom>
+          <a:noFill/>
+          <a:ln/>
+        </p:spPr>
+        <p:txBody>
+          <a:bodyPr wrap="square" lIns="0" tIns="0" rIns="0" bIns="0" rtlCol="0" anchor="ctr"/>
+          <a:lstStyle/>
+          <a:p>
+            <a:pPr indent="0" marL="0">
+              <a:lnSpc>
+                <a:spcPct val="108000"/>
+              </a:lnSpc>
+              <a:buNone/>
+            </a:pPr>
+            <a:r>
+              <a:rPr lang="en-US" sz="1250" dirty="0">
+                <a:solidFill>
+                  <a:srgbClr val="93A1AF"/>
+                </a:solidFill>
+                <a:latin typeface="Calibri" pitchFamily="34" charset="0"/>
+                <a:ea typeface="Calibri" pitchFamily="34" charset="-122"/>
+                <a:cs typeface="Calibri" pitchFamily="34" charset="-120"/>
+              </a:rPr>
+              <a:t>77 tests across computation, governance, retrieval, abstention, audit durability, chaining and identity — run on every push.</a:t>
+            </a:r>
+            <a:endParaRPr lang="en-US" sz="1250" dirty="0"/>
+          </a:p>
+        </p:txBody>
+      </p:sp>
+      <p:sp>
+        <p:nvSpPr>
+          <p:cNvPr id="15" name="Text 12"/>
+          <p:cNvSpPr/>
+          <p:nvPr/>
+        </p:nvSpPr>
+        <p:spPr>
+          <a:xfrm>
+            <a:off x="640080" y="6053328"/>
+            <a:ext cx="10881360" cy="274320"/>
+          </a:xfrm>
+          <a:prstGeom prst="rect">
+            <a:avLst/>
+          </a:prstGeom>
+          <a:noFill/>
+          <a:ln/>
+        </p:spPr>
+        <p:txBody>
+          <a:bodyPr wrap="square" lIns="0" tIns="0" rIns="0" bIns="0" rtlCol="0" anchor="ctr"/>
+          <a:lstStyle/>
+          <a:p>
+            <a:pPr indent="0" marL="0">
+              <a:buNone/>
+            </a:pPr>
+            <a:r>
+              <a:rPr lang="en-US" sz="1400" i="1" dirty="0">
+                <a:solidFill>
+                  <a:srgbClr val="FF8A3D"/>
+                </a:solidFill>
+                <a:latin typeface="Calibri" pitchFamily="34" charset="0"/>
+                <a:ea typeface="Calibri" pitchFamily="34" charset="-122"/>
+                <a:cs typeface="Calibri" pitchFamily="34" charset="-120"/>
+              </a:rPr>
+              <a:t>CI also asserts the demo figures still reproduce — so drift in the anomaly logic fails the build, not the demo.</a:t>
+            </a:r>
+            <a:endParaRPr lang="en-US" sz="1400" dirty="0"/>
+          </a:p>
+        </p:txBody>
+      </p:sp>
+      <p:sp>
+        <p:nvSpPr>
+          <p:cNvPr id="16" name="Text 13"/>
+          <p:cNvSpPr/>
+          <p:nvPr/>
+        </p:nvSpPr>
+        <p:spPr>
+          <a:xfrm>
+            <a:off x="11277295" y="6400800"/>
+            <a:ext cx="548640" cy="274320"/>
+          </a:xfrm>
+          <a:prstGeom prst="rect">
+            <a:avLst/>
+          </a:prstGeom>
+          <a:noFill/>
+          <a:ln/>
+        </p:spPr>
+        <p:txBody>
+          <a:bodyPr wrap="square" lIns="0" tIns="0" rIns="0" bIns="0" rtlCol="0" anchor="ctr"/>
+          <a:lstStyle/>
+          <a:p>
+            <a:pPr algn="r" indent="0" marL="0">
+              <a:buNone/>
+            </a:pPr>
+            <a:r>
+              <a:rPr lang="en-US" sz="1000" dirty="0">
+                <a:solidFill>
+                  <a:srgbClr val="6C7C8A"/>
+                </a:solidFill>
+                <a:latin typeface="Calibri" pitchFamily="34" charset="0"/>
+                <a:ea typeface="Calibri" pitchFamily="34" charset="-122"/>
+                <a:cs typeface="Calibri" pitchFamily="34" charset="-120"/>
+              </a:rPr>
+              <a:t>11</a:t>
+            </a:r>
+            <a:endParaRPr lang="en-US" sz="1000" dirty="0"/>
+          </a:p>
+        </p:txBody>
+      </p:sp>
+      <p:sp>
+        <p:nvSpPr>
+          <p:cNvPr id="17" name="Text 14"/>
+          <p:cNvSpPr/>
+          <p:nvPr/>
+        </p:nvSpPr>
+        <p:spPr>
+          <a:xfrm>
+            <a:off x="640080" y="6400800"/>
+            <a:ext cx="3657600" cy="274320"/>
+          </a:xfrm>
+          <a:prstGeom prst="rect">
+            <a:avLst/>
+          </a:prstGeom>
+          <a:noFill/>
+          <a:ln/>
+        </p:spPr>
+        <p:txBody>
+          <a:bodyPr wrap="square" lIns="0" tIns="0" rIns="0" bIns="0" rtlCol="0" anchor="ctr"/>
+          <a:lstStyle/>
+          <a:p>
+            <a:pPr indent="0" marL="0">
+              <a:buNone/>
+            </a:pPr>
+            <a:r>
+              <a:rPr lang="en-US" sz="1000" dirty="0">
+                <a:solidFill>
+                  <a:srgbClr val="6C7C8A"/>
+                </a:solidFill>
+                <a:latin typeface="Calibri" pitchFamily="34" charset="0"/>
+                <a:ea typeface="Calibri" pitchFamily="34" charset="-122"/>
+                <a:cs typeface="Calibri" pitchFamily="34" charset="-120"/>
+              </a:rPr>
+              <a:t>IntelligenceStack</a:t>
+            </a:r>
+            <a:endParaRPr lang="en-US" sz="1000" dirty="0"/>
+          </a:p>
+        </p:txBody>
+      </p:sp>
+    </p:spTree>
+  </p:cSld>
+  <p:clrMapOvr>
+    <a:masterClrMapping/>
+  </p:clrMapOvr>
+</p:sld>
+</file>
+
+<file path=ppt/slides/slide12.xml><?xml version="1.0" encoding="utf-8"?>
+<p:sld xmlns:a="http://schemas.openxmlformats.org/drawingml/2006/main" xmlns:r="http://schemas.openxmlformats.org/officeDocument/2006/relationships" xmlns:p="http://schemas.openxmlformats.org/presentationml/2006/main">
+  <p:cSld name="Slide 12">
+    <p:bg>
+      <p:bgPr>
+        <a:solidFill>
+          <a:srgbClr val="0E1621"/>
+        </a:solidFill>
+      </p:bgPr>
+    </p:bg>
+    <p:spTree>
+      <p:nvGrpSpPr>
+        <p:cNvPr id="1" name=""/>
+        <p:cNvGrpSpPr/>
+        <p:nvPr/>
+      </p:nvGrpSpPr>
+      <p:grpSpPr>
+        <a:xfrm>
+          <a:off x="0" y="0"/>
+          <a:ext cx="0" cy="0"/>
+          <a:chOff x="0" y="0"/>
+          <a:chExt cx="0" cy="0"/>
+        </a:xfrm>
+      </p:grpSpPr>
+      <p:sp>
+        <p:nvSpPr>
+          <p:cNvPr id="2" name="Shape 0"/>
+          <p:cNvSpPr/>
+          <p:nvPr/>
+        </p:nvSpPr>
+        <p:spPr>
+          <a:xfrm>
+            <a:off x="640080" y="566928"/>
+            <a:ext cx="146304" cy="146304"/>
+          </a:xfrm>
+          <a:prstGeom prst="ellipse">
+            <a:avLst/>
+          </a:prstGeom>
+          <a:solidFill>
+            <a:srgbClr val="FF6C00"/>
+          </a:solidFill>
+          <a:ln/>
+        </p:spPr>
+      </p:sp>
+      <p:sp>
+        <p:nvSpPr>
+          <p:cNvPr id="3" name="Text 1"/>
+          <p:cNvSpPr/>
+          <p:nvPr/>
+        </p:nvSpPr>
+        <p:spPr>
+          <a:xfrm>
+            <a:off x="896112" y="457200"/>
+            <a:ext cx="9144000" cy="365760"/>
+          </a:xfrm>
+          <a:prstGeom prst="rect">
+            <a:avLst/>
+          </a:prstGeom>
+          <a:noFill/>
+          <a:ln/>
+        </p:spPr>
+        <p:txBody>
+          <a:bodyPr wrap="square" lIns="0" tIns="0" rIns="0" bIns="0" rtlCol="0" anchor="ctr"/>
+          <a:lstStyle/>
+          <a:p>
+            <a:pPr indent="0" marL="0">
+              <a:buNone/>
+            </a:pPr>
+            <a:r>
+              <a:rPr lang="en-US" sz="1200" b="1" spc="200" kern="0" dirty="0">
+                <a:solidFill>
+                  <a:srgbClr val="FF8A3D"/>
+                </a:solidFill>
+                <a:latin typeface="Calibri" pitchFamily="34" charset="0"/>
+                <a:ea typeface="Calibri" pitchFamily="34" charset="-122"/>
+                <a:cs typeface="Calibri" pitchFamily="34" charset="-120"/>
+              </a:rPr>
               <a:t>WHY IT MATTERS</a:t>
             </a:r>
             <a:endParaRPr lang="en-US" sz="1200" dirty="0"/>
@@ -3224,12 +4630,12 @@
           <a:p>
             <a:pPr indent="0" marL="0">
               <a:lnSpc>
-                <a:spcPct val="108000"/>
+                <a:spcPct val="105000"/>
               </a:lnSpc>
               <a:buNone/>
             </a:pPr>
             <a:r>
-              <a:rPr lang="en-US" sz="1250" dirty="0">
+              <a:rPr lang="en-US" sz="1200" dirty="0">
                 <a:solidFill>
                   <a:srgbClr val="93A1AF"/>
                 </a:solidFill>
@@ -3239,7 +4645,7 @@
               </a:rPr>
               <a:t>A business owner asks in plain language and gets a governed answer immediately — no analyst ticket queue in between.</a:t>
             </a:r>
-            <a:endParaRPr lang="en-US" sz="1250" dirty="0"/>
+            <a:endParaRPr lang="en-US" sz="1200" dirty="0"/>
           </a:p>
         </p:txBody>
       </p:sp>
@@ -3378,12 +4784,12 @@
           <a:p>
             <a:pPr indent="0" marL="0">
               <a:lnSpc>
-                <a:spcPct val="108000"/>
+                <a:spcPct val="105000"/>
               </a:lnSpc>
               <a:buNone/>
             </a:pPr>
             <a:r>
-              <a:rPr lang="en-US" sz="1250" dirty="0">
+              <a:rPr lang="en-US" sz="1200" dirty="0">
                 <a:solidFill>
                   <a:srgbClr val="93A1AF"/>
                 </a:solidFill>
@@ -3391,9 +4797,9 @@
                 <a:ea typeface="Calibri" pitchFamily="34" charset="-122"/>
                 <a:cs typeface="Calibri" pitchFamily="34" charset="-120"/>
               </a:rPr>
-              <a:t>Risk stops being open-ended. Security reviews a bounded allowlist instead of debating 'the model can see everything.'</a:t>
-            </a:r>
-            <a:endParaRPr lang="en-US" sz="1250" dirty="0"/>
+              <a:t>Risk stops being open-ended. Security reviews a bounded allowlist and a per-caller entitlement model instead of debating 'the model can see everything.'</a:t>
+            </a:r>
+            <a:endParaRPr lang="en-US" sz="1200" dirty="0"/>
           </a:p>
         </p:txBody>
       </p:sp>
@@ -3532,12 +4938,12 @@
           <a:p>
             <a:pPr indent="0" marL="0">
               <a:lnSpc>
-                <a:spcPct val="108000"/>
+                <a:spcPct val="105000"/>
               </a:lnSpc>
               <a:buNone/>
             </a:pPr>
             <a:r>
-              <a:rPr lang="en-US" sz="1250" dirty="0">
+              <a:rPr lang="en-US" sz="1200" dirty="0">
                 <a:solidFill>
                   <a:srgbClr val="93A1AF"/>
                 </a:solidFill>
@@ -3545,9 +4951,9 @@
                 <a:ea typeface="Calibri" pitchFamily="34" charset="-122"/>
                 <a:cs typeface="Calibri" pitchFamily="34" charset="-120"/>
               </a:rPr>
-              <a:t>PII hashed at ingestion, no raw-row exfiltration, and a durable per-action record — controls you can demonstrate, not just promise.</a:t>
-            </a:r>
-            <a:endParaRPr lang="en-US" sz="1250" dirty="0"/>
+              <a:t>PII hashed at ingestion, no raw-row exfiltration, and a durable per-action record naming who did what.</a:t>
+            </a:r>
+            <a:endParaRPr lang="en-US" sz="1200" dirty="0"/>
           </a:p>
         </p:txBody>
       </p:sp>
@@ -3686,12 +5092,12 @@
           <a:p>
             <a:pPr indent="0" marL="0">
               <a:lnSpc>
-                <a:spcPct val="108000"/>
+                <a:spcPct val="105000"/>
               </a:lnSpc>
               <a:buNone/>
             </a:pPr>
             <a:r>
-              <a:rPr lang="en-US" sz="1250" dirty="0">
+              <a:rPr lang="en-US" sz="1200" dirty="0">
                 <a:solidFill>
                   <a:srgbClr val="93A1AF"/>
                 </a:solidFill>
@@ -3701,7 +5107,7 @@
               </a:rPr>
               <a:t>No egress, no duplicate copies, no third-party inference on proprietary data. Cost scales with data scanned, not data stored.</a:t>
             </a:r>
-            <a:endParaRPr lang="en-US" sz="1250" dirty="0"/>
+            <a:endParaRPr lang="en-US" sz="1200" dirty="0"/>
           </a:p>
         </p:txBody>
       </p:sp>
@@ -3738,7 +5144,7 @@
                 <a:ea typeface="Calibri" pitchFamily="34" charset="-122"/>
                 <a:cs typeface="Calibri" pitchFamily="34" charset="-120"/>
               </a:rPr>
-              <a:t>11</a:t>
+              <a:t>12</a:t>
             </a:r>
             <a:endParaRPr lang="en-US" sz="1000" dirty="0"/>
           </a:p>
@@ -3791,9 +5197,9 @@
 </p:sld>
 </file>
 
-<file path=ppt/slides/slide12.xml><?xml version="1.0" encoding="utf-8"?>
+<file path=ppt/slides/slide13.xml><?xml version="1.0" encoding="utf-8"?>
 <p:sld xmlns:a="http://schemas.openxmlformats.org/drawingml/2006/main" xmlns:r="http://schemas.openxmlformats.org/officeDocument/2006/relationships" xmlns:p="http://schemas.openxmlformats.org/presentationml/2006/main">
-  <p:cSld name="Slide 12">
+  <p:cSld name="Slide 13">
     <p:bg>
       <p:bgPr>
         <a:solidFill>
@@ -4059,7 +5465,7 @@
               <a:buNone/>
             </a:pPr>
             <a:r>
-              <a:rPr lang="en-US" sz="1280" dirty="0">
+              <a:rPr lang="en-US" sz="1250" dirty="0">
                 <a:solidFill>
                   <a:srgbClr val="93A1AF"/>
                 </a:solidFill>
@@ -4067,9 +5473,9 @@
                 <a:ea typeface="Calibri" pitchFamily="34" charset="-122"/>
                 <a:cs typeface="Calibri" pitchFamily="34" charset="-120"/>
               </a:rPr>
-              <a:t>A bounded, auditable AI risk surface. Injection and exfiltration prevented by construction, not by monitoring.</a:t>
-            </a:r>
-            <a:endParaRPr lang="en-US" sz="1280" dirty="0"/>
+              <a:t>A bounded, auditable AI risk surface. Injection and exfiltration prevented by construction; access scoped per caller.</a:t>
+            </a:r>
+            <a:endParaRPr lang="en-US" sz="1250" dirty="0"/>
           </a:p>
         </p:txBody>
       </p:sp>
@@ -4219,7 +5625,7 @@
               <a:buNone/>
             </a:pPr>
             <a:r>
-              <a:rPr lang="en-US" sz="1280" dirty="0">
+              <a:rPr lang="en-US" sz="1250" dirty="0">
                 <a:solidFill>
                   <a:srgbClr val="93A1AF"/>
                 </a:solidFill>
@@ -4229,7 +5635,7 @@
               </a:rPr>
               <a:t>Self-service analytics for the business without widening data access. Analysts redeployed from lookups to modelling.</a:t>
             </a:r>
-            <a:endParaRPr lang="en-US" sz="1280" dirty="0"/>
+            <a:endParaRPr lang="en-US" sz="1250" dirty="0"/>
           </a:p>
         </p:txBody>
       </p:sp>
@@ -4379,7 +5785,7 @@
               <a:buNone/>
             </a:pPr>
             <a:r>
-              <a:rPr lang="en-US" sz="1280" dirty="0">
+              <a:rPr lang="en-US" sz="1250" dirty="0">
                 <a:solidFill>
                   <a:srgbClr val="93A1AF"/>
                 </a:solidFill>
@@ -4387,9 +5793,9 @@
                 <a:ea typeface="Calibri" pitchFamily="34" charset="-122"/>
                 <a:cs typeface="Calibri" pitchFamily="34" charset="-120"/>
               </a:rPr>
-              <a:t>A durable, queryable record of every AI action — refusals included — that shortens review and audit cycles.</a:t>
-            </a:r>
-            <a:endParaRPr lang="en-US" sz="1280" dirty="0"/>
+              <a:t>A durable, queryable record of every AI action — who asked, what was refused — that shortens review and audit cycles.</a:t>
+            </a:r>
+            <a:endParaRPr lang="en-US" sz="1250" dirty="0"/>
           </a:p>
         </p:txBody>
       </p:sp>
@@ -4539,7 +5945,7 @@
               <a:buNone/>
             </a:pPr>
             <a:r>
-              <a:rPr lang="en-US" sz="1280" dirty="0">
+              <a:rPr lang="en-US" sz="1250" dirty="0">
                 <a:solidFill>
                   <a:srgbClr val="93A1AF"/>
                 </a:solidFill>
@@ -4549,7 +5955,7 @@
               </a:rPr>
               <a:t>Answers grounded in live, governed enterprise data — in plain language, in seconds.</a:t>
             </a:r>
-            <a:endParaRPr lang="en-US" sz="1280" dirty="0"/>
+            <a:endParaRPr lang="en-US" sz="1250" dirty="0"/>
           </a:p>
         </p:txBody>
       </p:sp>
@@ -4699,7 +6105,7 @@
               <a:buNone/>
             </a:pPr>
             <a:r>
-              <a:rPr lang="en-US" sz="1280" dirty="0">
+              <a:rPr lang="en-US" sz="1250" dirty="0">
                 <a:solidFill>
                   <a:srgbClr val="93A1AF"/>
                 </a:solidFill>
@@ -4709,7 +6115,7 @@
               </a:rPr>
               <a:t>AI value captured without egress, duplication, or third-party inference costs.</a:t>
             </a:r>
-            <a:endParaRPr lang="en-US" sz="1280" dirty="0"/>
+            <a:endParaRPr lang="en-US" sz="1250" dirty="0"/>
           </a:p>
         </p:txBody>
       </p:sp>
@@ -4746,7 +6152,7 @@
                 <a:ea typeface="Calibri" pitchFamily="34" charset="-122"/>
                 <a:cs typeface="Calibri" pitchFamily="34" charset="-120"/>
               </a:rPr>
-              <a:t>12</a:t>
+              <a:t>13</a:t>
             </a:r>
             <a:endParaRPr lang="en-US" sz="1000" dirty="0"/>
           </a:p>
@@ -4799,9 +6205,9 @@
 </p:sld>
 </file>
 
-<file path=ppt/slides/slide13.xml><?xml version="1.0" encoding="utf-8"?>
+<file path=ppt/slides/slide14.xml><?xml version="1.0" encoding="utf-8"?>
 <p:sld xmlns:a="http://schemas.openxmlformats.org/drawingml/2006/main" xmlns:r="http://schemas.openxmlformats.org/officeDocument/2006/relationships" xmlns:p="http://schemas.openxmlformats.org/presentationml/2006/main">
-  <p:cSld name="Slide 13">
+  <p:cSld name="Slide 14">
     <p:bg>
       <p:bgPr>
         <a:solidFill>
@@ -4971,8 +6377,8 @@
         </p:nvSpPr>
         <p:spPr>
           <a:xfrm>
-            <a:off x="777240" y="2404872"/>
-            <a:ext cx="4480560" cy="320040"/>
+            <a:off x="777240" y="2395728"/>
+            <a:ext cx="4480560" cy="292608"/>
           </a:xfrm>
           <a:prstGeom prst="rect">
             <a:avLst/>
@@ -5010,8 +6416,8 @@
         </p:nvSpPr>
         <p:spPr>
           <a:xfrm>
-            <a:off x="5623560" y="2404872"/>
-            <a:ext cx="6080760" cy="320040"/>
+            <a:off x="5623560" y="2395728"/>
+            <a:ext cx="6080760" cy="292608"/>
           </a:xfrm>
           <a:prstGeom prst="rect">
             <a:avLst/>
@@ -5049,12 +6455,12 @@
         </p:nvSpPr>
         <p:spPr>
           <a:xfrm>
-            <a:off x="640080" y="2788920"/>
-            <a:ext cx="4480560" cy="457200"/>
+            <a:off x="640080" y="2761488"/>
+            <a:ext cx="4480560" cy="384048"/>
           </a:xfrm>
           <a:prstGeom prst="roundRect">
             <a:avLst>
-              <a:gd name="adj" fmla="val 18000"/>
+              <a:gd name="adj" fmla="val 21429"/>
             </a:avLst>
           </a:prstGeom>
           <a:solidFill>
@@ -5083,24 +6489,24 @@
         </p:nvSpPr>
         <p:spPr>
           <a:xfrm>
-            <a:off x="914400" y="2788920"/>
-            <a:ext cx="4023360" cy="457200"/>
-          </a:xfrm>
-          <a:prstGeom prst="rect">
-            <a:avLst/>
-          </a:prstGeom>
-          <a:noFill/>
-          <a:ln/>
-        </p:spPr>
-        <p:txBody>
-          <a:bodyPr wrap="square" lIns="0" tIns="0" rIns="0" bIns="0" rtlCol="0" anchor="ctr"/>
-          <a:lstStyle/>
-          <a:p>
-            <a:pPr indent="0" marL="0">
-              <a:buNone/>
-            </a:pPr>
-            <a:r>
-              <a:rPr lang="en-US" sz="1200" dirty="0">
+            <a:off x="896112" y="2761488"/>
+            <a:ext cx="4069080" cy="384048"/>
+          </a:xfrm>
+          <a:prstGeom prst="rect">
+            <a:avLst/>
+          </a:prstGeom>
+          <a:noFill/>
+          <a:ln/>
+        </p:spPr>
+        <p:txBody>
+          <a:bodyPr wrap="square" lIns="0" tIns="0" rIns="0" bIns="0" rtlCol="0" anchor="ctr"/>
+          <a:lstStyle/>
+          <a:p>
+            <a:pPr indent="0" marL="0">
+              <a:buNone/>
+            </a:pPr>
+            <a:r>
+              <a:rPr lang="en-US" sz="1150" dirty="0">
                 <a:solidFill>
                   <a:srgbClr val="E9EEF3"/>
                 </a:solidFill>
@@ -5110,7 +6516,7 @@
               </a:rPr>
               <a:t>DuckDB medallion engine</a:t>
             </a:r>
-            <a:endParaRPr lang="en-US" sz="1200" dirty="0"/>
+            <a:endParaRPr lang="en-US" sz="1150" dirty="0"/>
           </a:p>
         </p:txBody>
       </p:sp>
@@ -5122,8 +6528,8 @@
         </p:nvSpPr>
         <p:spPr>
           <a:xfrm>
-            <a:off x="5175504" y="2944368"/>
-            <a:ext cx="256032" cy="146304"/>
+            <a:off x="5184648" y="2889504"/>
+            <a:ext cx="237744" cy="128016"/>
           </a:xfrm>
           <a:prstGeom prst="rightArrow">
             <a:avLst/>
@@ -5142,12 +6548,12 @@
         </p:nvSpPr>
         <p:spPr>
           <a:xfrm>
-            <a:off x="5486400" y="2788920"/>
-            <a:ext cx="6080760" cy="457200"/>
+            <a:off x="5486400" y="2761488"/>
+            <a:ext cx="6080760" cy="384048"/>
           </a:xfrm>
           <a:prstGeom prst="roundRect">
             <a:avLst>
-              <a:gd name="adj" fmla="val 18000"/>
+              <a:gd name="adj" fmla="val 21429"/>
             </a:avLst>
           </a:prstGeom>
           <a:solidFill>
@@ -5176,24 +6582,24 @@
         </p:nvSpPr>
         <p:spPr>
           <a:xfrm>
-            <a:off x="5760720" y="2788920"/>
-            <a:ext cx="5623560" cy="457200"/>
-          </a:xfrm>
-          <a:prstGeom prst="rect">
-            <a:avLst/>
-          </a:prstGeom>
-          <a:noFill/>
-          <a:ln/>
-        </p:spPr>
-        <p:txBody>
-          <a:bodyPr wrap="square" lIns="0" tIns="0" rIns="0" bIns="0" rtlCol="0" anchor="ctr"/>
-          <a:lstStyle/>
-          <a:p>
-            <a:pPr indent="0" marL="0">
-              <a:buNone/>
-            </a:pPr>
-            <a:r>
-              <a:rPr lang="en-US" sz="1200" dirty="0">
+            <a:off x="5742432" y="2761488"/>
+            <a:ext cx="5669280" cy="384048"/>
+          </a:xfrm>
+          <a:prstGeom prst="rect">
+            <a:avLst/>
+          </a:prstGeom>
+          <a:noFill/>
+          <a:ln/>
+        </p:spPr>
+        <p:txBody>
+          <a:bodyPr wrap="square" lIns="0" tIns="0" rIns="0" bIns="0" rtlCol="0" anchor="ctr"/>
+          <a:lstStyle/>
+          <a:p>
+            <a:pPr indent="0" marL="0">
+              <a:buNone/>
+            </a:pPr>
+            <a:r>
+              <a:rPr lang="en-US" sz="1150" dirty="0">
                 <a:solidFill>
                   <a:srgbClr val="E9EEF3"/>
                 </a:solidFill>
@@ -5203,7 +6609,7 @@
               </a:rPr>
               <a:t>Serverless SQL Warehouse over Delta + Unity Catalog</a:t>
             </a:r>
-            <a:endParaRPr lang="en-US" sz="1200" dirty="0"/>
+            <a:endParaRPr lang="en-US" sz="1150" dirty="0"/>
           </a:p>
         </p:txBody>
       </p:sp>
@@ -5215,12 +6621,12 @@
         </p:nvSpPr>
         <p:spPr>
           <a:xfrm>
-            <a:off x="640080" y="3319272"/>
-            <a:ext cx="4480560" cy="457200"/>
+            <a:off x="640080" y="3218688"/>
+            <a:ext cx="4480560" cy="384048"/>
           </a:xfrm>
           <a:prstGeom prst="roundRect">
             <a:avLst>
-              <a:gd name="adj" fmla="val 18000"/>
+              <a:gd name="adj" fmla="val 21429"/>
             </a:avLst>
           </a:prstGeom>
           <a:solidFill>
@@ -5249,24 +6655,24 @@
         </p:nvSpPr>
         <p:spPr>
           <a:xfrm>
-            <a:off x="914400" y="3319272"/>
-            <a:ext cx="4023360" cy="457200"/>
-          </a:xfrm>
-          <a:prstGeom prst="rect">
-            <a:avLst/>
-          </a:prstGeom>
-          <a:noFill/>
-          <a:ln/>
-        </p:spPr>
-        <p:txBody>
-          <a:bodyPr wrap="square" lIns="0" tIns="0" rIns="0" bIns="0" rtlCol="0" anchor="ctr"/>
-          <a:lstStyle/>
-          <a:p>
-            <a:pPr indent="0" marL="0">
-              <a:buNone/>
-            </a:pPr>
-            <a:r>
-              <a:rPr lang="en-US" sz="1200" dirty="0">
+            <a:off x="896112" y="3218688"/>
+            <a:ext cx="4069080" cy="384048"/>
+          </a:xfrm>
+          <a:prstGeom prst="rect">
+            <a:avLst/>
+          </a:prstGeom>
+          <a:noFill/>
+          <a:ln/>
+        </p:spPr>
+        <p:txBody>
+          <a:bodyPr wrap="square" lIns="0" tIns="0" rIns="0" bIns="0" rtlCol="0" anchor="ctr"/>
+          <a:lstStyle/>
+          <a:p>
+            <a:pPr indent="0" marL="0">
+              <a:buNone/>
+            </a:pPr>
+            <a:r>
+              <a:rPr lang="en-US" sz="1150" dirty="0">
                 <a:solidFill>
                   <a:srgbClr val="E9EEF3"/>
                 </a:solidFill>
@@ -5276,7 +6682,7 @@
               </a:rPr>
               <a:t>TF-IDF vector index</a:t>
             </a:r>
-            <a:endParaRPr lang="en-US" sz="1200" dirty="0"/>
+            <a:endParaRPr lang="en-US" sz="1150" dirty="0"/>
           </a:p>
         </p:txBody>
       </p:sp>
@@ -5288,8 +6694,8 @@
         </p:nvSpPr>
         <p:spPr>
           <a:xfrm>
-            <a:off x="5175504" y="3474720"/>
-            <a:ext cx="256032" cy="146304"/>
+            <a:off x="5184648" y="3346704"/>
+            <a:ext cx="237744" cy="128016"/>
           </a:xfrm>
           <a:prstGeom prst="rightArrow">
             <a:avLst/>
@@ -5308,12 +6714,12 @@
         </p:nvSpPr>
         <p:spPr>
           <a:xfrm>
-            <a:off x="5486400" y="3319272"/>
-            <a:ext cx="6080760" cy="457200"/>
+            <a:off x="5486400" y="3218688"/>
+            <a:ext cx="6080760" cy="384048"/>
           </a:xfrm>
           <a:prstGeom prst="roundRect">
             <a:avLst>
-              <a:gd name="adj" fmla="val 18000"/>
+              <a:gd name="adj" fmla="val 21429"/>
             </a:avLst>
           </a:prstGeom>
           <a:solidFill>
@@ -5342,24 +6748,24 @@
         </p:nvSpPr>
         <p:spPr>
           <a:xfrm>
-            <a:off x="5760720" y="3319272"/>
-            <a:ext cx="5623560" cy="457200"/>
-          </a:xfrm>
-          <a:prstGeom prst="rect">
-            <a:avLst/>
-          </a:prstGeom>
-          <a:noFill/>
-          <a:ln/>
-        </p:spPr>
-        <p:txBody>
-          <a:bodyPr wrap="square" lIns="0" tIns="0" rIns="0" bIns="0" rtlCol="0" anchor="ctr"/>
-          <a:lstStyle/>
-          <a:p>
-            <a:pPr indent="0" marL="0">
-              <a:buNone/>
-            </a:pPr>
-            <a:r>
-              <a:rPr lang="en-US" sz="1200" dirty="0">
+            <a:off x="5742432" y="3218688"/>
+            <a:ext cx="5669280" cy="384048"/>
+          </a:xfrm>
+          <a:prstGeom prst="rect">
+            <a:avLst/>
+          </a:prstGeom>
+          <a:noFill/>
+          <a:ln/>
+        </p:spPr>
+        <p:txBody>
+          <a:bodyPr wrap="square" lIns="0" tIns="0" rIns="0" bIns="0" rtlCol="0" anchor="ctr"/>
+          <a:lstStyle/>
+          <a:p>
+            <a:pPr indent="0" marL="0">
+              <a:buNone/>
+            </a:pPr>
+            <a:r>
+              <a:rPr lang="en-US" sz="1150" dirty="0">
                 <a:solidFill>
                   <a:srgbClr val="E9EEF3"/>
                 </a:solidFill>
@@ -5369,7 +6775,7 @@
               </a:rPr>
               <a:t>Mosaic AI Vector Search (bge-large embeddings)</a:t>
             </a:r>
-            <a:endParaRPr lang="en-US" sz="1200" dirty="0"/>
+            <a:endParaRPr lang="en-US" sz="1150" dirty="0"/>
           </a:p>
         </p:txBody>
       </p:sp>
@@ -5381,12 +6787,12 @@
         </p:nvSpPr>
         <p:spPr>
           <a:xfrm>
-            <a:off x="640080" y="3849624"/>
-            <a:ext cx="4480560" cy="457200"/>
+            <a:off x="640080" y="3675888"/>
+            <a:ext cx="4480560" cy="384048"/>
           </a:xfrm>
           <a:prstGeom prst="roundRect">
             <a:avLst>
-              <a:gd name="adj" fmla="val 18000"/>
+              <a:gd name="adj" fmla="val 21429"/>
             </a:avLst>
           </a:prstGeom>
           <a:solidFill>
@@ -5415,24 +6821,24 @@
         </p:nvSpPr>
         <p:spPr>
           <a:xfrm>
-            <a:off x="914400" y="3849624"/>
-            <a:ext cx="4023360" cy="457200"/>
-          </a:xfrm>
-          <a:prstGeom prst="rect">
-            <a:avLst/>
-          </a:prstGeom>
-          <a:noFill/>
-          <a:ln/>
-        </p:spPr>
-        <p:txBody>
-          <a:bodyPr wrap="square" lIns="0" tIns="0" rIns="0" bIns="0" rtlCol="0" anchor="ctr"/>
-          <a:lstStyle/>
-          <a:p>
-            <a:pPr indent="0" marL="0">
-              <a:buNone/>
-            </a:pPr>
-            <a:r>
-              <a:rPr lang="en-US" sz="1200" dirty="0">
+            <a:off x="896112" y="3675888"/>
+            <a:ext cx="4069080" cy="384048"/>
+          </a:xfrm>
+          <a:prstGeom prst="rect">
+            <a:avLst/>
+          </a:prstGeom>
+          <a:noFill/>
+          <a:ln/>
+        </p:spPr>
+        <p:txBody>
+          <a:bodyPr wrap="square" lIns="0" tIns="0" rIns="0" bIns="0" rtlCol="0" anchor="ctr"/>
+          <a:lstStyle/>
+          <a:p>
+            <a:pPr indent="0" marL="0">
+              <a:buNone/>
+            </a:pPr>
+            <a:r>
+              <a:rPr lang="en-US" sz="1150" dirty="0">
                 <a:solidFill>
                   <a:srgbClr val="E9EEF3"/>
                 </a:solidFill>
@@ -5440,9 +6846,9 @@
                 <a:ea typeface="Calibri" pitchFamily="34" charset="-122"/>
                 <a:cs typeface="Calibri" pitchFamily="34" charset="-120"/>
               </a:rPr>
-              <a:t>In-code governance allowlist</a:t>
-            </a:r>
-            <a:endParaRPr lang="en-US" sz="1200" dirty="0"/>
+              <a:t>In-code function allowlist</a:t>
+            </a:r>
+            <a:endParaRPr lang="en-US" sz="1150" dirty="0"/>
           </a:p>
         </p:txBody>
       </p:sp>
@@ -5454,8 +6860,8 @@
         </p:nvSpPr>
         <p:spPr>
           <a:xfrm>
-            <a:off x="5175504" y="4005072"/>
-            <a:ext cx="256032" cy="146304"/>
+            <a:off x="5184648" y="3803904"/>
+            <a:ext cx="237744" cy="128016"/>
           </a:xfrm>
           <a:prstGeom prst="rightArrow">
             <a:avLst/>
@@ -5474,12 +6880,12 @@
         </p:nvSpPr>
         <p:spPr>
           <a:xfrm>
-            <a:off x="5486400" y="3849624"/>
-            <a:ext cx="6080760" cy="457200"/>
+            <a:off x="5486400" y="3675888"/>
+            <a:ext cx="6080760" cy="384048"/>
           </a:xfrm>
           <a:prstGeom prst="roundRect">
             <a:avLst>
-              <a:gd name="adj" fmla="val 18000"/>
+              <a:gd name="adj" fmla="val 21429"/>
             </a:avLst>
           </a:prstGeom>
           <a:solidFill>
@@ -5508,24 +6914,24 @@
         </p:nvSpPr>
         <p:spPr>
           <a:xfrm>
-            <a:off x="5760720" y="3849624"/>
-            <a:ext cx="5623560" cy="457200"/>
-          </a:xfrm>
-          <a:prstGeom prst="rect">
-            <a:avLst/>
-          </a:prstGeom>
-          <a:noFill/>
-          <a:ln/>
-        </p:spPr>
-        <p:txBody>
-          <a:bodyPr wrap="square" lIns="0" tIns="0" rIns="0" bIns="0" rtlCol="0" anchor="ctr"/>
-          <a:lstStyle/>
-          <a:p>
-            <a:pPr indent="0" marL="0">
-              <a:buNone/>
-            </a:pPr>
-            <a:r>
-              <a:rPr lang="en-US" sz="1200" dirty="0">
+            <a:off x="5742432" y="3675888"/>
+            <a:ext cx="5669280" cy="384048"/>
+          </a:xfrm>
+          <a:prstGeom prst="rect">
+            <a:avLst/>
+          </a:prstGeom>
+          <a:noFill/>
+          <a:ln/>
+        </p:spPr>
+        <p:txBody>
+          <a:bodyPr wrap="square" lIns="0" tIns="0" rIns="0" bIns="0" rtlCol="0" anchor="ctr"/>
+          <a:lstStyle/>
+          <a:p>
+            <a:pPr indent="0" marL="0">
+              <a:buNone/>
+            </a:pPr>
+            <a:r>
+              <a:rPr lang="en-US" sz="1150" dirty="0">
                 <a:solidFill>
                   <a:srgbClr val="E9EEF3"/>
                 </a:solidFill>
@@ -5533,9 +6939,9 @@
                 <a:ea typeface="Calibri" pitchFamily="34" charset="-122"/>
                 <a:cs typeface="Calibri" pitchFamily="34" charset="-120"/>
               </a:rPr>
-              <a:t>GRANT EXECUTE ON FUNCTION + row/column-level security</a:t>
-            </a:r>
-            <a:endParaRPr lang="en-US" sz="1200" dirty="0"/>
+              <a:t>GRANT EXECUTE ON FUNCTION</a:t>
+            </a:r>
+            <a:endParaRPr lang="en-US" sz="1150" dirty="0"/>
           </a:p>
         </p:txBody>
       </p:sp>
@@ -5547,12 +6953,12 @@
         </p:nvSpPr>
         <p:spPr>
           <a:xfrm>
-            <a:off x="640080" y="4379976"/>
-            <a:ext cx="4480560" cy="457200"/>
+            <a:off x="640080" y="4133088"/>
+            <a:ext cx="4480560" cy="384048"/>
           </a:xfrm>
           <a:prstGeom prst="roundRect">
             <a:avLst>
-              <a:gd name="adj" fmla="val 18000"/>
+              <a:gd name="adj" fmla="val 21429"/>
             </a:avLst>
           </a:prstGeom>
           <a:solidFill>
@@ -5581,24 +6987,24 @@
         </p:nvSpPr>
         <p:spPr>
           <a:xfrm>
-            <a:off x="914400" y="4379976"/>
-            <a:ext cx="4023360" cy="457200"/>
-          </a:xfrm>
-          <a:prstGeom prst="rect">
-            <a:avLst/>
-          </a:prstGeom>
-          <a:noFill/>
-          <a:ln/>
-        </p:spPr>
-        <p:txBody>
-          <a:bodyPr wrap="square" lIns="0" tIns="0" rIns="0" bIns="0" rtlCol="0" anchor="ctr"/>
-          <a:lstStyle/>
-          <a:p>
-            <a:pPr indent="0" marL="0">
-              <a:buNone/>
-            </a:pPr>
-            <a:r>
-              <a:rPr lang="en-US" sz="1200" dirty="0">
+            <a:off x="896112" y="4133088"/>
+            <a:ext cx="4069080" cy="384048"/>
+          </a:xfrm>
+          <a:prstGeom prst="rect">
+            <a:avLst/>
+          </a:prstGeom>
+          <a:noFill/>
+          <a:ln/>
+        </p:spPr>
+        <p:txBody>
+          <a:bodyPr wrap="square" lIns="0" tIns="0" rIns="0" bIns="0" rtlCol="0" anchor="ctr"/>
+          <a:lstStyle/>
+          <a:p>
+            <a:pPr indent="0" marL="0">
+              <a:buNone/>
+            </a:pPr>
+            <a:r>
+              <a:rPr lang="en-US" sz="1150" dirty="0">
                 <a:solidFill>
                   <a:srgbClr val="E9EEF3"/>
                 </a:solidFill>
@@ -5606,9 +7012,9 @@
                 <a:ea typeface="Calibri" pitchFamily="34" charset="-122"/>
                 <a:cs typeface="Calibri" pitchFamily="34" charset="-120"/>
               </a:rPr>
-              <a:t>Append-only audit log</a:t>
-            </a:r>
-            <a:endParaRPr lang="en-US" sz="1200" dirty="0"/>
+              <a:t>Principal directory + row scopes</a:t>
+            </a:r>
+            <a:endParaRPr lang="en-US" sz="1150" dirty="0"/>
           </a:p>
         </p:txBody>
       </p:sp>
@@ -5620,8 +7026,8 @@
         </p:nvSpPr>
         <p:spPr>
           <a:xfrm>
-            <a:off x="5175504" y="4535424"/>
-            <a:ext cx="256032" cy="146304"/>
+            <a:off x="5184648" y="4261104"/>
+            <a:ext cx="237744" cy="128016"/>
           </a:xfrm>
           <a:prstGeom prst="rightArrow">
             <a:avLst/>
@@ -5640,12 +7046,12 @@
         </p:nvSpPr>
         <p:spPr>
           <a:xfrm>
-            <a:off x="5486400" y="4379976"/>
-            <a:ext cx="6080760" cy="457200"/>
+            <a:off x="5486400" y="4133088"/>
+            <a:ext cx="6080760" cy="384048"/>
           </a:xfrm>
           <a:prstGeom prst="roundRect">
             <a:avLst>
-              <a:gd name="adj" fmla="val 18000"/>
+              <a:gd name="adj" fmla="val 21429"/>
             </a:avLst>
           </a:prstGeom>
           <a:solidFill>
@@ -5674,24 +7080,24 @@
         </p:nvSpPr>
         <p:spPr>
           <a:xfrm>
-            <a:off x="5760720" y="4379976"/>
-            <a:ext cx="5623560" cy="457200"/>
-          </a:xfrm>
-          <a:prstGeom prst="rect">
-            <a:avLst/>
-          </a:prstGeom>
-          <a:noFill/>
-          <a:ln/>
-        </p:spPr>
-        <p:txBody>
-          <a:bodyPr wrap="square" lIns="0" tIns="0" rIns="0" bIns="0" rtlCol="0" anchor="ctr"/>
-          <a:lstStyle/>
-          <a:p>
-            <a:pPr indent="0" marL="0">
-              <a:buNone/>
-            </a:pPr>
-            <a:r>
-              <a:rPr lang="en-US" sz="1200" dirty="0">
+            <a:off x="5742432" y="4133088"/>
+            <a:ext cx="5669280" cy="384048"/>
+          </a:xfrm>
+          <a:prstGeom prst="rect">
+            <a:avLst/>
+          </a:prstGeom>
+          <a:noFill/>
+          <a:ln/>
+        </p:spPr>
+        <p:txBody>
+          <a:bodyPr wrap="square" lIns="0" tIns="0" rIns="0" bIns="0" rtlCol="0" anchor="ctr"/>
+          <a:lstStyle/>
+          <a:p>
+            <a:pPr indent="0" marL="0">
+              <a:buNone/>
+            </a:pPr>
+            <a:r>
+              <a:rPr lang="en-US" sz="1150" dirty="0">
                 <a:solidFill>
                   <a:srgbClr val="E9EEF3"/>
                 </a:solidFill>
@@ -5699,9 +7105,9 @@
                 <a:ea typeface="Calibri" pitchFamily="34" charset="-122"/>
                 <a:cs typeface="Calibri" pitchFamily="34" charset="-120"/>
               </a:rPr>
-              <a:t>Delta audit table with retention policy, or your SIEM</a:t>
-            </a:r>
-            <a:endParaRPr lang="en-US" sz="1200" dirty="0"/>
+              <a:t>Workspace identities + Unity Catalog row filters</a:t>
+            </a:r>
+            <a:endParaRPr lang="en-US" sz="1150" dirty="0"/>
           </a:p>
         </p:txBody>
       </p:sp>
@@ -5713,12 +7119,12 @@
         </p:nvSpPr>
         <p:spPr>
           <a:xfrm>
-            <a:off x="640080" y="4910328"/>
-            <a:ext cx="4480560" cy="457200"/>
+            <a:off x="640080" y="4590288"/>
+            <a:ext cx="4480560" cy="384048"/>
           </a:xfrm>
           <a:prstGeom prst="roundRect">
             <a:avLst>
-              <a:gd name="adj" fmla="val 18000"/>
+              <a:gd name="adj" fmla="val 21429"/>
             </a:avLst>
           </a:prstGeom>
           <a:solidFill>
@@ -5747,24 +7153,24 @@
         </p:nvSpPr>
         <p:spPr>
           <a:xfrm>
-            <a:off x="914400" y="4910328"/>
-            <a:ext cx="4023360" cy="457200"/>
-          </a:xfrm>
-          <a:prstGeom prst="rect">
-            <a:avLst/>
-          </a:prstGeom>
-          <a:noFill/>
-          <a:ln/>
-        </p:spPr>
-        <p:txBody>
-          <a:bodyPr wrap="square" lIns="0" tIns="0" rIns="0" bIns="0" rtlCol="0" anchor="ctr"/>
-          <a:lstStyle/>
-          <a:p>
-            <a:pPr indent="0" marL="0">
-              <a:buNone/>
-            </a:pPr>
-            <a:r>
-              <a:rPr lang="en-US" sz="1200" dirty="0">
+            <a:off x="896112" y="4590288"/>
+            <a:ext cx="4069080" cy="384048"/>
+          </a:xfrm>
+          <a:prstGeom prst="rect">
+            <a:avLst/>
+          </a:prstGeom>
+          <a:noFill/>
+          <a:ln/>
+        </p:spPr>
+        <p:txBody>
+          <a:bodyPr wrap="square" lIns="0" tIns="0" rIns="0" bIns="0" rtlCol="0" anchor="ctr"/>
+          <a:lstStyle/>
+          <a:p>
+            <a:pPr indent="0" marL="0">
+              <a:buNone/>
+            </a:pPr>
+            <a:r>
+              <a:rPr lang="en-US" sz="1150" dirty="0">
                 <a:solidFill>
                   <a:srgbClr val="E9EEF3"/>
                 </a:solidFill>
@@ -5772,9 +7178,9 @@
                 <a:ea typeface="Calibri" pitchFamily="34" charset="-122"/>
                 <a:cs typeface="Calibri" pitchFamily="34" charset="-120"/>
               </a:rPr>
-              <a:t>Local deterministic planner</a:t>
-            </a:r>
-            <a:endParaRPr lang="en-US" sz="1200" dirty="0"/>
+              <a:t>Append-only audit log</a:t>
+            </a:r>
+            <a:endParaRPr lang="en-US" sz="1150" dirty="0"/>
           </a:p>
         </p:txBody>
       </p:sp>
@@ -5786,8 +7192,8 @@
         </p:nvSpPr>
         <p:spPr>
           <a:xfrm>
-            <a:off x="5175504" y="5065776"/>
-            <a:ext cx="256032" cy="146304"/>
+            <a:off x="5184648" y="4718304"/>
+            <a:ext cx="237744" cy="128016"/>
           </a:xfrm>
           <a:prstGeom prst="rightArrow">
             <a:avLst/>
@@ -5806,12 +7212,12 @@
         </p:nvSpPr>
         <p:spPr>
           <a:xfrm>
-            <a:off x="5486400" y="4910328"/>
-            <a:ext cx="6080760" cy="457200"/>
+            <a:off x="5486400" y="4590288"/>
+            <a:ext cx="6080760" cy="384048"/>
           </a:xfrm>
           <a:prstGeom prst="roundRect">
             <a:avLst>
-              <a:gd name="adj" fmla="val 18000"/>
+              <a:gd name="adj" fmla="val 21429"/>
             </a:avLst>
           </a:prstGeom>
           <a:solidFill>
@@ -5840,24 +7246,24 @@
         </p:nvSpPr>
         <p:spPr>
           <a:xfrm>
-            <a:off x="5760720" y="4910328"/>
-            <a:ext cx="5623560" cy="457200"/>
-          </a:xfrm>
-          <a:prstGeom prst="rect">
-            <a:avLst/>
-          </a:prstGeom>
-          <a:noFill/>
-          <a:ln/>
-        </p:spPr>
-        <p:txBody>
-          <a:bodyPr wrap="square" lIns="0" tIns="0" rIns="0" bIns="0" rtlCol="0" anchor="ctr"/>
-          <a:lstStyle/>
-          <a:p>
-            <a:pPr indent="0" marL="0">
-              <a:buNone/>
-            </a:pPr>
-            <a:r>
-              <a:rPr lang="en-US" sz="1200" dirty="0">
+            <a:off x="5742432" y="4590288"/>
+            <a:ext cx="5669280" cy="384048"/>
+          </a:xfrm>
+          <a:prstGeom prst="rect">
+            <a:avLst/>
+          </a:prstGeom>
+          <a:noFill/>
+          <a:ln/>
+        </p:spPr>
+        <p:txBody>
+          <a:bodyPr wrap="square" lIns="0" tIns="0" rIns="0" bIns="0" rtlCol="0" anchor="ctr"/>
+          <a:lstStyle/>
+          <a:p>
+            <a:pPr indent="0" marL="0">
+              <a:buNone/>
+            </a:pPr>
+            <a:r>
+              <a:rPr lang="en-US" sz="1150" dirty="0">
                 <a:solidFill>
                   <a:srgbClr val="E9EEF3"/>
                 </a:solidFill>
@@ -5865,9 +7271,9 @@
                 <a:ea typeface="Calibri" pitchFamily="34" charset="-122"/>
                 <a:cs typeface="Calibri" pitchFamily="34" charset="-120"/>
               </a:rPr>
-              <a:t>Databricks Model Serving (Llama 3 / DBRX) in your VPC</a:t>
-            </a:r>
-            <a:endParaRPr lang="en-US" sz="1200" dirty="0"/>
+              <a:t>Delta audit table with retention, or your SIEM</a:t>
+            </a:r>
+            <a:endParaRPr lang="en-US" sz="1150" dirty="0"/>
           </a:p>
         </p:txBody>
       </p:sp>
@@ -5879,12 +7285,12 @@
         </p:nvSpPr>
         <p:spPr>
           <a:xfrm>
-            <a:off x="640080" y="5440680"/>
-            <a:ext cx="4480560" cy="457200"/>
+            <a:off x="640080" y="5047488"/>
+            <a:ext cx="4480560" cy="384048"/>
           </a:xfrm>
           <a:prstGeom prst="roundRect">
             <a:avLst>
-              <a:gd name="adj" fmla="val 18000"/>
+              <a:gd name="adj" fmla="val 21429"/>
             </a:avLst>
           </a:prstGeom>
           <a:solidFill>
@@ -5913,24 +7319,24 @@
         </p:nvSpPr>
         <p:spPr>
           <a:xfrm>
-            <a:off x="914400" y="5440680"/>
-            <a:ext cx="4023360" cy="457200"/>
-          </a:xfrm>
-          <a:prstGeom prst="rect">
-            <a:avLst/>
-          </a:prstGeom>
-          <a:noFill/>
-          <a:ln/>
-        </p:spPr>
-        <p:txBody>
-          <a:bodyPr wrap="square" lIns="0" tIns="0" rIns="0" bIns="0" rtlCol="0" anchor="ctr"/>
-          <a:lstStyle/>
-          <a:p>
-            <a:pPr indent="0" marL="0">
-              <a:buNone/>
-            </a:pPr>
-            <a:r>
-              <a:rPr lang="en-US" sz="1200" dirty="0">
+            <a:off x="896112" y="5047488"/>
+            <a:ext cx="4069080" cy="384048"/>
+          </a:xfrm>
+          <a:prstGeom prst="rect">
+            <a:avLst/>
+          </a:prstGeom>
+          <a:noFill/>
+          <a:ln/>
+        </p:spPr>
+        <p:txBody>
+          <a:bodyPr wrap="square" lIns="0" tIns="0" rIns="0" bIns="0" rtlCol="0" anchor="ctr"/>
+          <a:lstStyle/>
+          <a:p>
+            <a:pPr indent="0" marL="0">
+              <a:buNone/>
+            </a:pPr>
+            <a:r>
+              <a:rPr lang="en-US" sz="1150" dirty="0">
                 <a:solidFill>
                   <a:srgbClr val="E9EEF3"/>
                 </a:solidFill>
@@ -5938,9 +7344,9 @@
                 <a:ea typeface="Calibri" pitchFamily="34" charset="-122"/>
                 <a:cs typeface="Calibri" pitchFamily="34" charset="-120"/>
               </a:rPr>
-              <a:t>Synthetic JSON generator</a:t>
-            </a:r>
-            <a:endParaRPr lang="en-US" sz="1200" dirty="0"/>
+              <a:t>Local deterministic planner</a:t>
+            </a:r>
+            <a:endParaRPr lang="en-US" sz="1150" dirty="0"/>
           </a:p>
         </p:txBody>
       </p:sp>
@@ -5952,8 +7358,8 @@
         </p:nvSpPr>
         <p:spPr>
           <a:xfrm>
-            <a:off x="5175504" y="5596128"/>
-            <a:ext cx="256032" cy="146304"/>
+            <a:off x="5184648" y="5175504"/>
+            <a:ext cx="237744" cy="128016"/>
           </a:xfrm>
           <a:prstGeom prst="rightArrow">
             <a:avLst/>
@@ -5972,12 +7378,12 @@
         </p:nvSpPr>
         <p:spPr>
           <a:xfrm>
-            <a:off x="5486400" y="5440680"/>
-            <a:ext cx="6080760" cy="457200"/>
+            <a:off x="5486400" y="5047488"/>
+            <a:ext cx="6080760" cy="384048"/>
           </a:xfrm>
           <a:prstGeom prst="roundRect">
             <a:avLst>
-              <a:gd name="adj" fmla="val 18000"/>
+              <a:gd name="adj" fmla="val 21429"/>
             </a:avLst>
           </a:prstGeom>
           <a:solidFill>
@@ -6006,24 +7412,24 @@
         </p:nvSpPr>
         <p:spPr>
           <a:xfrm>
-            <a:off x="5760720" y="5440680"/>
-            <a:ext cx="5623560" cy="457200"/>
-          </a:xfrm>
-          <a:prstGeom prst="rect">
-            <a:avLst/>
-          </a:prstGeom>
-          <a:noFill/>
-          <a:ln/>
-        </p:spPr>
-        <p:txBody>
-          <a:bodyPr wrap="square" lIns="0" tIns="0" rIns="0" bIns="0" rtlCol="0" anchor="ctr"/>
-          <a:lstStyle/>
-          <a:p>
-            <a:pPr indent="0" marL="0">
-              <a:buNone/>
-            </a:pPr>
-            <a:r>
-              <a:rPr lang="en-US" sz="1200" dirty="0">
+            <a:off x="5742432" y="5047488"/>
+            <a:ext cx="5669280" cy="384048"/>
+          </a:xfrm>
+          <a:prstGeom prst="rect">
+            <a:avLst/>
+          </a:prstGeom>
+          <a:noFill/>
+          <a:ln/>
+        </p:spPr>
+        <p:txBody>
+          <a:bodyPr wrap="square" lIns="0" tIns="0" rIns="0" bIns="0" rtlCol="0" anchor="ctr"/>
+          <a:lstStyle/>
+          <a:p>
+            <a:pPr indent="0" marL="0">
+              <a:buNone/>
+            </a:pPr>
+            <a:r>
+              <a:rPr lang="en-US" sz="1150" dirty="0">
                 <a:solidFill>
                   <a:srgbClr val="E9EEF3"/>
                 </a:solidFill>
@@ -6031,15 +7437,181 @@
                 <a:ea typeface="Calibri" pitchFamily="34" charset="-122"/>
                 <a:cs typeface="Calibri" pitchFamily="34" charset="-120"/>
               </a:rPr>
+              <a:t>Databricks Model Serving (Llama 3 / DBRX) in your VPC</a:t>
+            </a:r>
+            <a:endParaRPr lang="en-US" sz="1150" dirty="0"/>
+          </a:p>
+        </p:txBody>
+      </p:sp>
+      <p:sp>
+        <p:nvSpPr>
+          <p:cNvPr id="38" name="Shape 36"/>
+          <p:cNvSpPr/>
+          <p:nvPr/>
+        </p:nvSpPr>
+        <p:spPr>
+          <a:xfrm>
+            <a:off x="640080" y="5504688"/>
+            <a:ext cx="4480560" cy="384048"/>
+          </a:xfrm>
+          <a:prstGeom prst="roundRect">
+            <a:avLst>
+              <a:gd name="adj" fmla="val 21429"/>
+            </a:avLst>
+          </a:prstGeom>
+          <a:solidFill>
+            <a:srgbClr val="18232F"/>
+          </a:solidFill>
+          <a:ln w="12700">
+            <a:solidFill>
+              <a:srgbClr val="2A3745"/>
+            </a:solidFill>
+            <a:prstDash val="solid"/>
+          </a:ln>
+          <a:effectLst>
+            <a:outerShdw sx="100000" sy="100000" kx="0" ky="0" algn="bl" rotWithShape="0" blurRad="114300" dist="38100" dir="5400000">
+              <a:srgbClr val="000000">
+                <a:alpha val="28000"/>
+              </a:srgbClr>
+            </a:outerShdw>
+          </a:effectLst>
+        </p:spPr>
+      </p:sp>
+      <p:sp>
+        <p:nvSpPr>
+          <p:cNvPr id="39" name="Text 37"/>
+          <p:cNvSpPr/>
+          <p:nvPr/>
+        </p:nvSpPr>
+        <p:spPr>
+          <a:xfrm>
+            <a:off x="896112" y="5504688"/>
+            <a:ext cx="4069080" cy="384048"/>
+          </a:xfrm>
+          <a:prstGeom prst="rect">
+            <a:avLst/>
+          </a:prstGeom>
+          <a:noFill/>
+          <a:ln/>
+        </p:spPr>
+        <p:txBody>
+          <a:bodyPr wrap="square" lIns="0" tIns="0" rIns="0" bIns="0" rtlCol="0" anchor="ctr"/>
+          <a:lstStyle/>
+          <a:p>
+            <a:pPr indent="0" marL="0">
+              <a:buNone/>
+            </a:pPr>
+            <a:r>
+              <a:rPr lang="en-US" sz="1150" dirty="0">
+                <a:solidFill>
+                  <a:srgbClr val="E9EEF3"/>
+                </a:solidFill>
+                <a:latin typeface="Calibri" pitchFamily="34" charset="0"/>
+                <a:ea typeface="Calibri" pitchFamily="34" charset="-122"/>
+                <a:cs typeface="Calibri" pitchFamily="34" charset="-120"/>
+              </a:rPr>
+              <a:t>Synthetic JSON generator</a:t>
+            </a:r>
+            <a:endParaRPr lang="en-US" sz="1150" dirty="0"/>
+          </a:p>
+        </p:txBody>
+      </p:sp>
+      <p:sp>
+        <p:nvSpPr>
+          <p:cNvPr id="40" name="Shape 38"/>
+          <p:cNvSpPr/>
+          <p:nvPr/>
+        </p:nvSpPr>
+        <p:spPr>
+          <a:xfrm>
+            <a:off x="5184648" y="5632704"/>
+            <a:ext cx="237744" cy="128016"/>
+          </a:xfrm>
+          <a:prstGeom prst="rightArrow">
+            <a:avLst/>
+          </a:prstGeom>
+          <a:solidFill>
+            <a:srgbClr val="FF6C00"/>
+          </a:solidFill>
+          <a:ln/>
+        </p:spPr>
+      </p:sp>
+      <p:sp>
+        <p:nvSpPr>
+          <p:cNvPr id="41" name="Shape 39"/>
+          <p:cNvSpPr/>
+          <p:nvPr/>
+        </p:nvSpPr>
+        <p:spPr>
+          <a:xfrm>
+            <a:off x="5486400" y="5504688"/>
+            <a:ext cx="6080760" cy="384048"/>
+          </a:xfrm>
+          <a:prstGeom prst="roundRect">
+            <a:avLst>
+              <a:gd name="adj" fmla="val 21429"/>
+            </a:avLst>
+          </a:prstGeom>
+          <a:solidFill>
+            <a:srgbClr val="18232F"/>
+          </a:solidFill>
+          <a:ln w="12700">
+            <a:solidFill>
+              <a:srgbClr val="2A3745"/>
+            </a:solidFill>
+            <a:prstDash val="solid"/>
+          </a:ln>
+          <a:effectLst>
+            <a:outerShdw sx="100000" sy="100000" kx="0" ky="0" algn="bl" rotWithShape="0" blurRad="114300" dist="38100" dir="5400000">
+              <a:srgbClr val="000000">
+                <a:alpha val="28000"/>
+              </a:srgbClr>
+            </a:outerShdw>
+          </a:effectLst>
+        </p:spPr>
+      </p:sp>
+      <p:sp>
+        <p:nvSpPr>
+          <p:cNvPr id="42" name="Text 40"/>
+          <p:cNvSpPr/>
+          <p:nvPr/>
+        </p:nvSpPr>
+        <p:spPr>
+          <a:xfrm>
+            <a:off x="5742432" y="5504688"/>
+            <a:ext cx="5669280" cy="384048"/>
+          </a:xfrm>
+          <a:prstGeom prst="rect">
+            <a:avLst/>
+          </a:prstGeom>
+          <a:noFill/>
+          <a:ln/>
+        </p:spPr>
+        <p:txBody>
+          <a:bodyPr wrap="square" lIns="0" tIns="0" rIns="0" bIns="0" rtlCol="0" anchor="ctr"/>
+          <a:lstStyle/>
+          <a:p>
+            <a:pPr indent="0" marL="0">
+              <a:buNone/>
+            </a:pPr>
+            <a:r>
+              <a:rPr lang="en-US" sz="1150" dirty="0">
+                <a:solidFill>
+                  <a:srgbClr val="E9EEF3"/>
+                </a:solidFill>
+                <a:latin typeface="Calibri" pitchFamily="34" charset="0"/>
+                <a:ea typeface="Calibri" pitchFamily="34" charset="-122"/>
+                <a:cs typeface="Calibri" pitchFamily="34" charset="-120"/>
+              </a:rPr>
               <a:t>Kafka streams / cloud storage via Auto Loader</a:t>
             </a:r>
-            <a:endParaRPr lang="en-US" sz="1200" dirty="0"/>
-          </a:p>
-        </p:txBody>
-      </p:sp>
-      <p:sp>
-        <p:nvSpPr>
-          <p:cNvPr id="38" name="Text 36"/>
+            <a:endParaRPr lang="en-US" sz="1150" dirty="0"/>
+          </a:p>
+        </p:txBody>
+      </p:sp>
+      <p:sp>
+        <p:nvSpPr>
+          <p:cNvPr id="43" name="Text 41"/>
           <p:cNvSpPr/>
           <p:nvPr/>
         </p:nvSpPr>
@@ -6062,7 +7634,7 @@
               <a:buNone/>
             </a:pPr>
             <a:r>
-              <a:rPr lang="en-US" sz="1300" i="1" dirty="0">
+              <a:rPr lang="en-US" sz="1400" i="1" dirty="0">
                 <a:solidFill>
                   <a:srgbClr val="93A1AF"/>
                 </a:solidFill>
@@ -6072,13 +7644,13 @@
               </a:rPr>
               <a:t>Point DATABRICKS_HOST / DATABRICKS_TOKEN at a workspace and the same call path routes to the served model.</a:t>
             </a:r>
-            <a:endParaRPr lang="en-US" sz="1300" dirty="0"/>
-          </a:p>
-        </p:txBody>
-      </p:sp>
-      <p:sp>
-        <p:nvSpPr>
-          <p:cNvPr id="39" name="Text 37"/>
+            <a:endParaRPr lang="en-US" sz="1400" dirty="0"/>
+          </a:p>
+        </p:txBody>
+      </p:sp>
+      <p:sp>
+        <p:nvSpPr>
+          <p:cNvPr id="44" name="Text 42"/>
           <p:cNvSpPr/>
           <p:nvPr/>
         </p:nvSpPr>
@@ -6109,7 +7681,7 @@
                 <a:ea typeface="Calibri" pitchFamily="34" charset="-122"/>
                 <a:cs typeface="Calibri" pitchFamily="34" charset="-120"/>
               </a:rPr>
-              <a:t>13</a:t>
+              <a:t>14</a:t>
             </a:r>
             <a:endParaRPr lang="en-US" sz="1000" dirty="0"/>
           </a:p>
@@ -6117,7 +7689,7 @@
       </p:sp>
       <p:sp>
         <p:nvSpPr>
-          <p:cNvPr id="40" name="Text 38"/>
+          <p:cNvPr id="45" name="Text 43"/>
           <p:cNvSpPr/>
           <p:nvPr/>
         </p:nvSpPr>
@@ -6162,9 +7734,9 @@
 </p:sld>
 </file>
 
-<file path=ppt/slides/slide14.xml><?xml version="1.0" encoding="utf-8"?>
+<file path=ppt/slides/slide15.xml><?xml version="1.0" encoding="utf-8"?>
 <p:sld xmlns:a="http://schemas.openxmlformats.org/drawingml/2006/main" xmlns:r="http://schemas.openxmlformats.org/officeDocument/2006/relationships" xmlns:p="http://schemas.openxmlformats.org/presentationml/2006/main">
-  <p:cSld name="Slide 14">
+  <p:cSld name="Slide 15">
     <p:bg>
       <p:bgPr>
         <a:solidFill>
@@ -6389,7 +7961,7 @@
                 <a:ea typeface="Calibri" pitchFamily="34" charset="-122"/>
                 <a:cs typeface="Calibri" pitchFamily="34" charset="-120"/>
               </a:rPr>
-              <a:t>IntelligenceStack proves it with running code — real answers, cited guidance, an enforced boundary, and a durable record of every decision.</a:t>
+              <a:t>Proven with running code — real answers, cited guidance, an enforced boundary, per-caller entitlements, and a durable record of every decision.</a:t>
             </a:r>
             <a:endParaRPr lang="en-US" sz="1700" dirty="0"/>
           </a:p>
@@ -6694,7 +8266,7 @@
                 <a:ea typeface="Calibri" pitchFamily="34" charset="-122"/>
                 <a:cs typeface="Calibri" pitchFamily="34" charset="-120"/>
               </a:rPr>
-              <a:t>github.com/atharvvani464/IntelligenceStack   ·   run locally in four commands</a:t>
+              <a:t>github.com/atharvvani464/IntelligenceStack   ·   runs locally in four commands   ·   77 tests, green in CI</a:t>
             </a:r>
             <a:endParaRPr lang="en-US" sz="1250" dirty="0"/>
           </a:p>
@@ -7361,7 +8933,7 @@
                 <a:ea typeface="Calibri" pitchFamily="34" charset="-122"/>
                 <a:cs typeface="Calibri" pitchFamily="34" charset="-120"/>
               </a:rPr>
-              <a:t>Compliance exposure</a:t>
+              <a:t>Unbounded access</a:t>
             </a:r>
             <a:endParaRPr lang="en-US" sz="1800" dirty="0"/>
           </a:p>
@@ -7403,7 +8975,7 @@
                 <a:ea typeface="Calibri" pitchFamily="34" charset="-122"/>
                 <a:cs typeface="Calibri" pitchFamily="34" charset="-120"/>
               </a:rPr>
-              <a:t>PII slips into a response and breaches GDPR, HIPAA, or internal policy. The audit question 'what can the AI actually do?' has no bounded answer.</a:t>
+              <a:t>Every user gets the model's full reach. 'What can the AI actually do, and for whom?' has no answer you can show an auditor.</a:t>
             </a:r>
             <a:endParaRPr lang="en-US" sz="1350" dirty="0"/>
           </a:p>
@@ -7417,24 +8989,24 @@
         </p:nvSpPr>
         <p:spPr>
           <a:xfrm>
-            <a:off x="640080" y="5806440"/>
-            <a:ext cx="10881360" cy="457200"/>
-          </a:xfrm>
-          <a:prstGeom prst="rect">
-            <a:avLst/>
-          </a:prstGeom>
-          <a:noFill/>
-          <a:ln/>
-        </p:spPr>
-        <p:txBody>
-          <a:bodyPr wrap="square" lIns="0" tIns="0" rIns="0" bIns="0" rtlCol="0" anchor="ctr"/>
-          <a:lstStyle/>
-          <a:p>
-            <a:pPr indent="0" marL="0">
-              <a:buNone/>
-            </a:pPr>
-            <a:r>
-              <a:rPr lang="en-US" sz="1500" i="1" dirty="0">
+            <a:off x="640080" y="6053328"/>
+            <a:ext cx="10881360" cy="274320"/>
+          </a:xfrm>
+          <a:prstGeom prst="rect">
+            <a:avLst/>
+          </a:prstGeom>
+          <a:noFill/>
+          <a:ln/>
+        </p:spPr>
+        <p:txBody>
+          <a:bodyPr wrap="square" lIns="0" tIns="0" rIns="0" bIns="0" rtlCol="0" anchor="ctr"/>
+          <a:lstStyle/>
+          <a:p>
+            <a:pPr indent="0" marL="0">
+              <a:buNone/>
+            </a:pPr>
+            <a:r>
+              <a:rPr lang="en-US" sz="1400" i="1" dirty="0">
                 <a:solidFill>
                   <a:srgbClr val="FF8A3D"/>
                 </a:solidFill>
@@ -7444,7 +9016,7 @@
               </a:rPr>
               <a:t>The traditional fix — copy the data out to the AI — is the most insecure option of all.</a:t>
             </a:r>
-            <a:endParaRPr lang="en-US" sz="1500" dirty="0"/>
+            <a:endParaRPr lang="en-US" sz="1400" dirty="0"/>
           </a:p>
         </p:txBody>
       </p:sp>
@@ -7818,8 +9390,8 @@
         </p:nvSpPr>
         <p:spPr>
           <a:xfrm>
-            <a:off x="1051560" y="3950208"/>
-            <a:ext cx="128016" cy="128016"/>
+            <a:off x="1051560" y="3840480"/>
+            <a:ext cx="118872" cy="118872"/>
           </a:xfrm>
           <a:prstGeom prst="ellipse">
             <a:avLst/>
@@ -7838,24 +9410,24 @@
         </p:nvSpPr>
         <p:spPr>
           <a:xfrm>
-            <a:off x="1298448" y="3840480"/>
-            <a:ext cx="4251960" cy="365760"/>
-          </a:xfrm>
-          <a:prstGeom prst="rect">
-            <a:avLst/>
-          </a:prstGeom>
-          <a:noFill/>
-          <a:ln/>
-        </p:spPr>
-        <p:txBody>
-          <a:bodyPr wrap="square" lIns="0" tIns="0" rIns="0" bIns="0" rtlCol="0" anchor="ctr"/>
-          <a:lstStyle/>
-          <a:p>
-            <a:pPr indent="0" marL="0">
-              <a:buNone/>
-            </a:pPr>
-            <a:r>
-              <a:rPr lang="en-US" sz="1400" dirty="0">
+            <a:off x="1298448" y="3739896"/>
+            <a:ext cx="4251960" cy="329184"/>
+          </a:xfrm>
+          <a:prstGeom prst="rect">
+            <a:avLst/>
+          </a:prstGeom>
+          <a:noFill/>
+          <a:ln/>
+        </p:spPr>
+        <p:txBody>
+          <a:bodyPr wrap="square" lIns="0" tIns="0" rIns="0" bIns="0" rtlCol="0" anchor="ctr"/>
+          <a:lstStyle/>
+          <a:p>
+            <a:pPr indent="0" marL="0">
+              <a:buNone/>
+            </a:pPr>
+            <a:r>
+              <a:rPr lang="en-US" sz="1350" dirty="0">
                 <a:solidFill>
                   <a:srgbClr val="93A1AF"/>
                 </a:solidFill>
@@ -7865,7 +9437,7 @@
               </a:rPr>
               <a:t>Proprietary rows leave the perimeter</a:t>
             </a:r>
-            <a:endParaRPr lang="en-US" sz="1400" dirty="0"/>
+            <a:endParaRPr lang="en-US" sz="1350" dirty="0"/>
           </a:p>
         </p:txBody>
       </p:sp>
@@ -7877,8 +9449,8 @@
         </p:nvSpPr>
         <p:spPr>
           <a:xfrm>
-            <a:off x="1051560" y="4352544"/>
-            <a:ext cx="128016" cy="128016"/>
+            <a:off x="1051560" y="4187952"/>
+            <a:ext cx="118872" cy="118872"/>
           </a:xfrm>
           <a:prstGeom prst="ellipse">
             <a:avLst/>
@@ -7897,24 +9469,24 @@
         </p:nvSpPr>
         <p:spPr>
           <a:xfrm>
-            <a:off x="1298448" y="4242816"/>
-            <a:ext cx="4251960" cy="365760"/>
-          </a:xfrm>
-          <a:prstGeom prst="rect">
-            <a:avLst/>
-          </a:prstGeom>
-          <a:noFill/>
-          <a:ln/>
-        </p:spPr>
-        <p:txBody>
-          <a:bodyPr wrap="square" lIns="0" tIns="0" rIns="0" bIns="0" rtlCol="0" anchor="ctr"/>
-          <a:lstStyle/>
-          <a:p>
-            <a:pPr indent="0" marL="0">
-              <a:buNone/>
-            </a:pPr>
-            <a:r>
-              <a:rPr lang="en-US" sz="1400" dirty="0">
+            <a:off x="1298448" y="4087368"/>
+            <a:ext cx="4251960" cy="329184"/>
+          </a:xfrm>
+          <a:prstGeom prst="rect">
+            <a:avLst/>
+          </a:prstGeom>
+          <a:noFill/>
+          <a:ln/>
+        </p:spPr>
+        <p:txBody>
+          <a:bodyPr wrap="square" lIns="0" tIns="0" rIns="0" bIns="0" rtlCol="0" anchor="ctr"/>
+          <a:lstStyle/>
+          <a:p>
+            <a:pPr indent="0" marL="0">
+              <a:buNone/>
+            </a:pPr>
+            <a:r>
+              <a:rPr lang="en-US" sz="1350" dirty="0">
                 <a:solidFill>
                   <a:srgbClr val="93A1AF"/>
                 </a:solidFill>
@@ -7924,7 +9496,7 @@
               </a:rPr>
               <a:t>The model is an unbounded database client</a:t>
             </a:r>
-            <a:endParaRPr lang="en-US" sz="1400" dirty="0"/>
+            <a:endParaRPr lang="en-US" sz="1350" dirty="0"/>
           </a:p>
         </p:txBody>
       </p:sp>
@@ -7936,8 +9508,8 @@
         </p:nvSpPr>
         <p:spPr>
           <a:xfrm>
-            <a:off x="1051560" y="4754880"/>
-            <a:ext cx="128016" cy="128016"/>
+            <a:off x="1051560" y="4535424"/>
+            <a:ext cx="118872" cy="118872"/>
           </a:xfrm>
           <a:prstGeom prst="ellipse">
             <a:avLst/>
@@ -7956,24 +9528,24 @@
         </p:nvSpPr>
         <p:spPr>
           <a:xfrm>
-            <a:off x="1298448" y="4645152"/>
-            <a:ext cx="4251960" cy="365760"/>
-          </a:xfrm>
-          <a:prstGeom prst="rect">
-            <a:avLst/>
-          </a:prstGeom>
-          <a:noFill/>
-          <a:ln/>
-        </p:spPr>
-        <p:txBody>
-          <a:bodyPr wrap="square" lIns="0" tIns="0" rIns="0" bIns="0" rtlCol="0" anchor="ctr"/>
-          <a:lstStyle/>
-          <a:p>
-            <a:pPr indent="0" marL="0">
-              <a:buNone/>
-            </a:pPr>
-            <a:r>
-              <a:rPr lang="en-US" sz="1400" dirty="0">
+            <a:off x="1298448" y="4434840"/>
+            <a:ext cx="4251960" cy="329184"/>
+          </a:xfrm>
+          <a:prstGeom prst="rect">
+            <a:avLst/>
+          </a:prstGeom>
+          <a:noFill/>
+          <a:ln/>
+        </p:spPr>
+        <p:txBody>
+          <a:bodyPr wrap="square" lIns="0" tIns="0" rIns="0" bIns="0" rtlCol="0" anchor="ctr"/>
+          <a:lstStyle/>
+          <a:p>
+            <a:pPr indent="0" marL="0">
+              <a:buNone/>
+            </a:pPr>
+            <a:r>
+              <a:rPr lang="en-US" sz="1350" dirty="0">
                 <a:solidFill>
                   <a:srgbClr val="93A1AF"/>
                 </a:solidFill>
@@ -7983,7 +9555,7 @@
               </a:rPr>
               <a:t>Injection can reach real tables</a:t>
             </a:r>
-            <a:endParaRPr lang="en-US" sz="1400" dirty="0"/>
+            <a:endParaRPr lang="en-US" sz="1350" dirty="0"/>
           </a:p>
         </p:txBody>
       </p:sp>
@@ -7995,8 +9567,8 @@
         </p:nvSpPr>
         <p:spPr>
           <a:xfrm>
-            <a:off x="1051560" y="5157216"/>
-            <a:ext cx="128016" cy="128016"/>
+            <a:off x="1051560" y="4882896"/>
+            <a:ext cx="118872" cy="118872"/>
           </a:xfrm>
           <a:prstGeom prst="ellipse">
             <a:avLst/>
@@ -8015,24 +9587,24 @@
         </p:nvSpPr>
         <p:spPr>
           <a:xfrm>
-            <a:off x="1298448" y="5047488"/>
-            <a:ext cx="4251960" cy="365760"/>
-          </a:xfrm>
-          <a:prstGeom prst="rect">
-            <a:avLst/>
-          </a:prstGeom>
-          <a:noFill/>
-          <a:ln/>
-        </p:spPr>
-        <p:txBody>
-          <a:bodyPr wrap="square" lIns="0" tIns="0" rIns="0" bIns="0" rtlCol="0" anchor="ctr"/>
-          <a:lstStyle/>
-          <a:p>
-            <a:pPr indent="0" marL="0">
-              <a:buNone/>
-            </a:pPr>
-            <a:r>
-              <a:rPr lang="en-US" sz="1400" dirty="0">
+            <a:off x="1298448" y="4782312"/>
+            <a:ext cx="4251960" cy="329184"/>
+          </a:xfrm>
+          <a:prstGeom prst="rect">
+            <a:avLst/>
+          </a:prstGeom>
+          <a:noFill/>
+          <a:ln/>
+        </p:spPr>
+        <p:txBody>
+          <a:bodyPr wrap="square" lIns="0" tIns="0" rIns="0" bIns="0" rtlCol="0" anchor="ctr"/>
+          <a:lstStyle/>
+          <a:p>
+            <a:pPr indent="0" marL="0">
+              <a:buNone/>
+            </a:pPr>
+            <a:r>
+              <a:rPr lang="en-US" sz="1350" dirty="0">
                 <a:solidFill>
                   <a:srgbClr val="93A1AF"/>
                 </a:solidFill>
@@ -8040,15 +9612,74 @@
                 <a:ea typeface="Calibri" pitchFamily="34" charset="-122"/>
                 <a:cs typeface="Calibri" pitchFamily="34" charset="-120"/>
               </a:rPr>
+              <a:t>Every user has the same reach</a:t>
+            </a:r>
+            <a:endParaRPr lang="en-US" sz="1350" dirty="0"/>
+          </a:p>
+        </p:txBody>
+      </p:sp>
+      <p:sp>
+        <p:nvSpPr>
+          <p:cNvPr id="17" name="Shape 15"/>
+          <p:cNvSpPr/>
+          <p:nvPr/>
+        </p:nvSpPr>
+        <p:spPr>
+          <a:xfrm>
+            <a:off x="1051560" y="5230368"/>
+            <a:ext cx="118872" cy="118872"/>
+          </a:xfrm>
+          <a:prstGeom prst="ellipse">
+            <a:avLst/>
+          </a:prstGeom>
+          <a:solidFill>
+            <a:srgbClr val="F85149"/>
+          </a:solidFill>
+          <a:ln/>
+        </p:spPr>
+      </p:sp>
+      <p:sp>
+        <p:nvSpPr>
+          <p:cNvPr id="18" name="Text 16"/>
+          <p:cNvSpPr/>
+          <p:nvPr/>
+        </p:nvSpPr>
+        <p:spPr>
+          <a:xfrm>
+            <a:off x="1298448" y="5129784"/>
+            <a:ext cx="4251960" cy="329184"/>
+          </a:xfrm>
+          <a:prstGeom prst="rect">
+            <a:avLst/>
+          </a:prstGeom>
+          <a:noFill/>
+          <a:ln/>
+        </p:spPr>
+        <p:txBody>
+          <a:bodyPr wrap="square" lIns="0" tIns="0" rIns="0" bIns="0" rtlCol="0" anchor="ctr"/>
+          <a:lstStyle/>
+          <a:p>
+            <a:pPr indent="0" marL="0">
+              <a:buNone/>
+            </a:pPr>
+            <a:r>
+              <a:rPr lang="en-US" sz="1350" dirty="0">
+                <a:solidFill>
+                  <a:srgbClr val="93A1AF"/>
+                </a:solidFill>
+                <a:latin typeface="Calibri" pitchFamily="34" charset="0"/>
+                <a:ea typeface="Calibri" pitchFamily="34" charset="-122"/>
+                <a:cs typeface="Calibri" pitchFamily="34" charset="-120"/>
+              </a:rPr>
               <a:t>Compliance answer: trust us</a:t>
             </a:r>
-            <a:endParaRPr lang="en-US" sz="1400" dirty="0"/>
-          </a:p>
-        </p:txBody>
-      </p:sp>
-      <p:sp>
-        <p:nvSpPr>
-          <p:cNvPr id="17" name="Shape 15"/>
+            <a:endParaRPr lang="en-US" sz="1350" dirty="0"/>
+          </a:p>
+        </p:txBody>
+      </p:sp>
+      <p:sp>
+        <p:nvSpPr>
+          <p:cNvPr id="19" name="Shape 17"/>
           <p:cNvSpPr/>
           <p:nvPr/>
         </p:nvSpPr>
@@ -8068,7 +9699,7 @@
       </p:sp>
       <p:sp>
         <p:nvSpPr>
-          <p:cNvPr id="18" name="Shape 16"/>
+          <p:cNvPr id="20" name="Shape 18"/>
           <p:cNvSpPr/>
           <p:nvPr/>
         </p:nvSpPr>
@@ -8102,7 +9733,7 @@
       </p:sp>
       <p:sp>
         <p:nvSpPr>
-          <p:cNvPr id="19" name="Text 17"/>
+          <p:cNvPr id="21" name="Text 19"/>
           <p:cNvSpPr/>
           <p:nvPr/>
         </p:nvSpPr>
@@ -8141,7 +9772,7 @@
       </p:sp>
       <p:sp>
         <p:nvSpPr>
-          <p:cNvPr id="20" name="Text 18"/>
+          <p:cNvPr id="22" name="Text 20"/>
           <p:cNvSpPr/>
           <p:nvPr/>
         </p:nvSpPr>
@@ -8180,14 +9811,14 @@
       </p:sp>
       <p:sp>
         <p:nvSpPr>
-          <p:cNvPr id="21" name="Shape 19"/>
-          <p:cNvSpPr/>
-          <p:nvPr/>
-        </p:nvSpPr>
-        <p:spPr>
-          <a:xfrm>
-            <a:off x="7315200" y="3950208"/>
-            <a:ext cx="128016" cy="128016"/>
+          <p:cNvPr id="23" name="Shape 21"/>
+          <p:cNvSpPr/>
+          <p:nvPr/>
+        </p:nvSpPr>
+        <p:spPr>
+          <a:xfrm>
+            <a:off x="7315200" y="3840480"/>
+            <a:ext cx="118872" cy="118872"/>
           </a:xfrm>
           <a:prstGeom prst="ellipse">
             <a:avLst/>
@@ -8200,30 +9831,30 @@
       </p:sp>
       <p:sp>
         <p:nvSpPr>
-          <p:cNvPr id="22" name="Text 20"/>
-          <p:cNvSpPr/>
-          <p:nvPr/>
-        </p:nvSpPr>
-        <p:spPr>
-          <a:xfrm>
-            <a:off x="7562088" y="3840480"/>
-            <a:ext cx="4251960" cy="365760"/>
-          </a:xfrm>
-          <a:prstGeom prst="rect">
-            <a:avLst/>
-          </a:prstGeom>
-          <a:noFill/>
-          <a:ln/>
-        </p:spPr>
-        <p:txBody>
-          <a:bodyPr wrap="square" lIns="0" tIns="0" rIns="0" bIns="0" rtlCol="0" anchor="ctr"/>
-          <a:lstStyle/>
-          <a:p>
-            <a:pPr indent="0" marL="0">
-              <a:buNone/>
-            </a:pPr>
-            <a:r>
-              <a:rPr lang="en-US" sz="1400" dirty="0">
+          <p:cNvPr id="24" name="Text 22"/>
+          <p:cNvSpPr/>
+          <p:nvPr/>
+        </p:nvSpPr>
+        <p:spPr>
+          <a:xfrm>
+            <a:off x="7562088" y="3739896"/>
+            <a:ext cx="4251960" cy="329184"/>
+          </a:xfrm>
+          <a:prstGeom prst="rect">
+            <a:avLst/>
+          </a:prstGeom>
+          <a:noFill/>
+          <a:ln/>
+        </p:spPr>
+        <p:txBody>
+          <a:bodyPr wrap="square" lIns="0" tIns="0" rIns="0" bIns="0" rtlCol="0" anchor="ctr"/>
+          <a:lstStyle/>
+          <a:p>
+            <a:pPr indent="0" marL="0">
+              <a:buNone/>
+            </a:pPr>
+            <a:r>
+              <a:rPr lang="en-US" sz="1350" dirty="0">
                 <a:solidFill>
                   <a:srgbClr val="E9EEF3"/>
                 </a:solidFill>
@@ -8233,20 +9864,20 @@
               </a:rPr>
               <a:t>Data never leaves the lakehouse</a:t>
             </a:r>
-            <a:endParaRPr lang="en-US" sz="1400" dirty="0"/>
-          </a:p>
-        </p:txBody>
-      </p:sp>
-      <p:sp>
-        <p:nvSpPr>
-          <p:cNvPr id="23" name="Shape 21"/>
-          <p:cNvSpPr/>
-          <p:nvPr/>
-        </p:nvSpPr>
-        <p:spPr>
-          <a:xfrm>
-            <a:off x="7315200" y="4352544"/>
-            <a:ext cx="128016" cy="128016"/>
+            <a:endParaRPr lang="en-US" sz="1350" dirty="0"/>
+          </a:p>
+        </p:txBody>
+      </p:sp>
+      <p:sp>
+        <p:nvSpPr>
+          <p:cNvPr id="25" name="Shape 23"/>
+          <p:cNvSpPr/>
+          <p:nvPr/>
+        </p:nvSpPr>
+        <p:spPr>
+          <a:xfrm>
+            <a:off x="7315200" y="4187952"/>
+            <a:ext cx="118872" cy="118872"/>
           </a:xfrm>
           <a:prstGeom prst="ellipse">
             <a:avLst/>
@@ -8259,30 +9890,30 @@
       </p:sp>
       <p:sp>
         <p:nvSpPr>
-          <p:cNvPr id="24" name="Text 22"/>
-          <p:cNvSpPr/>
-          <p:nvPr/>
-        </p:nvSpPr>
-        <p:spPr>
-          <a:xfrm>
-            <a:off x="7562088" y="4242816"/>
-            <a:ext cx="4251960" cy="365760"/>
-          </a:xfrm>
-          <a:prstGeom prst="rect">
-            <a:avLst/>
-          </a:prstGeom>
-          <a:noFill/>
-          <a:ln/>
-        </p:spPr>
-        <p:txBody>
-          <a:bodyPr wrap="square" lIns="0" tIns="0" rIns="0" bIns="0" rtlCol="0" anchor="ctr"/>
-          <a:lstStyle/>
-          <a:p>
-            <a:pPr indent="0" marL="0">
-              <a:buNone/>
-            </a:pPr>
-            <a:r>
-              <a:rPr lang="en-US" sz="1400" dirty="0">
+          <p:cNvPr id="26" name="Text 24"/>
+          <p:cNvSpPr/>
+          <p:nvPr/>
+        </p:nvSpPr>
+        <p:spPr>
+          <a:xfrm>
+            <a:off x="7562088" y="4087368"/>
+            <a:ext cx="4251960" cy="329184"/>
+          </a:xfrm>
+          <a:prstGeom prst="rect">
+            <a:avLst/>
+          </a:prstGeom>
+          <a:noFill/>
+          <a:ln/>
+        </p:spPr>
+        <p:txBody>
+          <a:bodyPr wrap="square" lIns="0" tIns="0" rIns="0" bIns="0" rtlCol="0" anchor="ctr"/>
+          <a:lstStyle/>
+          <a:p>
+            <a:pPr indent="0" marL="0">
+              <a:buNone/>
+            </a:pPr>
+            <a:r>
+              <a:rPr lang="en-US" sz="1350" dirty="0">
                 <a:solidFill>
                   <a:srgbClr val="E9EEF3"/>
                 </a:solidFill>
@@ -8292,20 +9923,20 @@
               </a:rPr>
               <a:t>The model is an orchestrator, not a client</a:t>
             </a:r>
-            <a:endParaRPr lang="en-US" sz="1400" dirty="0"/>
-          </a:p>
-        </p:txBody>
-      </p:sp>
-      <p:sp>
-        <p:nvSpPr>
-          <p:cNvPr id="25" name="Shape 23"/>
-          <p:cNvSpPr/>
-          <p:nvPr/>
-        </p:nvSpPr>
-        <p:spPr>
-          <a:xfrm>
-            <a:off x="7315200" y="4754880"/>
-            <a:ext cx="128016" cy="128016"/>
+            <a:endParaRPr lang="en-US" sz="1350" dirty="0"/>
+          </a:p>
+        </p:txBody>
+      </p:sp>
+      <p:sp>
+        <p:nvSpPr>
+          <p:cNvPr id="27" name="Shape 25"/>
+          <p:cNvSpPr/>
+          <p:nvPr/>
+        </p:nvSpPr>
+        <p:spPr>
+          <a:xfrm>
+            <a:off x="7315200" y="4535424"/>
+            <a:ext cx="118872" cy="118872"/>
           </a:xfrm>
           <a:prstGeom prst="ellipse">
             <a:avLst/>
@@ -8318,30 +9949,30 @@
       </p:sp>
       <p:sp>
         <p:nvSpPr>
-          <p:cNvPr id="26" name="Text 24"/>
-          <p:cNvSpPr/>
-          <p:nvPr/>
-        </p:nvSpPr>
-        <p:spPr>
-          <a:xfrm>
-            <a:off x="7562088" y="4645152"/>
-            <a:ext cx="4251960" cy="365760"/>
-          </a:xfrm>
-          <a:prstGeom prst="rect">
-            <a:avLst/>
-          </a:prstGeom>
-          <a:noFill/>
-          <a:ln/>
-        </p:spPr>
-        <p:txBody>
-          <a:bodyPr wrap="square" lIns="0" tIns="0" rIns="0" bIns="0" rtlCol="0" anchor="ctr"/>
-          <a:lstStyle/>
-          <a:p>
-            <a:pPr indent="0" marL="0">
-              <a:buNone/>
-            </a:pPr>
-            <a:r>
-              <a:rPr lang="en-US" sz="1400" dirty="0">
+          <p:cNvPr id="28" name="Text 26"/>
+          <p:cNvSpPr/>
+          <p:nvPr/>
+        </p:nvSpPr>
+        <p:spPr>
+          <a:xfrm>
+            <a:off x="7562088" y="4434840"/>
+            <a:ext cx="4251960" cy="329184"/>
+          </a:xfrm>
+          <a:prstGeom prst="rect">
+            <a:avLst/>
+          </a:prstGeom>
+          <a:noFill/>
+          <a:ln/>
+        </p:spPr>
+        <p:txBody>
+          <a:bodyPr wrap="square" lIns="0" tIns="0" rIns="0" bIns="0" rtlCol="0" anchor="ctr"/>
+          <a:lstStyle/>
+          <a:p>
+            <a:pPr indent="0" marL="0">
+              <a:buNone/>
+            </a:pPr>
+            <a:r>
+              <a:rPr lang="en-US" sz="1350" dirty="0">
                 <a:solidFill>
                   <a:srgbClr val="E9EEF3"/>
                 </a:solidFill>
@@ -8351,20 +9982,20 @@
               </a:rPr>
               <a:t>Only pre-approved functions can run</a:t>
             </a:r>
-            <a:endParaRPr lang="en-US" sz="1400" dirty="0"/>
-          </a:p>
-        </p:txBody>
-      </p:sp>
-      <p:sp>
-        <p:nvSpPr>
-          <p:cNvPr id="27" name="Shape 25"/>
-          <p:cNvSpPr/>
-          <p:nvPr/>
-        </p:nvSpPr>
-        <p:spPr>
-          <a:xfrm>
-            <a:off x="7315200" y="5157216"/>
-            <a:ext cx="128016" cy="128016"/>
+            <a:endParaRPr lang="en-US" sz="1350" dirty="0"/>
+          </a:p>
+        </p:txBody>
+      </p:sp>
+      <p:sp>
+        <p:nvSpPr>
+          <p:cNvPr id="29" name="Shape 27"/>
+          <p:cNvSpPr/>
+          <p:nvPr/>
+        </p:nvSpPr>
+        <p:spPr>
+          <a:xfrm>
+            <a:off x="7315200" y="4882896"/>
+            <a:ext cx="118872" cy="118872"/>
           </a:xfrm>
           <a:prstGeom prst="ellipse">
             <a:avLst/>
@@ -8377,30 +10008,30 @@
       </p:sp>
       <p:sp>
         <p:nvSpPr>
-          <p:cNvPr id="28" name="Text 26"/>
-          <p:cNvSpPr/>
-          <p:nvPr/>
-        </p:nvSpPr>
-        <p:spPr>
-          <a:xfrm>
-            <a:off x="7562088" y="5047488"/>
-            <a:ext cx="4251960" cy="365760"/>
-          </a:xfrm>
-          <a:prstGeom prst="rect">
-            <a:avLst/>
-          </a:prstGeom>
-          <a:noFill/>
-          <a:ln/>
-        </p:spPr>
-        <p:txBody>
-          <a:bodyPr wrap="square" lIns="0" tIns="0" rIns="0" bIns="0" rtlCol="0" anchor="ctr"/>
-          <a:lstStyle/>
-          <a:p>
-            <a:pPr indent="0" marL="0">
-              <a:buNone/>
-            </a:pPr>
-            <a:r>
-              <a:rPr lang="en-US" sz="1400" dirty="0">
+          <p:cNvPr id="30" name="Text 28"/>
+          <p:cNvSpPr/>
+          <p:nvPr/>
+        </p:nvSpPr>
+        <p:spPr>
+          <a:xfrm>
+            <a:off x="7562088" y="4782312"/>
+            <a:ext cx="4251960" cy="329184"/>
+          </a:xfrm>
+          <a:prstGeom prst="rect">
+            <a:avLst/>
+          </a:prstGeom>
+          <a:noFill/>
+          <a:ln/>
+        </p:spPr>
+        <p:txBody>
+          <a:bodyPr wrap="square" lIns="0" tIns="0" rIns="0" bIns="0" rtlCol="0" anchor="ctr"/>
+          <a:lstStyle/>
+          <a:p>
+            <a:pPr indent="0" marL="0">
+              <a:buNone/>
+            </a:pPr>
+            <a:r>
+              <a:rPr lang="en-US" sz="1350" dirty="0">
                 <a:solidFill>
                   <a:srgbClr val="E9EEF3"/>
                 </a:solidFill>
@@ -8408,54 +10039,113 @@
                 <a:ea typeface="Calibri" pitchFamily="34" charset="-122"/>
                 <a:cs typeface="Calibri" pitchFamily="34" charset="-120"/>
               </a:rPr>
+              <a:t>Each caller has their own entitlements</a:t>
+            </a:r>
+            <a:endParaRPr lang="en-US" sz="1350" dirty="0"/>
+          </a:p>
+        </p:txBody>
+      </p:sp>
+      <p:sp>
+        <p:nvSpPr>
+          <p:cNvPr id="31" name="Shape 29"/>
+          <p:cNvSpPr/>
+          <p:nvPr/>
+        </p:nvSpPr>
+        <p:spPr>
+          <a:xfrm>
+            <a:off x="7315200" y="5230368"/>
+            <a:ext cx="118872" cy="118872"/>
+          </a:xfrm>
+          <a:prstGeom prst="ellipse">
+            <a:avLst/>
+          </a:prstGeom>
+          <a:solidFill>
+            <a:srgbClr val="3FB950"/>
+          </a:solidFill>
+          <a:ln/>
+        </p:spPr>
+      </p:sp>
+      <p:sp>
+        <p:nvSpPr>
+          <p:cNvPr id="32" name="Text 30"/>
+          <p:cNvSpPr/>
+          <p:nvPr/>
+        </p:nvSpPr>
+        <p:spPr>
+          <a:xfrm>
+            <a:off x="7562088" y="5129784"/>
+            <a:ext cx="4251960" cy="329184"/>
+          </a:xfrm>
+          <a:prstGeom prst="rect">
+            <a:avLst/>
+          </a:prstGeom>
+          <a:noFill/>
+          <a:ln/>
+        </p:spPr>
+        <p:txBody>
+          <a:bodyPr wrap="square" lIns="0" tIns="0" rIns="0" bIns="0" rtlCol="0" anchor="ctr"/>
+          <a:lstStyle/>
+          <a:p>
+            <a:pPr indent="0" marL="0">
+              <a:buNone/>
+            </a:pPr>
+            <a:r>
+              <a:rPr lang="en-US" sz="1350" dirty="0">
+                <a:solidFill>
+                  <a:srgbClr val="E9EEF3"/>
+                </a:solidFill>
+                <a:latin typeface="Calibri" pitchFamily="34" charset="0"/>
+                <a:ea typeface="Calibri" pitchFamily="34" charset="-122"/>
+                <a:cs typeface="Calibri" pitchFamily="34" charset="-120"/>
+              </a:rPr>
               <a:t>Compliance answer: here is the evidence</a:t>
             </a:r>
+            <a:endParaRPr lang="en-US" sz="1350" dirty="0"/>
+          </a:p>
+        </p:txBody>
+      </p:sp>
+      <p:sp>
+        <p:nvSpPr>
+          <p:cNvPr id="33" name="Text 31"/>
+          <p:cNvSpPr/>
+          <p:nvPr/>
+        </p:nvSpPr>
+        <p:spPr>
+          <a:xfrm>
+            <a:off x="640080" y="6053328"/>
+            <a:ext cx="10881360" cy="274320"/>
+          </a:xfrm>
+          <a:prstGeom prst="rect">
+            <a:avLst/>
+          </a:prstGeom>
+          <a:noFill/>
+          <a:ln/>
+        </p:spPr>
+        <p:txBody>
+          <a:bodyPr wrap="square" lIns="0" tIns="0" rIns="0" bIns="0" rtlCol="0" anchor="ctr"/>
+          <a:lstStyle/>
+          <a:p>
+            <a:pPr indent="0" marL="0">
+              <a:buNone/>
+            </a:pPr>
+            <a:r>
+              <a:rPr lang="en-US" sz="1400" i="1" dirty="0">
+                <a:solidFill>
+                  <a:srgbClr val="FF8A3D"/>
+                </a:solidFill>
+                <a:latin typeface="Calibri" pitchFamily="34" charset="0"/>
+                <a:ea typeface="Calibri" pitchFamily="34" charset="-122"/>
+                <a:cs typeface="Calibri" pitchFamily="34" charset="-120"/>
+              </a:rPr>
+              <a:t>The LLM operates strictly as an orchestrator — it chooses which approved function to call, and is mechanically incapable of anything else.</a:t>
+            </a:r>
             <a:endParaRPr lang="en-US" sz="1400" dirty="0"/>
           </a:p>
         </p:txBody>
       </p:sp>
       <p:sp>
         <p:nvSpPr>
-          <p:cNvPr id="29" name="Text 27"/>
-          <p:cNvSpPr/>
-          <p:nvPr/>
-        </p:nvSpPr>
-        <p:spPr>
-          <a:xfrm>
-            <a:off x="640080" y="5852160"/>
-            <a:ext cx="10881360" cy="457200"/>
-          </a:xfrm>
-          <a:prstGeom prst="rect">
-            <a:avLst/>
-          </a:prstGeom>
-          <a:noFill/>
-          <a:ln/>
-        </p:spPr>
-        <p:txBody>
-          <a:bodyPr wrap="square" lIns="0" tIns="0" rIns="0" bIns="0" rtlCol="0" anchor="ctr"/>
-          <a:lstStyle/>
-          <a:p>
-            <a:pPr indent="0" marL="0">
-              <a:buNone/>
-            </a:pPr>
-            <a:r>
-              <a:rPr lang="en-US" sz="1500" i="1" dirty="0">
-                <a:solidFill>
-                  <a:srgbClr val="FF8A3D"/>
-                </a:solidFill>
-                <a:latin typeface="Calibri" pitchFamily="34" charset="0"/>
-                <a:ea typeface="Calibri" pitchFamily="34" charset="-122"/>
-                <a:cs typeface="Calibri" pitchFamily="34" charset="-120"/>
-              </a:rPr>
-              <a:t>The LLM operates strictly as an orchestrator — it decides which approved function to call, and it is mechanically incapable of anything else.</a:t>
-            </a:r>
-            <a:endParaRPr lang="en-US" sz="1500" dirty="0"/>
-          </a:p>
-        </p:txBody>
-      </p:sp>
-      <p:sp>
-        <p:nvSpPr>
-          <p:cNvPr id="30" name="Text 28"/>
+          <p:cNvPr id="34" name="Text 32"/>
           <p:cNvSpPr/>
           <p:nvPr/>
         </p:nvSpPr>
@@ -8494,7 +10184,7 @@
       </p:sp>
       <p:sp>
         <p:nvSpPr>
-          <p:cNvPr id="31" name="Text 29"/>
+          <p:cNvPr id="35" name="Text 33"/>
           <p:cNvSpPr/>
           <p:nvPr/>
         </p:nvSpPr>
@@ -8693,8 +10383,8 @@
         </p:nvSpPr>
         <p:spPr>
           <a:xfrm>
-            <a:off x="5760720" y="1828800"/>
-            <a:ext cx="329184" cy="329184"/>
+            <a:off x="5760720" y="1801368"/>
+            <a:ext cx="310896" cy="310896"/>
           </a:xfrm>
           <a:prstGeom prst="ellipse">
             <a:avLst/>
@@ -8702,7 +10392,7 @@
           <a:solidFill>
             <a:srgbClr val="2A1B12"/>
           </a:solidFill>
-          <a:ln w="15240">
+          <a:ln w="13970">
             <a:solidFill>
               <a:srgbClr val="FF6C00"/>
             </a:solidFill>
@@ -8718,8 +10408,8 @@
         </p:nvSpPr>
         <p:spPr>
           <a:xfrm>
-            <a:off x="5760720" y="1828800"/>
-            <a:ext cx="329184" cy="329184"/>
+            <a:off x="5760720" y="1801368"/>
+            <a:ext cx="310896" cy="310896"/>
           </a:xfrm>
           <a:prstGeom prst="rect">
             <a:avLst/>
@@ -8735,7 +10425,7 @@
               <a:buNone/>
             </a:pPr>
             <a:r>
-              <a:rPr lang="en-US" sz="1400" b="1" dirty="0">
+              <a:rPr lang="en-US" sz="1300" b="1" dirty="0">
                 <a:solidFill>
                   <a:srgbClr val="FF8A3D"/>
                 </a:solidFill>
@@ -8745,7 +10435,7 @@
               </a:rPr>
               <a:t>1</a:t>
             </a:r>
-            <a:endParaRPr lang="en-US" sz="1400" dirty="0"/>
+            <a:endParaRPr lang="en-US" sz="1300" dirty="0"/>
           </a:p>
         </p:txBody>
       </p:sp>
@@ -8757,24 +10447,24 @@
         </p:nvSpPr>
         <p:spPr>
           <a:xfrm>
-            <a:off x="6236208" y="1764792"/>
-            <a:ext cx="5285232" cy="292608"/>
-          </a:xfrm>
-          <a:prstGeom prst="rect">
-            <a:avLst/>
-          </a:prstGeom>
-          <a:noFill/>
-          <a:ln/>
-        </p:spPr>
-        <p:txBody>
-          <a:bodyPr wrap="square" lIns="0" tIns="0" rIns="0" bIns="0" rtlCol="0" anchor="ctr"/>
-          <a:lstStyle/>
-          <a:p>
-            <a:pPr indent="0" marL="0">
-              <a:buNone/>
-            </a:pPr>
-            <a:r>
-              <a:rPr lang="en-US" sz="1400" b="1" dirty="0">
+            <a:off x="6217920" y="1737360"/>
+            <a:ext cx="5303520" cy="274320"/>
+          </a:xfrm>
+          <a:prstGeom prst="rect">
+            <a:avLst/>
+          </a:prstGeom>
+          <a:noFill/>
+          <a:ln/>
+        </p:spPr>
+        <p:txBody>
+          <a:bodyPr wrap="square" lIns="0" tIns="0" rIns="0" bIns="0" rtlCol="0" anchor="ctr"/>
+          <a:lstStyle/>
+          <a:p>
+            <a:pPr indent="0" marL="0">
+              <a:buNone/>
+            </a:pPr>
+            <a:r>
+              <a:rPr lang="en-US" sz="1350" b="1" dirty="0">
                 <a:solidFill>
                   <a:srgbClr val="E9EEF3"/>
                 </a:solidFill>
@@ -8784,7 +10474,7 @@
               </a:rPr>
               <a:t>Streaming ingestion</a:t>
             </a:r>
-            <a:endParaRPr lang="en-US" sz="1400" dirty="0"/>
+            <a:endParaRPr lang="en-US" sz="1350" dirty="0"/>
           </a:p>
         </p:txBody>
       </p:sp>
@@ -8796,8 +10486,8 @@
         </p:nvSpPr>
         <p:spPr>
           <a:xfrm>
-            <a:off x="6236208" y="2039112"/>
-            <a:ext cx="5285232" cy="530352"/>
+            <a:off x="6217920" y="1993392"/>
+            <a:ext cx="5303520" cy="438912"/>
           </a:xfrm>
           <a:prstGeom prst="rect">
             <a:avLst/>
@@ -8811,12 +10501,12 @@
           <a:p>
             <a:pPr indent="0" marL="0">
               <a:lnSpc>
-                <a:spcPct val="102000"/>
+                <a:spcPct val="100000"/>
               </a:lnSpc>
               <a:buNone/>
             </a:pPr>
             <a:r>
-              <a:rPr lang="en-US" sz="1050" dirty="0">
+              <a:rPr lang="en-US" sz="1000" dirty="0">
                 <a:solidFill>
                   <a:srgbClr val="93A1AF"/>
                 </a:solidFill>
@@ -8824,9 +10514,9 @@
                 <a:ea typeface="Calibri" pitchFamily="34" charset="-122"/>
                 <a:cs typeface="Calibri" pitchFamily="34" charset="-120"/>
               </a:rPr>
-              <a:t>Auto Loader + Delta Live Tables land events through a bronze → silver → gold medallion, enforcing data quality and hashing PII on the way in.</a:t>
-            </a:r>
-            <a:endParaRPr lang="en-US" sz="1050" dirty="0"/>
+              <a:t>Auto Loader + Delta Live Tables land events through a bronze → silver → gold medallion, enforcing quality and hashing PII on the way in.</a:t>
+            </a:r>
+            <a:endParaRPr lang="en-US" sz="1000" dirty="0"/>
           </a:p>
         </p:txBody>
       </p:sp>
@@ -8838,8 +10528,8 @@
         </p:nvSpPr>
         <p:spPr>
           <a:xfrm>
-            <a:off x="5760720" y="2569464"/>
-            <a:ext cx="329184" cy="329184"/>
+            <a:off x="5760720" y="2441448"/>
+            <a:ext cx="310896" cy="310896"/>
           </a:xfrm>
           <a:prstGeom prst="ellipse">
             <a:avLst/>
@@ -8847,7 +10537,7 @@
           <a:solidFill>
             <a:srgbClr val="2A1B12"/>
           </a:solidFill>
-          <a:ln w="15240">
+          <a:ln w="13970">
             <a:solidFill>
               <a:srgbClr val="FF6C00"/>
             </a:solidFill>
@@ -8863,8 +10553,8 @@
         </p:nvSpPr>
         <p:spPr>
           <a:xfrm>
-            <a:off x="5760720" y="2569464"/>
-            <a:ext cx="329184" cy="329184"/>
+            <a:off x="5760720" y="2441448"/>
+            <a:ext cx="310896" cy="310896"/>
           </a:xfrm>
           <a:prstGeom prst="rect">
             <a:avLst/>
@@ -8880,7 +10570,7 @@
               <a:buNone/>
             </a:pPr>
             <a:r>
-              <a:rPr lang="en-US" sz="1400" b="1" dirty="0">
+              <a:rPr lang="en-US" sz="1300" b="1" dirty="0">
                 <a:solidFill>
                   <a:srgbClr val="FF8A3D"/>
                 </a:solidFill>
@@ -8890,7 +10580,7 @@
               </a:rPr>
               <a:t>2</a:t>
             </a:r>
-            <a:endParaRPr lang="en-US" sz="1400" dirty="0"/>
+            <a:endParaRPr lang="en-US" sz="1300" dirty="0"/>
           </a:p>
         </p:txBody>
       </p:sp>
@@ -8902,24 +10592,24 @@
         </p:nvSpPr>
         <p:spPr>
           <a:xfrm>
-            <a:off x="6236208" y="2505456"/>
-            <a:ext cx="5285232" cy="292608"/>
-          </a:xfrm>
-          <a:prstGeom prst="rect">
-            <a:avLst/>
-          </a:prstGeom>
-          <a:noFill/>
-          <a:ln/>
-        </p:spPr>
-        <p:txBody>
-          <a:bodyPr wrap="square" lIns="0" tIns="0" rIns="0" bIns="0" rtlCol="0" anchor="ctr"/>
-          <a:lstStyle/>
-          <a:p>
-            <a:pPr indent="0" marL="0">
-              <a:buNone/>
-            </a:pPr>
-            <a:r>
-              <a:rPr lang="en-US" sz="1400" b="1" dirty="0">
+            <a:off x="6217920" y="2377440"/>
+            <a:ext cx="5303520" cy="274320"/>
+          </a:xfrm>
+          <a:prstGeom prst="rect">
+            <a:avLst/>
+          </a:prstGeom>
+          <a:noFill/>
+          <a:ln/>
+        </p:spPr>
+        <p:txBody>
+          <a:bodyPr wrap="square" lIns="0" tIns="0" rIns="0" bIns="0" rtlCol="0" anchor="ctr"/>
+          <a:lstStyle/>
+          <a:p>
+            <a:pPr indent="0" marL="0">
+              <a:buNone/>
+            </a:pPr>
+            <a:r>
+              <a:rPr lang="en-US" sz="1350" b="1" dirty="0">
                 <a:solidFill>
                   <a:srgbClr val="E9EEF3"/>
                 </a:solidFill>
@@ -8929,7 +10619,7 @@
               </a:rPr>
               <a:t>Governed gold layer</a:t>
             </a:r>
-            <a:endParaRPr lang="en-US" sz="1400" dirty="0"/>
+            <a:endParaRPr lang="en-US" sz="1350" dirty="0"/>
           </a:p>
         </p:txBody>
       </p:sp>
@@ -8941,8 +10631,8 @@
         </p:nvSpPr>
         <p:spPr>
           <a:xfrm>
-            <a:off x="6236208" y="2779776"/>
-            <a:ext cx="5285232" cy="530352"/>
+            <a:off x="6217920" y="2633472"/>
+            <a:ext cx="5303520" cy="438912"/>
           </a:xfrm>
           <a:prstGeom prst="rect">
             <a:avLst/>
@@ -8956,12 +10646,12 @@
           <a:p>
             <a:pPr indent="0" marL="0">
               <a:lnSpc>
-                <a:spcPct val="102000"/>
+                <a:spcPct val="100000"/>
               </a:lnSpc>
               <a:buNone/>
             </a:pPr>
             <a:r>
-              <a:rPr lang="en-US" sz="1050" dirty="0">
+              <a:rPr lang="en-US" sz="1000" dirty="0">
                 <a:solidFill>
                   <a:srgbClr val="93A1AF"/>
                 </a:solidFill>
@@ -8969,9 +10659,9 @@
                 <a:ea typeface="Calibri" pitchFamily="34" charset="-122"/>
                 <a:cs typeface="Calibri" pitchFamily="34" charset="-120"/>
               </a:rPr>
-              <a:t>Business-ready tables the agent reads. In the sandbox a real DuckDB engine; in production, a Serverless SQL Warehouse over Delta.</a:t>
-            </a:r>
-            <a:endParaRPr lang="en-US" sz="1050" dirty="0"/>
+              <a:t>Business-ready tables the agent reads — a real DuckDB engine locally, a Serverless SQL Warehouse over Delta in production.</a:t>
+            </a:r>
+            <a:endParaRPr lang="en-US" sz="1000" dirty="0"/>
           </a:p>
         </p:txBody>
       </p:sp>
@@ -8983,8 +10673,8 @@
         </p:nvSpPr>
         <p:spPr>
           <a:xfrm>
-            <a:off x="5760720" y="3310128"/>
-            <a:ext cx="329184" cy="329184"/>
+            <a:off x="5760720" y="3081528"/>
+            <a:ext cx="310896" cy="310896"/>
           </a:xfrm>
           <a:prstGeom prst="ellipse">
             <a:avLst/>
@@ -8992,7 +10682,7 @@
           <a:solidFill>
             <a:srgbClr val="2A1B12"/>
           </a:solidFill>
-          <a:ln w="15240">
+          <a:ln w="13970">
             <a:solidFill>
               <a:srgbClr val="FF6C00"/>
             </a:solidFill>
@@ -9008,8 +10698,8 @@
         </p:nvSpPr>
         <p:spPr>
           <a:xfrm>
-            <a:off x="5760720" y="3310128"/>
-            <a:ext cx="329184" cy="329184"/>
+            <a:off x="5760720" y="3081528"/>
+            <a:ext cx="310896" cy="310896"/>
           </a:xfrm>
           <a:prstGeom prst="rect">
             <a:avLst/>
@@ -9025,7 +10715,7 @@
               <a:buNone/>
             </a:pPr>
             <a:r>
-              <a:rPr lang="en-US" sz="1400" b="1" dirty="0">
+              <a:rPr lang="en-US" sz="1300" b="1" dirty="0">
                 <a:solidFill>
                   <a:srgbClr val="FF8A3D"/>
                 </a:solidFill>
@@ -9035,7 +10725,7 @@
               </a:rPr>
               <a:t>3</a:t>
             </a:r>
-            <a:endParaRPr lang="en-US" sz="1400" dirty="0"/>
+            <a:endParaRPr lang="en-US" sz="1300" dirty="0"/>
           </a:p>
         </p:txBody>
       </p:sp>
@@ -9047,24 +10737,24 @@
         </p:nvSpPr>
         <p:spPr>
           <a:xfrm>
-            <a:off x="6236208" y="3246120"/>
-            <a:ext cx="5285232" cy="292608"/>
-          </a:xfrm>
-          <a:prstGeom prst="rect">
-            <a:avLst/>
-          </a:prstGeom>
-          <a:noFill/>
-          <a:ln/>
-        </p:spPr>
-        <p:txBody>
-          <a:bodyPr wrap="square" lIns="0" tIns="0" rIns="0" bIns="0" rtlCol="0" anchor="ctr"/>
-          <a:lstStyle/>
-          <a:p>
-            <a:pPr indent="0" marL="0">
-              <a:buNone/>
-            </a:pPr>
-            <a:r>
-              <a:rPr lang="en-US" sz="1400" b="1" dirty="0">
+            <a:off x="6217920" y="3017520"/>
+            <a:ext cx="5303520" cy="274320"/>
+          </a:xfrm>
+          <a:prstGeom prst="rect">
+            <a:avLst/>
+          </a:prstGeom>
+          <a:noFill/>
+          <a:ln/>
+        </p:spPr>
+        <p:txBody>
+          <a:bodyPr wrap="square" lIns="0" tIns="0" rIns="0" bIns="0" rtlCol="0" anchor="ctr"/>
+          <a:lstStyle/>
+          <a:p>
+            <a:pPr indent="0" marL="0">
+              <a:buNone/>
+            </a:pPr>
+            <a:r>
+              <a:rPr lang="en-US" sz="1350" b="1" dirty="0">
                 <a:solidFill>
                   <a:srgbClr val="E9EEF3"/>
                 </a:solidFill>
@@ -9074,7 +10764,7 @@
               </a:rPr>
               <a:t>Unity Catalog boundary</a:t>
             </a:r>
-            <a:endParaRPr lang="en-US" sz="1400" dirty="0"/>
+            <a:endParaRPr lang="en-US" sz="1350" dirty="0"/>
           </a:p>
         </p:txBody>
       </p:sp>
@@ -9086,8 +10776,8 @@
         </p:nvSpPr>
         <p:spPr>
           <a:xfrm>
-            <a:off x="6236208" y="3520440"/>
-            <a:ext cx="5285232" cy="530352"/>
+            <a:off x="6217920" y="3273552"/>
+            <a:ext cx="5303520" cy="438912"/>
           </a:xfrm>
           <a:prstGeom prst="rect">
             <a:avLst/>
@@ -9101,12 +10791,12 @@
           <a:p>
             <a:pPr indent="0" marL="0">
               <a:lnSpc>
-                <a:spcPct val="102000"/>
+                <a:spcPct val="100000"/>
               </a:lnSpc>
               <a:buNone/>
             </a:pPr>
             <a:r>
-              <a:rPr lang="en-US" sz="1050" dirty="0">
+              <a:rPr lang="en-US" sz="1000" dirty="0">
                 <a:solidFill>
                   <a:srgbClr val="93A1AF"/>
                 </a:solidFill>
@@ -9114,9 +10804,9 @@
                 <a:ea typeface="Calibri" pitchFamily="34" charset="-122"/>
                 <a:cs typeface="Calibri" pitchFamily="34" charset="-120"/>
               </a:rPr>
-              <a:t>The agent is granted EXECUTE on a short allowlist of functions — never raw table access. Every call is checked before it runs.</a:t>
-            </a:r>
-            <a:endParaRPr lang="en-US" sz="1050" dirty="0"/>
+              <a:t>Four controls: function allowlist, parameter schema, SQL interdiction, and per-caller entitlement. Never raw table access.</a:t>
+            </a:r>
+            <a:endParaRPr lang="en-US" sz="1000" dirty="0"/>
           </a:p>
         </p:txBody>
       </p:sp>
@@ -9128,8 +10818,8 @@
         </p:nvSpPr>
         <p:spPr>
           <a:xfrm>
-            <a:off x="5760720" y="4050792"/>
-            <a:ext cx="329184" cy="329184"/>
+            <a:off x="5760720" y="3721608"/>
+            <a:ext cx="310896" cy="310896"/>
           </a:xfrm>
           <a:prstGeom prst="ellipse">
             <a:avLst/>
@@ -9137,7 +10827,7 @@
           <a:solidFill>
             <a:srgbClr val="2A1B12"/>
           </a:solidFill>
-          <a:ln w="15240">
+          <a:ln w="13970">
             <a:solidFill>
               <a:srgbClr val="FF6C00"/>
             </a:solidFill>
@@ -9153,8 +10843,8 @@
         </p:nvSpPr>
         <p:spPr>
           <a:xfrm>
-            <a:off x="5760720" y="4050792"/>
-            <a:ext cx="329184" cy="329184"/>
+            <a:off x="5760720" y="3721608"/>
+            <a:ext cx="310896" cy="310896"/>
           </a:xfrm>
           <a:prstGeom prst="rect">
             <a:avLst/>
@@ -9170,7 +10860,7 @@
               <a:buNone/>
             </a:pPr>
             <a:r>
-              <a:rPr lang="en-US" sz="1400" b="1" dirty="0">
+              <a:rPr lang="en-US" sz="1300" b="1" dirty="0">
                 <a:solidFill>
                   <a:srgbClr val="FF8A3D"/>
                 </a:solidFill>
@@ -9180,7 +10870,7 @@
               </a:rPr>
               <a:t>4</a:t>
             </a:r>
-            <a:endParaRPr lang="en-US" sz="1400" dirty="0"/>
+            <a:endParaRPr lang="en-US" sz="1300" dirty="0"/>
           </a:p>
         </p:txBody>
       </p:sp>
@@ -9192,24 +10882,24 @@
         </p:nvSpPr>
         <p:spPr>
           <a:xfrm>
-            <a:off x="6236208" y="3986784"/>
-            <a:ext cx="5285232" cy="292608"/>
-          </a:xfrm>
-          <a:prstGeom prst="rect">
-            <a:avLst/>
-          </a:prstGeom>
-          <a:noFill/>
-          <a:ln/>
-        </p:spPr>
-        <p:txBody>
-          <a:bodyPr wrap="square" lIns="0" tIns="0" rIns="0" bIns="0" rtlCol="0" anchor="ctr"/>
-          <a:lstStyle/>
-          <a:p>
-            <a:pPr indent="0" marL="0">
-              <a:buNone/>
-            </a:pPr>
-            <a:r>
-              <a:rPr lang="en-US" sz="1400" b="1" dirty="0">
+            <a:off x="6217920" y="3657600"/>
+            <a:ext cx="5303520" cy="274320"/>
+          </a:xfrm>
+          <a:prstGeom prst="rect">
+            <a:avLst/>
+          </a:prstGeom>
+          <a:noFill/>
+          <a:ln/>
+        </p:spPr>
+        <p:txBody>
+          <a:bodyPr wrap="square" lIns="0" tIns="0" rIns="0" bIns="0" rtlCol="0" anchor="ctr"/>
+          <a:lstStyle/>
+          <a:p>
+            <a:pPr indent="0" marL="0">
+              <a:buNone/>
+            </a:pPr>
+            <a:r>
+              <a:rPr lang="en-US" sz="1350" b="1" dirty="0">
                 <a:solidFill>
                   <a:srgbClr val="E9EEF3"/>
                 </a:solidFill>
@@ -9219,7 +10909,7 @@
               </a:rPr>
               <a:t>Mosaic AI Vector Search</a:t>
             </a:r>
-            <a:endParaRPr lang="en-US" sz="1400" dirty="0"/>
+            <a:endParaRPr lang="en-US" sz="1350" dirty="0"/>
           </a:p>
         </p:txBody>
       </p:sp>
@@ -9231,8 +10921,8 @@
         </p:nvSpPr>
         <p:spPr>
           <a:xfrm>
-            <a:off x="6236208" y="4261104"/>
-            <a:ext cx="5285232" cy="530352"/>
+            <a:off x="6217920" y="3913632"/>
+            <a:ext cx="5303520" cy="438912"/>
           </a:xfrm>
           <a:prstGeom prst="rect">
             <a:avLst/>
@@ -9246,12 +10936,12 @@
           <a:p>
             <a:pPr indent="0" marL="0">
               <a:lnSpc>
-                <a:spcPct val="102000"/>
+                <a:spcPct val="100000"/>
               </a:lnSpc>
               <a:buNone/>
             </a:pPr>
             <a:r>
-              <a:rPr lang="en-US" sz="1050" dirty="0">
+              <a:rPr lang="en-US" sz="1000" dirty="0">
                 <a:solidFill>
                   <a:srgbClr val="93A1AF"/>
                 </a:solidFill>
@@ -9259,9 +10949,9 @@
                 <a:ea typeface="Calibri" pitchFamily="34" charset="-122"/>
                 <a:cs typeface="Calibri" pitchFamily="34" charset="-120"/>
               </a:rPr>
-              <a:t>A governed index over enterprise runbooks and policies, so answers can be grounded in documented knowledge as well as live metrics.</a:t>
-            </a:r>
-            <a:endParaRPr lang="en-US" sz="1050" dirty="0"/>
+              <a:t>A governed index over runbooks and policies, so answers can be grounded in documented knowledge as well as live metrics.</a:t>
+            </a:r>
+            <a:endParaRPr lang="en-US" sz="1000" dirty="0"/>
           </a:p>
         </p:txBody>
       </p:sp>
@@ -9273,8 +10963,8 @@
         </p:nvSpPr>
         <p:spPr>
           <a:xfrm>
-            <a:off x="5760720" y="4791456"/>
-            <a:ext cx="329184" cy="329184"/>
+            <a:off x="5760720" y="4361688"/>
+            <a:ext cx="310896" cy="310896"/>
           </a:xfrm>
           <a:prstGeom prst="ellipse">
             <a:avLst/>
@@ -9282,7 +10972,7 @@
           <a:solidFill>
             <a:srgbClr val="2A1B12"/>
           </a:solidFill>
-          <a:ln w="15240">
+          <a:ln w="13970">
             <a:solidFill>
               <a:srgbClr val="FF6C00"/>
             </a:solidFill>
@@ -9298,8 +10988,8 @@
         </p:nvSpPr>
         <p:spPr>
           <a:xfrm>
-            <a:off x="5760720" y="4791456"/>
-            <a:ext cx="329184" cy="329184"/>
+            <a:off x="5760720" y="4361688"/>
+            <a:ext cx="310896" cy="310896"/>
           </a:xfrm>
           <a:prstGeom prst="rect">
             <a:avLst/>
@@ -9315,7 +11005,7 @@
               <a:buNone/>
             </a:pPr>
             <a:r>
-              <a:rPr lang="en-US" sz="1400" b="1" dirty="0">
+              <a:rPr lang="en-US" sz="1300" b="1" dirty="0">
                 <a:solidFill>
                   <a:srgbClr val="FF8A3D"/>
                 </a:solidFill>
@@ -9325,7 +11015,7 @@
               </a:rPr>
               <a:t>5</a:t>
             </a:r>
-            <a:endParaRPr lang="en-US" sz="1400" dirty="0"/>
+            <a:endParaRPr lang="en-US" sz="1300" dirty="0"/>
           </a:p>
         </p:txBody>
       </p:sp>
@@ -9337,24 +11027,24 @@
         </p:nvSpPr>
         <p:spPr>
           <a:xfrm>
-            <a:off x="6236208" y="4727448"/>
-            <a:ext cx="5285232" cy="292608"/>
-          </a:xfrm>
-          <a:prstGeom prst="rect">
-            <a:avLst/>
-          </a:prstGeom>
-          <a:noFill/>
-          <a:ln/>
-        </p:spPr>
-        <p:txBody>
-          <a:bodyPr wrap="square" lIns="0" tIns="0" rIns="0" bIns="0" rtlCol="0" anchor="ctr"/>
-          <a:lstStyle/>
-          <a:p>
-            <a:pPr indent="0" marL="0">
-              <a:buNone/>
-            </a:pPr>
-            <a:r>
-              <a:rPr lang="en-US" sz="1400" b="1" dirty="0">
+            <a:off x="6217920" y="4297680"/>
+            <a:ext cx="5303520" cy="274320"/>
+          </a:xfrm>
+          <a:prstGeom prst="rect">
+            <a:avLst/>
+          </a:prstGeom>
+          <a:noFill/>
+          <a:ln/>
+        </p:spPr>
+        <p:txBody>
+          <a:bodyPr wrap="square" lIns="0" tIns="0" rIns="0" bIns="0" rtlCol="0" anchor="ctr"/>
+          <a:lstStyle/>
+          <a:p>
+            <a:pPr indent="0" marL="0">
+              <a:buNone/>
+            </a:pPr>
+            <a:r>
+              <a:rPr lang="en-US" sz="1350" b="1" dirty="0">
                 <a:solidFill>
                   <a:srgbClr val="E9EEF3"/>
                 </a:solidFill>
@@ -9362,9 +11052,9 @@
                 <a:ea typeface="Calibri" pitchFamily="34" charset="-122"/>
                 <a:cs typeface="Calibri" pitchFamily="34" charset="-120"/>
               </a:rPr>
-              <a:t>Audit trail</a:t>
-            </a:r>
-            <a:endParaRPr lang="en-US" sz="1400" dirty="0"/>
+              <a:t>Identity &amp; entitlements</a:t>
+            </a:r>
+            <a:endParaRPr lang="en-US" sz="1350" dirty="0"/>
           </a:p>
         </p:txBody>
       </p:sp>
@@ -9376,8 +11066,8 @@
         </p:nvSpPr>
         <p:spPr>
           <a:xfrm>
-            <a:off x="6236208" y="5001768"/>
-            <a:ext cx="5285232" cy="530352"/>
+            <a:off x="6217920" y="4553712"/>
+            <a:ext cx="5303520" cy="438912"/>
           </a:xfrm>
           <a:prstGeom prst="rect">
             <a:avLst/>
@@ -9391,12 +11081,12 @@
           <a:p>
             <a:pPr indent="0" marL="0">
               <a:lnSpc>
-                <a:spcPct val="102000"/>
+                <a:spcPct val="100000"/>
               </a:lnSpc>
               <a:buNone/>
             </a:pPr>
             <a:r>
-              <a:rPr lang="en-US" sz="1050" dirty="0">
+              <a:rPr lang="en-US" sz="1000" dirty="0">
                 <a:solidFill>
                   <a:srgbClr val="93A1AF"/>
                 </a:solidFill>
@@ -9404,9 +11094,9 @@
                 <a:ea typeface="Calibri" pitchFamily="34" charset="-122"/>
                 <a:cs typeface="Calibri" pitchFamily="34" charset="-120"/>
               </a:rPr>
-              <a:t>Every decision — granted or refused — is appended to a durable record, making the boundary provable after the fact, not just at request time.</a:t>
-            </a:r>
-            <a:endParaRPr lang="en-US" sz="1050" dirty="0"/>
+              <a:t>Each caller carries its own function grants and customer row scope — least privilege for the person, not just the system.</a:t>
+            </a:r>
+            <a:endParaRPr lang="en-US" sz="1000" dirty="0"/>
           </a:p>
         </p:txBody>
       </p:sp>
@@ -9418,8 +11108,8 @@
         </p:nvSpPr>
         <p:spPr>
           <a:xfrm>
-            <a:off x="5760720" y="5532120"/>
-            <a:ext cx="329184" cy="329184"/>
+            <a:off x="5760720" y="5001768"/>
+            <a:ext cx="310896" cy="310896"/>
           </a:xfrm>
           <a:prstGeom prst="ellipse">
             <a:avLst/>
@@ -9427,7 +11117,7 @@
           <a:solidFill>
             <a:srgbClr val="2A1B12"/>
           </a:solidFill>
-          <a:ln w="15240">
+          <a:ln w="13970">
             <a:solidFill>
               <a:srgbClr val="FF6C00"/>
             </a:solidFill>
@@ -9443,8 +11133,8 @@
         </p:nvSpPr>
         <p:spPr>
           <a:xfrm>
-            <a:off x="5760720" y="5532120"/>
-            <a:ext cx="329184" cy="329184"/>
+            <a:off x="5760720" y="5001768"/>
+            <a:ext cx="310896" cy="310896"/>
           </a:xfrm>
           <a:prstGeom prst="rect">
             <a:avLst/>
@@ -9460,7 +11150,7 @@
               <a:buNone/>
             </a:pPr>
             <a:r>
-              <a:rPr lang="en-US" sz="1400" b="1" dirty="0">
+              <a:rPr lang="en-US" sz="1300" b="1" dirty="0">
                 <a:solidFill>
                   <a:srgbClr val="FF8A3D"/>
                 </a:solidFill>
@@ -9470,7 +11160,7 @@
               </a:rPr>
               <a:t>6</a:t>
             </a:r>
-            <a:endParaRPr lang="en-US" sz="1400" dirty="0"/>
+            <a:endParaRPr lang="en-US" sz="1300" dirty="0"/>
           </a:p>
         </p:txBody>
       </p:sp>
@@ -9482,24 +11172,24 @@
         </p:nvSpPr>
         <p:spPr>
           <a:xfrm>
-            <a:off x="6236208" y="5468112"/>
-            <a:ext cx="5285232" cy="292608"/>
-          </a:xfrm>
-          <a:prstGeom prst="rect">
-            <a:avLst/>
-          </a:prstGeom>
-          <a:noFill/>
-          <a:ln/>
-        </p:spPr>
-        <p:txBody>
-          <a:bodyPr wrap="square" lIns="0" tIns="0" rIns="0" bIns="0" rtlCol="0" anchor="ctr"/>
-          <a:lstStyle/>
-          <a:p>
-            <a:pPr indent="0" marL="0">
-              <a:buNone/>
-            </a:pPr>
-            <a:r>
-              <a:rPr lang="en-US" sz="1400" b="1" dirty="0">
+            <a:off x="6217920" y="4937760"/>
+            <a:ext cx="5303520" cy="274320"/>
+          </a:xfrm>
+          <a:prstGeom prst="rect">
+            <a:avLst/>
+          </a:prstGeom>
+          <a:noFill/>
+          <a:ln/>
+        </p:spPr>
+        <p:txBody>
+          <a:bodyPr wrap="square" lIns="0" tIns="0" rIns="0" bIns="0" rtlCol="0" anchor="ctr"/>
+          <a:lstStyle/>
+          <a:p>
+            <a:pPr indent="0" marL="0">
+              <a:buNone/>
+            </a:pPr>
+            <a:r>
+              <a:rPr lang="en-US" sz="1350" b="1" dirty="0">
                 <a:solidFill>
                   <a:srgbClr val="E9EEF3"/>
                 </a:solidFill>
@@ -9507,22 +11197,167 @@
                 <a:ea typeface="Calibri" pitchFamily="34" charset="-122"/>
                 <a:cs typeface="Calibri" pitchFamily="34" charset="-120"/>
               </a:rPr>
+              <a:t>Audit trail</a:t>
+            </a:r>
+            <a:endParaRPr lang="en-US" sz="1350" dirty="0"/>
+          </a:p>
+        </p:txBody>
+      </p:sp>
+      <p:sp>
+        <p:nvSpPr>
+          <p:cNvPr id="29" name="Text 26"/>
+          <p:cNvSpPr/>
+          <p:nvPr/>
+        </p:nvSpPr>
+        <p:spPr>
+          <a:xfrm>
+            <a:off x="6217920" y="5193792"/>
+            <a:ext cx="5303520" cy="438912"/>
+          </a:xfrm>
+          <a:prstGeom prst="rect">
+            <a:avLst/>
+          </a:prstGeom>
+          <a:noFill/>
+          <a:ln/>
+        </p:spPr>
+        <p:txBody>
+          <a:bodyPr wrap="square" lIns="0" tIns="0" rIns="0" bIns="0" rtlCol="0" anchor="ctr"/>
+          <a:lstStyle/>
+          <a:p>
+            <a:pPr indent="0" marL="0">
+              <a:lnSpc>
+                <a:spcPct val="100000"/>
+              </a:lnSpc>
+              <a:buNone/>
+            </a:pPr>
+            <a:r>
+              <a:rPr lang="en-US" sz="1000" dirty="0">
+                <a:solidFill>
+                  <a:srgbClr val="93A1AF"/>
+                </a:solidFill>
+                <a:latin typeface="Calibri" pitchFamily="34" charset="0"/>
+                <a:ea typeface="Calibri" pitchFamily="34" charset="-122"/>
+                <a:cs typeface="Calibri" pitchFamily="34" charset="-120"/>
+              </a:rPr>
+              <a:t>Every decision, granted or refused, appended to a durable record with who made it and what it cost.</a:t>
+            </a:r>
+            <a:endParaRPr lang="en-US" sz="1000" dirty="0"/>
+          </a:p>
+        </p:txBody>
+      </p:sp>
+      <p:sp>
+        <p:nvSpPr>
+          <p:cNvPr id="30" name="Shape 27"/>
+          <p:cNvSpPr/>
+          <p:nvPr/>
+        </p:nvSpPr>
+        <p:spPr>
+          <a:xfrm>
+            <a:off x="5760720" y="5641848"/>
+            <a:ext cx="310896" cy="310896"/>
+          </a:xfrm>
+          <a:prstGeom prst="ellipse">
+            <a:avLst/>
+          </a:prstGeom>
+          <a:solidFill>
+            <a:srgbClr val="2A1B12"/>
+          </a:solidFill>
+          <a:ln w="13970">
+            <a:solidFill>
+              <a:srgbClr val="FF6C00"/>
+            </a:solidFill>
+            <a:prstDash val="solid"/>
+          </a:ln>
+        </p:spPr>
+      </p:sp>
+      <p:sp>
+        <p:nvSpPr>
+          <p:cNvPr id="31" name="Text 28"/>
+          <p:cNvSpPr/>
+          <p:nvPr/>
+        </p:nvSpPr>
+        <p:spPr>
+          <a:xfrm>
+            <a:off x="5760720" y="5641848"/>
+            <a:ext cx="310896" cy="310896"/>
+          </a:xfrm>
+          <a:prstGeom prst="rect">
+            <a:avLst/>
+          </a:prstGeom>
+          <a:noFill/>
+          <a:ln/>
+        </p:spPr>
+        <p:txBody>
+          <a:bodyPr wrap="square" lIns="0" tIns="0" rIns="0" bIns="0" rtlCol="0" anchor="ctr"/>
+          <a:lstStyle/>
+          <a:p>
+            <a:pPr algn="ctr" indent="0" marL="0">
+              <a:buNone/>
+            </a:pPr>
+            <a:r>
+              <a:rPr lang="en-US" sz="1300" b="1" dirty="0">
+                <a:solidFill>
+                  <a:srgbClr val="FF8A3D"/>
+                </a:solidFill>
+                <a:latin typeface="Cambria" pitchFamily="34" charset="0"/>
+                <a:ea typeface="Cambria" pitchFamily="34" charset="-122"/>
+                <a:cs typeface="Cambria" pitchFamily="34" charset="-120"/>
+              </a:rPr>
+              <a:t>7</a:t>
+            </a:r>
+            <a:endParaRPr lang="en-US" sz="1300" dirty="0"/>
+          </a:p>
+        </p:txBody>
+      </p:sp>
+      <p:sp>
+        <p:nvSpPr>
+          <p:cNvPr id="32" name="Text 29"/>
+          <p:cNvSpPr/>
+          <p:nvPr/>
+        </p:nvSpPr>
+        <p:spPr>
+          <a:xfrm>
+            <a:off x="6217920" y="5577840"/>
+            <a:ext cx="5303520" cy="274320"/>
+          </a:xfrm>
+          <a:prstGeom prst="rect">
+            <a:avLst/>
+          </a:prstGeom>
+          <a:noFill/>
+          <a:ln/>
+        </p:spPr>
+        <p:txBody>
+          <a:bodyPr wrap="square" lIns="0" tIns="0" rIns="0" bIns="0" rtlCol="0" anchor="ctr"/>
+          <a:lstStyle/>
+          <a:p>
+            <a:pPr indent="0" marL="0">
+              <a:buNone/>
+            </a:pPr>
+            <a:r>
+              <a:rPr lang="en-US" sz="1350" b="1" dirty="0">
+                <a:solidFill>
+                  <a:srgbClr val="E9EEF3"/>
+                </a:solidFill>
+                <a:latin typeface="Calibri" pitchFamily="34" charset="0"/>
+                <a:ea typeface="Calibri" pitchFamily="34" charset="-122"/>
+                <a:cs typeface="Calibri" pitchFamily="34" charset="-120"/>
+              </a:rPr>
               <a:t>Cognitive agent + serving</a:t>
             </a:r>
-            <a:endParaRPr lang="en-US" sz="1400" dirty="0"/>
-          </a:p>
-        </p:txBody>
-      </p:sp>
-      <p:sp>
-        <p:nvSpPr>
-          <p:cNvPr id="29" name="Text 26"/>
-          <p:cNvSpPr/>
-          <p:nvPr/>
-        </p:nvSpPr>
-        <p:spPr>
-          <a:xfrm>
-            <a:off x="6236208" y="5742432"/>
-            <a:ext cx="5285232" cy="530352"/>
+            <a:endParaRPr lang="en-US" sz="1350" dirty="0"/>
+          </a:p>
+        </p:txBody>
+      </p:sp>
+      <p:sp>
+        <p:nvSpPr>
+          <p:cNvPr id="33" name="Text 30"/>
+          <p:cNvSpPr/>
+          <p:nvPr/>
+        </p:nvSpPr>
+        <p:spPr>
+          <a:xfrm>
+            <a:off x="6217920" y="5833872"/>
+            <a:ext cx="5303520" cy="438912"/>
           </a:xfrm>
           <a:prstGeom prst="rect">
             <a:avLst/>
@@ -9536,12 +11371,12 @@
           <a:p>
             <a:pPr indent="0" marL="0">
               <a:lnSpc>
-                <a:spcPct val="102000"/>
+                <a:spcPct val="100000"/>
               </a:lnSpc>
               <a:buNone/>
             </a:pPr>
             <a:r>
-              <a:rPr lang="en-US" sz="1050" dirty="0">
+              <a:rPr lang="en-US" sz="1000" dirty="0">
                 <a:solidFill>
                   <a:srgbClr val="93A1AF"/>
                 </a:solidFill>
@@ -9549,15 +11384,15 @@
                 <a:ea typeface="Calibri" pitchFamily="34" charset="-122"/>
                 <a:cs typeface="Calibri" pitchFamily="34" charset="-120"/>
               </a:rPr>
-              <a:t>Model Serving resolves plain-English intent into approved function calls, then grounds the answer in what those calls returned.</a:t>
-            </a:r>
-            <a:endParaRPr lang="en-US" sz="1050" dirty="0"/>
-          </a:p>
-        </p:txBody>
-      </p:sp>
-      <p:sp>
-        <p:nvSpPr>
-          <p:cNvPr id="30" name="Text 27"/>
+              <a:t>Model Serving resolves plain-English intent into N approved calls, then grounds the answer in what they returned.</a:t>
+            </a:r>
+            <a:endParaRPr lang="en-US" sz="1000" dirty="0"/>
+          </a:p>
+        </p:txBody>
+      </p:sp>
+      <p:sp>
+        <p:nvSpPr>
+          <p:cNvPr id="34" name="Text 31"/>
           <p:cNvSpPr/>
           <p:nvPr/>
         </p:nvSpPr>
@@ -9596,7 +11431,7 @@
       </p:sp>
       <p:sp>
         <p:nvSpPr>
-          <p:cNvPr id="31" name="Text 28"/>
+          <p:cNvPr id="35" name="Text 32"/>
           <p:cNvSpPr/>
           <p:nvPr/>
         </p:nvSpPr>
@@ -9757,7 +11592,7 @@
                 <a:ea typeface="Cambria" pitchFamily="34" charset="-122"/>
                 <a:cs typeface="Cambria" pitchFamily="34" charset="-120"/>
               </a:rPr>
-              <a:t>Five moves, then the receipts</a:t>
+              <a:t>What it can do, and why you can trust it</a:t>
             </a:r>
             <a:endParaRPr lang="en-US" sz="3200" dirty="0"/>
           </a:p>
@@ -9772,23 +11607,23 @@
         <p:spPr>
           <a:xfrm>
             <a:off x="640080" y="1783080"/>
-            <a:ext cx="10698480" cy="457200"/>
-          </a:xfrm>
-          <a:prstGeom prst="rect">
-            <a:avLst/>
-          </a:prstGeom>
-          <a:noFill/>
-          <a:ln/>
-        </p:spPr>
-        <p:txBody>
-          <a:bodyPr wrap="square" lIns="0" tIns="0" rIns="0" bIns="0" rtlCol="0" anchor="ctr"/>
-          <a:lstStyle/>
-          <a:p>
-            <a:pPr indent="0" marL="0">
-              <a:buNone/>
-            </a:pPr>
-            <a:r>
-              <a:rPr lang="en-US" sz="1600" dirty="0">
+            <a:ext cx="10698480" cy="365760"/>
+          </a:xfrm>
+          <a:prstGeom prst="rect">
+            <a:avLst/>
+          </a:prstGeom>
+          <a:noFill/>
+          <a:ln/>
+        </p:spPr>
+        <p:txBody>
+          <a:bodyPr wrap="square" lIns="0" tIns="0" rIns="0" bIns="0" rtlCol="0" anchor="ctr"/>
+          <a:lstStyle/>
+          <a:p>
+            <a:pPr indent="0" marL="0">
+              <a:buNone/>
+            </a:pPr>
+            <a:r>
+              <a:rPr lang="en-US" sz="1550" dirty="0">
                 <a:solidFill>
                   <a:srgbClr val="93A1AF"/>
                 </a:solidFill>
@@ -9796,26 +11631,65 @@
                 <a:ea typeface="Calibri" pitchFamily="34" charset="-122"/>
                 <a:cs typeface="Calibri" pitchFamily="34" charset="-120"/>
               </a:rPr>
-              <a:t>The same interface throughout. The first two show value; the next three show why you can trust it — and the Trust Center proves all five happened.</a:t>
-            </a:r>
-            <a:endParaRPr lang="en-US" sz="1600" dirty="0"/>
-          </a:p>
-        </p:txBody>
-      </p:sp>
-      <p:sp>
-        <p:nvSpPr>
-          <p:cNvPr id="6" name="Shape 4"/>
-          <p:cNvSpPr/>
-          <p:nvPr/>
-        </p:nvSpPr>
-        <p:spPr>
-          <a:xfrm>
-            <a:off x="640080" y="2395728"/>
-            <a:ext cx="10927080" cy="640080"/>
+              <a:t>Eight prompts in the same interface. The left column earns the attention; the right column keeps it.</a:t>
+            </a:r>
+            <a:endParaRPr lang="en-US" sz="1550" dirty="0"/>
+          </a:p>
+        </p:txBody>
+      </p:sp>
+      <p:sp>
+        <p:nvSpPr>
+          <p:cNvPr id="6" name="Text 4"/>
+          <p:cNvSpPr/>
+          <p:nvPr/>
+        </p:nvSpPr>
+        <p:spPr>
+          <a:xfrm>
+            <a:off x="731520" y="2240280"/>
+            <a:ext cx="5257800" cy="274320"/>
+          </a:xfrm>
+          <a:prstGeom prst="rect">
+            <a:avLst/>
+          </a:prstGeom>
+          <a:noFill/>
+          <a:ln/>
+        </p:spPr>
+        <p:txBody>
+          <a:bodyPr wrap="square" lIns="0" tIns="0" rIns="0" bIns="0" rtlCol="0" anchor="ctr"/>
+          <a:lstStyle/>
+          <a:p>
+            <a:pPr indent="0" marL="0">
+              <a:buNone/>
+            </a:pPr>
+            <a:r>
+              <a:rPr lang="en-US" sz="1150" b="1" spc="180" kern="0" dirty="0">
+                <a:solidFill>
+                  <a:srgbClr val="3FB950"/>
+                </a:solidFill>
+                <a:latin typeface="Calibri" pitchFamily="34" charset="0"/>
+                <a:ea typeface="Calibri" pitchFamily="34" charset="-122"/>
+                <a:cs typeface="Calibri" pitchFamily="34" charset="-120"/>
+              </a:rPr>
+              <a:t>CAPABILITY</a:t>
+            </a:r>
+            <a:endParaRPr lang="en-US" sz="1150" dirty="0"/>
+          </a:p>
+        </p:txBody>
+      </p:sp>
+      <p:sp>
+        <p:nvSpPr>
+          <p:cNvPr id="7" name="Shape 5"/>
+          <p:cNvSpPr/>
+          <p:nvPr/>
+        </p:nvSpPr>
+        <p:spPr>
+          <a:xfrm>
+            <a:off x="640080" y="2578608"/>
+            <a:ext cx="5257800" cy="777240"/>
           </a:xfrm>
           <a:prstGeom prst="roundRect">
             <a:avLst>
-              <a:gd name="adj" fmla="val 12857"/>
+              <a:gd name="adj" fmla="val 10588"/>
             </a:avLst>
           </a:prstGeom>
           <a:solidFill>
@@ -9838,14 +11712,14 @@
       </p:sp>
       <p:sp>
         <p:nvSpPr>
-          <p:cNvPr id="7" name="Shape 5"/>
-          <p:cNvSpPr/>
-          <p:nvPr/>
-        </p:nvSpPr>
-        <p:spPr>
-          <a:xfrm>
-            <a:off x="877824" y="2532888"/>
-            <a:ext cx="365760" cy="365760"/>
+          <p:cNvPr id="8" name="Shape 6"/>
+          <p:cNvSpPr/>
+          <p:nvPr/>
+        </p:nvSpPr>
+        <p:spPr>
+          <a:xfrm>
+            <a:off x="877824" y="2889504"/>
+            <a:ext cx="146304" cy="146304"/>
           </a:xfrm>
           <a:prstGeom prst="ellipse">
             <a:avLst/>
@@ -9858,53 +11732,14 @@
       </p:sp>
       <p:sp>
         <p:nvSpPr>
-          <p:cNvPr id="8" name="Text 6"/>
-          <p:cNvSpPr/>
-          <p:nvPr/>
-        </p:nvSpPr>
-        <p:spPr>
-          <a:xfrm>
-            <a:off x="877824" y="2532888"/>
-            <a:ext cx="365760" cy="365760"/>
-          </a:xfrm>
-          <a:prstGeom prst="rect">
-            <a:avLst/>
-          </a:prstGeom>
-          <a:noFill/>
-          <a:ln/>
-        </p:spPr>
-        <p:txBody>
-          <a:bodyPr wrap="square" lIns="0" tIns="0" rIns="0" bIns="0" rtlCol="0" anchor="ctr"/>
-          <a:lstStyle/>
-          <a:p>
-            <a:pPr algn="ctr" indent="0" marL="0">
-              <a:buNone/>
-            </a:pPr>
-            <a:r>
-              <a:rPr lang="en-US" sz="1600" b="1" dirty="0">
-                <a:solidFill>
-                  <a:srgbClr val="0B121B"/>
-                </a:solidFill>
-                <a:latin typeface="Cambria" pitchFamily="34" charset="0"/>
-                <a:ea typeface="Cambria" pitchFamily="34" charset="-122"/>
-                <a:cs typeface="Cambria" pitchFamily="34" charset="-120"/>
-              </a:rPr>
-              <a:t>1</a:t>
-            </a:r>
-            <a:endParaRPr lang="en-US" sz="1600" dirty="0"/>
-          </a:p>
-        </p:txBody>
-      </p:sp>
-      <p:sp>
-        <p:nvSpPr>
           <p:cNvPr id="9" name="Text 7"/>
           <p:cNvSpPr/>
           <p:nvPr/>
         </p:nvSpPr>
         <p:spPr>
           <a:xfrm>
-            <a:off x="1399032" y="2395728"/>
-            <a:ext cx="2286000" cy="640080"/>
+            <a:off x="1152144" y="2670048"/>
+            <a:ext cx="4526280" cy="292608"/>
           </a:xfrm>
           <a:prstGeom prst="rect">
             <a:avLst/>
@@ -9942,8 +11777,8 @@
         </p:nvSpPr>
         <p:spPr>
           <a:xfrm>
-            <a:off x="3794760" y="2395728"/>
-            <a:ext cx="3749040" cy="640080"/>
+            <a:off x="1152144" y="2962656"/>
+            <a:ext cx="4526280" cy="310896"/>
           </a:xfrm>
           <a:prstGeom prst="rect">
             <a:avLst/>
@@ -9967,7 +11802,7 @@
                 <a:ea typeface="Consolas" pitchFamily="34" charset="-122"/>
                 <a:cs typeface="Consolas" pitchFamily="34" charset="-120"/>
               </a:rPr>
-              <a:t>“Evaluate anomaly parameters for customer CUST_404”</a:t>
+              <a:t>“Evaluate anomaly parameters for CUST_404”</a:t>
             </a:r>
             <a:endParaRPr lang="en-US" sz="950" dirty="0"/>
           </a:p>
@@ -9975,60 +11810,150 @@
       </p:sp>
       <p:sp>
         <p:nvSpPr>
-          <p:cNvPr id="11" name="Text 9"/>
-          <p:cNvSpPr/>
-          <p:nvPr/>
-        </p:nvSpPr>
-        <p:spPr>
-          <a:xfrm>
-            <a:off x="7680960" y="2395728"/>
-            <a:ext cx="3657600" cy="640080"/>
-          </a:xfrm>
-          <a:prstGeom prst="rect">
-            <a:avLst/>
-          </a:prstGeom>
-          <a:noFill/>
-          <a:ln/>
-        </p:spPr>
-        <p:txBody>
-          <a:bodyPr wrap="square" lIns="0" tIns="0" rIns="0" bIns="0" rtlCol="0" anchor="ctr"/>
-          <a:lstStyle/>
-          <a:p>
-            <a:pPr indent="0" marL="0">
-              <a:lnSpc>
-                <a:spcPct val="105000"/>
-              </a:lnSpc>
-              <a:buNone/>
-            </a:pPr>
-            <a:r>
-              <a:rPr lang="en-US" sz="1150" dirty="0">
-                <a:solidFill>
-                  <a:srgbClr val="93A1AF"/>
-                </a:solidFill>
-                <a:latin typeface="Calibri" pitchFamily="34" charset="0"/>
-                <a:ea typeface="Calibri" pitchFamily="34" charset="-122"/>
-                <a:cs typeface="Calibri" pitchFamily="34" charset="-120"/>
-              </a:rPr>
-              <a:t>Runs the approved function over live data — a genuine computed result.</a:t>
-            </a:r>
-            <a:endParaRPr lang="en-US" sz="1150" dirty="0"/>
-          </a:p>
-        </p:txBody>
-      </p:sp>
-      <p:sp>
-        <p:nvSpPr>
-          <p:cNvPr id="12" name="Shape 10"/>
-          <p:cNvSpPr/>
-          <p:nvPr/>
-        </p:nvSpPr>
-        <p:spPr>
-          <a:xfrm>
-            <a:off x="640080" y="3108960"/>
-            <a:ext cx="10927080" cy="640080"/>
+          <p:cNvPr id="11" name="Shape 9"/>
+          <p:cNvSpPr/>
+          <p:nvPr/>
+        </p:nvSpPr>
+        <p:spPr>
+          <a:xfrm>
+            <a:off x="640080" y="3447288"/>
+            <a:ext cx="5257800" cy="777240"/>
           </a:xfrm>
           <a:prstGeom prst="roundRect">
             <a:avLst>
-              <a:gd name="adj" fmla="val 12857"/>
+              <a:gd name="adj" fmla="val 10588"/>
+            </a:avLst>
+          </a:prstGeom>
+          <a:solidFill>
+            <a:srgbClr val="1F2C3A"/>
+          </a:solidFill>
+          <a:ln w="12700">
+            <a:solidFill>
+              <a:srgbClr val="2A3745"/>
+            </a:solidFill>
+            <a:prstDash val="solid"/>
+          </a:ln>
+          <a:effectLst>
+            <a:outerShdw sx="100000" sy="100000" kx="0" ky="0" algn="bl" rotWithShape="0" blurRad="114300" dist="38100" dir="5400000">
+              <a:srgbClr val="000000">
+                <a:alpha val="28000"/>
+              </a:srgbClr>
+            </a:outerShdw>
+          </a:effectLst>
+        </p:spPr>
+      </p:sp>
+      <p:sp>
+        <p:nvSpPr>
+          <p:cNvPr id="12" name="Shape 10"/>
+          <p:cNvSpPr/>
+          <p:nvPr/>
+        </p:nvSpPr>
+        <p:spPr>
+          <a:xfrm>
+            <a:off x="877824" y="3758184"/>
+            <a:ext cx="146304" cy="146304"/>
+          </a:xfrm>
+          <a:prstGeom prst="ellipse">
+            <a:avLst/>
+          </a:prstGeom>
+          <a:solidFill>
+            <a:srgbClr val="3FB950"/>
+          </a:solidFill>
+          <a:ln/>
+        </p:spPr>
+      </p:sp>
+      <p:sp>
+        <p:nvSpPr>
+          <p:cNvPr id="13" name="Text 11"/>
+          <p:cNvSpPr/>
+          <p:nvPr/>
+        </p:nvSpPr>
+        <p:spPr>
+          <a:xfrm>
+            <a:off x="1152144" y="3538728"/>
+            <a:ext cx="4526280" cy="292608"/>
+          </a:xfrm>
+          <a:prstGeom prst="rect">
+            <a:avLst/>
+          </a:prstGeom>
+          <a:noFill/>
+          <a:ln/>
+        </p:spPr>
+        <p:txBody>
+          <a:bodyPr wrap="square" lIns="0" tIns="0" rIns="0" bIns="0" rtlCol="0" anchor="ctr"/>
+          <a:lstStyle/>
+          <a:p>
+            <a:pPr indent="0" marL="0">
+              <a:buNone/>
+            </a:pPr>
+            <a:r>
+              <a:rPr lang="en-US" sz="1400" b="1" dirty="0">
+                <a:solidFill>
+                  <a:srgbClr val="E9EEF3"/>
+                </a:solidFill>
+                <a:latin typeface="Calibri" pitchFamily="34" charset="0"/>
+                <a:ea typeface="Calibri" pitchFamily="34" charset="-122"/>
+                <a:cs typeface="Calibri" pitchFamily="34" charset="-120"/>
+              </a:rPr>
+              <a:t>Hybrid answer</a:t>
+            </a:r>
+            <a:endParaRPr lang="en-US" sz="1400" dirty="0"/>
+          </a:p>
+        </p:txBody>
+      </p:sp>
+      <p:sp>
+        <p:nvSpPr>
+          <p:cNvPr id="14" name="Text 12"/>
+          <p:cNvSpPr/>
+          <p:nvPr/>
+        </p:nvSpPr>
+        <p:spPr>
+          <a:xfrm>
+            <a:off x="1152144" y="3831336"/>
+            <a:ext cx="4526280" cy="310896"/>
+          </a:xfrm>
+          <a:prstGeom prst="rect">
+            <a:avLst/>
+          </a:prstGeom>
+          <a:noFill/>
+          <a:ln/>
+        </p:spPr>
+        <p:txBody>
+          <a:bodyPr wrap="square" lIns="0" tIns="0" rIns="0" bIns="0" rtlCol="0" anchor="ctr"/>
+          <a:lstStyle/>
+          <a:p>
+            <a:pPr indent="0" marL="0">
+              <a:buNone/>
+            </a:pPr>
+            <a:r>
+              <a:rPr lang="en-US" sz="950" i="1" dirty="0">
+                <a:solidFill>
+                  <a:srgbClr val="FF8A3D"/>
+                </a:solidFill>
+                <a:latin typeface="Consolas" pitchFamily="34" charset="0"/>
+                <a:ea typeface="Consolas" pitchFamily="34" charset="-122"/>
+                <a:cs typeface="Consolas" pitchFamily="34" charset="-120"/>
+              </a:rPr>
+              <a:t>“CUST_404 is flagged — what should we do?”</a:t>
+            </a:r>
+            <a:endParaRPr lang="en-US" sz="950" dirty="0"/>
+          </a:p>
+        </p:txBody>
+      </p:sp>
+      <p:sp>
+        <p:nvSpPr>
+          <p:cNvPr id="15" name="Shape 13"/>
+          <p:cNvSpPr/>
+          <p:nvPr/>
+        </p:nvSpPr>
+        <p:spPr>
+          <a:xfrm>
+            <a:off x="640080" y="4315968"/>
+            <a:ext cx="5257800" cy="777240"/>
+          </a:xfrm>
+          <a:prstGeom prst="roundRect">
+            <a:avLst>
+              <a:gd name="adj" fmla="val 10588"/>
             </a:avLst>
           </a:prstGeom>
           <a:solidFill>
@@ -10051,14 +11976,14 @@
       </p:sp>
       <p:sp>
         <p:nvSpPr>
-          <p:cNvPr id="13" name="Shape 11"/>
-          <p:cNvSpPr/>
-          <p:nvPr/>
-        </p:nvSpPr>
-        <p:spPr>
-          <a:xfrm>
-            <a:off x="877824" y="3246120"/>
-            <a:ext cx="365760" cy="365760"/>
+          <p:cNvPr id="16" name="Shape 14"/>
+          <p:cNvSpPr/>
+          <p:nvPr/>
+        </p:nvSpPr>
+        <p:spPr>
+          <a:xfrm>
+            <a:off x="877824" y="4626864"/>
+            <a:ext cx="146304" cy="146304"/>
           </a:xfrm>
           <a:prstGeom prst="ellipse">
             <a:avLst/>
@@ -10071,53 +11996,14 @@
       </p:sp>
       <p:sp>
         <p:nvSpPr>
-          <p:cNvPr id="14" name="Text 12"/>
-          <p:cNvSpPr/>
-          <p:nvPr/>
-        </p:nvSpPr>
-        <p:spPr>
-          <a:xfrm>
-            <a:off x="877824" y="3246120"/>
-            <a:ext cx="365760" cy="365760"/>
-          </a:xfrm>
-          <a:prstGeom prst="rect">
-            <a:avLst/>
-          </a:prstGeom>
-          <a:noFill/>
-          <a:ln/>
-        </p:spPr>
-        <p:txBody>
-          <a:bodyPr wrap="square" lIns="0" tIns="0" rIns="0" bIns="0" rtlCol="0" anchor="ctr"/>
-          <a:lstStyle/>
-          <a:p>
-            <a:pPr algn="ctr" indent="0" marL="0">
-              <a:buNone/>
-            </a:pPr>
-            <a:r>
-              <a:rPr lang="en-US" sz="1600" b="1" dirty="0">
-                <a:solidFill>
-                  <a:srgbClr val="0B121B"/>
-                </a:solidFill>
-                <a:latin typeface="Cambria" pitchFamily="34" charset="0"/>
-                <a:ea typeface="Cambria" pitchFamily="34" charset="-122"/>
-                <a:cs typeface="Cambria" pitchFamily="34" charset="-120"/>
-              </a:rPr>
-              <a:t>2</a:t>
-            </a:r>
-            <a:endParaRPr lang="en-US" sz="1600" dirty="0"/>
-          </a:p>
-        </p:txBody>
-      </p:sp>
-      <p:sp>
-        <p:nvSpPr>
-          <p:cNvPr id="15" name="Text 13"/>
-          <p:cNvSpPr/>
-          <p:nvPr/>
-        </p:nvSpPr>
-        <p:spPr>
-          <a:xfrm>
-            <a:off x="1399032" y="3108960"/>
-            <a:ext cx="2286000" cy="640080"/>
+          <p:cNvPr id="17" name="Text 15"/>
+          <p:cNvSpPr/>
+          <p:nvPr/>
+        </p:nvSpPr>
+        <p:spPr>
+          <a:xfrm>
+            <a:off x="1152144" y="4407408"/>
+            <a:ext cx="4526280" cy="292608"/>
           </a:xfrm>
           <a:prstGeom prst="rect">
             <a:avLst/>
@@ -10141,7 +12027,7 @@
                 <a:ea typeface="Calibri" pitchFamily="34" charset="-122"/>
                 <a:cs typeface="Calibri" pitchFamily="34" charset="-120"/>
               </a:rPr>
-              <a:t>Hybrid reasoning</a:t>
+              <a:t>Comparison</a:t>
             </a:r>
             <a:endParaRPr lang="en-US" sz="1400" dirty="0"/>
           </a:p>
@@ -10149,14 +12035,14 @@
       </p:sp>
       <p:sp>
         <p:nvSpPr>
-          <p:cNvPr id="16" name="Text 14"/>
-          <p:cNvSpPr/>
-          <p:nvPr/>
-        </p:nvSpPr>
-        <p:spPr>
-          <a:xfrm>
-            <a:off x="3794760" y="3108960"/>
-            <a:ext cx="3749040" cy="640080"/>
+          <p:cNvPr id="18" name="Text 16"/>
+          <p:cNvSpPr/>
+          <p:nvPr/>
+        </p:nvSpPr>
+        <p:spPr>
+          <a:xfrm>
+            <a:off x="1152144" y="4700016"/>
+            <a:ext cx="4526280" cy="310896"/>
           </a:xfrm>
           <a:prstGeom prst="rect">
             <a:avLst/>
@@ -10180,7 +12066,7 @@
                 <a:ea typeface="Consolas" pitchFamily="34" charset="-122"/>
                 <a:cs typeface="Consolas" pitchFamily="34" charset="-120"/>
               </a:rPr>
-              <a:t>“CUST_404 is flagged — what should we do about it?”</a:t>
+              <a:t>“Compare CUST_404 and CUST_417”</a:t>
             </a:r>
             <a:endParaRPr lang="en-US" sz="950" dirty="0"/>
           </a:p>
@@ -10188,60 +12074,189 @@
       </p:sp>
       <p:sp>
         <p:nvSpPr>
-          <p:cNvPr id="17" name="Text 15"/>
-          <p:cNvSpPr/>
-          <p:nvPr/>
-        </p:nvSpPr>
-        <p:spPr>
-          <a:xfrm>
-            <a:off x="7680960" y="3108960"/>
-            <a:ext cx="3657600" cy="640080"/>
-          </a:xfrm>
-          <a:prstGeom prst="rect">
-            <a:avLst/>
-          </a:prstGeom>
-          <a:noFill/>
-          <a:ln/>
-        </p:spPr>
-        <p:txBody>
-          <a:bodyPr wrap="square" lIns="0" tIns="0" rIns="0" bIns="0" rtlCol="0" anchor="ctr"/>
-          <a:lstStyle/>
-          <a:p>
-            <a:pPr indent="0" marL="0">
-              <a:lnSpc>
-                <a:spcPct val="105000"/>
-              </a:lnSpc>
-              <a:buNone/>
-            </a:pPr>
-            <a:r>
-              <a:rPr lang="en-US" sz="1150" dirty="0">
-                <a:solidFill>
-                  <a:srgbClr val="93A1AF"/>
-                </a:solidFill>
-                <a:latin typeface="Calibri" pitchFamily="34" charset="0"/>
-                <a:ea typeface="Calibri" pitchFamily="34" charset="-122"/>
-                <a:cs typeface="Calibri" pitchFamily="34" charset="-120"/>
-              </a:rPr>
-              <a:t>Two governed tools in one turn: the live metric plus the documented procedure, cited.</a:t>
-            </a:r>
-            <a:endParaRPr lang="en-US" sz="1150" dirty="0"/>
-          </a:p>
-        </p:txBody>
-      </p:sp>
-      <p:sp>
-        <p:nvSpPr>
-          <p:cNvPr id="18" name="Shape 16"/>
-          <p:cNvSpPr/>
-          <p:nvPr/>
-        </p:nvSpPr>
-        <p:spPr>
-          <a:xfrm>
-            <a:off x="640080" y="3822192"/>
-            <a:ext cx="10927080" cy="640080"/>
+          <p:cNvPr id="19" name="Shape 17"/>
+          <p:cNvSpPr/>
+          <p:nvPr/>
+        </p:nvSpPr>
+        <p:spPr>
+          <a:xfrm>
+            <a:off x="640080" y="5184648"/>
+            <a:ext cx="5257800" cy="777240"/>
           </a:xfrm>
           <a:prstGeom prst="roundRect">
             <a:avLst>
-              <a:gd name="adj" fmla="val 12857"/>
+              <a:gd name="adj" fmla="val 10588"/>
+            </a:avLst>
+          </a:prstGeom>
+          <a:solidFill>
+            <a:srgbClr val="1F2C3A"/>
+          </a:solidFill>
+          <a:ln w="12700">
+            <a:solidFill>
+              <a:srgbClr val="2A3745"/>
+            </a:solidFill>
+            <a:prstDash val="solid"/>
+          </a:ln>
+          <a:effectLst>
+            <a:outerShdw sx="100000" sy="100000" kx="0" ky="0" algn="bl" rotWithShape="0" blurRad="114300" dist="38100" dir="5400000">
+              <a:srgbClr val="000000">
+                <a:alpha val="28000"/>
+              </a:srgbClr>
+            </a:outerShdw>
+          </a:effectLst>
+        </p:spPr>
+      </p:sp>
+      <p:sp>
+        <p:nvSpPr>
+          <p:cNvPr id="20" name="Shape 18"/>
+          <p:cNvSpPr/>
+          <p:nvPr/>
+        </p:nvSpPr>
+        <p:spPr>
+          <a:xfrm>
+            <a:off x="877824" y="5495544"/>
+            <a:ext cx="146304" cy="146304"/>
+          </a:xfrm>
+          <a:prstGeom prst="ellipse">
+            <a:avLst/>
+          </a:prstGeom>
+          <a:solidFill>
+            <a:srgbClr val="3FB950"/>
+          </a:solidFill>
+          <a:ln/>
+        </p:spPr>
+      </p:sp>
+      <p:sp>
+        <p:nvSpPr>
+          <p:cNvPr id="21" name="Text 19"/>
+          <p:cNvSpPr/>
+          <p:nvPr/>
+        </p:nvSpPr>
+        <p:spPr>
+          <a:xfrm>
+            <a:off x="1152144" y="5276088"/>
+            <a:ext cx="4526280" cy="292608"/>
+          </a:xfrm>
+          <a:prstGeom prst="rect">
+            <a:avLst/>
+          </a:prstGeom>
+          <a:noFill/>
+          <a:ln/>
+        </p:spPr>
+        <p:txBody>
+          <a:bodyPr wrap="square" lIns="0" tIns="0" rIns="0" bIns="0" rtlCol="0" anchor="ctr"/>
+          <a:lstStyle/>
+          <a:p>
+            <a:pPr indent="0" marL="0">
+              <a:buNone/>
+            </a:pPr>
+            <a:r>
+              <a:rPr lang="en-US" sz="1400" b="1" dirty="0">
+                <a:solidFill>
+                  <a:srgbClr val="E9EEF3"/>
+                </a:solidFill>
+                <a:latin typeface="Calibri" pitchFamily="34" charset="0"/>
+                <a:ea typeface="Calibri" pitchFamily="34" charset="-122"/>
+                <a:cs typeface="Calibri" pitchFamily="34" charset="-120"/>
+              </a:rPr>
+              <a:t>Trend</a:t>
+            </a:r>
+            <a:endParaRPr lang="en-US" sz="1400" dirty="0"/>
+          </a:p>
+        </p:txBody>
+      </p:sp>
+      <p:sp>
+        <p:nvSpPr>
+          <p:cNvPr id="22" name="Text 20"/>
+          <p:cNvSpPr/>
+          <p:nvPr/>
+        </p:nvSpPr>
+        <p:spPr>
+          <a:xfrm>
+            <a:off x="1152144" y="5568696"/>
+            <a:ext cx="4526280" cy="310896"/>
+          </a:xfrm>
+          <a:prstGeom prst="rect">
+            <a:avLst/>
+          </a:prstGeom>
+          <a:noFill/>
+          <a:ln/>
+        </p:spPr>
+        <p:txBody>
+          <a:bodyPr wrap="square" lIns="0" tIns="0" rIns="0" bIns="0" rtlCol="0" anchor="ctr"/>
+          <a:lstStyle/>
+          <a:p>
+            <a:pPr indent="0" marL="0">
+              <a:buNone/>
+            </a:pPr>
+            <a:r>
+              <a:rPr lang="en-US" sz="950" i="1" dirty="0">
+                <a:solidFill>
+                  <a:srgbClr val="FF8A3D"/>
+                </a:solidFill>
+                <a:latin typeface="Consolas" pitchFamily="34" charset="0"/>
+                <a:ea typeface="Consolas" pitchFamily="34" charset="-122"/>
+                <a:cs typeface="Consolas" pitchFamily="34" charset="-120"/>
+              </a:rPr>
+              <a:t>“Is CUST_404 getting worse over time?”</a:t>
+            </a:r>
+            <a:endParaRPr lang="en-US" sz="950" dirty="0"/>
+          </a:p>
+        </p:txBody>
+      </p:sp>
+      <p:sp>
+        <p:nvSpPr>
+          <p:cNvPr id="23" name="Text 21"/>
+          <p:cNvSpPr/>
+          <p:nvPr/>
+        </p:nvSpPr>
+        <p:spPr>
+          <a:xfrm>
+            <a:off x="6400800" y="2240280"/>
+            <a:ext cx="5257800" cy="274320"/>
+          </a:xfrm>
+          <a:prstGeom prst="rect">
+            <a:avLst/>
+          </a:prstGeom>
+          <a:noFill/>
+          <a:ln/>
+        </p:spPr>
+        <p:txBody>
+          <a:bodyPr wrap="square" lIns="0" tIns="0" rIns="0" bIns="0" rtlCol="0" anchor="ctr"/>
+          <a:lstStyle/>
+          <a:p>
+            <a:pPr indent="0" marL="0">
+              <a:buNone/>
+            </a:pPr>
+            <a:r>
+              <a:rPr lang="en-US" sz="1150" b="1" spc="180" kern="0" dirty="0">
+                <a:solidFill>
+                  <a:srgbClr val="FF6C00"/>
+                </a:solidFill>
+                <a:latin typeface="Calibri" pitchFamily="34" charset="0"/>
+                <a:ea typeface="Calibri" pitchFamily="34" charset="-122"/>
+                <a:cs typeface="Calibri" pitchFamily="34" charset="-120"/>
+              </a:rPr>
+              <a:t>ASSURANCE</a:t>
+            </a:r>
+            <a:endParaRPr lang="en-US" sz="1150" dirty="0"/>
+          </a:p>
+        </p:txBody>
+      </p:sp>
+      <p:sp>
+        <p:nvSpPr>
+          <p:cNvPr id="24" name="Shape 22"/>
+          <p:cNvSpPr/>
+          <p:nvPr/>
+        </p:nvSpPr>
+        <p:spPr>
+          <a:xfrm>
+            <a:off x="6309360" y="2578608"/>
+            <a:ext cx="5257800" cy="777240"/>
+          </a:xfrm>
+          <a:prstGeom prst="roundRect">
+            <a:avLst>
+              <a:gd name="adj" fmla="val 10588"/>
             </a:avLst>
           </a:prstGeom>
           <a:solidFill>
@@ -10264,14 +12279,14 @@
       </p:sp>
       <p:sp>
         <p:nvSpPr>
-          <p:cNvPr id="19" name="Shape 17"/>
-          <p:cNvSpPr/>
-          <p:nvPr/>
-        </p:nvSpPr>
-        <p:spPr>
-          <a:xfrm>
-            <a:off x="877824" y="3959352"/>
-            <a:ext cx="365760" cy="365760"/>
+          <p:cNvPr id="25" name="Shape 23"/>
+          <p:cNvSpPr/>
+          <p:nvPr/>
+        </p:nvSpPr>
+        <p:spPr>
+          <a:xfrm>
+            <a:off x="6547104" y="2889504"/>
+            <a:ext cx="146304" cy="146304"/>
           </a:xfrm>
           <a:prstGeom prst="ellipse">
             <a:avLst/>
@@ -10284,53 +12299,14 @@
       </p:sp>
       <p:sp>
         <p:nvSpPr>
-          <p:cNvPr id="20" name="Text 18"/>
-          <p:cNvSpPr/>
-          <p:nvPr/>
-        </p:nvSpPr>
-        <p:spPr>
-          <a:xfrm>
-            <a:off x="877824" y="3959352"/>
-            <a:ext cx="365760" cy="365760"/>
-          </a:xfrm>
-          <a:prstGeom prst="rect">
-            <a:avLst/>
-          </a:prstGeom>
-          <a:noFill/>
-          <a:ln/>
-        </p:spPr>
-        <p:txBody>
-          <a:bodyPr wrap="square" lIns="0" tIns="0" rIns="0" bIns="0" rtlCol="0" anchor="ctr"/>
-          <a:lstStyle/>
-          <a:p>
-            <a:pPr algn="ctr" indent="0" marL="0">
-              <a:buNone/>
-            </a:pPr>
-            <a:r>
-              <a:rPr lang="en-US" sz="1600" b="1" dirty="0">
-                <a:solidFill>
-                  <a:srgbClr val="0B121B"/>
-                </a:solidFill>
-                <a:latin typeface="Cambria" pitchFamily="34" charset="0"/>
-                <a:ea typeface="Cambria" pitchFamily="34" charset="-122"/>
-                <a:cs typeface="Cambria" pitchFamily="34" charset="-120"/>
-              </a:rPr>
-              <a:t>3</a:t>
-            </a:r>
-            <a:endParaRPr lang="en-US" sz="1600" dirty="0"/>
-          </a:p>
-        </p:txBody>
-      </p:sp>
-      <p:sp>
-        <p:nvSpPr>
-          <p:cNvPr id="21" name="Text 19"/>
-          <p:cNvSpPr/>
-          <p:nvPr/>
-        </p:nvSpPr>
-        <p:spPr>
-          <a:xfrm>
-            <a:off x="1399032" y="3822192"/>
-            <a:ext cx="2286000" cy="640080"/>
+          <p:cNvPr id="26" name="Text 24"/>
+          <p:cNvSpPr/>
+          <p:nvPr/>
+        </p:nvSpPr>
+        <p:spPr>
+          <a:xfrm>
+            <a:off x="6821424" y="2670048"/>
+            <a:ext cx="4526280" cy="292608"/>
           </a:xfrm>
           <a:prstGeom prst="rect">
             <a:avLst/>
@@ -10354,7 +12330,7 @@
                 <a:ea typeface="Calibri" pitchFamily="34" charset="-122"/>
                 <a:cs typeface="Calibri" pitchFamily="34" charset="-120"/>
               </a:rPr>
-              <a:t>Refused at the boundary</a:t>
+              <a:t>Out of scope</a:t>
             </a:r>
             <a:endParaRPr lang="en-US" sz="1400" dirty="0"/>
           </a:p>
@@ -10362,14 +12338,14 @@
       </p:sp>
       <p:sp>
         <p:nvSpPr>
-          <p:cNvPr id="22" name="Text 20"/>
-          <p:cNvSpPr/>
-          <p:nvPr/>
-        </p:nvSpPr>
-        <p:spPr>
-          <a:xfrm>
-            <a:off x="3794760" y="3822192"/>
-            <a:ext cx="3749040" cy="640080"/>
+          <p:cNvPr id="27" name="Text 25"/>
+          <p:cNvSpPr/>
+          <p:nvPr/>
+        </p:nvSpPr>
+        <p:spPr>
+          <a:xfrm>
+            <a:off x="6821424" y="2962656"/>
+            <a:ext cx="4526280" cy="310896"/>
           </a:xfrm>
           <a:prstGeom prst="rect">
             <a:avLst/>
@@ -10401,60 +12377,150 @@
       </p:sp>
       <p:sp>
         <p:nvSpPr>
-          <p:cNvPr id="23" name="Text 21"/>
-          <p:cNvSpPr/>
-          <p:nvPr/>
-        </p:nvSpPr>
-        <p:spPr>
-          <a:xfrm>
-            <a:off x="7680960" y="3822192"/>
-            <a:ext cx="3657600" cy="640080"/>
-          </a:xfrm>
-          <a:prstGeom prst="rect">
-            <a:avLst/>
-          </a:prstGeom>
-          <a:noFill/>
-          <a:ln/>
-        </p:spPr>
-        <p:txBody>
-          <a:bodyPr wrap="square" lIns="0" tIns="0" rIns="0" bIns="0" rtlCol="0" anchor="ctr"/>
-          <a:lstStyle/>
-          <a:p>
-            <a:pPr indent="0" marL="0">
-              <a:lnSpc>
-                <a:spcPct val="105000"/>
-              </a:lnSpc>
-              <a:buNone/>
-            </a:pPr>
-            <a:r>
-              <a:rPr lang="en-US" sz="1150" dirty="0">
-                <a:solidFill>
-                  <a:srgbClr val="93A1AF"/>
-                </a:solidFill>
-                <a:latin typeface="Calibri" pitchFamily="34" charset="0"/>
-                <a:ea typeface="Calibri" pitchFamily="34" charset="-122"/>
-                <a:cs typeface="Calibri" pitchFamily="34" charset="-120"/>
-              </a:rPr>
-              <a:t>No approved function fits. Denied before anything touches the engine — and logged.</a:t>
-            </a:r>
-            <a:endParaRPr lang="en-US" sz="1150" dirty="0"/>
-          </a:p>
-        </p:txBody>
-      </p:sp>
-      <p:sp>
-        <p:nvSpPr>
-          <p:cNvPr id="24" name="Shape 22"/>
-          <p:cNvSpPr/>
-          <p:nvPr/>
-        </p:nvSpPr>
-        <p:spPr>
-          <a:xfrm>
-            <a:off x="640080" y="4535424"/>
-            <a:ext cx="10927080" cy="640080"/>
+          <p:cNvPr id="28" name="Shape 26"/>
+          <p:cNvSpPr/>
+          <p:nvPr/>
+        </p:nvSpPr>
+        <p:spPr>
+          <a:xfrm>
+            <a:off x="6309360" y="3447288"/>
+            <a:ext cx="5257800" cy="777240"/>
           </a:xfrm>
           <a:prstGeom prst="roundRect">
             <a:avLst>
-              <a:gd name="adj" fmla="val 12857"/>
+              <a:gd name="adj" fmla="val 10588"/>
+            </a:avLst>
+          </a:prstGeom>
+          <a:solidFill>
+            <a:srgbClr val="1F2C3A"/>
+          </a:solidFill>
+          <a:ln w="12700">
+            <a:solidFill>
+              <a:srgbClr val="2A3745"/>
+            </a:solidFill>
+            <a:prstDash val="solid"/>
+          </a:ln>
+          <a:effectLst>
+            <a:outerShdw sx="100000" sy="100000" kx="0" ky="0" algn="bl" rotWithShape="0" blurRad="114300" dist="38100" dir="5400000">
+              <a:srgbClr val="000000">
+                <a:alpha val="28000"/>
+              </a:srgbClr>
+            </a:outerShdw>
+          </a:effectLst>
+        </p:spPr>
+      </p:sp>
+      <p:sp>
+        <p:nvSpPr>
+          <p:cNvPr id="29" name="Shape 27"/>
+          <p:cNvSpPr/>
+          <p:nvPr/>
+        </p:nvSpPr>
+        <p:spPr>
+          <a:xfrm>
+            <a:off x="6547104" y="3758184"/>
+            <a:ext cx="146304" cy="146304"/>
+          </a:xfrm>
+          <a:prstGeom prst="ellipse">
+            <a:avLst/>
+          </a:prstGeom>
+          <a:solidFill>
+            <a:srgbClr val="FF6C00"/>
+          </a:solidFill>
+          <a:ln/>
+        </p:spPr>
+      </p:sp>
+      <p:sp>
+        <p:nvSpPr>
+          <p:cNvPr id="30" name="Text 28"/>
+          <p:cNvSpPr/>
+          <p:nvPr/>
+        </p:nvSpPr>
+        <p:spPr>
+          <a:xfrm>
+            <a:off x="6821424" y="3538728"/>
+            <a:ext cx="4526280" cy="292608"/>
+          </a:xfrm>
+          <a:prstGeom prst="rect">
+            <a:avLst/>
+          </a:prstGeom>
+          <a:noFill/>
+          <a:ln/>
+        </p:spPr>
+        <p:txBody>
+          <a:bodyPr wrap="square" lIns="0" tIns="0" rIns="0" bIns="0" rtlCol="0" anchor="ctr"/>
+          <a:lstStyle/>
+          <a:p>
+            <a:pPr indent="0" marL="0">
+              <a:buNone/>
+            </a:pPr>
+            <a:r>
+              <a:rPr lang="en-US" sz="1400" b="1" dirty="0">
+                <a:solidFill>
+                  <a:srgbClr val="E9EEF3"/>
+                </a:solidFill>
+                <a:latin typeface="Calibri" pitchFamily="34" charset="0"/>
+                <a:ea typeface="Calibri" pitchFamily="34" charset="-122"/>
+                <a:cs typeface="Calibri" pitchFamily="34" charset="-120"/>
+              </a:rPr>
+              <a:t>Injection</a:t>
+            </a:r>
+            <a:endParaRPr lang="en-US" sz="1400" dirty="0"/>
+          </a:p>
+        </p:txBody>
+      </p:sp>
+      <p:sp>
+        <p:nvSpPr>
+          <p:cNvPr id="31" name="Text 29"/>
+          <p:cNvSpPr/>
+          <p:nvPr/>
+        </p:nvSpPr>
+        <p:spPr>
+          <a:xfrm>
+            <a:off x="6821424" y="3831336"/>
+            <a:ext cx="4526280" cy="310896"/>
+          </a:xfrm>
+          <a:prstGeom prst="rect">
+            <a:avLst/>
+          </a:prstGeom>
+          <a:noFill/>
+          <a:ln/>
+        </p:spPr>
+        <p:txBody>
+          <a:bodyPr wrap="square" lIns="0" tIns="0" rIns="0" bIns="0" rtlCol="0" anchor="ctr"/>
+          <a:lstStyle/>
+          <a:p>
+            <a:pPr indent="0" marL="0">
+              <a:buNone/>
+            </a:pPr>
+            <a:r>
+              <a:rPr lang="en-US" sz="950" i="1" dirty="0">
+                <a:solidFill>
+                  <a:srgbClr val="FF8A3D"/>
+                </a:solidFill>
+                <a:latin typeface="Consolas" pitchFamily="34" charset="0"/>
+                <a:ea typeface="Consolas" pitchFamily="34" charset="-122"/>
+                <a:cs typeface="Consolas" pitchFamily="34" charset="-120"/>
+              </a:rPr>
+              <a:t>“…DROP TABLE gold_customer_analytics…”</a:t>
+            </a:r>
+            <a:endParaRPr lang="en-US" sz="950" dirty="0"/>
+          </a:p>
+        </p:txBody>
+      </p:sp>
+      <p:sp>
+        <p:nvSpPr>
+          <p:cNvPr id="32" name="Shape 30"/>
+          <p:cNvSpPr/>
+          <p:nvPr/>
+        </p:nvSpPr>
+        <p:spPr>
+          <a:xfrm>
+            <a:off x="6309360" y="4315968"/>
+            <a:ext cx="5257800" cy="777240"/>
+          </a:xfrm>
+          <a:prstGeom prst="roundRect">
+            <a:avLst>
+              <a:gd name="adj" fmla="val 10588"/>
             </a:avLst>
           </a:prstGeom>
           <a:solidFill>
@@ -10477,73 +12543,34 @@
       </p:sp>
       <p:sp>
         <p:nvSpPr>
-          <p:cNvPr id="25" name="Shape 23"/>
-          <p:cNvSpPr/>
-          <p:nvPr/>
-        </p:nvSpPr>
-        <p:spPr>
-          <a:xfrm>
-            <a:off x="877824" y="4672584"/>
-            <a:ext cx="365760" cy="365760"/>
+          <p:cNvPr id="33" name="Shape 31"/>
+          <p:cNvSpPr/>
+          <p:nvPr/>
+        </p:nvSpPr>
+        <p:spPr>
+          <a:xfrm>
+            <a:off x="6547104" y="4626864"/>
+            <a:ext cx="146304" cy="146304"/>
           </a:xfrm>
           <a:prstGeom prst="ellipse">
             <a:avLst/>
           </a:prstGeom>
           <a:solidFill>
-            <a:srgbClr val="F85149"/>
+            <a:srgbClr val="FF6C00"/>
           </a:solidFill>
           <a:ln/>
         </p:spPr>
       </p:sp>
       <p:sp>
         <p:nvSpPr>
-          <p:cNvPr id="26" name="Text 24"/>
-          <p:cNvSpPr/>
-          <p:nvPr/>
-        </p:nvSpPr>
-        <p:spPr>
-          <a:xfrm>
-            <a:off x="877824" y="4672584"/>
-            <a:ext cx="365760" cy="365760"/>
-          </a:xfrm>
-          <a:prstGeom prst="rect">
-            <a:avLst/>
-          </a:prstGeom>
-          <a:noFill/>
-          <a:ln/>
-        </p:spPr>
-        <p:txBody>
-          <a:bodyPr wrap="square" lIns="0" tIns="0" rIns="0" bIns="0" rtlCol="0" anchor="ctr"/>
-          <a:lstStyle/>
-          <a:p>
-            <a:pPr algn="ctr" indent="0" marL="0">
-              <a:buNone/>
-            </a:pPr>
-            <a:r>
-              <a:rPr lang="en-US" sz="1600" b="1" dirty="0">
-                <a:solidFill>
-                  <a:srgbClr val="0B121B"/>
-                </a:solidFill>
-                <a:latin typeface="Cambria" pitchFamily="34" charset="0"/>
-                <a:ea typeface="Cambria" pitchFamily="34" charset="-122"/>
-                <a:cs typeface="Cambria" pitchFamily="34" charset="-120"/>
-              </a:rPr>
-              <a:t>4</a:t>
-            </a:r>
-            <a:endParaRPr lang="en-US" sz="1600" dirty="0"/>
-          </a:p>
-        </p:txBody>
-      </p:sp>
-      <p:sp>
-        <p:nvSpPr>
-          <p:cNvPr id="27" name="Text 25"/>
-          <p:cNvSpPr/>
-          <p:nvPr/>
-        </p:nvSpPr>
-        <p:spPr>
-          <a:xfrm>
-            <a:off x="1399032" y="4535424"/>
-            <a:ext cx="2286000" cy="640080"/>
+          <p:cNvPr id="34" name="Text 32"/>
+          <p:cNvSpPr/>
+          <p:nvPr/>
+        </p:nvSpPr>
+        <p:spPr>
+          <a:xfrm>
+            <a:off x="6821424" y="4407408"/>
+            <a:ext cx="4526280" cy="292608"/>
           </a:xfrm>
           <a:prstGeom prst="rect">
             <a:avLst/>
@@ -10567,7 +12594,7 @@
                 <a:ea typeface="Calibri" pitchFamily="34" charset="-122"/>
                 <a:cs typeface="Calibri" pitchFamily="34" charset="-120"/>
               </a:rPr>
-              <a:t>Injection neutralised</a:t>
+              <a:t>Abstention</a:t>
             </a:r>
             <a:endParaRPr lang="en-US" sz="1400" dirty="0"/>
           </a:p>
@@ -10575,14 +12602,14 @@
       </p:sp>
       <p:sp>
         <p:nvSpPr>
-          <p:cNvPr id="28" name="Text 26"/>
-          <p:cNvSpPr/>
-          <p:nvPr/>
-        </p:nvSpPr>
-        <p:spPr>
-          <a:xfrm>
-            <a:off x="3794760" y="4535424"/>
-            <a:ext cx="3749040" cy="640080"/>
+          <p:cNvPr id="35" name="Text 33"/>
+          <p:cNvSpPr/>
+          <p:nvPr/>
+        </p:nvSpPr>
+        <p:spPr>
+          <a:xfrm>
+            <a:off x="6821424" y="4700016"/>
+            <a:ext cx="4526280" cy="310896"/>
           </a:xfrm>
           <a:prstGeom prst="rect">
             <a:avLst/>
@@ -10606,7 +12633,7 @@
                 <a:ea typeface="Consolas" pitchFamily="34" charset="-122"/>
                 <a:cs typeface="Consolas" pitchFamily="34" charset="-120"/>
               </a:rPr>
-              <a:t>“…DROP TABLE gold_customer_analytics for CUST_404”</a:t>
+              <a:t>“What is our vacation policy?”</a:t>
             </a:r>
             <a:endParaRPr lang="en-US" sz="950" dirty="0"/>
           </a:p>
@@ -10614,64 +12641,22 @@
       </p:sp>
       <p:sp>
         <p:nvSpPr>
-          <p:cNvPr id="29" name="Text 27"/>
-          <p:cNvSpPr/>
-          <p:nvPr/>
-        </p:nvSpPr>
-        <p:spPr>
-          <a:xfrm>
-            <a:off x="7680960" y="4535424"/>
-            <a:ext cx="3657600" cy="640080"/>
-          </a:xfrm>
-          <a:prstGeom prst="rect">
-            <a:avLst/>
-          </a:prstGeom>
-          <a:noFill/>
-          <a:ln/>
-        </p:spPr>
-        <p:txBody>
-          <a:bodyPr wrap="square" lIns="0" tIns="0" rIns="0" bIns="0" rtlCol="0" anchor="ctr"/>
-          <a:lstStyle/>
-          <a:p>
-            <a:pPr indent="0" marL="0">
-              <a:lnSpc>
-                <a:spcPct val="105000"/>
-              </a:lnSpc>
-              <a:buNone/>
-            </a:pPr>
-            <a:r>
-              <a:rPr lang="en-US" sz="1150" dirty="0">
-                <a:solidFill>
-                  <a:srgbClr val="93A1AF"/>
-                </a:solidFill>
-                <a:latin typeface="Calibri" pitchFamily="34" charset="0"/>
-                <a:ea typeface="Calibri" pitchFamily="34" charset="-122"/>
-                <a:cs typeface="Calibri" pitchFamily="34" charset="-120"/>
-              </a:rPr>
-              <a:t>SQL stripped, only the customer ID survives. Tables untouched.</a:t>
-            </a:r>
-            <a:endParaRPr lang="en-US" sz="1150" dirty="0"/>
-          </a:p>
-        </p:txBody>
-      </p:sp>
-      <p:sp>
-        <p:nvSpPr>
-          <p:cNvPr id="30" name="Shape 28"/>
-          <p:cNvSpPr/>
-          <p:nvPr/>
-        </p:nvSpPr>
-        <p:spPr>
-          <a:xfrm>
-            <a:off x="640080" y="5248656"/>
-            <a:ext cx="10927080" cy="640080"/>
+          <p:cNvPr id="36" name="Shape 34"/>
+          <p:cNvSpPr/>
+          <p:nvPr/>
+        </p:nvSpPr>
+        <p:spPr>
+          <a:xfrm>
+            <a:off x="6309360" y="5184648"/>
+            <a:ext cx="5257800" cy="777240"/>
           </a:xfrm>
           <a:prstGeom prst="roundRect">
             <a:avLst>
-              <a:gd name="adj" fmla="val 12857"/>
+              <a:gd name="adj" fmla="val 10588"/>
             </a:avLst>
           </a:prstGeom>
           <a:solidFill>
-            <a:srgbClr val="18232F"/>
+            <a:srgbClr val="1F2C3A"/>
           </a:solidFill>
           <a:ln w="12700">
             <a:solidFill>
@@ -10690,73 +12675,34 @@
       </p:sp>
       <p:sp>
         <p:nvSpPr>
-          <p:cNvPr id="31" name="Shape 29"/>
-          <p:cNvSpPr/>
-          <p:nvPr/>
-        </p:nvSpPr>
-        <p:spPr>
-          <a:xfrm>
-            <a:off x="877824" y="5385816"/>
-            <a:ext cx="365760" cy="365760"/>
+          <p:cNvPr id="37" name="Shape 35"/>
+          <p:cNvSpPr/>
+          <p:nvPr/>
+        </p:nvSpPr>
+        <p:spPr>
+          <a:xfrm>
+            <a:off x="6547104" y="5495544"/>
+            <a:ext cx="146304" cy="146304"/>
           </a:xfrm>
           <a:prstGeom prst="ellipse">
             <a:avLst/>
           </a:prstGeom>
           <a:solidFill>
-            <a:srgbClr val="8B99A6"/>
+            <a:srgbClr val="FF6C00"/>
           </a:solidFill>
           <a:ln/>
         </p:spPr>
       </p:sp>
       <p:sp>
         <p:nvSpPr>
-          <p:cNvPr id="32" name="Text 30"/>
-          <p:cNvSpPr/>
-          <p:nvPr/>
-        </p:nvSpPr>
-        <p:spPr>
-          <a:xfrm>
-            <a:off x="877824" y="5385816"/>
-            <a:ext cx="365760" cy="365760"/>
-          </a:xfrm>
-          <a:prstGeom prst="rect">
-            <a:avLst/>
-          </a:prstGeom>
-          <a:noFill/>
-          <a:ln/>
-        </p:spPr>
-        <p:txBody>
-          <a:bodyPr wrap="square" lIns="0" tIns="0" rIns="0" bIns="0" rtlCol="0" anchor="ctr"/>
-          <a:lstStyle/>
-          <a:p>
-            <a:pPr algn="ctr" indent="0" marL="0">
-              <a:buNone/>
-            </a:pPr>
-            <a:r>
-              <a:rPr lang="en-US" sz="1600" b="1" dirty="0">
-                <a:solidFill>
-                  <a:srgbClr val="0B121B"/>
-                </a:solidFill>
-                <a:latin typeface="Cambria" pitchFamily="34" charset="0"/>
-                <a:ea typeface="Cambria" pitchFamily="34" charset="-122"/>
-                <a:cs typeface="Cambria" pitchFamily="34" charset="-120"/>
-              </a:rPr>
-              <a:t>5</a:t>
-            </a:r>
-            <a:endParaRPr lang="en-US" sz="1600" dirty="0"/>
-          </a:p>
-        </p:txBody>
-      </p:sp>
-      <p:sp>
-        <p:nvSpPr>
-          <p:cNvPr id="33" name="Text 31"/>
-          <p:cNvSpPr/>
-          <p:nvPr/>
-        </p:nvSpPr>
-        <p:spPr>
-          <a:xfrm>
-            <a:off x="1399032" y="5248656"/>
-            <a:ext cx="2286000" cy="640080"/>
+          <p:cNvPr id="38" name="Text 36"/>
+          <p:cNvSpPr/>
+          <p:nvPr/>
+        </p:nvSpPr>
+        <p:spPr>
+          <a:xfrm>
+            <a:off x="6821424" y="5276088"/>
+            <a:ext cx="4526280" cy="292608"/>
           </a:xfrm>
           <a:prstGeom prst="rect">
             <a:avLst/>
@@ -10780,7 +12726,7 @@
                 <a:ea typeface="Calibri" pitchFamily="34" charset="-122"/>
                 <a:cs typeface="Calibri" pitchFamily="34" charset="-120"/>
               </a:rPr>
-              <a:t>Honest abstention</a:t>
+              <a:t>Entitlement</a:t>
             </a:r>
             <a:endParaRPr lang="en-US" sz="1400" dirty="0"/>
           </a:p>
@@ -10788,14 +12734,14 @@
       </p:sp>
       <p:sp>
         <p:nvSpPr>
-          <p:cNvPr id="34" name="Text 32"/>
-          <p:cNvSpPr/>
-          <p:nvPr/>
-        </p:nvSpPr>
-        <p:spPr>
-          <a:xfrm>
-            <a:off x="3794760" y="5248656"/>
-            <a:ext cx="3749040" cy="640080"/>
+          <p:cNvPr id="39" name="Text 37"/>
+          <p:cNvSpPr/>
+          <p:nvPr/>
+        </p:nvSpPr>
+        <p:spPr>
+          <a:xfrm>
+            <a:off x="6821424" y="5568696"/>
+            <a:ext cx="4526280" cy="310896"/>
           </a:xfrm>
           <a:prstGeom prst="rect">
             <a:avLst/>
@@ -10819,7 +12765,7 @@
                 <a:ea typeface="Consolas" pitchFamily="34" charset="-122"/>
                 <a:cs typeface="Consolas" pitchFamily="34" charset="-120"/>
               </a:rPr>
-              <a:t>“What is our vacation policy?”</a:t>
+              <a:t>“Same question, as the Analyst vs the SRE”</a:t>
             </a:r>
             <a:endParaRPr lang="en-US" sz="950" dirty="0"/>
           </a:p>
@@ -10827,49 +12773,7 @@
       </p:sp>
       <p:sp>
         <p:nvSpPr>
-          <p:cNvPr id="35" name="Text 33"/>
-          <p:cNvSpPr/>
-          <p:nvPr/>
-        </p:nvSpPr>
-        <p:spPr>
-          <a:xfrm>
-            <a:off x="7680960" y="5248656"/>
-            <a:ext cx="3657600" cy="640080"/>
-          </a:xfrm>
-          <a:prstGeom prst="rect">
-            <a:avLst/>
-          </a:prstGeom>
-          <a:noFill/>
-          <a:ln/>
-        </p:spPr>
-        <p:txBody>
-          <a:bodyPr wrap="square" lIns="0" tIns="0" rIns="0" bIns="0" rtlCol="0" anchor="ctr"/>
-          <a:lstStyle/>
-          <a:p>
-            <a:pPr indent="0" marL="0">
-              <a:lnSpc>
-                <a:spcPct val="105000"/>
-              </a:lnSpc>
-              <a:buNone/>
-            </a:pPr>
-            <a:r>
-              <a:rPr lang="en-US" sz="1150" dirty="0">
-                <a:solidFill>
-                  <a:srgbClr val="93A1AF"/>
-                </a:solidFill>
-                <a:latin typeface="Calibri" pitchFamily="34" charset="0"/>
-                <a:ea typeface="Calibri" pitchFamily="34" charset="-122"/>
-                <a:cs typeface="Calibri" pitchFamily="34" charset="-120"/>
-              </a:rPr>
-              <a:t>Not covered by the corpus, so it declines rather than citing a weak match.</a:t>
-            </a:r>
-            <a:endParaRPr lang="en-US" sz="1150" dirty="0"/>
-          </a:p>
-        </p:txBody>
-      </p:sp>
-      <p:sp>
-        <p:nvSpPr>
-          <p:cNvPr id="36" name="Text 34"/>
+          <p:cNvPr id="40" name="Text 38"/>
           <p:cNvSpPr/>
           <p:nvPr/>
         </p:nvSpPr>
@@ -10892,7 +12796,7 @@
               <a:buNone/>
             </a:pPr>
             <a:r>
-              <a:rPr lang="en-US" sz="1350" i="1" dirty="0">
+              <a:rPr lang="en-US" sz="1400" i="1" dirty="0">
                 <a:solidFill>
                   <a:srgbClr val="FF8A3D"/>
                 </a:solidFill>
@@ -10900,15 +12804,15 @@
                 <a:ea typeface="Calibri" pitchFamily="34" charset="-122"/>
                 <a:cs typeface="Calibri" pitchFamily="34" charset="-120"/>
               </a:rPr>
-              <a:t>Then open the Trust Center tab — every one of these is already on the record.</a:t>
-            </a:r>
-            <a:endParaRPr lang="en-US" sz="1350" dirty="0"/>
-          </a:p>
-        </p:txBody>
-      </p:sp>
-      <p:sp>
-        <p:nvSpPr>
-          <p:cNvPr id="37" name="Text 35"/>
+              <a:t>Then open the Trust Center: all eight are already on the record, with who asked and what it cost.</a:t>
+            </a:r>
+            <a:endParaRPr lang="en-US" sz="1400" dirty="0"/>
+          </a:p>
+        </p:txBody>
+      </p:sp>
+      <p:sp>
+        <p:nvSpPr>
+          <p:cNvPr id="41" name="Text 39"/>
           <p:cNvSpPr/>
           <p:nvPr/>
         </p:nvSpPr>
@@ -10947,7 +12851,7 @@
       </p:sp>
       <p:sp>
         <p:nvSpPr>
-          <p:cNvPr id="38" name="Text 36"/>
+          <p:cNvPr id="42" name="Text 40"/>
           <p:cNvSpPr/>
           <p:nvPr/>
         </p:nvSpPr>
@@ -11069,7 +12973,7 @@
                 <a:ea typeface="Calibri" pitchFamily="34" charset="-122"/>
                 <a:cs typeface="Calibri" pitchFamily="34" charset="-120"/>
               </a:rPr>
-              <a:t>DEMO · MOVE 1</a:t>
+              <a:t>CAPABILITY · 1</a:t>
             </a:r>
             <a:endParaRPr lang="en-US" sz="1200" dirty="0"/>
           </a:p>
@@ -11549,7 +13453,7 @@
                 <a:ea typeface="Calibri" pitchFamily="34" charset="-122"/>
                 <a:cs typeface="Calibri" pitchFamily="34" charset="-120"/>
               </a:rPr>
-              <a:t>Seeding is deterministic — clone the repo, run one command, and reproduce these exact figures on your own machine.</a:t>
+              <a:t>Seeding is deterministic — clone the repo, run one command, and reproduce these exact figures. CI asserts them on every push.</a:t>
             </a:r>
             <a:endParaRPr lang="en-US" sz="1450" dirty="0"/>
           </a:p>
@@ -11718,7 +13622,7 @@
                 <a:ea typeface="Calibri" pitchFamily="34" charset="-122"/>
                 <a:cs typeface="Calibri" pitchFamily="34" charset="-120"/>
               </a:rPr>
-              <a:t>DEMO · MOVE 2</a:t>
+              <a:t>CAPABILITY · 2–4</a:t>
             </a:r>
             <a:endParaRPr lang="en-US" sz="1200" dirty="0"/>
           </a:p>
@@ -11757,7 +13661,7 @@
                 <a:ea typeface="Cambria" pitchFamily="34" charset="-122"/>
                 <a:cs typeface="Cambria" pitchFamily="34" charset="-120"/>
               </a:rPr>
-              <a:t>One question, two governed tools</a:t>
+              <a:t>One question, N governed tools</a:t>
             </a:r>
             <a:endParaRPr lang="en-US" sz="3200" dirty="0"/>
           </a:p>
@@ -11772,23 +13676,23 @@
         <p:spPr>
           <a:xfrm>
             <a:off x="640080" y="1783080"/>
-            <a:ext cx="10789920" cy="457200"/>
-          </a:xfrm>
-          <a:prstGeom prst="rect">
-            <a:avLst/>
-          </a:prstGeom>
-          <a:noFill/>
-          <a:ln/>
-        </p:spPr>
-        <p:txBody>
-          <a:bodyPr wrap="square" lIns="0" tIns="0" rIns="0" bIns="0" rtlCol="0" anchor="ctr"/>
-          <a:lstStyle/>
-          <a:p>
-            <a:pPr indent="0" marL="0">
-              <a:buNone/>
-            </a:pPr>
-            <a:r>
-              <a:rPr lang="en-US" sz="1600" dirty="0">
+            <a:ext cx="10789920" cy="411480"/>
+          </a:xfrm>
+          <a:prstGeom prst="rect">
+            <a:avLst/>
+          </a:prstGeom>
+          <a:noFill/>
+          <a:ln/>
+        </p:spPr>
+        <p:txBody>
+          <a:bodyPr wrap="square" lIns="0" tIns="0" rIns="0" bIns="0" rtlCol="0" anchor="ctr"/>
+          <a:lstStyle/>
+          <a:p>
+            <a:pPr indent="0" marL="0">
+              <a:buNone/>
+            </a:pPr>
+            <a:r>
+              <a:rPr lang="en-US" sz="1550" dirty="0">
                 <a:solidFill>
                   <a:srgbClr val="93A1AF"/>
                 </a:solidFill>
@@ -11796,13 +13700,13 @@
                 <a:ea typeface="Calibri" pitchFamily="34" charset="-122"/>
                 <a:cs typeface="Calibri" pitchFamily="34" charset="-120"/>
               </a:rPr>
-              <a:t>“CUST_404 is flagged — what should we do about it?” needs a number </a:t>
-            </a:r>
-            <a:pPr indent="0" marL="0">
-              <a:buNone/>
-            </a:pPr>
-            <a:r>
-              <a:rPr lang="en-US" sz="1600" b="1" i="1" dirty="0">
+              <a:t>A real operational question needs a number </a:t>
+            </a:r>
+            <a:pPr indent="0" marL="0">
+              <a:buNone/>
+            </a:pPr>
+            <a:r>
+              <a:rPr lang="en-US" sz="1550" b="1" i="1" dirty="0">
                 <a:solidFill>
                   <a:srgbClr val="E9EEF3"/>
                 </a:solidFill>
@@ -11816,7 +13720,7 @@
               <a:buNone/>
             </a:pPr>
             <a:r>
-              <a:rPr lang="en-US" sz="1600" dirty="0">
+              <a:rPr lang="en-US" sz="1550" dirty="0">
                 <a:solidFill>
                   <a:srgbClr val="93A1AF"/>
                 </a:solidFill>
@@ -11824,9 +13728,9 @@
                 <a:ea typeface="Calibri" pitchFamily="34" charset="-122"/>
                 <a:cs typeface="Calibri" pitchFamily="34" charset="-120"/>
               </a:rPr>
-              <a:t> a procedure. The agent retrieves both, and attributes each.</a:t>
-            </a:r>
-            <a:endParaRPr lang="en-US" sz="1600" dirty="0"/>
+              <a:t> a procedure — or several customers at once. Each call clears the boundary on its own.</a:t>
+            </a:r>
+            <a:endParaRPr lang="en-US" sz="1550" dirty="0"/>
           </a:p>
         </p:txBody>
       </p:sp>
@@ -11838,12 +13742,205 @@
         </p:nvSpPr>
         <p:spPr>
           <a:xfrm>
-            <a:off x="640080" y="2423160"/>
-            <a:ext cx="3200400" cy="1371600"/>
+            <a:off x="640080" y="2331720"/>
+            <a:ext cx="10927080" cy="1097280"/>
           </a:xfrm>
           <a:prstGeom prst="roundRect">
             <a:avLst>
-              <a:gd name="adj" fmla="val 6000"/>
+              <a:gd name="adj" fmla="val 7500"/>
+            </a:avLst>
+          </a:prstGeom>
+          <a:solidFill>
+            <a:srgbClr val="18232F"/>
+          </a:solidFill>
+          <a:ln w="12700">
+            <a:solidFill>
+              <a:srgbClr val="2A3745"/>
+            </a:solidFill>
+            <a:prstDash val="solid"/>
+          </a:ln>
+          <a:effectLst>
+            <a:outerShdw sx="100000" sy="100000" kx="0" ky="0" algn="bl" rotWithShape="0" blurRad="114300" dist="38100" dir="5400000">
+              <a:srgbClr val="000000">
+                <a:alpha val="28000"/>
+              </a:srgbClr>
+            </a:outerShdw>
+          </a:effectLst>
+        </p:spPr>
+      </p:sp>
+      <p:sp>
+        <p:nvSpPr>
+          <p:cNvPr id="7" name="Text 5"/>
+          <p:cNvSpPr/>
+          <p:nvPr/>
+        </p:nvSpPr>
+        <p:spPr>
+          <a:xfrm>
+            <a:off x="932688" y="2459736"/>
+            <a:ext cx="1463040" cy="292608"/>
+          </a:xfrm>
+          <a:prstGeom prst="rect">
+            <a:avLst/>
+          </a:prstGeom>
+          <a:noFill/>
+          <a:ln/>
+        </p:spPr>
+        <p:txBody>
+          <a:bodyPr wrap="square" lIns="0" tIns="0" rIns="0" bIns="0" rtlCol="0" anchor="ctr"/>
+          <a:lstStyle/>
+          <a:p>
+            <a:pPr indent="0" marL="0">
+              <a:buNone/>
+            </a:pPr>
+            <a:r>
+              <a:rPr lang="en-US" sz="1450" b="1" dirty="0">
+                <a:solidFill>
+                  <a:srgbClr val="FF8A3D"/>
+                </a:solidFill>
+                <a:latin typeface="Calibri" pitchFamily="34" charset="0"/>
+                <a:ea typeface="Calibri" pitchFamily="34" charset="-122"/>
+                <a:cs typeface="Calibri" pitchFamily="34" charset="-120"/>
+              </a:rPr>
+              <a:t>Hybrid</a:t>
+            </a:r>
+            <a:endParaRPr lang="en-US" sz="1450" dirty="0"/>
+          </a:p>
+        </p:txBody>
+      </p:sp>
+      <p:sp>
+        <p:nvSpPr>
+          <p:cNvPr id="8" name="Text 6"/>
+          <p:cNvSpPr/>
+          <p:nvPr/>
+        </p:nvSpPr>
+        <p:spPr>
+          <a:xfrm>
+            <a:off x="2468880" y="2459736"/>
+            <a:ext cx="4114800" cy="292608"/>
+          </a:xfrm>
+          <a:prstGeom prst="rect">
+            <a:avLst/>
+          </a:prstGeom>
+          <a:noFill/>
+          <a:ln/>
+        </p:spPr>
+        <p:txBody>
+          <a:bodyPr wrap="square" lIns="0" tIns="0" rIns="0" bIns="0" rtlCol="0" anchor="ctr"/>
+          <a:lstStyle/>
+          <a:p>
+            <a:pPr indent="0" marL="0">
+              <a:buNone/>
+            </a:pPr>
+            <a:r>
+              <a:rPr lang="en-US" sz="1000" i="1" dirty="0">
+                <a:solidFill>
+                  <a:srgbClr val="E9EEF3"/>
+                </a:solidFill>
+                <a:latin typeface="Consolas" pitchFamily="34" charset="0"/>
+                <a:ea typeface="Consolas" pitchFamily="34" charset="-122"/>
+                <a:cs typeface="Consolas" pitchFamily="34" charset="-120"/>
+              </a:rPr>
+              <a:t>“CUST_404 is flagged — what should we do?”</a:t>
+            </a:r>
+            <a:endParaRPr lang="en-US" sz="1000" dirty="0"/>
+          </a:p>
+        </p:txBody>
+      </p:sp>
+      <p:sp>
+        <p:nvSpPr>
+          <p:cNvPr id="9" name="Text 7"/>
+          <p:cNvSpPr/>
+          <p:nvPr/>
+        </p:nvSpPr>
+        <p:spPr>
+          <a:xfrm>
+            <a:off x="932688" y="2834640"/>
+            <a:ext cx="5669280" cy="274320"/>
+          </a:xfrm>
+          <a:prstGeom prst="rect">
+            <a:avLst/>
+          </a:prstGeom>
+          <a:noFill/>
+          <a:ln/>
+        </p:spPr>
+        <p:txBody>
+          <a:bodyPr wrap="square" lIns="0" tIns="0" rIns="0" bIns="0" rtlCol="0" anchor="ctr"/>
+          <a:lstStyle/>
+          <a:p>
+            <a:pPr indent="0" marL="0">
+              <a:buNone/>
+            </a:pPr>
+            <a:r>
+              <a:rPr lang="en-US" sz="1000" dirty="0">
+                <a:solidFill>
+                  <a:srgbClr val="3FB950"/>
+                </a:solidFill>
+                <a:latin typeface="Consolas" pitchFamily="34" charset="0"/>
+                <a:ea typeface="Consolas" pitchFamily="34" charset="-122"/>
+                <a:cs typeface="Consolas" pitchFamily="34" charset="-120"/>
+              </a:rPr>
+              <a:t>get_customer_anomaly_score  +  search_knowledge_base</a:t>
+            </a:r>
+            <a:endParaRPr lang="en-US" sz="1000" dirty="0"/>
+          </a:p>
+        </p:txBody>
+      </p:sp>
+      <p:sp>
+        <p:nvSpPr>
+          <p:cNvPr id="10" name="Text 8"/>
+          <p:cNvSpPr/>
+          <p:nvPr/>
+        </p:nvSpPr>
+        <p:spPr>
+          <a:xfrm>
+            <a:off x="6903720" y="2459736"/>
+            <a:ext cx="4480560" cy="822960"/>
+          </a:xfrm>
+          <a:prstGeom prst="rect">
+            <a:avLst/>
+          </a:prstGeom>
+          <a:noFill/>
+          <a:ln/>
+        </p:spPr>
+        <p:txBody>
+          <a:bodyPr wrap="square" lIns="0" tIns="0" rIns="0" bIns="0" rtlCol="0" anchor="ctr"/>
+          <a:lstStyle/>
+          <a:p>
+            <a:pPr indent="0" marL="0">
+              <a:lnSpc>
+                <a:spcPct val="105000"/>
+              </a:lnSpc>
+              <a:buNone/>
+            </a:pPr>
+            <a:r>
+              <a:rPr lang="en-US" sz="1200" dirty="0">
+                <a:solidFill>
+                  <a:srgbClr val="93A1AF"/>
+                </a:solidFill>
+                <a:latin typeface="Calibri" pitchFamily="34" charset="0"/>
+                <a:ea typeface="Calibri" pitchFamily="34" charset="-122"/>
+                <a:cs typeface="Calibri" pitchFamily="34" charset="-120"/>
+              </a:rPr>
+              <a:t>The live metric, plus the remediation procedure cited to the SRE Runbook.</a:t>
+            </a:r>
+            <a:endParaRPr lang="en-US" sz="1200" dirty="0"/>
+          </a:p>
+        </p:txBody>
+      </p:sp>
+      <p:sp>
+        <p:nvSpPr>
+          <p:cNvPr id="11" name="Shape 9"/>
+          <p:cNvSpPr/>
+          <p:nvPr/>
+        </p:nvSpPr>
+        <p:spPr>
+          <a:xfrm>
+            <a:off x="640080" y="3538728"/>
+            <a:ext cx="10927080" cy="1097280"/>
+          </a:xfrm>
+          <a:prstGeom prst="roundRect">
+            <a:avLst>
+              <a:gd name="adj" fmla="val 7500"/>
             </a:avLst>
           </a:prstGeom>
           <a:solidFill>
@@ -11866,53 +13963,131 @@
       </p:sp>
       <p:sp>
         <p:nvSpPr>
-          <p:cNvPr id="7" name="Text 5"/>
-          <p:cNvSpPr/>
-          <p:nvPr/>
-        </p:nvSpPr>
-        <p:spPr>
-          <a:xfrm>
-            <a:off x="896112" y="2606040"/>
-            <a:ext cx="2743200" cy="274320"/>
-          </a:xfrm>
-          <a:prstGeom prst="rect">
-            <a:avLst/>
-          </a:prstGeom>
-          <a:noFill/>
-          <a:ln/>
-        </p:spPr>
-        <p:txBody>
-          <a:bodyPr wrap="square" lIns="0" tIns="0" rIns="0" bIns="0" rtlCol="0" anchor="ctr"/>
-          <a:lstStyle/>
-          <a:p>
-            <a:pPr indent="0" marL="0">
-              <a:buNone/>
-            </a:pPr>
-            <a:r>
-              <a:rPr lang="en-US" sz="1050" b="1" spc="150" kern="0" dirty="0">
-                <a:solidFill>
-                  <a:srgbClr val="6C7C8A"/>
-                </a:solidFill>
-                <a:latin typeface="Calibri" pitchFamily="34" charset="0"/>
-                <a:ea typeface="Calibri" pitchFamily="34" charset="-122"/>
-                <a:cs typeface="Calibri" pitchFamily="34" charset="-120"/>
-              </a:rPr>
-              <a:t>THE QUESTION</a:t>
-            </a:r>
-            <a:endParaRPr lang="en-US" sz="1050" dirty="0"/>
-          </a:p>
-        </p:txBody>
-      </p:sp>
-      <p:sp>
-        <p:nvSpPr>
-          <p:cNvPr id="8" name="Text 6"/>
-          <p:cNvSpPr/>
-          <p:nvPr/>
-        </p:nvSpPr>
-        <p:spPr>
-          <a:xfrm>
-            <a:off x="896112" y="2926080"/>
-            <a:ext cx="2743200" cy="731520"/>
+          <p:cNvPr id="12" name="Text 10"/>
+          <p:cNvSpPr/>
+          <p:nvPr/>
+        </p:nvSpPr>
+        <p:spPr>
+          <a:xfrm>
+            <a:off x="932688" y="3666744"/>
+            <a:ext cx="1463040" cy="292608"/>
+          </a:xfrm>
+          <a:prstGeom prst="rect">
+            <a:avLst/>
+          </a:prstGeom>
+          <a:noFill/>
+          <a:ln/>
+        </p:spPr>
+        <p:txBody>
+          <a:bodyPr wrap="square" lIns="0" tIns="0" rIns="0" bIns="0" rtlCol="0" anchor="ctr"/>
+          <a:lstStyle/>
+          <a:p>
+            <a:pPr indent="0" marL="0">
+              <a:buNone/>
+            </a:pPr>
+            <a:r>
+              <a:rPr lang="en-US" sz="1450" b="1" dirty="0">
+                <a:solidFill>
+                  <a:srgbClr val="FF8A3D"/>
+                </a:solidFill>
+                <a:latin typeface="Calibri" pitchFamily="34" charset="0"/>
+                <a:ea typeface="Calibri" pitchFamily="34" charset="-122"/>
+                <a:cs typeface="Calibri" pitchFamily="34" charset="-120"/>
+              </a:rPr>
+              <a:t>Comparison</a:t>
+            </a:r>
+            <a:endParaRPr lang="en-US" sz="1450" dirty="0"/>
+          </a:p>
+        </p:txBody>
+      </p:sp>
+      <p:sp>
+        <p:nvSpPr>
+          <p:cNvPr id="13" name="Text 11"/>
+          <p:cNvSpPr/>
+          <p:nvPr/>
+        </p:nvSpPr>
+        <p:spPr>
+          <a:xfrm>
+            <a:off x="2468880" y="3666744"/>
+            <a:ext cx="4114800" cy="292608"/>
+          </a:xfrm>
+          <a:prstGeom prst="rect">
+            <a:avLst/>
+          </a:prstGeom>
+          <a:noFill/>
+          <a:ln/>
+        </p:spPr>
+        <p:txBody>
+          <a:bodyPr wrap="square" lIns="0" tIns="0" rIns="0" bIns="0" rtlCol="0" anchor="ctr"/>
+          <a:lstStyle/>
+          <a:p>
+            <a:pPr indent="0" marL="0">
+              <a:buNone/>
+            </a:pPr>
+            <a:r>
+              <a:rPr lang="en-US" sz="1000" i="1" dirty="0">
+                <a:solidFill>
+                  <a:srgbClr val="E9EEF3"/>
+                </a:solidFill>
+                <a:latin typeface="Consolas" pitchFamily="34" charset="0"/>
+                <a:ea typeface="Consolas" pitchFamily="34" charset="-122"/>
+                <a:cs typeface="Consolas" pitchFamily="34" charset="-120"/>
+              </a:rPr>
+              <a:t>“Compare CUST_404 and CUST_417”</a:t>
+            </a:r>
+            <a:endParaRPr lang="en-US" sz="1000" dirty="0"/>
+          </a:p>
+        </p:txBody>
+      </p:sp>
+      <p:sp>
+        <p:nvSpPr>
+          <p:cNvPr id="14" name="Text 12"/>
+          <p:cNvSpPr/>
+          <p:nvPr/>
+        </p:nvSpPr>
+        <p:spPr>
+          <a:xfrm>
+            <a:off x="932688" y="4041648"/>
+            <a:ext cx="5669280" cy="274320"/>
+          </a:xfrm>
+          <a:prstGeom prst="rect">
+            <a:avLst/>
+          </a:prstGeom>
+          <a:noFill/>
+          <a:ln/>
+        </p:spPr>
+        <p:txBody>
+          <a:bodyPr wrap="square" lIns="0" tIns="0" rIns="0" bIns="0" rtlCol="0" anchor="ctr"/>
+          <a:lstStyle/>
+          <a:p>
+            <a:pPr indent="0" marL="0">
+              <a:buNone/>
+            </a:pPr>
+            <a:r>
+              <a:rPr lang="en-US" sz="1000" dirty="0">
+                <a:solidFill>
+                  <a:srgbClr val="3FB950"/>
+                </a:solidFill>
+                <a:latin typeface="Consolas" pitchFamily="34" charset="0"/>
+                <a:ea typeface="Consolas" pitchFamily="34" charset="-122"/>
+                <a:cs typeface="Consolas" pitchFamily="34" charset="-120"/>
+              </a:rPr>
+              <a:t>get_customer_anomaly_score  ×2</a:t>
+            </a:r>
+            <a:endParaRPr lang="en-US" sz="1000" dirty="0"/>
+          </a:p>
+        </p:txBody>
+      </p:sp>
+      <p:sp>
+        <p:nvSpPr>
+          <p:cNvPr id="15" name="Text 13"/>
+          <p:cNvSpPr/>
+          <p:nvPr/>
+        </p:nvSpPr>
+        <p:spPr>
+          <a:xfrm>
+            <a:off x="6903720" y="3666744"/>
+            <a:ext cx="4480560" cy="822960"/>
           </a:xfrm>
           <a:prstGeom prst="rect">
             <a:avLst/>
@@ -11926,59 +14101,39 @@
           <a:p>
             <a:pPr indent="0" marL="0">
               <a:lnSpc>
-                <a:spcPct val="110000"/>
+                <a:spcPct val="105000"/>
               </a:lnSpc>
               <a:buNone/>
             </a:pPr>
             <a:r>
-              <a:rPr lang="en-US" sz="1300" dirty="0">
-                <a:solidFill>
-                  <a:srgbClr val="E9EEF3"/>
-                </a:solidFill>
-                <a:latin typeface="Calibri" pitchFamily="34" charset="0"/>
-                <a:ea typeface="Calibri" pitchFamily="34" charset="-122"/>
-                <a:cs typeface="Calibri" pitchFamily="34" charset="-120"/>
-              </a:rPr>
-              <a:t>Plain English, no schema,</a:t>
-            </a:r>
-            <a:endParaRPr lang="en-US" sz="1300" dirty="0"/>
-          </a:p>
-          <a:p>
-            <a:pPr indent="0" marL="0">
-              <a:lnSpc>
-                <a:spcPct val="110000"/>
-              </a:lnSpc>
-              <a:buNone/>
-            </a:pPr>
-            <a:r>
-              <a:rPr lang="en-US" sz="1300" dirty="0">
-                <a:solidFill>
-                  <a:srgbClr val="E9EEF3"/>
-                </a:solidFill>
-                <a:latin typeface="Calibri" pitchFamily="34" charset="0"/>
-                <a:ea typeface="Calibri" pitchFamily="34" charset="-122"/>
-                <a:cs typeface="Calibri" pitchFamily="34" charset="-120"/>
-              </a:rPr>
-              <a:t>no function names</a:t>
-            </a:r>
-            <a:endParaRPr lang="en-US" sz="1300" dirty="0"/>
-          </a:p>
-        </p:txBody>
-      </p:sp>
-      <p:sp>
-        <p:nvSpPr>
-          <p:cNvPr id="9" name="Shape 7"/>
-          <p:cNvSpPr/>
-          <p:nvPr/>
-        </p:nvSpPr>
-        <p:spPr>
-          <a:xfrm>
-            <a:off x="4343400" y="2423160"/>
-            <a:ext cx="4023360" cy="640080"/>
+              <a:rPr lang="en-US" sz="1200" dirty="0">
+                <a:solidFill>
+                  <a:srgbClr val="93A1AF"/>
+                </a:solidFill>
+                <a:latin typeface="Calibri" pitchFamily="34" charset="0"/>
+                <a:ea typeface="Calibri" pitchFamily="34" charset="-122"/>
+                <a:cs typeface="Calibri" pitchFamily="34" charset="-120"/>
+              </a:rPr>
+              <a:t>One call per customer, then a ranked answer naming who to fix first.</a:t>
+            </a:r>
+            <a:endParaRPr lang="en-US" sz="1200" dirty="0"/>
+          </a:p>
+        </p:txBody>
+      </p:sp>
+      <p:sp>
+        <p:nvSpPr>
+          <p:cNvPr id="16" name="Shape 14"/>
+          <p:cNvSpPr/>
+          <p:nvPr/>
+        </p:nvSpPr>
+        <p:spPr>
+          <a:xfrm>
+            <a:off x="640080" y="4745736"/>
+            <a:ext cx="10927080" cy="1097280"/>
           </a:xfrm>
           <a:prstGeom prst="roundRect">
             <a:avLst>
-              <a:gd name="adj" fmla="val 12857"/>
+              <a:gd name="adj" fmla="val 7500"/>
             </a:avLst>
           </a:prstGeom>
           <a:solidFill>
@@ -12001,50 +14156,69 @@
       </p:sp>
       <p:sp>
         <p:nvSpPr>
-          <p:cNvPr id="10" name="Shape 8"/>
-          <p:cNvSpPr/>
-          <p:nvPr/>
-        </p:nvSpPr>
-        <p:spPr>
-          <a:xfrm>
-            <a:off x="4526280" y="2642616"/>
-            <a:ext cx="201168" cy="201168"/>
-          </a:xfrm>
-          <a:prstGeom prst="ellipse">
-            <a:avLst/>
-          </a:prstGeom>
-          <a:solidFill>
-            <a:srgbClr val="3FB950"/>
-          </a:solidFill>
-          <a:ln/>
-        </p:spPr>
-      </p:sp>
-      <p:sp>
-        <p:nvSpPr>
-          <p:cNvPr id="11" name="Text 9"/>
-          <p:cNvSpPr/>
-          <p:nvPr/>
-        </p:nvSpPr>
-        <p:spPr>
-          <a:xfrm>
-            <a:off x="4818888" y="2459736"/>
-            <a:ext cx="3474720" cy="292608"/>
-          </a:xfrm>
-          <a:prstGeom prst="rect">
-            <a:avLst/>
-          </a:prstGeom>
-          <a:noFill/>
-          <a:ln/>
-        </p:spPr>
-        <p:txBody>
-          <a:bodyPr wrap="square" lIns="0" tIns="0" rIns="0" bIns="0" rtlCol="0" anchor="ctr"/>
-          <a:lstStyle/>
-          <a:p>
-            <a:pPr indent="0" marL="0">
-              <a:buNone/>
-            </a:pPr>
-            <a:r>
-              <a:rPr lang="en-US" sz="1050" b="1" dirty="0">
+          <p:cNvPr id="17" name="Text 15"/>
+          <p:cNvSpPr/>
+          <p:nvPr/>
+        </p:nvSpPr>
+        <p:spPr>
+          <a:xfrm>
+            <a:off x="932688" y="4873752"/>
+            <a:ext cx="1463040" cy="292608"/>
+          </a:xfrm>
+          <a:prstGeom prst="rect">
+            <a:avLst/>
+          </a:prstGeom>
+          <a:noFill/>
+          <a:ln/>
+        </p:spPr>
+        <p:txBody>
+          <a:bodyPr wrap="square" lIns="0" tIns="0" rIns="0" bIns="0" rtlCol="0" anchor="ctr"/>
+          <a:lstStyle/>
+          <a:p>
+            <a:pPr indent="0" marL="0">
+              <a:buNone/>
+            </a:pPr>
+            <a:r>
+              <a:rPr lang="en-US" sz="1450" b="1" dirty="0">
+                <a:solidFill>
+                  <a:srgbClr val="FF8A3D"/>
+                </a:solidFill>
+                <a:latin typeface="Calibri" pitchFamily="34" charset="0"/>
+                <a:ea typeface="Calibri" pitchFamily="34" charset="-122"/>
+                <a:cs typeface="Calibri" pitchFamily="34" charset="-120"/>
+              </a:rPr>
+              <a:t>Trend</a:t>
+            </a:r>
+            <a:endParaRPr lang="en-US" sz="1450" dirty="0"/>
+          </a:p>
+        </p:txBody>
+      </p:sp>
+      <p:sp>
+        <p:nvSpPr>
+          <p:cNvPr id="18" name="Text 16"/>
+          <p:cNvSpPr/>
+          <p:nvPr/>
+        </p:nvSpPr>
+        <p:spPr>
+          <a:xfrm>
+            <a:off x="2468880" y="4873752"/>
+            <a:ext cx="4114800" cy="292608"/>
+          </a:xfrm>
+          <a:prstGeom prst="rect">
+            <a:avLst/>
+          </a:prstGeom>
+          <a:noFill/>
+          <a:ln/>
+        </p:spPr>
+        <p:txBody>
+          <a:bodyPr wrap="square" lIns="0" tIns="0" rIns="0" bIns="0" rtlCol="0" anchor="ctr"/>
+          <a:lstStyle/>
+          <a:p>
+            <a:pPr indent="0" marL="0">
+              <a:buNone/>
+            </a:pPr>
+            <a:r>
+              <a:rPr lang="en-US" sz="1000" i="1" dirty="0">
                 <a:solidFill>
                   <a:srgbClr val="E9EEF3"/>
                 </a:solidFill>
@@ -12052,170 +14226,80 @@
                 <a:ea typeface="Consolas" pitchFamily="34" charset="-122"/>
                 <a:cs typeface="Consolas" pitchFamily="34" charset="-120"/>
               </a:rPr>
-              <a:t>get_customer_anomaly_score</a:t>
-            </a:r>
-            <a:endParaRPr lang="en-US" sz="1050" dirty="0"/>
-          </a:p>
-        </p:txBody>
-      </p:sp>
-      <p:sp>
-        <p:nvSpPr>
-          <p:cNvPr id="12" name="Text 10"/>
-          <p:cNvSpPr/>
-          <p:nvPr/>
-        </p:nvSpPr>
-        <p:spPr>
-          <a:xfrm>
-            <a:off x="4818888" y="2734056"/>
-            <a:ext cx="3474720" cy="274320"/>
-          </a:xfrm>
-          <a:prstGeom prst="rect">
-            <a:avLst/>
-          </a:prstGeom>
-          <a:noFill/>
-          <a:ln/>
-        </p:spPr>
-        <p:txBody>
-          <a:bodyPr wrap="square" lIns="0" tIns="0" rIns="0" bIns="0" rtlCol="0" anchor="ctr"/>
-          <a:lstStyle/>
-          <a:p>
-            <a:pPr indent="0" marL="0">
-              <a:buNone/>
-            </a:pPr>
-            <a:r>
-              <a:rPr lang="en-US" sz="1050" dirty="0">
-                <a:solidFill>
-                  <a:srgbClr val="93A1AF"/>
-                </a:solidFill>
-                <a:latin typeface="Calibri" pitchFamily="34" charset="0"/>
-                <a:ea typeface="Calibri" pitchFamily="34" charset="-122"/>
-                <a:cs typeface="Calibri" pitchFamily="34" charset="-120"/>
-              </a:rPr>
-              <a:t>Gold layer → 82.35% anomalous, 6.0× baseline</a:t>
-            </a:r>
-            <a:endParaRPr lang="en-US" sz="1050" dirty="0"/>
-          </a:p>
-        </p:txBody>
-      </p:sp>
-      <p:sp>
-        <p:nvSpPr>
-          <p:cNvPr id="13" name="Shape 11"/>
-          <p:cNvSpPr/>
-          <p:nvPr/>
-        </p:nvSpPr>
-        <p:spPr>
-          <a:xfrm>
-            <a:off x="4343400" y="3154680"/>
-            <a:ext cx="4023360" cy="640080"/>
-          </a:xfrm>
-          <a:prstGeom prst="roundRect">
-            <a:avLst>
-              <a:gd name="adj" fmla="val 12857"/>
-            </a:avLst>
-          </a:prstGeom>
-          <a:solidFill>
-            <a:srgbClr val="18232F"/>
-          </a:solidFill>
-          <a:ln w="12700">
-            <a:solidFill>
-              <a:srgbClr val="2A3745"/>
-            </a:solidFill>
-            <a:prstDash val="solid"/>
-          </a:ln>
-          <a:effectLst>
-            <a:outerShdw sx="100000" sy="100000" kx="0" ky="0" algn="bl" rotWithShape="0" blurRad="114300" dist="38100" dir="5400000">
-              <a:srgbClr val="000000">
-                <a:alpha val="28000"/>
-              </a:srgbClr>
-            </a:outerShdw>
-          </a:effectLst>
-        </p:spPr>
-      </p:sp>
-      <p:sp>
-        <p:nvSpPr>
-          <p:cNvPr id="14" name="Shape 12"/>
-          <p:cNvSpPr/>
-          <p:nvPr/>
-        </p:nvSpPr>
-        <p:spPr>
-          <a:xfrm>
-            <a:off x="4526280" y="3374136"/>
-            <a:ext cx="201168" cy="201168"/>
-          </a:xfrm>
-          <a:prstGeom prst="ellipse">
-            <a:avLst/>
-          </a:prstGeom>
-          <a:solidFill>
-            <a:srgbClr val="3FB950"/>
-          </a:solidFill>
-          <a:ln/>
-        </p:spPr>
-      </p:sp>
-      <p:sp>
-        <p:nvSpPr>
-          <p:cNvPr id="15" name="Text 13"/>
-          <p:cNvSpPr/>
-          <p:nvPr/>
-        </p:nvSpPr>
-        <p:spPr>
-          <a:xfrm>
-            <a:off x="4818888" y="3191256"/>
-            <a:ext cx="3474720" cy="292608"/>
-          </a:xfrm>
-          <a:prstGeom prst="rect">
-            <a:avLst/>
-          </a:prstGeom>
-          <a:noFill/>
-          <a:ln/>
-        </p:spPr>
-        <p:txBody>
-          <a:bodyPr wrap="square" lIns="0" tIns="0" rIns="0" bIns="0" rtlCol="0" anchor="ctr"/>
-          <a:lstStyle/>
-          <a:p>
-            <a:pPr indent="0" marL="0">
-              <a:buNone/>
-            </a:pPr>
-            <a:r>
-              <a:rPr lang="en-US" sz="1050" b="1" dirty="0">
-                <a:solidFill>
-                  <a:srgbClr val="E9EEF3"/>
+              <a:t>“Is CUST_404 getting worse over time?”</a:t>
+            </a:r>
+            <a:endParaRPr lang="en-US" sz="1000" dirty="0"/>
+          </a:p>
+        </p:txBody>
+      </p:sp>
+      <p:sp>
+        <p:nvSpPr>
+          <p:cNvPr id="19" name="Text 17"/>
+          <p:cNvSpPr/>
+          <p:nvPr/>
+        </p:nvSpPr>
+        <p:spPr>
+          <a:xfrm>
+            <a:off x="932688" y="5248656"/>
+            <a:ext cx="5669280" cy="274320"/>
+          </a:xfrm>
+          <a:prstGeom prst="rect">
+            <a:avLst/>
+          </a:prstGeom>
+          <a:noFill/>
+          <a:ln/>
+        </p:spPr>
+        <p:txBody>
+          <a:bodyPr wrap="square" lIns="0" tIns="0" rIns="0" bIns="0" rtlCol="0" anchor="ctr"/>
+          <a:lstStyle/>
+          <a:p>
+            <a:pPr indent="0" marL="0">
+              <a:buNone/>
+            </a:pPr>
+            <a:r>
+              <a:rPr lang="en-US" sz="1000" dirty="0">
+                <a:solidFill>
+                  <a:srgbClr val="3FB950"/>
                 </a:solidFill>
                 <a:latin typeface="Consolas" pitchFamily="34" charset="0"/>
                 <a:ea typeface="Consolas" pitchFamily="34" charset="-122"/>
                 <a:cs typeface="Consolas" pitchFamily="34" charset="-120"/>
               </a:rPr>
-              <a:t>search_knowledge_base</a:t>
-            </a:r>
-            <a:endParaRPr lang="en-US" sz="1050" dirty="0"/>
-          </a:p>
-        </p:txBody>
-      </p:sp>
-      <p:sp>
-        <p:nvSpPr>
-          <p:cNvPr id="16" name="Text 14"/>
-          <p:cNvSpPr/>
-          <p:nvPr/>
-        </p:nvSpPr>
-        <p:spPr>
-          <a:xfrm>
-            <a:off x="4818888" y="3465576"/>
-            <a:ext cx="3474720" cy="274320"/>
-          </a:xfrm>
-          <a:prstGeom prst="rect">
-            <a:avLst/>
-          </a:prstGeom>
-          <a:noFill/>
-          <a:ln/>
-        </p:spPr>
-        <p:txBody>
-          <a:bodyPr wrap="square" lIns="0" tIns="0" rIns="0" bIns="0" rtlCol="0" anchor="ctr"/>
-          <a:lstStyle/>
-          <a:p>
-            <a:pPr indent="0" marL="0">
-              <a:buNone/>
-            </a:pPr>
-            <a:r>
-              <a:rPr lang="en-US" sz="1050" dirty="0">
+              <a:t>get_customer_timeline</a:t>
+            </a:r>
+            <a:endParaRPr lang="en-US" sz="1000" dirty="0"/>
+          </a:p>
+        </p:txBody>
+      </p:sp>
+      <p:sp>
+        <p:nvSpPr>
+          <p:cNvPr id="20" name="Text 18"/>
+          <p:cNvSpPr/>
+          <p:nvPr/>
+        </p:nvSpPr>
+        <p:spPr>
+          <a:xfrm>
+            <a:off x="6903720" y="4873752"/>
+            <a:ext cx="4480560" cy="822960"/>
+          </a:xfrm>
+          <a:prstGeom prst="rect">
+            <a:avLst/>
+          </a:prstGeom>
+          <a:noFill/>
+          <a:ln/>
+        </p:spPr>
+        <p:txBody>
+          <a:bodyPr wrap="square" lIns="0" tIns="0" rIns="0" bIns="0" rtlCol="0" anchor="ctr"/>
+          <a:lstStyle/>
+          <a:p>
+            <a:pPr indent="0" marL="0">
+              <a:lnSpc>
+                <a:spcPct val="105000"/>
+              </a:lnSpc>
+              <a:buNone/>
+            </a:pPr>
+            <a:r>
+              <a:rPr lang="en-US" sz="1200" dirty="0">
                 <a:solidFill>
                   <a:srgbClr val="93A1AF"/>
                 </a:solidFill>
@@ -12223,38 +14307,38 @@
                 <a:ea typeface="Calibri" pitchFamily="34" charset="-122"/>
                 <a:cs typeface="Calibri" pitchFamily="34" charset="-120"/>
               </a:rPr>
-              <a:t>Vector index → SRE Runbook remediation steps</a:t>
-            </a:r>
-            <a:endParaRPr lang="en-US" sz="1050" dirty="0"/>
-          </a:p>
-        </p:txBody>
-      </p:sp>
-      <p:sp>
-        <p:nvSpPr>
-          <p:cNvPr id="17" name="Text 15"/>
-          <p:cNvSpPr/>
-          <p:nvPr/>
-        </p:nvSpPr>
-        <p:spPr>
-          <a:xfrm>
-            <a:off x="4343400" y="3867912"/>
-            <a:ext cx="4023360" cy="274320"/>
-          </a:xfrm>
-          <a:prstGeom prst="rect">
-            <a:avLst/>
-          </a:prstGeom>
-          <a:noFill/>
-          <a:ln/>
-        </p:spPr>
-        <p:txBody>
-          <a:bodyPr wrap="square" lIns="0" tIns="0" rIns="0" bIns="0" rtlCol="0" anchor="ctr"/>
-          <a:lstStyle/>
-          <a:p>
-            <a:pPr algn="ctr" indent="0" marL="0">
-              <a:buNone/>
-            </a:pPr>
-            <a:r>
-              <a:rPr lang="en-US" sz="1050" i="1" dirty="0">
+              <a:t>Routes to a different governed function and reads off the trajectory.</a:t>
+            </a:r>
+            <a:endParaRPr lang="en-US" sz="1200" dirty="0"/>
+          </a:p>
+        </p:txBody>
+      </p:sp>
+      <p:sp>
+        <p:nvSpPr>
+          <p:cNvPr id="21" name="Text 19"/>
+          <p:cNvSpPr/>
+          <p:nvPr/>
+        </p:nvSpPr>
+        <p:spPr>
+          <a:xfrm>
+            <a:off x="640080" y="6053328"/>
+            <a:ext cx="10881360" cy="274320"/>
+          </a:xfrm>
+          <a:prstGeom prst="rect">
+            <a:avLst/>
+          </a:prstGeom>
+          <a:noFill/>
+          <a:ln/>
+        </p:spPr>
+        <p:txBody>
+          <a:bodyPr wrap="square" lIns="0" tIns="0" rIns="0" bIns="0" rtlCol="0" anchor="ctr"/>
+          <a:lstStyle/>
+          <a:p>
+            <a:pPr indent="0" marL="0">
+              <a:buNone/>
+            </a:pPr>
+            <a:r>
+              <a:rPr lang="en-US" sz="1400" i="1" dirty="0">
                 <a:solidFill>
                   <a:srgbClr val="FF8A3D"/>
                 </a:solidFill>
@@ -12262,399 +14346,15 @@
                 <a:ea typeface="Calibri" pitchFamily="34" charset="-122"/>
                 <a:cs typeface="Calibri" pitchFamily="34" charset="-120"/>
               </a:rPr>
-              <a:t>each independently cleared at the boundary</a:t>
-            </a:r>
-            <a:endParaRPr lang="en-US" sz="1050" dirty="0"/>
-          </a:p>
-        </p:txBody>
-      </p:sp>
-      <p:sp>
-        <p:nvSpPr>
-          <p:cNvPr id="18" name="Shape 16"/>
-          <p:cNvSpPr/>
-          <p:nvPr/>
-        </p:nvSpPr>
-        <p:spPr>
-          <a:xfrm>
-            <a:off x="8686800" y="2423160"/>
-            <a:ext cx="2880360" cy="1371600"/>
-          </a:xfrm>
-          <a:prstGeom prst="roundRect">
-            <a:avLst>
-              <a:gd name="adj" fmla="val 6000"/>
-            </a:avLst>
-          </a:prstGeom>
-          <a:solidFill>
-            <a:srgbClr val="1F2C3A"/>
-          </a:solidFill>
-          <a:ln w="12700">
-            <a:solidFill>
-              <a:srgbClr val="2A3745"/>
-            </a:solidFill>
-            <a:prstDash val="solid"/>
-          </a:ln>
-          <a:effectLst>
-            <a:outerShdw sx="100000" sy="100000" kx="0" ky="0" algn="bl" rotWithShape="0" blurRad="114300" dist="38100" dir="5400000">
-              <a:srgbClr val="000000">
-                <a:alpha val="28000"/>
-              </a:srgbClr>
-            </a:outerShdw>
-          </a:effectLst>
-        </p:spPr>
-      </p:sp>
-      <p:sp>
-        <p:nvSpPr>
-          <p:cNvPr id="19" name="Text 17"/>
-          <p:cNvSpPr/>
-          <p:nvPr/>
-        </p:nvSpPr>
-        <p:spPr>
-          <a:xfrm>
-            <a:off x="8942832" y="2606040"/>
-            <a:ext cx="2377440" cy="274320"/>
-          </a:xfrm>
-          <a:prstGeom prst="rect">
-            <a:avLst/>
-          </a:prstGeom>
-          <a:noFill/>
-          <a:ln/>
-        </p:spPr>
-        <p:txBody>
-          <a:bodyPr wrap="square" lIns="0" tIns="0" rIns="0" bIns="0" rtlCol="0" anchor="ctr"/>
-          <a:lstStyle/>
-          <a:p>
-            <a:pPr indent="0" marL="0">
-              <a:buNone/>
-            </a:pPr>
-            <a:r>
-              <a:rPr lang="en-US" sz="1050" b="1" spc="150" kern="0" dirty="0">
-                <a:solidFill>
-                  <a:srgbClr val="3FB950"/>
-                </a:solidFill>
-                <a:latin typeface="Calibri" pitchFamily="34" charset="0"/>
-                <a:ea typeface="Calibri" pitchFamily="34" charset="-122"/>
-                <a:cs typeface="Calibri" pitchFamily="34" charset="-120"/>
-              </a:rPr>
-              <a:t>ONE CITED ANSWER</a:t>
-            </a:r>
-            <a:endParaRPr lang="en-US" sz="1050" dirty="0"/>
-          </a:p>
-        </p:txBody>
-      </p:sp>
-      <p:sp>
-        <p:nvSpPr>
-          <p:cNvPr id="20" name="Text 18"/>
-          <p:cNvSpPr/>
-          <p:nvPr/>
-        </p:nvSpPr>
-        <p:spPr>
-          <a:xfrm>
-            <a:off x="8942832" y="2926080"/>
-            <a:ext cx="2468880" cy="777240"/>
-          </a:xfrm>
-          <a:prstGeom prst="rect">
-            <a:avLst/>
-          </a:prstGeom>
-          <a:noFill/>
-          <a:ln/>
-        </p:spPr>
-        <p:txBody>
-          <a:bodyPr wrap="square" lIns="0" tIns="0" rIns="0" bIns="0" rtlCol="0" anchor="ctr"/>
-          <a:lstStyle/>
-          <a:p>
-            <a:pPr indent="0" marL="0">
-              <a:lnSpc>
-                <a:spcPct val="110000"/>
-              </a:lnSpc>
-              <a:buNone/>
-            </a:pPr>
-            <a:r>
-              <a:rPr lang="en-US" sz="1250" dirty="0">
-                <a:solidFill>
-                  <a:srgbClr val="E9EEF3"/>
-                </a:solidFill>
-                <a:latin typeface="Calibri" pitchFamily="34" charset="0"/>
-                <a:ea typeface="Calibri" pitchFamily="34" charset="-122"/>
-                <a:cs typeface="Calibri" pitchFamily="34" charset="-120"/>
-              </a:rPr>
-              <a:t>The metric, the recommended</a:t>
-            </a:r>
-            <a:endParaRPr lang="en-US" sz="1250" dirty="0"/>
-          </a:p>
-          <a:p>
-            <a:pPr indent="0" marL="0">
-              <a:lnSpc>
-                <a:spcPct val="110000"/>
-              </a:lnSpc>
-              <a:buNone/>
-            </a:pPr>
-            <a:r>
-              <a:rPr lang="en-US" sz="1250" dirty="0">
-                <a:solidFill>
-                  <a:srgbClr val="E9EEF3"/>
-                </a:solidFill>
-                <a:latin typeface="Calibri" pitchFamily="34" charset="0"/>
-                <a:ea typeface="Calibri" pitchFamily="34" charset="-122"/>
-                <a:cs typeface="Calibri" pitchFamily="34" charset="-120"/>
-              </a:rPr>
-              <a:t>action, and the document it</a:t>
-            </a:r>
-            <a:endParaRPr lang="en-US" sz="1250" dirty="0"/>
-          </a:p>
-          <a:p>
-            <a:pPr indent="0" marL="0">
-              <a:lnSpc>
-                <a:spcPct val="110000"/>
-              </a:lnSpc>
-              <a:buNone/>
-            </a:pPr>
-            <a:r>
-              <a:rPr lang="en-US" sz="1250" dirty="0">
-                <a:solidFill>
-                  <a:srgbClr val="E9EEF3"/>
-                </a:solidFill>
-                <a:latin typeface="Calibri" pitchFamily="34" charset="0"/>
-                <a:ea typeface="Calibri" pitchFamily="34" charset="-122"/>
-                <a:cs typeface="Calibri" pitchFamily="34" charset="-120"/>
-              </a:rPr>
-              <a:t>came from</a:t>
-            </a:r>
-            <a:endParaRPr lang="en-US" sz="1250" dirty="0"/>
-          </a:p>
-        </p:txBody>
-      </p:sp>
-      <p:sp>
-        <p:nvSpPr>
-          <p:cNvPr id="21" name="Shape 19"/>
-          <p:cNvSpPr/>
-          <p:nvPr/>
-        </p:nvSpPr>
-        <p:spPr>
-          <a:xfrm>
-            <a:off x="3913632" y="2962656"/>
-            <a:ext cx="365760" cy="292608"/>
-          </a:xfrm>
-          <a:prstGeom prst="rightArrow">
-            <a:avLst/>
-          </a:prstGeom>
-          <a:solidFill>
-            <a:srgbClr val="FF6C00"/>
-          </a:solidFill>
-          <a:ln/>
-        </p:spPr>
-      </p:sp>
-      <p:sp>
-        <p:nvSpPr>
-          <p:cNvPr id="22" name="Shape 20"/>
-          <p:cNvSpPr/>
-          <p:nvPr/>
-        </p:nvSpPr>
-        <p:spPr>
-          <a:xfrm>
-            <a:off x="8412480" y="2962656"/>
-            <a:ext cx="365760" cy="292608"/>
-          </a:xfrm>
-          <a:prstGeom prst="rightArrow">
-            <a:avLst/>
-          </a:prstGeom>
-          <a:solidFill>
-            <a:srgbClr val="FF6C00"/>
-          </a:solidFill>
-          <a:ln/>
-        </p:spPr>
-      </p:sp>
-      <p:sp>
-        <p:nvSpPr>
-          <p:cNvPr id="23" name="Shape 21"/>
-          <p:cNvSpPr/>
-          <p:nvPr/>
-        </p:nvSpPr>
-        <p:spPr>
-          <a:xfrm>
-            <a:off x="640080" y="4160520"/>
-            <a:ext cx="10927080" cy="1600200"/>
-          </a:xfrm>
-          <a:prstGeom prst="roundRect">
-            <a:avLst>
-              <a:gd name="adj" fmla="val 5143"/>
-            </a:avLst>
-          </a:prstGeom>
-          <a:solidFill>
-            <a:srgbClr val="18232F"/>
-          </a:solidFill>
-          <a:ln w="12700">
-            <a:solidFill>
-              <a:srgbClr val="2A3745"/>
-            </a:solidFill>
-            <a:prstDash val="solid"/>
-          </a:ln>
-          <a:effectLst>
-            <a:outerShdw sx="100000" sy="100000" kx="0" ky="0" algn="bl" rotWithShape="0" blurRad="114300" dist="38100" dir="5400000">
-              <a:srgbClr val="000000">
-                <a:alpha val="28000"/>
-              </a:srgbClr>
-            </a:outerShdw>
-          </a:effectLst>
-        </p:spPr>
-      </p:sp>
-      <p:sp>
-        <p:nvSpPr>
-          <p:cNvPr id="24" name="Text 22"/>
-          <p:cNvSpPr/>
-          <p:nvPr/>
-        </p:nvSpPr>
-        <p:spPr>
-          <a:xfrm>
-            <a:off x="960120" y="4279392"/>
-            <a:ext cx="4572000" cy="274320"/>
-          </a:xfrm>
-          <a:prstGeom prst="rect">
-            <a:avLst/>
-          </a:prstGeom>
-          <a:noFill/>
-          <a:ln/>
-        </p:spPr>
-        <p:txBody>
-          <a:bodyPr wrap="square" lIns="0" tIns="0" rIns="0" bIns="0" rtlCol="0" anchor="ctr"/>
-          <a:lstStyle/>
-          <a:p>
-            <a:pPr indent="0" marL="0">
-              <a:buNone/>
-            </a:pPr>
-            <a:r>
-              <a:rPr lang="en-US" sz="1100" b="1" spc="100" kern="0" dirty="0">
-                <a:solidFill>
-                  <a:srgbClr val="FF8A3D"/>
-                </a:solidFill>
-                <a:latin typeface="Calibri" pitchFamily="34" charset="0"/>
-                <a:ea typeface="Calibri" pitchFamily="34" charset="-122"/>
-                <a:cs typeface="Calibri" pitchFamily="34" charset="-120"/>
-              </a:rPr>
-              <a:t>Agent output</a:t>
-            </a:r>
-            <a:endParaRPr lang="en-US" sz="1100" dirty="0"/>
-          </a:p>
-        </p:txBody>
-      </p:sp>
-      <p:sp>
-        <p:nvSpPr>
-          <p:cNvPr id="25" name="Text 23"/>
-          <p:cNvSpPr/>
-          <p:nvPr/>
-        </p:nvSpPr>
-        <p:spPr>
-          <a:xfrm>
-            <a:off x="960120" y="4572000"/>
-            <a:ext cx="10332720" cy="1097280"/>
-          </a:xfrm>
-          <a:prstGeom prst="rect">
-            <a:avLst/>
-          </a:prstGeom>
-          <a:noFill/>
-          <a:ln/>
-        </p:spPr>
-        <p:txBody>
-          <a:bodyPr wrap="square" lIns="0" tIns="0" rIns="0" bIns="0" rtlCol="0" anchor="ctr"/>
-          <a:lstStyle/>
-          <a:p>
-            <a:pPr indent="0" marL="0">
-              <a:lnSpc>
-                <a:spcPct val="115000"/>
-              </a:lnSpc>
-              <a:buNone/>
-            </a:pPr>
-            <a:r>
-              <a:rPr lang="en-US" sz="1250" dirty="0">
-                <a:solidFill>
-                  <a:srgbClr val="E9EEF3"/>
-                </a:solidFill>
-                <a:latin typeface="Calibri" pitchFamily="34" charset="0"/>
-                <a:ea typeface="Calibri" pitchFamily="34" charset="-122"/>
-                <a:cs typeface="Calibri" pitchFamily="34" charset="-120"/>
-              </a:rPr>
-              <a:t>Customer CUST_404 is materially anomalous… risk factor 82.35, 6.0× the population average.
-</a:t>
-            </a:r>
-            <a:pPr indent="0" marL="0">
-              <a:lnSpc>
-                <a:spcPct val="115000"/>
-              </a:lnSpc>
-              <a:buNone/>
-            </a:pPr>
-            <a:r>
-              <a:rPr lang="en-US" sz="1250" b="1" dirty="0">
-                <a:solidFill>
-                  <a:srgbClr val="E9EEF3"/>
-                </a:solidFill>
-                <a:latin typeface="Calibri" pitchFamily="34" charset="0"/>
-                <a:ea typeface="Calibri" pitchFamily="34" charset="-122"/>
-                <a:cs typeface="Calibri" pitchFamily="34" charset="-120"/>
-              </a:rPr>
-              <a:t>Governed guidance — SRE Runbook, “Remediation procedure for high-latency customers”: </a:t>
-            </a:r>
-            <a:pPr indent="0" marL="0">
-              <a:lnSpc>
-                <a:spcPct val="115000"/>
-              </a:lnSpc>
-              <a:buNone/>
-            </a:pPr>
-            <a:r>
-              <a:rPr lang="en-US" sz="1250" dirty="0">
-                <a:solidFill>
-                  <a:srgbClr val="93A1AF"/>
-                </a:solidFill>
-                <a:latin typeface="Calibri" pitchFamily="34" charset="0"/>
-                <a:ea typeface="Calibri" pitchFamily="34" charset="-122"/>
-                <a:cs typeface="Calibri" pitchFamily="34" charset="-120"/>
-              </a:rPr>
-              <a:t>confirm the signal, isolate the blast radius, check recent deploys, apply the mitigation, verify recovery below 5%.</a:t>
-            </a:r>
-            <a:endParaRPr lang="en-US" sz="1250" dirty="0"/>
-          </a:p>
-        </p:txBody>
-      </p:sp>
-      <p:sp>
-        <p:nvSpPr>
-          <p:cNvPr id="26" name="Text 24"/>
-          <p:cNvSpPr/>
-          <p:nvPr/>
-        </p:nvSpPr>
-        <p:spPr>
-          <a:xfrm>
-            <a:off x="640080" y="5943600"/>
-            <a:ext cx="10881360" cy="411480"/>
-          </a:xfrm>
-          <a:prstGeom prst="rect">
-            <a:avLst/>
-          </a:prstGeom>
-          <a:noFill/>
-          <a:ln/>
-        </p:spPr>
-        <p:txBody>
-          <a:bodyPr wrap="square" lIns="0" tIns="0" rIns="0" bIns="0" rtlCol="0" anchor="ctr"/>
-          <a:lstStyle/>
-          <a:p>
-            <a:pPr indent="0" marL="0">
-              <a:buNone/>
-            </a:pPr>
-            <a:r>
-              <a:rPr lang="en-US" sz="1450" i="1" dirty="0">
-                <a:solidFill>
-                  <a:srgbClr val="FF8A3D"/>
-                </a:solidFill>
-                <a:latin typeface="Calibri" pitchFamily="34" charset="0"/>
-                <a:ea typeface="Calibri" pitchFamily="34" charset="-122"/>
-                <a:cs typeface="Calibri" pitchFamily="34" charset="-120"/>
-              </a:rPr>
-              <a:t>The number comes from the lakehouse; the recommendation comes from an approved document. Neither is invented by the model.</a:t>
-            </a:r>
-            <a:endParaRPr lang="en-US" sz="1450" dirty="0"/>
-          </a:p>
-        </p:txBody>
-      </p:sp>
-      <p:sp>
-        <p:nvSpPr>
-          <p:cNvPr id="27" name="Text 25"/>
+              <a:t>Adding the third tool changed no boundary code — registration, not redesign. That is what makes the pattern scale.</a:t>
+            </a:r>
+            <a:endParaRPr lang="en-US" sz="1400" dirty="0"/>
+          </a:p>
+        </p:txBody>
+      </p:sp>
+      <p:sp>
+        <p:nvSpPr>
+          <p:cNvPr id="22" name="Text 20"/>
           <p:cNvSpPr/>
           <p:nvPr/>
         </p:nvSpPr>
@@ -12693,7 +14393,7 @@
       </p:sp>
       <p:sp>
         <p:nvSpPr>
-          <p:cNvPr id="28" name="Text 26"/>
+          <p:cNvPr id="23" name="Text 21"/>
           <p:cNvSpPr/>
           <p:nvPr/>
         </p:nvSpPr>
@@ -12815,7 +14515,7 @@
                 <a:ea typeface="Calibri" pitchFamily="34" charset="-122"/>
                 <a:cs typeface="Calibri" pitchFamily="34" charset="-120"/>
               </a:rPr>
-              <a:t>DEMO · MOVE 5</a:t>
+              <a:t>ASSURANCE · RETRIEVAL</a:t>
             </a:r>
             <a:endParaRPr lang="en-US" sz="1200" dirty="0"/>
           </a:p>
@@ -13119,7 +14819,7 @@
                 <a:ea typeface="Calibri" pitchFamily="34" charset="-122"/>
                 <a:cs typeface="Calibri" pitchFamily="34" charset="-120"/>
               </a:rPr>
-              <a:t>A hit also needs most of the question's meaningful terms to actually appear in the corpus. Below the threshold, the agent abstains.</a:t>
+              <a:t>A hit also needs most of the question's meaningful terms to appear in the corpus. Below the threshold, the agent abstains.</a:t>
             </a:r>
             <a:endParaRPr lang="en-US" sz="1200" dirty="0"/>
           </a:p>
@@ -13234,24 +14934,24 @@
         </p:nvSpPr>
         <p:spPr>
           <a:xfrm>
-            <a:off x="640080" y="5989320"/>
-            <a:ext cx="10881360" cy="365760"/>
-          </a:xfrm>
-          <a:prstGeom prst="rect">
-            <a:avLst/>
-          </a:prstGeom>
-          <a:noFill/>
-          <a:ln/>
-        </p:spPr>
-        <p:txBody>
-          <a:bodyPr wrap="square" lIns="0" tIns="0" rIns="0" bIns="0" rtlCol="0" anchor="ctr"/>
-          <a:lstStyle/>
-          <a:p>
-            <a:pPr indent="0" marL="0">
-              <a:buNone/>
-            </a:pPr>
-            <a:r>
-              <a:rPr lang="en-US" sz="1450" i="1" dirty="0">
+            <a:off x="640080" y="6053328"/>
+            <a:ext cx="10881360" cy="274320"/>
+          </a:xfrm>
+          <a:prstGeom prst="rect">
+            <a:avLst/>
+          </a:prstGeom>
+          <a:noFill/>
+          <a:ln/>
+        </p:spPr>
+        <p:txBody>
+          <a:bodyPr wrap="square" lIns="0" tIns="0" rIns="0" bIns="0" rtlCol="0" anchor="ctr"/>
+          <a:lstStyle/>
+          <a:p>
+            <a:pPr indent="0" marL="0">
+              <a:buNone/>
+            </a:pPr>
+            <a:r>
+              <a:rPr lang="en-US" sz="1400" i="1" dirty="0">
                 <a:solidFill>
                   <a:srgbClr val="FF8A3D"/>
                 </a:solidFill>
@@ -13261,7 +14961,7 @@
               </a:rPr>
               <a:t>A spurious citation is worse than an honest “no” — it is the failure mode that destroys trust in an AI system.</a:t>
             </a:r>
-            <a:endParaRPr lang="en-US" sz="1450" dirty="0"/>
+            <a:endParaRPr lang="en-US" sz="1400" dirty="0"/>
           </a:p>
         </p:txBody>
       </p:sp>
@@ -13428,7 +15128,7 @@
                 <a:ea typeface="Calibri" pitchFamily="34" charset="-122"/>
                 <a:cs typeface="Calibri" pitchFamily="34" charset="-120"/>
               </a:rPr>
-              <a:t>THE RECEIPTS</a:t>
+              <a:t>ASSURANCE · IDENTITY</a:t>
             </a:r>
             <a:endParaRPr lang="en-US" sz="1200" dirty="0"/>
           </a:p>
@@ -13467,7 +15167,7 @@
                 <a:ea typeface="Cambria" pitchFamily="34" charset="-122"/>
                 <a:cs typeface="Cambria" pitchFamily="34" charset="-120"/>
               </a:rPr>
-              <a:t>Proving it after the fact</a:t>
+              <a:t>Same question. Different person. Different answer.</a:t>
             </a:r>
             <a:endParaRPr lang="en-US" sz="3200" dirty="0"/>
           </a:p>
@@ -13506,542 +15206,45 @@
                 <a:ea typeface="Calibri" pitchFamily="34" charset="-122"/>
                 <a:cs typeface="Calibri" pitchFamily="34" charset="-120"/>
               </a:rPr>
-              <a:t>A control you cannot evidence is a control you cannot pass an audit with. Every decision — granted or refused — is appended to a durable trail.</a:t>
+              <a:t>Bounding the agent is half of least privilege. The other half is bounding each caller — which tools they may use, and which rows they may see.</a:t>
             </a:r>
             <a:endParaRPr lang="en-US" sz="1600" dirty="0"/>
           </a:p>
         </p:txBody>
       </p:sp>
-      <p:sp>
-        <p:nvSpPr>
-          <p:cNvPr id="6" name="Shape 4"/>
-          <p:cNvSpPr/>
-          <p:nvPr/>
-        </p:nvSpPr>
-        <p:spPr>
-          <a:xfrm>
-            <a:off x="640080" y="2331720"/>
-            <a:ext cx="2615184" cy="960120"/>
-          </a:xfrm>
-          <a:prstGeom prst="roundRect">
-            <a:avLst>
-              <a:gd name="adj" fmla="val 8571"/>
-            </a:avLst>
-          </a:prstGeom>
-          <a:solidFill>
-            <a:srgbClr val="18232F"/>
-          </a:solidFill>
-          <a:ln w="12700">
-            <a:solidFill>
-              <a:srgbClr val="2A3745"/>
-            </a:solidFill>
-            <a:prstDash val="solid"/>
-          </a:ln>
-          <a:effectLst>
-            <a:outerShdw sx="100000" sy="100000" kx="0" ky="0" algn="bl" rotWithShape="0" blurRad="114300" dist="38100" dir="5400000">
-              <a:srgbClr val="000000">
-                <a:alpha val="28000"/>
-              </a:srgbClr>
-            </a:outerShdw>
-          </a:effectLst>
-        </p:spPr>
-      </p:sp>
-      <p:sp>
-        <p:nvSpPr>
-          <p:cNvPr id="7" name="Text 5"/>
-          <p:cNvSpPr/>
-          <p:nvPr/>
-        </p:nvSpPr>
-        <p:spPr>
-          <a:xfrm>
-            <a:off x="868680" y="2395728"/>
-            <a:ext cx="2157984" cy="502920"/>
-          </a:xfrm>
-          <a:prstGeom prst="rect">
-            <a:avLst/>
-          </a:prstGeom>
-          <a:noFill/>
-          <a:ln/>
-        </p:spPr>
-        <p:txBody>
-          <a:bodyPr wrap="square" lIns="0" tIns="0" rIns="0" bIns="0" rtlCol="0" anchor="ctr"/>
-          <a:lstStyle/>
-          <a:p>
-            <a:pPr indent="0" marL="0">
-              <a:buNone/>
-            </a:pPr>
-            <a:r>
-              <a:rPr lang="en-US" sz="2500" b="1" dirty="0">
-                <a:solidFill>
-                  <a:srgbClr val="FF8A3D"/>
-                </a:solidFill>
-                <a:latin typeface="Cambria" pitchFamily="34" charset="0"/>
-                <a:ea typeface="Cambria" pitchFamily="34" charset="-122"/>
-                <a:cs typeface="Cambria" pitchFamily="34" charset="-120"/>
-              </a:rPr>
-              <a:t>6</a:t>
-            </a:r>
-            <a:endParaRPr lang="en-US" sz="2500" dirty="0"/>
-          </a:p>
-        </p:txBody>
-      </p:sp>
-      <p:sp>
-        <p:nvSpPr>
-          <p:cNvPr id="8" name="Text 6"/>
-          <p:cNvSpPr/>
-          <p:nvPr/>
-        </p:nvSpPr>
-        <p:spPr>
-          <a:xfrm>
-            <a:off x="868680" y="2889504"/>
-            <a:ext cx="2157984" cy="274320"/>
-          </a:xfrm>
-          <a:prstGeom prst="rect">
-            <a:avLst/>
-          </a:prstGeom>
-          <a:noFill/>
-          <a:ln/>
-        </p:spPr>
-        <p:txBody>
-          <a:bodyPr wrap="square" lIns="0" tIns="0" rIns="0" bIns="0" rtlCol="0" anchor="ctr"/>
-          <a:lstStyle/>
-          <a:p>
-            <a:pPr indent="0" marL="0">
-              <a:buNone/>
-            </a:pPr>
-            <a:r>
-              <a:rPr lang="en-US" sz="1050" b="1" spc="120" kern="0" dirty="0">
-                <a:solidFill>
-                  <a:srgbClr val="93A1AF"/>
-                </a:solidFill>
-                <a:latin typeface="Calibri" pitchFamily="34" charset="0"/>
-                <a:ea typeface="Calibri" pitchFamily="34" charset="-122"/>
-                <a:cs typeface="Calibri" pitchFamily="34" charset="-120"/>
-              </a:rPr>
-              <a:t>GOVERNED ACTIONS</a:t>
-            </a:r>
-            <a:endParaRPr lang="en-US" sz="1050" dirty="0"/>
-          </a:p>
-        </p:txBody>
-      </p:sp>
-      <p:sp>
-        <p:nvSpPr>
-          <p:cNvPr id="9" name="Shape 7"/>
-          <p:cNvSpPr/>
-          <p:nvPr/>
-        </p:nvSpPr>
-        <p:spPr>
-          <a:xfrm>
-            <a:off x="3429000" y="2331720"/>
-            <a:ext cx="2615184" cy="960120"/>
-          </a:xfrm>
-          <a:prstGeom prst="roundRect">
-            <a:avLst>
-              <a:gd name="adj" fmla="val 8571"/>
-            </a:avLst>
-          </a:prstGeom>
-          <a:solidFill>
-            <a:srgbClr val="18232F"/>
-          </a:solidFill>
-          <a:ln w="12700">
-            <a:solidFill>
-              <a:srgbClr val="2A3745"/>
-            </a:solidFill>
-            <a:prstDash val="solid"/>
-          </a:ln>
-          <a:effectLst>
-            <a:outerShdw sx="100000" sy="100000" kx="0" ky="0" algn="bl" rotWithShape="0" blurRad="114300" dist="38100" dir="5400000">
-              <a:srgbClr val="000000">
-                <a:alpha val="28000"/>
-              </a:srgbClr>
-            </a:outerShdw>
-          </a:effectLst>
-        </p:spPr>
-      </p:sp>
-      <p:sp>
-        <p:nvSpPr>
-          <p:cNvPr id="10" name="Text 8"/>
-          <p:cNvSpPr/>
-          <p:nvPr/>
-        </p:nvSpPr>
-        <p:spPr>
-          <a:xfrm>
-            <a:off x="3657600" y="2395728"/>
-            <a:ext cx="2157984" cy="502920"/>
-          </a:xfrm>
-          <a:prstGeom prst="rect">
-            <a:avLst/>
-          </a:prstGeom>
-          <a:noFill/>
-          <a:ln/>
-        </p:spPr>
-        <p:txBody>
-          <a:bodyPr wrap="square" lIns="0" tIns="0" rIns="0" bIns="0" rtlCol="0" anchor="ctr"/>
-          <a:lstStyle/>
-          <a:p>
-            <a:pPr indent="0" marL="0">
-              <a:buNone/>
-            </a:pPr>
-            <a:r>
-              <a:rPr lang="en-US" sz="2500" b="1" dirty="0">
-                <a:solidFill>
-                  <a:srgbClr val="FF8A3D"/>
-                </a:solidFill>
-                <a:latin typeface="Cambria" pitchFamily="34" charset="0"/>
-                <a:ea typeface="Cambria" pitchFamily="34" charset="-122"/>
-                <a:cs typeface="Cambria" pitchFamily="34" charset="-120"/>
-              </a:rPr>
-              <a:t>5</a:t>
-            </a:r>
-            <a:endParaRPr lang="en-US" sz="2500" dirty="0"/>
-          </a:p>
-        </p:txBody>
-      </p:sp>
-      <p:sp>
-        <p:nvSpPr>
-          <p:cNvPr id="11" name="Text 9"/>
-          <p:cNvSpPr/>
-          <p:nvPr/>
-        </p:nvSpPr>
-        <p:spPr>
-          <a:xfrm>
-            <a:off x="3657600" y="2889504"/>
-            <a:ext cx="2157984" cy="274320"/>
-          </a:xfrm>
-          <a:prstGeom prst="rect">
-            <a:avLst/>
-          </a:prstGeom>
-          <a:noFill/>
-          <a:ln/>
-        </p:spPr>
-        <p:txBody>
-          <a:bodyPr wrap="square" lIns="0" tIns="0" rIns="0" bIns="0" rtlCol="0" anchor="ctr"/>
-          <a:lstStyle/>
-          <a:p>
-            <a:pPr indent="0" marL="0">
-              <a:buNone/>
-            </a:pPr>
-            <a:r>
-              <a:rPr lang="en-US" sz="1050" b="1" spc="120" kern="0" dirty="0">
-                <a:solidFill>
-                  <a:srgbClr val="93A1AF"/>
-                </a:solidFill>
-                <a:latin typeface="Calibri" pitchFamily="34" charset="0"/>
-                <a:ea typeface="Calibri" pitchFamily="34" charset="-122"/>
-                <a:cs typeface="Calibri" pitchFamily="34" charset="-120"/>
-              </a:rPr>
-              <a:t>GRANTED</a:t>
-            </a:r>
-            <a:endParaRPr lang="en-US" sz="1050" dirty="0"/>
-          </a:p>
-        </p:txBody>
-      </p:sp>
-      <p:sp>
-        <p:nvSpPr>
-          <p:cNvPr id="12" name="Shape 10"/>
-          <p:cNvSpPr/>
-          <p:nvPr/>
-        </p:nvSpPr>
-        <p:spPr>
-          <a:xfrm>
-            <a:off x="6217920" y="2331720"/>
-            <a:ext cx="2615184" cy="960120"/>
-          </a:xfrm>
-          <a:prstGeom prst="roundRect">
-            <a:avLst>
-              <a:gd name="adj" fmla="val 8571"/>
-            </a:avLst>
-          </a:prstGeom>
-          <a:solidFill>
-            <a:srgbClr val="1F2C3A"/>
-          </a:solidFill>
-          <a:ln w="12700">
-            <a:solidFill>
-              <a:srgbClr val="2A3745"/>
-            </a:solidFill>
-            <a:prstDash val="solid"/>
-          </a:ln>
-          <a:effectLst>
-            <a:outerShdw sx="100000" sy="100000" kx="0" ky="0" algn="bl" rotWithShape="0" blurRad="114300" dist="38100" dir="5400000">
-              <a:srgbClr val="000000">
-                <a:alpha val="28000"/>
-              </a:srgbClr>
-            </a:outerShdw>
-          </a:effectLst>
-        </p:spPr>
-      </p:sp>
-      <p:sp>
-        <p:nvSpPr>
-          <p:cNvPr id="13" name="Text 11"/>
-          <p:cNvSpPr/>
-          <p:nvPr/>
-        </p:nvSpPr>
-        <p:spPr>
-          <a:xfrm>
-            <a:off x="6446520" y="2395728"/>
-            <a:ext cx="2157984" cy="502920"/>
-          </a:xfrm>
-          <a:prstGeom prst="rect">
-            <a:avLst/>
-          </a:prstGeom>
-          <a:noFill/>
-          <a:ln/>
-        </p:spPr>
-        <p:txBody>
-          <a:bodyPr wrap="square" lIns="0" tIns="0" rIns="0" bIns="0" rtlCol="0" anchor="ctr"/>
-          <a:lstStyle/>
-          <a:p>
-            <a:pPr indent="0" marL="0">
-              <a:buNone/>
-            </a:pPr>
-            <a:r>
-              <a:rPr lang="en-US" sz="2500" b="1" dirty="0">
-                <a:solidFill>
-                  <a:srgbClr val="F85149"/>
-                </a:solidFill>
-                <a:latin typeface="Cambria" pitchFamily="34" charset="0"/>
-                <a:ea typeface="Cambria" pitchFamily="34" charset="-122"/>
-                <a:cs typeface="Cambria" pitchFamily="34" charset="-120"/>
-              </a:rPr>
-              <a:t>1</a:t>
-            </a:r>
-            <a:endParaRPr lang="en-US" sz="2500" dirty="0"/>
-          </a:p>
-        </p:txBody>
-      </p:sp>
-      <p:sp>
-        <p:nvSpPr>
-          <p:cNvPr id="14" name="Text 12"/>
-          <p:cNvSpPr/>
-          <p:nvPr/>
-        </p:nvSpPr>
-        <p:spPr>
-          <a:xfrm>
-            <a:off x="6446520" y="2889504"/>
-            <a:ext cx="2157984" cy="274320"/>
-          </a:xfrm>
-          <a:prstGeom prst="rect">
-            <a:avLst/>
-          </a:prstGeom>
-          <a:noFill/>
-          <a:ln/>
-        </p:spPr>
-        <p:txBody>
-          <a:bodyPr wrap="square" lIns="0" tIns="0" rIns="0" bIns="0" rtlCol="0" anchor="ctr"/>
-          <a:lstStyle/>
-          <a:p>
-            <a:pPr indent="0" marL="0">
-              <a:buNone/>
-            </a:pPr>
-            <a:r>
-              <a:rPr lang="en-US" sz="1050" b="1" spc="120" kern="0" dirty="0">
-                <a:solidFill>
-                  <a:srgbClr val="93A1AF"/>
-                </a:solidFill>
-                <a:latin typeface="Calibri" pitchFamily="34" charset="0"/>
-                <a:ea typeface="Calibri" pitchFamily="34" charset="-122"/>
-                <a:cs typeface="Calibri" pitchFamily="34" charset="-120"/>
-              </a:rPr>
-              <a:t>DENIED</a:t>
-            </a:r>
-            <a:endParaRPr lang="en-US" sz="1050" dirty="0"/>
-          </a:p>
-        </p:txBody>
-      </p:sp>
-      <p:sp>
-        <p:nvSpPr>
-          <p:cNvPr id="15" name="Shape 13"/>
-          <p:cNvSpPr/>
-          <p:nvPr/>
-        </p:nvSpPr>
-        <p:spPr>
-          <a:xfrm>
-            <a:off x="9006840" y="2331720"/>
-            <a:ext cx="2615184" cy="960120"/>
-          </a:xfrm>
-          <a:prstGeom prst="roundRect">
-            <a:avLst>
-              <a:gd name="adj" fmla="val 8571"/>
-            </a:avLst>
-          </a:prstGeom>
-          <a:solidFill>
-            <a:srgbClr val="18232F"/>
-          </a:solidFill>
-          <a:ln w="12700">
-            <a:solidFill>
-              <a:srgbClr val="2A3745"/>
-            </a:solidFill>
-            <a:prstDash val="solid"/>
-          </a:ln>
-          <a:effectLst>
-            <a:outerShdw sx="100000" sy="100000" kx="0" ky="0" algn="bl" rotWithShape="0" blurRad="114300" dist="38100" dir="5400000">
-              <a:srgbClr val="000000">
-                <a:alpha val="28000"/>
-              </a:srgbClr>
-            </a:outerShdw>
-          </a:effectLst>
-        </p:spPr>
-      </p:sp>
-      <p:sp>
-        <p:nvSpPr>
-          <p:cNvPr id="16" name="Text 14"/>
-          <p:cNvSpPr/>
-          <p:nvPr/>
-        </p:nvSpPr>
-        <p:spPr>
-          <a:xfrm>
-            <a:off x="9235440" y="2395728"/>
-            <a:ext cx="2157984" cy="502920"/>
-          </a:xfrm>
-          <a:prstGeom prst="rect">
-            <a:avLst/>
-          </a:prstGeom>
-          <a:noFill/>
-          <a:ln/>
-        </p:spPr>
-        <p:txBody>
-          <a:bodyPr wrap="square" lIns="0" tIns="0" rIns="0" bIns="0" rtlCol="0" anchor="ctr"/>
-          <a:lstStyle/>
-          <a:p>
-            <a:pPr indent="0" marL="0">
-              <a:buNone/>
-            </a:pPr>
-            <a:r>
-              <a:rPr lang="en-US" sz="2500" b="1" dirty="0">
-                <a:solidFill>
-                  <a:srgbClr val="FF8A3D"/>
-                </a:solidFill>
-                <a:latin typeface="Cambria" pitchFamily="34" charset="0"/>
-                <a:ea typeface="Cambria" pitchFamily="34" charset="-122"/>
-                <a:cs typeface="Cambria" pitchFamily="34" charset="-120"/>
-              </a:rPr>
-              <a:t>16.7%</a:t>
-            </a:r>
-            <a:endParaRPr lang="en-US" sz="2500" dirty="0"/>
-          </a:p>
-        </p:txBody>
-      </p:sp>
-      <p:sp>
-        <p:nvSpPr>
-          <p:cNvPr id="17" name="Text 15"/>
-          <p:cNvSpPr/>
-          <p:nvPr/>
-        </p:nvSpPr>
-        <p:spPr>
-          <a:xfrm>
-            <a:off x="9235440" y="2889504"/>
-            <a:ext cx="2157984" cy="274320"/>
-          </a:xfrm>
-          <a:prstGeom prst="rect">
-            <a:avLst/>
-          </a:prstGeom>
-          <a:noFill/>
-          <a:ln/>
-        </p:spPr>
-        <p:txBody>
-          <a:bodyPr wrap="square" lIns="0" tIns="0" rIns="0" bIns="0" rtlCol="0" anchor="ctr"/>
-          <a:lstStyle/>
-          <a:p>
-            <a:pPr indent="0" marL="0">
-              <a:buNone/>
-            </a:pPr>
-            <a:r>
-              <a:rPr lang="en-US" sz="1050" b="1" spc="120" kern="0" dirty="0">
-                <a:solidFill>
-                  <a:srgbClr val="93A1AF"/>
-                </a:solidFill>
-                <a:latin typeface="Calibri" pitchFamily="34" charset="0"/>
-                <a:ea typeface="Calibri" pitchFamily="34" charset="-122"/>
-                <a:cs typeface="Calibri" pitchFamily="34" charset="-120"/>
-              </a:rPr>
-              <a:t>DENIAL RATE</a:t>
-            </a:r>
-            <a:endParaRPr lang="en-US" sz="1050" dirty="0"/>
-          </a:p>
-        </p:txBody>
-      </p:sp>
-      <p:sp>
-        <p:nvSpPr>
-          <p:cNvPr id="18" name="Text 16"/>
-          <p:cNvSpPr/>
-          <p:nvPr/>
-        </p:nvSpPr>
-        <p:spPr>
-          <a:xfrm>
-            <a:off x="640080" y="3364992"/>
-            <a:ext cx="10881360" cy="256032"/>
-          </a:xfrm>
-          <a:prstGeom prst="rect">
-            <a:avLst/>
-          </a:prstGeom>
-          <a:noFill/>
-          <a:ln/>
-        </p:spPr>
-        <p:txBody>
-          <a:bodyPr wrap="square" lIns="0" tIns="0" rIns="0" bIns="0" rtlCol="0" anchor="ctr"/>
-          <a:lstStyle/>
-          <a:p>
-            <a:pPr indent="0" marL="0">
-              <a:buNone/>
-            </a:pPr>
-            <a:r>
-              <a:rPr lang="en-US" sz="1150" i="1" dirty="0">
-                <a:solidFill>
-                  <a:srgbClr val="6C7C8A"/>
-                </a:solidFill>
-                <a:latin typeface="Calibri" pitchFamily="34" charset="0"/>
-                <a:ea typeface="Calibri" pitchFamily="34" charset="-122"/>
-                <a:cs typeface="Calibri" pitchFamily="34" charset="-120"/>
-              </a:rPr>
-              <a:t>the five demo moves, already on the record</a:t>
-            </a:r>
-            <a:endParaRPr lang="en-US" sz="1150" dirty="0"/>
-          </a:p>
-        </p:txBody>
-      </p:sp>
-      <p:sp>
-        <p:nvSpPr>
-          <p:cNvPr id="19" name="Shape 17"/>
-          <p:cNvSpPr/>
-          <p:nvPr/>
-        </p:nvSpPr>
-        <p:spPr>
-          <a:xfrm>
-            <a:off x="640080" y="3675888"/>
-            <a:ext cx="5257800" cy="1051560"/>
-          </a:xfrm>
-          <a:prstGeom prst="roundRect">
-            <a:avLst>
-              <a:gd name="adj" fmla="val 7826"/>
-            </a:avLst>
-          </a:prstGeom>
-          <a:solidFill>
-            <a:srgbClr val="18232F"/>
-          </a:solidFill>
-          <a:ln w="12700">
-            <a:solidFill>
-              <a:srgbClr val="2A3745"/>
-            </a:solidFill>
-            <a:prstDash val="solid"/>
-          </a:ln>
-          <a:effectLst>
-            <a:outerShdw sx="100000" sy="100000" kx="0" ky="0" algn="bl" rotWithShape="0" blurRad="114300" dist="38100" dir="5400000">
-              <a:srgbClr val="000000">
-                <a:alpha val="28000"/>
-              </a:srgbClr>
-            </a:outerShdw>
-          </a:effectLst>
-        </p:spPr>
-      </p:sp>
-      <p:sp>
-        <p:nvSpPr>
-          <p:cNvPr id="20" name="Shape 18"/>
-          <p:cNvSpPr/>
-          <p:nvPr/>
-        </p:nvSpPr>
-        <p:spPr>
-          <a:xfrm>
-            <a:off x="914400" y="3895344"/>
+      <p:pic>
+        <p:nvPicPr>
+          <p:cNvPr id="6" name="Image 0" descr="/private/tmp/claude-501/-Users-atharvvani-Downloads-DataBricks/437ba0b1-41b9-48e1-95cf-333721d11260/scratchpad/deck_assets/entitlement_matrix.png">    </p:cNvPr>
+          <p:cNvPicPr>
+            <a:picLocks noChangeAspect="1"/>
+          </p:cNvPicPr>
+          <p:nvPr/>
+        </p:nvPicPr>
+        <p:blipFill>
+          <a:blip r:embed="rId1"/>
+          <a:stretch>
+            <a:fillRect/>
+          </a:stretch>
+        </p:blipFill>
+        <p:spPr>
+          <a:xfrm>
+            <a:off x="640080" y="2286000"/>
+            <a:ext cx="7086600" cy="2852928"/>
+          </a:xfrm>
+          <a:prstGeom prst="rect">
+            <a:avLst/>
+          </a:prstGeom>
+        </p:spPr>
+      </p:pic>
+      <p:sp>
+        <p:nvSpPr>
+          <p:cNvPr id="7" name="Shape 4"/>
+          <p:cNvSpPr/>
+          <p:nvPr/>
+        </p:nvSpPr>
+        <p:spPr>
+          <a:xfrm>
+            <a:off x="8092440" y="2286000"/>
             <a:ext cx="146304" cy="146304"/>
           </a:xfrm>
           <a:prstGeom prst="ellipse">
@@ -14055,14 +15258,14 @@
       </p:sp>
       <p:sp>
         <p:nvSpPr>
-          <p:cNvPr id="21" name="Text 19"/>
-          <p:cNvSpPr/>
-          <p:nvPr/>
-        </p:nvSpPr>
-        <p:spPr>
-          <a:xfrm>
-            <a:off x="1188720" y="3785616"/>
-            <a:ext cx="4480560" cy="292608"/>
+          <p:cNvPr id="8" name="Text 5"/>
+          <p:cNvSpPr/>
+          <p:nvPr/>
+        </p:nvSpPr>
+        <p:spPr>
+          <a:xfrm>
+            <a:off x="8366760" y="2167128"/>
+            <a:ext cx="3200400" cy="320040"/>
           </a:xfrm>
           <a:prstGeom prst="rect">
             <a:avLst/>
@@ -14086,7 +15289,7 @@
                 <a:ea typeface="Calibri" pitchFamily="34" charset="-122"/>
                 <a:cs typeface="Calibri" pitchFamily="34" charset="-120"/>
               </a:rPr>
-              <a:t>Append-only</a:t>
+              <a:t>Grants and scopes are separate</a:t>
             </a:r>
             <a:endParaRPr lang="en-US" sz="1400" dirty="0"/>
           </a:p>
@@ -14094,14 +15297,14 @@
       </p:sp>
       <p:sp>
         <p:nvSpPr>
-          <p:cNvPr id="22" name="Text 20"/>
-          <p:cNvSpPr/>
-          <p:nvPr/>
-        </p:nvSpPr>
-        <p:spPr>
-          <a:xfrm>
-            <a:off x="1188720" y="4078224"/>
-            <a:ext cx="4480560" cy="585216"/>
+          <p:cNvPr id="9" name="Text 6"/>
+          <p:cNvSpPr/>
+          <p:nvPr/>
+        </p:nvSpPr>
+        <p:spPr>
+          <a:xfrm>
+            <a:off x="8366760" y="2514600"/>
+            <a:ext cx="3200400" cy="960120"/>
           </a:xfrm>
           <a:prstGeom prst="rect">
             <a:avLst/>
@@ -14115,12 +15318,12 @@
           <a:p>
             <a:pPr indent="0" marL="0">
               <a:lnSpc>
-                <a:spcPct val="103000"/>
+                <a:spcPct val="106000"/>
               </a:lnSpc>
               <a:buNone/>
             </a:pPr>
             <a:r>
-              <a:rPr lang="en-US" sz="1100" dirty="0">
+              <a:rPr lang="en-US" sz="1150" dirty="0">
                 <a:solidFill>
                   <a:srgbClr val="93A1AF"/>
                 </a:solidFill>
@@ -14128,55 +15331,21 @@
                 <a:ea typeface="Calibri" pitchFamily="34" charset="-122"/>
                 <a:cs typeface="Calibri" pitchFamily="34" charset="-120"/>
               </a:rPr>
-              <a:t>Records are never rewritten. A log you can edit in place is not evidence — and it can be tailed straight to a SIEM.</a:t>
-            </a:r>
-            <a:endParaRPr lang="en-US" sz="1100" dirty="0"/>
-          </a:p>
-        </p:txBody>
-      </p:sp>
-      <p:sp>
-        <p:nvSpPr>
-          <p:cNvPr id="23" name="Shape 21"/>
-          <p:cNvSpPr/>
-          <p:nvPr/>
-        </p:nvSpPr>
-        <p:spPr>
-          <a:xfrm>
-            <a:off x="6217920" y="3675888"/>
-            <a:ext cx="5257800" cy="1051560"/>
-          </a:xfrm>
-          <a:prstGeom prst="roundRect">
-            <a:avLst>
-              <a:gd name="adj" fmla="val 7826"/>
-            </a:avLst>
-          </a:prstGeom>
-          <a:solidFill>
-            <a:srgbClr val="18232F"/>
-          </a:solidFill>
-          <a:ln w="12700">
-            <a:solidFill>
-              <a:srgbClr val="2A3745"/>
-            </a:solidFill>
-            <a:prstDash val="solid"/>
-          </a:ln>
-          <a:effectLst>
-            <a:outerShdw sx="100000" sy="100000" kx="0" ky="0" algn="bl" rotWithShape="0" blurRad="114300" dist="38100" dir="5400000">
-              <a:srgbClr val="000000">
-                <a:alpha val="28000"/>
-              </a:srgbClr>
-            </a:outerShdw>
-          </a:effectLst>
-        </p:spPr>
-      </p:sp>
-      <p:sp>
-        <p:nvSpPr>
-          <p:cNvPr id="24" name="Shape 22"/>
-          <p:cNvSpPr/>
-          <p:nvPr/>
-        </p:nvSpPr>
-        <p:spPr>
-          <a:xfrm>
-            <a:off x="6492240" y="3895344"/>
+              <a:t>“You may not use that tool” is a different finding from “you may, but not on that customer.” Auditors need to tell them apart.</a:t>
+            </a:r>
+            <a:endParaRPr lang="en-US" sz="1150" dirty="0"/>
+          </a:p>
+        </p:txBody>
+      </p:sp>
+      <p:sp>
+        <p:nvSpPr>
+          <p:cNvPr id="10" name="Shape 7"/>
+          <p:cNvSpPr/>
+          <p:nvPr/>
+        </p:nvSpPr>
+        <p:spPr>
+          <a:xfrm>
+            <a:off x="8092440" y="3566160"/>
             <a:ext cx="146304" cy="146304"/>
           </a:xfrm>
           <a:prstGeom prst="ellipse">
@@ -14190,14 +15359,14 @@
       </p:sp>
       <p:sp>
         <p:nvSpPr>
-          <p:cNvPr id="25" name="Text 23"/>
-          <p:cNvSpPr/>
-          <p:nvPr/>
-        </p:nvSpPr>
-        <p:spPr>
-          <a:xfrm>
-            <a:off x="6766560" y="3785616"/>
-            <a:ext cx="4480560" cy="292608"/>
+          <p:cNvPr id="11" name="Text 8"/>
+          <p:cNvSpPr/>
+          <p:nvPr/>
+        </p:nvSpPr>
+        <p:spPr>
+          <a:xfrm>
+            <a:off x="8366760" y="3447288"/>
+            <a:ext cx="3200400" cy="320040"/>
           </a:xfrm>
           <a:prstGeom prst="rect">
             <a:avLst/>
@@ -14221,7 +15390,7 @@
                 <a:ea typeface="Calibri" pitchFamily="34" charset="-122"/>
                 <a:cs typeface="Calibri" pitchFamily="34" charset="-120"/>
               </a:rPr>
-              <a:t>Refusals are the point</a:t>
+              <a:t>Unknown callers fail closed</a:t>
             </a:r>
             <a:endParaRPr lang="en-US" sz="1400" dirty="0"/>
           </a:p>
@@ -14229,14 +15398,14 @@
       </p:sp>
       <p:sp>
         <p:nvSpPr>
-          <p:cNvPr id="26" name="Text 24"/>
-          <p:cNvSpPr/>
-          <p:nvPr/>
-        </p:nvSpPr>
-        <p:spPr>
-          <a:xfrm>
-            <a:off x="6766560" y="4078224"/>
-            <a:ext cx="4480560" cy="585216"/>
+          <p:cNvPr id="12" name="Text 9"/>
+          <p:cNvSpPr/>
+          <p:nvPr/>
+        </p:nvSpPr>
+        <p:spPr>
+          <a:xfrm>
+            <a:off x="8366760" y="3794760"/>
+            <a:ext cx="3200400" cy="960120"/>
           </a:xfrm>
           <a:prstGeom prst="rect">
             <a:avLst/>
@@ -14250,12 +15419,12 @@
           <a:p>
             <a:pPr indent="0" marL="0">
               <a:lnSpc>
-                <a:spcPct val="103000"/>
+                <a:spcPct val="106000"/>
               </a:lnSpc>
               <a:buNone/>
             </a:pPr>
             <a:r>
-              <a:rPr lang="en-US" sz="1100" dirty="0">
+              <a:rPr lang="en-US" sz="1150" dirty="0">
                 <a:solidFill>
                   <a:srgbClr val="93A1AF"/>
                 </a:solidFill>
@@ -14263,55 +15432,21 @@
                 <a:ea typeface="Calibri" pitchFamily="34" charset="-122"/>
                 <a:cs typeface="Calibri" pitchFamily="34" charset="-120"/>
               </a:rPr>
-              <a:t>A denial is the control working. It is recorded with the control that made it and the request that triggered it.</a:t>
-            </a:r>
-            <a:endParaRPr lang="en-US" sz="1100" dirty="0"/>
-          </a:p>
-        </p:txBody>
-      </p:sp>
-      <p:sp>
-        <p:nvSpPr>
-          <p:cNvPr id="27" name="Shape 25"/>
-          <p:cNvSpPr/>
-          <p:nvPr/>
-        </p:nvSpPr>
-        <p:spPr>
-          <a:xfrm>
-            <a:off x="640080" y="4892040"/>
-            <a:ext cx="5257800" cy="1051560"/>
-          </a:xfrm>
-          <a:prstGeom prst="roundRect">
-            <a:avLst>
-              <a:gd name="adj" fmla="val 7826"/>
-            </a:avLst>
-          </a:prstGeom>
-          <a:solidFill>
-            <a:srgbClr val="18232F"/>
-          </a:solidFill>
-          <a:ln w="12700">
-            <a:solidFill>
-              <a:srgbClr val="2A3745"/>
-            </a:solidFill>
-            <a:prstDash val="solid"/>
-          </a:ln>
-          <a:effectLst>
-            <a:outerShdw sx="100000" sy="100000" kx="0" ky="0" algn="bl" rotWithShape="0" blurRad="114300" dist="38100" dir="5400000">
-              <a:srgbClr val="000000">
-                <a:alpha val="28000"/>
-              </a:srgbClr>
-            </a:outerShdw>
-          </a:effectLst>
-        </p:spPr>
-      </p:sp>
-      <p:sp>
-        <p:nvSpPr>
-          <p:cNvPr id="28" name="Shape 26"/>
-          <p:cNvSpPr/>
-          <p:nvPr/>
-        </p:nvSpPr>
-        <p:spPr>
-          <a:xfrm>
-            <a:off x="914400" y="5111496"/>
+              <a:t>An unrecognised identity resolves to no entitlements — a typo in a header can never escalate.</a:t>
+            </a:r>
+            <a:endParaRPr lang="en-US" sz="1150" dirty="0"/>
+          </a:p>
+        </p:txBody>
+      </p:sp>
+      <p:sp>
+        <p:nvSpPr>
+          <p:cNvPr id="13" name="Shape 10"/>
+          <p:cNvSpPr/>
+          <p:nvPr/>
+        </p:nvSpPr>
+        <p:spPr>
+          <a:xfrm>
+            <a:off x="8092440" y="4846320"/>
             <a:ext cx="146304" cy="146304"/>
           </a:xfrm>
           <a:prstGeom prst="ellipse">
@@ -14325,14 +15460,14 @@
       </p:sp>
       <p:sp>
         <p:nvSpPr>
-          <p:cNvPr id="29" name="Text 27"/>
-          <p:cNvSpPr/>
-          <p:nvPr/>
-        </p:nvSpPr>
-        <p:spPr>
-          <a:xfrm>
-            <a:off x="1188720" y="5001768"/>
-            <a:ext cx="4480560" cy="292608"/>
+          <p:cNvPr id="14" name="Text 11"/>
+          <p:cNvSpPr/>
+          <p:nvPr/>
+        </p:nvSpPr>
+        <p:spPr>
+          <a:xfrm>
+            <a:off x="8366760" y="4727448"/>
+            <a:ext cx="3200400" cy="320040"/>
           </a:xfrm>
           <a:prstGeom prst="rect">
             <a:avLst/>
@@ -14356,7 +15491,7 @@
                 <a:ea typeface="Calibri" pitchFamily="34" charset="-122"/>
                 <a:cs typeface="Calibri" pitchFamily="34" charset="-120"/>
               </a:rPr>
-              <a:t>Queryable, exportable</a:t>
+              <a:t>Oversight without exposure</a:t>
             </a:r>
             <a:endParaRPr lang="en-US" sz="1400" dirty="0"/>
           </a:p>
@@ -14364,14 +15499,14 @@
       </p:sp>
       <p:sp>
         <p:nvSpPr>
-          <p:cNvPr id="30" name="Text 28"/>
-          <p:cNvSpPr/>
-          <p:nvPr/>
-        </p:nvSpPr>
-        <p:spPr>
-          <a:xfrm>
-            <a:off x="1188720" y="5294376"/>
-            <a:ext cx="4480560" cy="585216"/>
+          <p:cNvPr id="15" name="Text 12"/>
+          <p:cNvSpPr/>
+          <p:nvPr/>
+        </p:nvSpPr>
+        <p:spPr>
+          <a:xfrm>
+            <a:off x="8366760" y="5074920"/>
+            <a:ext cx="3200400" cy="960120"/>
           </a:xfrm>
           <a:prstGeom prst="rect">
             <a:avLst/>
@@ -14385,12 +15520,12 @@
           <a:p>
             <a:pPr indent="0" marL="0">
               <a:lnSpc>
-                <a:spcPct val="103000"/>
+                <a:spcPct val="106000"/>
               </a:lnSpc>
               <a:buNone/>
             </a:pPr>
             <a:r>
-              <a:rPr lang="en-US" sz="1100" dirty="0">
+              <a:rPr lang="en-US" sz="1150" dirty="0">
                 <a:solidFill>
                   <a:srgbClr val="93A1AF"/>
                 </a:solidFill>
@@ -14398,100 +15533,46 @@
                 <a:ea typeface="Calibri" pitchFamily="34" charset="-122"/>
                 <a:cs typeface="Calibri" pitchFamily="34" charset="-120"/>
               </a:rPr>
-              <a:t>“Show me everything the AI did” is a SQL question, with a CSV extract for the auditor.</a:t>
-            </a:r>
-            <a:endParaRPr lang="en-US" sz="1100" dirty="0"/>
-          </a:p>
-        </p:txBody>
-      </p:sp>
-      <p:sp>
-        <p:nvSpPr>
-          <p:cNvPr id="31" name="Shape 29"/>
-          <p:cNvSpPr/>
-          <p:nvPr/>
-        </p:nvSpPr>
-        <p:spPr>
-          <a:xfrm>
-            <a:off x="6217920" y="4892040"/>
-            <a:ext cx="5257800" cy="1051560"/>
-          </a:xfrm>
-          <a:prstGeom prst="roundRect">
-            <a:avLst>
-              <a:gd name="adj" fmla="val 7826"/>
-            </a:avLst>
-          </a:prstGeom>
-          <a:solidFill>
-            <a:srgbClr val="18232F"/>
-          </a:solidFill>
-          <a:ln w="12700">
-            <a:solidFill>
-              <a:srgbClr val="2A3745"/>
-            </a:solidFill>
-            <a:prstDash val="solid"/>
-          </a:ln>
-          <a:effectLst>
-            <a:outerShdw sx="100000" sy="100000" kx="0" ky="0" algn="bl" rotWithShape="0" blurRad="114300" dist="38100" dir="5400000">
-              <a:srgbClr val="000000">
-                <a:alpha val="28000"/>
-              </a:srgbClr>
-            </a:outerShdw>
-          </a:effectLst>
-        </p:spPr>
-      </p:sp>
-      <p:sp>
-        <p:nvSpPr>
-          <p:cNvPr id="32" name="Shape 30"/>
-          <p:cNvSpPr/>
-          <p:nvPr/>
-        </p:nvSpPr>
-        <p:spPr>
-          <a:xfrm>
-            <a:off x="6492240" y="5111496"/>
-            <a:ext cx="146304" cy="146304"/>
-          </a:xfrm>
-          <a:prstGeom prst="ellipse">
-            <a:avLst/>
-          </a:prstGeom>
-          <a:solidFill>
-            <a:srgbClr val="FF6C00"/>
-          </a:solidFill>
-          <a:ln/>
-        </p:spPr>
-      </p:sp>
-      <p:sp>
-        <p:nvSpPr>
-          <p:cNvPr id="33" name="Text 31"/>
-          <p:cNvSpPr/>
-          <p:nvPr/>
-        </p:nvSpPr>
-        <p:spPr>
-          <a:xfrm>
-            <a:off x="6766560" y="5001768"/>
-            <a:ext cx="4480560" cy="292608"/>
-          </a:xfrm>
-          <a:prstGeom prst="rect">
-            <a:avLst/>
-          </a:prstGeom>
-          <a:noFill/>
-          <a:ln/>
-        </p:spPr>
-        <p:txBody>
-          <a:bodyPr wrap="square" lIns="0" tIns="0" rIns="0" bIns="0" rtlCol="0" anchor="ctr"/>
-          <a:lstStyle/>
-          <a:p>
-            <a:pPr indent="0" marL="0">
-              <a:buNone/>
-            </a:pPr>
-            <a:r>
-              <a:rPr lang="en-US" sz="1400" b="1" dirty="0">
-                <a:solidFill>
-                  <a:srgbClr val="E9EEF3"/>
-                </a:solidFill>
-                <a:latin typeface="Calibri" pitchFamily="34" charset="0"/>
-                <a:ea typeface="Calibri" pitchFamily="34" charset="-122"/>
-                <a:cs typeface="Calibri" pitchFamily="34" charset="-120"/>
-              </a:rPr>
-              <a:t>Never fails the request</a:t>
+              <a:t>The compliance auditor holds the entire governance trail and no customer data at all.</a:t>
+            </a:r>
+            <a:endParaRPr lang="en-US" sz="1150" dirty="0"/>
+          </a:p>
+        </p:txBody>
+      </p:sp>
+      <p:sp>
+        <p:nvSpPr>
+          <p:cNvPr id="16" name="Text 13"/>
+          <p:cNvSpPr/>
+          <p:nvPr/>
+        </p:nvSpPr>
+        <p:spPr>
+          <a:xfrm>
+            <a:off x="640080" y="6053328"/>
+            <a:ext cx="10881360" cy="274320"/>
+          </a:xfrm>
+          <a:prstGeom prst="rect">
+            <a:avLst/>
+          </a:prstGeom>
+          <a:noFill/>
+          <a:ln/>
+        </p:spPr>
+        <p:txBody>
+          <a:bodyPr wrap="square" lIns="0" tIns="0" rIns="0" bIns="0" rtlCol="0" anchor="ctr"/>
+          <a:lstStyle/>
+          <a:p>
+            <a:pPr indent="0" marL="0">
+              <a:buNone/>
+            </a:pPr>
+            <a:r>
+              <a:rPr lang="en-US" sz="1400" i="1" dirty="0">
+                <a:solidFill>
+                  <a:srgbClr val="FF8A3D"/>
+                </a:solidFill>
+                <a:latin typeface="Calibri" pitchFamily="34" charset="0"/>
+                <a:ea typeface="Calibri" pitchFamily="34" charset="-122"/>
+                <a:cs typeface="Calibri" pitchFamily="34" charset="-120"/>
+              </a:rPr>
+              <a:t>Row-level security enforced at the agent — not promised at the warehouse. Every cell above is a live policy evaluation.</a:t>
             </a:r>
             <a:endParaRPr lang="en-US" sz="1400" dirty="0"/>
           </a:p>
@@ -14499,88 +15580,7 @@
       </p:sp>
       <p:sp>
         <p:nvSpPr>
-          <p:cNvPr id="34" name="Text 32"/>
-          <p:cNvSpPr/>
-          <p:nvPr/>
-        </p:nvSpPr>
-        <p:spPr>
-          <a:xfrm>
-            <a:off x="6766560" y="5294376"/>
-            <a:ext cx="4480560" cy="585216"/>
-          </a:xfrm>
-          <a:prstGeom prst="rect">
-            <a:avLst/>
-          </a:prstGeom>
-          <a:noFill/>
-          <a:ln/>
-        </p:spPr>
-        <p:txBody>
-          <a:bodyPr wrap="square" lIns="0" tIns="0" rIns="0" bIns="0" rtlCol="0" anchor="ctr"/>
-          <a:lstStyle/>
-          <a:p>
-            <a:pPr indent="0" marL="0">
-              <a:lnSpc>
-                <a:spcPct val="103000"/>
-              </a:lnSpc>
-              <a:buNone/>
-            </a:pPr>
-            <a:r>
-              <a:rPr lang="en-US" sz="1100" dirty="0">
-                <a:solidFill>
-                  <a:srgbClr val="93A1AF"/>
-                </a:solidFill>
-                <a:latin typeface="Calibri" pitchFamily="34" charset="0"/>
-                <a:ea typeface="Calibri" pitchFamily="34" charset="-122"/>
-                <a:cs typeface="Calibri" pitchFamily="34" charset="-120"/>
-              </a:rPr>
-              <a:t>An audit sink that can take the service down is a liability. Write failures are logged and swallowed.</a:t>
-            </a:r>
-            <a:endParaRPr lang="en-US" sz="1100" dirty="0"/>
-          </a:p>
-        </p:txBody>
-      </p:sp>
-      <p:sp>
-        <p:nvSpPr>
-          <p:cNvPr id="35" name="Text 33"/>
-          <p:cNvSpPr/>
-          <p:nvPr/>
-        </p:nvSpPr>
-        <p:spPr>
-          <a:xfrm>
-            <a:off x="640080" y="6035040"/>
-            <a:ext cx="10881360" cy="274320"/>
-          </a:xfrm>
-          <a:prstGeom prst="rect">
-            <a:avLst/>
-          </a:prstGeom>
-          <a:noFill/>
-          <a:ln/>
-        </p:spPr>
-        <p:txBody>
-          <a:bodyPr wrap="square" lIns="0" tIns="0" rIns="0" bIns="0" rtlCol="0" anchor="ctr"/>
-          <a:lstStyle/>
-          <a:p>
-            <a:pPr indent="0" marL="0">
-              <a:buNone/>
-            </a:pPr>
-            <a:r>
-              <a:rPr lang="en-US" sz="1400" i="1" dirty="0">
-                <a:solidFill>
-                  <a:srgbClr val="FF8A3D"/>
-                </a:solidFill>
-                <a:latin typeface="Calibri" pitchFamily="34" charset="0"/>
-                <a:ea typeface="Calibri" pitchFamily="34" charset="-122"/>
-                <a:cs typeface="Calibri" pitchFamily="34" charset="-120"/>
-              </a:rPr>
-              <a:t>Kill the process, restart it, and the trail is still there — that is the difference between logging and evidence.</a:t>
-            </a:r>
-            <a:endParaRPr lang="en-US" sz="1400" dirty="0"/>
-          </a:p>
-        </p:txBody>
-      </p:sp>
-      <p:sp>
-        <p:nvSpPr>
-          <p:cNvPr id="36" name="Text 34"/>
+          <p:cNvPr id="17" name="Text 14"/>
           <p:cNvSpPr/>
           <p:nvPr/>
         </p:nvSpPr>
@@ -14619,7 +15619,7 @@
       </p:sp>
       <p:sp>
         <p:nvSpPr>
-          <p:cNvPr id="37" name="Text 35"/>
+          <p:cNvPr id="18" name="Text 15"/>
           <p:cNvSpPr/>
           <p:nvPr/>
         </p:nvSpPr>
